--- a/Docs/Presentation/Farol_First_Presentation.pptx
+++ b/Docs/Presentation/Farol_First_Presentation.pptx
@@ -6,6 +6,7 @@
   </p:sldMasterIdLst>
   <p:sldIdLst>
     <p:sldId id="256" r:id="rId2"/>
+    <p:sldId id="259" r:id="rId10"/>
     <p:sldId id="257" r:id="rId3"/>
     <p:sldId id="258" r:id="rId4"/>
   </p:sldIdLst>
@@ -109,9 +110,18 @@
   <p:extLst>
     <p:ext uri="{521415D9-36F7-43E2-AB2F-B90AF26B5E84}">
       <p14:sectionLst xmlns:p14="http://schemas.microsoft.com/office/powerpoint/2010/main">
+        <p14:section name="Cover (Bruno Lopes)" id="{3c1f5a2e-6d4b-4e8a-9b71-2f0c8d9e4a10}">
+          <p14:sldIdLst>
+            <p14:sldId id="256"/>
+          </p14:sldIdLst>
+        </p14:section>
+        <p14:section name="Personas (Tiago Teixeira)" id="{7a9e2b44-1c3d-4f6a-8e25-5b0d7c1f9e32}">
+          <p14:sldIdLst>
+            <p14:sldId id="259"/>
+          </p14:sldIdLst>
+        </p14:section>
         <p14:section name="Main features (Bruno Lopes)" id="{b2ef1337-627e-81ae-c510-0d08fb5c3d36}">
           <p14:sldIdLst>
-            <p14:sldId id="256"/>
             <p14:sldId id="257"/>
             <p14:sldId id="258"/>
           </p14:sldIdLst>
@@ -720,6 +730,94 @@
             <a:fld id="{F7021451-1387-4CA6-816F-3879F97B5CBC}" type="slidenum">
               <a:rPr lang="en-US"/>
               <a:t>3</a:t>
+            </a:fld>
+            <a:endParaRPr lang="en-US"/>
+          </a:p>
+        </p:txBody>
+      </p:sp>
+    </p:spTree>
+    <p:extLst>
+      <p:ext uri="{BB962C8B-B14F-4D97-AF65-F5344CB8AC3E}">
+        <p14:creationId xmlns:p14="http://schemas.microsoft.com/office/powerpoint/2010/main" val="1024086991"/>
+      </p:ext>
+    </p:extLst>
+  </p:cSld>
+  <p:clrMapOvr>
+    <a:masterClrMapping/>
+  </p:clrMapOvr>
+</p:notes>
+</file>
+
+<file path=ppt/notesSlides/notesSlide4.xml><?xml version="1.0" encoding="utf-8"?>
+<p:notes xmlns:a="http://schemas.openxmlformats.org/drawingml/2006/main" xmlns:r="http://schemas.openxmlformats.org/officeDocument/2006/relationships" xmlns:p="http://schemas.openxmlformats.org/presentationml/2006/main">
+  <p:cSld>
+    <p:spTree>
+      <p:nvGrpSpPr>
+        <p:cNvPr id="1" name=""/>
+        <p:cNvGrpSpPr/>
+        <p:nvPr/>
+      </p:nvGrpSpPr>
+      <p:grpSpPr>
+        <a:xfrm>
+          <a:off x="0" y="0"/>
+          <a:ext cx="0" cy="0"/>
+          <a:chOff x="0" y="0"/>
+          <a:chExt cx="0" cy="0"/>
+        </a:xfrm>
+      </p:grpSpPr>
+      <p:sp>
+        <p:nvSpPr>
+          <p:cNvPr id="2" name="Slide Image Placeholder 1"/>
+          <p:cNvSpPr>
+            <a:spLocks noGrp="1" noRot="1" noChangeAspect="1"/>
+          </p:cNvSpPr>
+          <p:nvPr>
+            <p:ph type="sldImg"/>
+          </p:nvPr>
+        </p:nvSpPr>
+        <p:spPr/>
+      </p:sp>
+      <p:sp>
+        <p:nvSpPr>
+          <p:cNvPr id="3" name="Notes Placeholder 2"/>
+          <p:cNvSpPr>
+            <a:spLocks noGrp="1"/>
+          </p:cNvSpPr>
+          <p:nvPr>
+            <p:ph type="body" idx="1"/>
+          </p:nvPr>
+        </p:nvSpPr>
+        <p:spPr/>
+        <p:txBody>
+          <a:bodyPr/>
+          <a:lstStyle/>
+          <a:p>
+            <a:r>
+              <a:rPr lang="en-US" dirty="0"/>
+              <a:t>(~70 s) Desenhámos o Farol para quatro pessoas. O relatório tem dois grupos de utilizadores, os participantes e a equipa do evento, mas dentro da equipa há dois trabalhos diferentes: quem configura o evento e quem trata os pedidos de ajuda durante a noite. A Rita é estudante: está no recinto à noite, com pouca bateria e muito barulho, e quer encontrar a casa de banho, os primeiros socorros e o caminho para casa. Hoje a informação fica desatualizada e a planta é uma imagem nas redes sociais. Para ela, sucesso é pedir ajuda para uma amiga em menos de 30 segundos. O Miguel é voluntário da PCR: recebe muitos pedidos ao mesmo tempo, por rádio e telefone, sem localização nem prioridade. Precisa de ver cada pedido em segundos, já com a triagem da IA. A Sofia é da organização: configura o evento e publica alterações durante as noites, mas só gere o seu evento. Como o Farol tem vários festivais, a Queima do Porto, de Braga, de Coimbra, alguém tem de os criar: é o Daniel, da equipa Farol. Confirma que quem pede o evento é mesmo a organização, cria-o e nomeia o responsável, e transfere esse papel quando a direção muda. Nunca vê os pedidos de ajuda nem os dados dos eventos. Importante: são proto-personas, construídas a partir do relatório e de dados públicos, com nomes fictícios. Vamos validá-las com o inquérito aos estudantes, a entrevista ao voluntário de segurança e uma conversa com a organização.</a:t>
+            </a:r>
+            <a:endParaRPr lang="en-US" dirty="0"/>
+          </a:p>
+        </p:txBody>
+      </p:sp>
+      <p:sp>
+        <p:nvSpPr>
+          <p:cNvPr id="4" name="Slide Number Placeholder 3"/>
+          <p:cNvSpPr>
+            <a:spLocks noGrp="1"/>
+          </p:cNvSpPr>
+          <p:nvPr>
+            <p:ph type="sldNum" sz="quarter" idx="10"/>
+          </p:nvPr>
+        </p:nvSpPr>
+        <p:spPr/>
+        <p:txBody>
+          <a:bodyPr/>
+          <a:lstStyle/>
+          <a:p>
+            <a:fld id="{F7021451-1387-4CA6-816F-3879F97B5CBC}" type="slidenum">
+              <a:rPr lang="en-US"/>
+              <a:t>1</a:t>
             </a:fld>
             <a:endParaRPr lang="en-US"/>
           </a:p>
@@ -3755,6 +3853,2239 @@
 </p:sld>
 </file>
 
+<file path=ppt/slides/slide4.xml><?xml version="1.0" encoding="utf-8"?>
+<p:sld xmlns:a="http://schemas.openxmlformats.org/drawingml/2006/main" xmlns:r="http://schemas.openxmlformats.org/officeDocument/2006/relationships" xmlns:p="http://schemas.openxmlformats.org/presentationml/2006/main">
+  <p:cSld name="Slide 1">
+    <p:spTree>
+      <p:nvGrpSpPr>
+        <p:cNvPr id="1" name=""/>
+        <p:cNvGrpSpPr/>
+        <p:nvPr/>
+      </p:nvGrpSpPr>
+      <p:grpSpPr>
+        <a:xfrm>
+          <a:off x="0" y="0"/>
+          <a:ext cx="0" cy="0"/>
+          <a:chOff x="0" y="0"/>
+          <a:chExt cx="0" cy="0"/>
+        </a:xfrm>
+      </p:grpSpPr>
+      <p:sp>
+        <p:nvSpPr>
+          <p:cNvPr id="2" name="Text 0"/>
+          <p:cNvSpPr/>
+          <p:nvPr>
+            <p:ph idx="100" type="title" hasCustomPrompt="1"/>
+          </p:nvPr>
+        </p:nvSpPr>
+        <p:spPr>
+          <a:xfrm>
+            <a:off x="457200" y="274320"/>
+            <a:ext cx="8229600" cy="640080"/>
+          </a:xfrm>
+          <a:prstGeom prst="rect">
+            <a:avLst/>
+          </a:prstGeom>
+          <a:noFill/>
+          <a:ln/>
+        </p:spPr>
+        <p:txBody>
+          <a:bodyPr wrap="square" lIns="0" tIns="0" rIns="0" bIns="0" rtlCol="0" anchor="ctr"/>
+          <a:lstStyle/>
+          <a:p>
+            <a:pPr algn="ctr" indent="0" marL="0">
+              <a:buNone/>
+            </a:pPr>
+            <a:r>
+              <a:rPr lang="en-US" sz="3200" b="1" dirty="0">
+                <a:solidFill>
+                  <a:schemeClr val="tx2"/>
+                </a:solidFill>
+              </a:rPr>
+              <a:t>Who we design for</a:t>
+            </a:r>
+            <a:endParaRPr lang="en-US" sz="3200" dirty="0"/>
+          </a:p>
+        </p:txBody>
+      </p:sp>
+      <p:sp>
+        <p:nvSpPr>
+          <p:cNvPr id="3" name="Rita card"/>
+          <p:cNvSpPr/>
+          <p:nvPr/>
+        </p:nvSpPr>
+        <p:spPr>
+          <a:xfrm>
+            <a:off x="457200" y="1005840"/>
+            <a:ext cx="1920240" cy="2761488"/>
+          </a:xfrm>
+          <a:prstGeom prst="roundRect">
+            <a:avLst>
+              <a:gd name="adj" fmla="val 5714"/>
+            </a:avLst>
+          </a:prstGeom>
+          <a:solidFill>
+            <a:schemeClr val="bg2"/>
+          </a:solidFill>
+          <a:ln/>
+        </p:spPr>
+      </p:sp>
+      <p:sp>
+        <p:nvSpPr>
+          <p:cNvPr id="4" name="Rita icon circle"/>
+          <p:cNvSpPr/>
+          <p:nvPr/>
+        </p:nvSpPr>
+        <p:spPr>
+          <a:xfrm>
+            <a:off x="621792" y="1161288"/>
+            <a:ext cx="402336" cy="402336"/>
+          </a:xfrm>
+          <a:prstGeom prst="ellipse">
+            <a:avLst/>
+          </a:prstGeom>
+          <a:solidFill>
+            <a:schemeClr val="tx2"/>
+          </a:solidFill>
+          <a:ln/>
+        </p:spPr>
+      </p:sp>
+      <p:pic>
+        <p:nvPicPr>
+          <p:cNvPr id="5" name="Rita icon" descr="Rita icon">    </p:cNvPr>
+          <p:cNvPicPr>
+            <a:picLocks noChangeAspect="1"/>
+          </p:cNvPicPr>
+          <p:nvPr/>
+        </p:nvPicPr>
+        <p:blipFill>
+          <a:blip r:embed="rId1"/>
+          <a:stretch>
+            <a:fillRect/>
+          </a:stretch>
+        </p:blipFill>
+        <p:spPr>
+          <a:xfrm>
+            <a:off x="722376" y="1261872"/>
+            <a:ext cx="201168" cy="201168"/>
+          </a:xfrm>
+          <a:prstGeom prst="rect">
+            <a:avLst/>
+          </a:prstGeom>
+        </p:spPr>
+      </p:pic>
+      <p:sp>
+        <p:nvSpPr>
+          <p:cNvPr id="6" name="Rita name"/>
+          <p:cNvSpPr txBox="1"/>
+          <p:nvPr/>
+        </p:nvSpPr>
+        <p:spPr>
+          <a:xfrm>
+            <a:off x="1115568" y="1161288"/>
+            <a:ext cx="1188720" cy="402336"/>
+          </a:xfrm>
+          <a:prstGeom prst="rect">
+            <a:avLst/>
+          </a:prstGeom>
+          <a:noFill/>
+          <a:ln/>
+        </p:spPr>
+        <p:txBody>
+          <a:bodyPr wrap="square" lIns="0" tIns="0" rIns="0" bIns="0" rtlCol="0" anchor="ctr"/>
+          <a:lstStyle/>
+          <a:p>
+            <a:pPr indent="0" marL="0">
+              <a:buNone/>
+            </a:pPr>
+            <a:r>
+              <a:rPr lang="en-US" sz="1600" b="1" dirty="0">
+                <a:solidFill>
+                  <a:schemeClr val="tx2"/>
+                </a:solidFill>
+              </a:rPr>
+              <a:t>Rita, 21</a:t>
+            </a:r>
+            <a:endParaRPr lang="en-US" sz="1600" dirty="0"/>
+          </a:p>
+        </p:txBody>
+      </p:sp>
+      <p:sp>
+        <p:nvSpPr>
+          <p:cNvPr id="7" name="Rita role"/>
+          <p:cNvSpPr txBox="1"/>
+          <p:nvPr/>
+        </p:nvSpPr>
+        <p:spPr>
+          <a:xfrm>
+            <a:off x="621792" y="1627632"/>
+            <a:ext cx="1645920" cy="201168"/>
+          </a:xfrm>
+          <a:prstGeom prst="rect">
+            <a:avLst/>
+          </a:prstGeom>
+          <a:noFill/>
+          <a:ln/>
+        </p:spPr>
+        <p:txBody>
+          <a:bodyPr wrap="square" lIns="0" tIns="0" rIns="0" bIns="0" rtlCol="0" anchor="ctr"/>
+          <a:lstStyle/>
+          <a:p>
+            <a:pPr indent="0" marL="0">
+              <a:buNone/>
+            </a:pPr>
+            <a:r>
+              <a:rPr lang="en-US" sz="1100" b="1" dirty="0">
+                <a:solidFill>
+                  <a:schemeClr val="accent2"/>
+                </a:solidFill>
+              </a:rPr>
+              <a:t>Student · participant app</a:t>
+            </a:r>
+            <a:endParaRPr lang="en-US" sz="1100" dirty="0"/>
+          </a:p>
+        </p:txBody>
+      </p:sp>
+      <p:pic>
+        <p:nvPicPr>
+          <p:cNvPr id="8" name="Rita Goal icon" descr="Goal">    </p:cNvPr>
+          <p:cNvPicPr>
+            <a:picLocks noChangeAspect="1"/>
+          </p:cNvPicPr>
+          <p:nvPr/>
+        </p:nvPicPr>
+        <p:blipFill>
+          <a:blip r:embed="rId2"/>
+          <a:stretch>
+            <a:fillRect/>
+          </a:stretch>
+        </p:blipFill>
+        <p:spPr>
+          <a:xfrm>
+            <a:off x="621792" y="1943100"/>
+            <a:ext cx="146304" cy="146304"/>
+          </a:xfrm>
+          <a:prstGeom prst="rect">
+            <a:avLst/>
+          </a:prstGeom>
+        </p:spPr>
+      </p:pic>
+      <p:sp>
+        <p:nvSpPr>
+          <p:cNvPr id="9" name="Rita Goal label"/>
+          <p:cNvSpPr txBox="1"/>
+          <p:nvPr/>
+        </p:nvSpPr>
+        <p:spPr>
+          <a:xfrm>
+            <a:off x="841248" y="1920240"/>
+            <a:ext cx="1371600" cy="182880"/>
+          </a:xfrm>
+          <a:prstGeom prst="rect">
+            <a:avLst/>
+          </a:prstGeom>
+          <a:noFill/>
+          <a:ln/>
+        </p:spPr>
+        <p:txBody>
+          <a:bodyPr wrap="square" lIns="0" tIns="0" rIns="0" bIns="0" rtlCol="0" anchor="ctr"/>
+          <a:lstStyle/>
+          <a:p>
+            <a:pPr indent="0" marL="0">
+              <a:buNone/>
+            </a:pPr>
+            <a:r>
+              <a:rPr lang="en-US" sz="1100" b="1" dirty="0">
+                <a:solidFill>
+                  <a:schemeClr val="tx2"/>
+                </a:solidFill>
+              </a:rPr>
+              <a:t>Goal</a:t>
+            </a:r>
+            <a:endParaRPr lang="en-US" sz="1100" dirty="0"/>
+          </a:p>
+        </p:txBody>
+      </p:sp>
+      <p:sp>
+        <p:nvSpPr>
+          <p:cNvPr id="10" name="Rita Goal"/>
+          <p:cNvSpPr txBox="1"/>
+          <p:nvPr/>
+        </p:nvSpPr>
+        <p:spPr>
+          <a:xfrm>
+            <a:off x="621792" y="2112264"/>
+            <a:ext cx="1645920" cy="347472"/>
+          </a:xfrm>
+          <a:prstGeom prst="rect">
+            <a:avLst/>
+          </a:prstGeom>
+          <a:noFill/>
+          <a:ln/>
+        </p:spPr>
+        <p:txBody>
+          <a:bodyPr wrap="square" lIns="0" tIns="0" rIns="0" bIns="0" rtlCol="0" anchor="t"/>
+          <a:lstStyle/>
+          <a:p>
+            <a:pPr indent="0" marL="0">
+              <a:buNone/>
+            </a:pPr>
+            <a:r>
+              <a:rPr lang="en-US" sz="1200" dirty="0">
+                <a:solidFill>
+                  <a:schemeClr val="tx1"/>
+                </a:solidFill>
+              </a:rPr>
+              <a:t>find WC, first aid and the way home, fast</a:t>
+            </a:r>
+            <a:endParaRPr lang="en-US" sz="1200" dirty="0"/>
+          </a:p>
+        </p:txBody>
+      </p:sp>
+      <p:pic>
+        <p:nvPicPr>
+          <p:cNvPr id="11" name="Rita Pain icon" descr="Pain">    </p:cNvPr>
+          <p:cNvPicPr>
+            <a:picLocks noChangeAspect="1"/>
+          </p:cNvPicPr>
+          <p:nvPr/>
+        </p:nvPicPr>
+        <p:blipFill>
+          <a:blip r:embed="rId3"/>
+          <a:stretch>
+            <a:fillRect/>
+          </a:stretch>
+        </p:blipFill>
+        <p:spPr>
+          <a:xfrm>
+            <a:off x="621792" y="2546604"/>
+            <a:ext cx="146304" cy="146304"/>
+          </a:xfrm>
+          <a:prstGeom prst="rect">
+            <a:avLst/>
+          </a:prstGeom>
+        </p:spPr>
+      </p:pic>
+      <p:sp>
+        <p:nvSpPr>
+          <p:cNvPr id="12" name="Rita Pain label"/>
+          <p:cNvSpPr txBox="1"/>
+          <p:nvPr/>
+        </p:nvSpPr>
+        <p:spPr>
+          <a:xfrm>
+            <a:off x="841248" y="2523744"/>
+            <a:ext cx="1371600" cy="182880"/>
+          </a:xfrm>
+          <a:prstGeom prst="rect">
+            <a:avLst/>
+          </a:prstGeom>
+          <a:noFill/>
+          <a:ln/>
+        </p:spPr>
+        <p:txBody>
+          <a:bodyPr wrap="square" lIns="0" tIns="0" rIns="0" bIns="0" rtlCol="0" anchor="ctr"/>
+          <a:lstStyle/>
+          <a:p>
+            <a:pPr indent="0" marL="0">
+              <a:buNone/>
+            </a:pPr>
+            <a:r>
+              <a:rPr lang="en-US" sz="1100" b="1" dirty="0">
+                <a:solidFill>
+                  <a:schemeClr val="tx2"/>
+                </a:solidFill>
+              </a:rPr>
+              <a:t>Pain</a:t>
+            </a:r>
+            <a:endParaRPr lang="en-US" sz="1100" dirty="0"/>
+          </a:p>
+        </p:txBody>
+      </p:sp>
+      <p:sp>
+        <p:nvSpPr>
+          <p:cNvPr id="13" name="Rita Pain"/>
+          <p:cNvSpPr txBox="1"/>
+          <p:nvPr/>
+        </p:nvSpPr>
+        <p:spPr>
+          <a:xfrm>
+            <a:off x="621792" y="2715768"/>
+            <a:ext cx="1645920" cy="347472"/>
+          </a:xfrm>
+          <a:prstGeom prst="rect">
+            <a:avLst/>
+          </a:prstGeom>
+          <a:noFill/>
+          <a:ln/>
+        </p:spPr>
+        <p:txBody>
+          <a:bodyPr wrap="square" lIns="0" tIns="0" rIns="0" bIns="0" rtlCol="0" anchor="t"/>
+          <a:lstStyle/>
+          <a:p>
+            <a:pPr indent="0" marL="0">
+              <a:buNone/>
+            </a:pPr>
+            <a:r>
+              <a:rPr lang="en-US" sz="1200" dirty="0">
+                <a:solidFill>
+                  <a:schemeClr val="tx1"/>
+                </a:solidFill>
+              </a:rPr>
+              <a:t>info goes stale; the map is an image</a:t>
+            </a:r>
+            <a:endParaRPr lang="en-US" sz="1200" dirty="0"/>
+          </a:p>
+        </p:txBody>
+      </p:sp>
+      <p:pic>
+        <p:nvPicPr>
+          <p:cNvPr id="14" name="Rita Success icon" descr="Success">    </p:cNvPr>
+          <p:cNvPicPr>
+            <a:picLocks noChangeAspect="1"/>
+          </p:cNvPicPr>
+          <p:nvPr/>
+        </p:nvPicPr>
+        <p:blipFill>
+          <a:blip r:embed="rId4"/>
+          <a:stretch>
+            <a:fillRect/>
+          </a:stretch>
+        </p:blipFill>
+        <p:spPr>
+          <a:xfrm>
+            <a:off x="621792" y="3150108"/>
+            <a:ext cx="146304" cy="146304"/>
+          </a:xfrm>
+          <a:prstGeom prst="rect">
+            <a:avLst/>
+          </a:prstGeom>
+        </p:spPr>
+      </p:pic>
+      <p:sp>
+        <p:nvSpPr>
+          <p:cNvPr id="15" name="Rita Success label"/>
+          <p:cNvSpPr txBox="1"/>
+          <p:nvPr/>
+        </p:nvSpPr>
+        <p:spPr>
+          <a:xfrm>
+            <a:off x="841248" y="3127248"/>
+            <a:ext cx="1371600" cy="182880"/>
+          </a:xfrm>
+          <a:prstGeom prst="rect">
+            <a:avLst/>
+          </a:prstGeom>
+          <a:noFill/>
+          <a:ln/>
+        </p:spPr>
+        <p:txBody>
+          <a:bodyPr wrap="square" lIns="0" tIns="0" rIns="0" bIns="0" rtlCol="0" anchor="ctr"/>
+          <a:lstStyle/>
+          <a:p>
+            <a:pPr indent="0" marL="0">
+              <a:buNone/>
+            </a:pPr>
+            <a:r>
+              <a:rPr lang="en-US" sz="1100" b="1" dirty="0">
+                <a:solidFill>
+                  <a:schemeClr val="tx2"/>
+                </a:solidFill>
+              </a:rPr>
+              <a:t>Success</a:t>
+            </a:r>
+            <a:endParaRPr lang="en-US" sz="1100" dirty="0"/>
+          </a:p>
+        </p:txBody>
+      </p:sp>
+      <p:sp>
+        <p:nvSpPr>
+          <p:cNvPr id="16" name="Rita Success"/>
+          <p:cNvSpPr txBox="1"/>
+          <p:nvPr/>
+        </p:nvSpPr>
+        <p:spPr>
+          <a:xfrm>
+            <a:off x="621792" y="3319272"/>
+            <a:ext cx="1645920" cy="347472"/>
+          </a:xfrm>
+          <a:prstGeom prst="rect">
+            <a:avLst/>
+          </a:prstGeom>
+          <a:noFill/>
+          <a:ln/>
+        </p:spPr>
+        <p:txBody>
+          <a:bodyPr wrap="square" lIns="0" tIns="0" rIns="0" bIns="0" rtlCol="0" anchor="t"/>
+          <a:lstStyle/>
+          <a:p>
+            <a:pPr indent="0" marL="0">
+              <a:buNone/>
+            </a:pPr>
+            <a:r>
+              <a:rPr lang="en-US" sz="1200" dirty="0">
+                <a:solidFill>
+                  <a:schemeClr val="tx1"/>
+                </a:solidFill>
+              </a:rPr>
+              <a:t>asks help for a friend in under 30 s</a:t>
+            </a:r>
+            <a:endParaRPr lang="en-US" sz="1200" dirty="0"/>
+          </a:p>
+        </p:txBody>
+      </p:sp>
+      <p:sp>
+        <p:nvSpPr>
+          <p:cNvPr id="17" name="Miguel card"/>
+          <p:cNvSpPr/>
+          <p:nvPr/>
+        </p:nvSpPr>
+        <p:spPr>
+          <a:xfrm>
+            <a:off x="2560320" y="1005840"/>
+            <a:ext cx="1920240" cy="2761488"/>
+          </a:xfrm>
+          <a:prstGeom prst="roundRect">
+            <a:avLst>
+              <a:gd name="adj" fmla="val 5714"/>
+            </a:avLst>
+          </a:prstGeom>
+          <a:solidFill>
+            <a:schemeClr val="bg2"/>
+          </a:solidFill>
+          <a:ln/>
+        </p:spPr>
+      </p:sp>
+      <p:sp>
+        <p:nvSpPr>
+          <p:cNvPr id="18" name="Miguel icon circle"/>
+          <p:cNvSpPr/>
+          <p:nvPr/>
+        </p:nvSpPr>
+        <p:spPr>
+          <a:xfrm>
+            <a:off x="2724912" y="1161288"/>
+            <a:ext cx="402336" cy="402336"/>
+          </a:xfrm>
+          <a:prstGeom prst="ellipse">
+            <a:avLst/>
+          </a:prstGeom>
+          <a:solidFill>
+            <a:schemeClr val="tx2"/>
+          </a:solidFill>
+          <a:ln/>
+        </p:spPr>
+      </p:sp>
+      <p:pic>
+        <p:nvPicPr>
+          <p:cNvPr id="19" name="Miguel icon" descr="Miguel icon">    </p:cNvPr>
+          <p:cNvPicPr>
+            <a:picLocks noChangeAspect="1"/>
+          </p:cNvPicPr>
+          <p:nvPr/>
+        </p:nvPicPr>
+        <p:blipFill>
+          <a:blip r:embed="rId5"/>
+          <a:stretch>
+            <a:fillRect/>
+          </a:stretch>
+        </p:blipFill>
+        <p:spPr>
+          <a:xfrm>
+            <a:off x="2825496" y="1261872"/>
+            <a:ext cx="201168" cy="201168"/>
+          </a:xfrm>
+          <a:prstGeom prst="rect">
+            <a:avLst/>
+          </a:prstGeom>
+        </p:spPr>
+      </p:pic>
+      <p:sp>
+        <p:nvSpPr>
+          <p:cNvPr id="20" name="Miguel name"/>
+          <p:cNvSpPr txBox="1"/>
+          <p:nvPr/>
+        </p:nvSpPr>
+        <p:spPr>
+          <a:xfrm>
+            <a:off x="3218688" y="1161288"/>
+            <a:ext cx="1188720" cy="402336"/>
+          </a:xfrm>
+          <a:prstGeom prst="rect">
+            <a:avLst/>
+          </a:prstGeom>
+          <a:noFill/>
+          <a:ln/>
+        </p:spPr>
+        <p:txBody>
+          <a:bodyPr wrap="square" lIns="0" tIns="0" rIns="0" bIns="0" rtlCol="0" anchor="ctr"/>
+          <a:lstStyle/>
+          <a:p>
+            <a:pPr indent="0" marL="0">
+              <a:buNone/>
+            </a:pPr>
+            <a:r>
+              <a:rPr lang="en-US" sz="1600" b="1" dirty="0">
+                <a:solidFill>
+                  <a:schemeClr val="tx2"/>
+                </a:solidFill>
+              </a:rPr>
+              <a:t>Miguel, 24</a:t>
+            </a:r>
+            <a:endParaRPr lang="en-US" sz="1600" dirty="0"/>
+          </a:p>
+        </p:txBody>
+      </p:sp>
+      <p:sp>
+        <p:nvSpPr>
+          <p:cNvPr id="21" name="Miguel role"/>
+          <p:cNvSpPr txBox="1"/>
+          <p:nvPr/>
+        </p:nvSpPr>
+        <p:spPr>
+          <a:xfrm>
+            <a:off x="2724912" y="1627632"/>
+            <a:ext cx="1645920" cy="201168"/>
+          </a:xfrm>
+          <a:prstGeom prst="rect">
+            <a:avLst/>
+          </a:prstGeom>
+          <a:noFill/>
+          <a:ln/>
+        </p:spPr>
+        <p:txBody>
+          <a:bodyPr wrap="square" lIns="0" tIns="0" rIns="0" bIns="0" rtlCol="0" anchor="ctr"/>
+          <a:lstStyle/>
+          <a:p>
+            <a:pPr indent="0" marL="0">
+              <a:buNone/>
+            </a:pPr>
+            <a:r>
+              <a:rPr lang="en-US" sz="1100" b="1" dirty="0">
+                <a:solidFill>
+                  <a:schemeClr val="accent2"/>
+                </a:solidFill>
+              </a:rPr>
+              <a:t>PCR volunteer · operator</a:t>
+            </a:r>
+            <a:endParaRPr lang="en-US" sz="1100" dirty="0"/>
+          </a:p>
+        </p:txBody>
+      </p:sp>
+      <p:pic>
+        <p:nvPicPr>
+          <p:cNvPr id="22" name="Miguel Goal icon" descr="Goal">    </p:cNvPr>
+          <p:cNvPicPr>
+            <a:picLocks noChangeAspect="1"/>
+          </p:cNvPicPr>
+          <p:nvPr/>
+        </p:nvPicPr>
+        <p:blipFill>
+          <a:blip r:embed="rId6"/>
+          <a:stretch>
+            <a:fillRect/>
+          </a:stretch>
+        </p:blipFill>
+        <p:spPr>
+          <a:xfrm>
+            <a:off x="2724912" y="1943100"/>
+            <a:ext cx="146304" cy="146304"/>
+          </a:xfrm>
+          <a:prstGeom prst="rect">
+            <a:avLst/>
+          </a:prstGeom>
+        </p:spPr>
+      </p:pic>
+      <p:sp>
+        <p:nvSpPr>
+          <p:cNvPr id="23" name="Miguel Goal label"/>
+          <p:cNvSpPr txBox="1"/>
+          <p:nvPr/>
+        </p:nvSpPr>
+        <p:spPr>
+          <a:xfrm>
+            <a:off x="2944368" y="1920240"/>
+            <a:ext cx="1371600" cy="182880"/>
+          </a:xfrm>
+          <a:prstGeom prst="rect">
+            <a:avLst/>
+          </a:prstGeom>
+          <a:noFill/>
+          <a:ln/>
+        </p:spPr>
+        <p:txBody>
+          <a:bodyPr wrap="square" lIns="0" tIns="0" rIns="0" bIns="0" rtlCol="0" anchor="ctr"/>
+          <a:lstStyle/>
+          <a:p>
+            <a:pPr indent="0" marL="0">
+              <a:buNone/>
+            </a:pPr>
+            <a:r>
+              <a:rPr lang="en-US" sz="1100" b="1" dirty="0">
+                <a:solidFill>
+                  <a:schemeClr val="tx2"/>
+                </a:solidFill>
+              </a:rPr>
+              <a:t>Goal</a:t>
+            </a:r>
+            <a:endParaRPr lang="en-US" sz="1100" dirty="0"/>
+          </a:p>
+        </p:txBody>
+      </p:sp>
+      <p:sp>
+        <p:nvSpPr>
+          <p:cNvPr id="24" name="Miguel Goal"/>
+          <p:cNvSpPr txBox="1"/>
+          <p:nvPr/>
+        </p:nvSpPr>
+        <p:spPr>
+          <a:xfrm>
+            <a:off x="2724912" y="2112264"/>
+            <a:ext cx="1645920" cy="347472"/>
+          </a:xfrm>
+          <a:prstGeom prst="rect">
+            <a:avLst/>
+          </a:prstGeom>
+          <a:noFill/>
+          <a:ln/>
+        </p:spPr>
+        <p:txBody>
+          <a:bodyPr wrap="square" lIns="0" tIns="0" rIns="0" bIns="0" rtlCol="0" anchor="t"/>
+          <a:lstStyle/>
+          <a:p>
+            <a:pPr indent="0" marL="0">
+              <a:buNone/>
+            </a:pPr>
+            <a:r>
+              <a:rPr lang="en-US" sz="1200" dirty="0">
+                <a:solidFill>
+                  <a:schemeClr val="tx1"/>
+                </a:solidFill>
+              </a:rPr>
+              <a:t>see every request: what, where, status</a:t>
+            </a:r>
+            <a:endParaRPr lang="en-US" sz="1200" dirty="0"/>
+          </a:p>
+        </p:txBody>
+      </p:sp>
+      <p:pic>
+        <p:nvPicPr>
+          <p:cNvPr id="25" name="Miguel Pain icon" descr="Pain">    </p:cNvPr>
+          <p:cNvPicPr>
+            <a:picLocks noChangeAspect="1"/>
+          </p:cNvPicPr>
+          <p:nvPr/>
+        </p:nvPicPr>
+        <p:blipFill>
+          <a:blip r:embed="rId7"/>
+          <a:stretch>
+            <a:fillRect/>
+          </a:stretch>
+        </p:blipFill>
+        <p:spPr>
+          <a:xfrm>
+            <a:off x="2724912" y="2546604"/>
+            <a:ext cx="146304" cy="146304"/>
+          </a:xfrm>
+          <a:prstGeom prst="rect">
+            <a:avLst/>
+          </a:prstGeom>
+        </p:spPr>
+      </p:pic>
+      <p:sp>
+        <p:nvSpPr>
+          <p:cNvPr id="26" name="Miguel Pain label"/>
+          <p:cNvSpPr txBox="1"/>
+          <p:nvPr/>
+        </p:nvSpPr>
+        <p:spPr>
+          <a:xfrm>
+            <a:off x="2944368" y="2523744"/>
+            <a:ext cx="1371600" cy="182880"/>
+          </a:xfrm>
+          <a:prstGeom prst="rect">
+            <a:avLst/>
+          </a:prstGeom>
+          <a:noFill/>
+          <a:ln/>
+        </p:spPr>
+        <p:txBody>
+          <a:bodyPr wrap="square" lIns="0" tIns="0" rIns="0" bIns="0" rtlCol="0" anchor="ctr"/>
+          <a:lstStyle/>
+          <a:p>
+            <a:pPr indent="0" marL="0">
+              <a:buNone/>
+            </a:pPr>
+            <a:r>
+              <a:rPr lang="en-US" sz="1100" b="1" dirty="0">
+                <a:solidFill>
+                  <a:schemeClr val="tx2"/>
+                </a:solidFill>
+              </a:rPr>
+              <a:t>Pain</a:t>
+            </a:r>
+            <a:endParaRPr lang="en-US" sz="1100" dirty="0"/>
+          </a:p>
+        </p:txBody>
+      </p:sp>
+      <p:sp>
+        <p:nvSpPr>
+          <p:cNvPr id="27" name="Miguel Pain"/>
+          <p:cNvSpPr txBox="1"/>
+          <p:nvPr/>
+        </p:nvSpPr>
+        <p:spPr>
+          <a:xfrm>
+            <a:off x="2724912" y="2715768"/>
+            <a:ext cx="1645920" cy="347472"/>
+          </a:xfrm>
+          <a:prstGeom prst="rect">
+            <a:avLst/>
+          </a:prstGeom>
+          <a:noFill/>
+          <a:ln/>
+        </p:spPr>
+        <p:txBody>
+          <a:bodyPr wrap="square" lIns="0" tIns="0" rIns="0" bIns="0" rtlCol="0" anchor="t"/>
+          <a:lstStyle/>
+          <a:p>
+            <a:pPr indent="0" marL="0">
+              <a:buNone/>
+            </a:pPr>
+            <a:r>
+              <a:rPr lang="en-US" sz="1200" dirty="0">
+                <a:solidFill>
+                  <a:schemeClr val="tx1"/>
+                </a:solidFill>
+              </a:rPr>
+              <a:t>radio and phone, no location or priority</a:t>
+            </a:r>
+            <a:endParaRPr lang="en-US" sz="1200" dirty="0"/>
+          </a:p>
+        </p:txBody>
+      </p:sp>
+      <p:pic>
+        <p:nvPicPr>
+          <p:cNvPr id="28" name="Miguel Success icon" descr="Success">    </p:cNvPr>
+          <p:cNvPicPr>
+            <a:picLocks noChangeAspect="1"/>
+          </p:cNvPicPr>
+          <p:nvPr/>
+        </p:nvPicPr>
+        <p:blipFill>
+          <a:blip r:embed="rId8"/>
+          <a:stretch>
+            <a:fillRect/>
+          </a:stretch>
+        </p:blipFill>
+        <p:spPr>
+          <a:xfrm>
+            <a:off x="2724912" y="3150108"/>
+            <a:ext cx="146304" cy="146304"/>
+          </a:xfrm>
+          <a:prstGeom prst="rect">
+            <a:avLst/>
+          </a:prstGeom>
+        </p:spPr>
+      </p:pic>
+      <p:sp>
+        <p:nvSpPr>
+          <p:cNvPr id="29" name="Miguel Success label"/>
+          <p:cNvSpPr txBox="1"/>
+          <p:nvPr/>
+        </p:nvSpPr>
+        <p:spPr>
+          <a:xfrm>
+            <a:off x="2944368" y="3127248"/>
+            <a:ext cx="1371600" cy="182880"/>
+          </a:xfrm>
+          <a:prstGeom prst="rect">
+            <a:avLst/>
+          </a:prstGeom>
+          <a:noFill/>
+          <a:ln/>
+        </p:spPr>
+        <p:txBody>
+          <a:bodyPr wrap="square" lIns="0" tIns="0" rIns="0" bIns="0" rtlCol="0" anchor="ctr"/>
+          <a:lstStyle/>
+          <a:p>
+            <a:pPr indent="0" marL="0">
+              <a:buNone/>
+            </a:pPr>
+            <a:r>
+              <a:rPr lang="en-US" sz="1100" b="1" dirty="0">
+                <a:solidFill>
+                  <a:schemeClr val="tx2"/>
+                </a:solidFill>
+              </a:rPr>
+              <a:t>Success</a:t>
+            </a:r>
+            <a:endParaRPr lang="en-US" sz="1100" dirty="0"/>
+          </a:p>
+        </p:txBody>
+      </p:sp>
+      <p:sp>
+        <p:nvSpPr>
+          <p:cNvPr id="30" name="Miguel Success"/>
+          <p:cNvSpPr txBox="1"/>
+          <p:nvPr/>
+        </p:nvSpPr>
+        <p:spPr>
+          <a:xfrm>
+            <a:off x="2724912" y="3319272"/>
+            <a:ext cx="1645920" cy="347472"/>
+          </a:xfrm>
+          <a:prstGeom prst="rect">
+            <a:avLst/>
+          </a:prstGeom>
+          <a:noFill/>
+          <a:ln/>
+        </p:spPr>
+        <p:txBody>
+          <a:bodyPr wrap="square" lIns="0" tIns="0" rIns="0" bIns="0" rtlCol="0" anchor="t"/>
+          <a:lstStyle/>
+          <a:p>
+            <a:pPr indent="0" marL="0">
+              <a:buNone/>
+            </a:pPr>
+            <a:r>
+              <a:rPr lang="en-US" sz="1200" dirty="0">
+                <a:solidFill>
+                  <a:schemeClr val="tx1"/>
+                </a:solidFill>
+              </a:rPr>
+              <a:t>each request in seconds, triaged in ≤ 30 s</a:t>
+            </a:r>
+            <a:endParaRPr lang="en-US" sz="1200" dirty="0"/>
+          </a:p>
+        </p:txBody>
+      </p:sp>
+      <p:sp>
+        <p:nvSpPr>
+          <p:cNvPr id="31" name="Sofia card"/>
+          <p:cNvSpPr/>
+          <p:nvPr/>
+        </p:nvSpPr>
+        <p:spPr>
+          <a:xfrm>
+            <a:off x="4663440" y="1005840"/>
+            <a:ext cx="1920240" cy="2761488"/>
+          </a:xfrm>
+          <a:prstGeom prst="roundRect">
+            <a:avLst>
+              <a:gd name="adj" fmla="val 5714"/>
+            </a:avLst>
+          </a:prstGeom>
+          <a:solidFill>
+            <a:schemeClr val="bg2"/>
+          </a:solidFill>
+          <a:ln/>
+        </p:spPr>
+      </p:sp>
+      <p:sp>
+        <p:nvSpPr>
+          <p:cNvPr id="32" name="Sofia icon circle"/>
+          <p:cNvSpPr/>
+          <p:nvPr/>
+        </p:nvSpPr>
+        <p:spPr>
+          <a:xfrm>
+            <a:off x="4828032" y="1161288"/>
+            <a:ext cx="402336" cy="402336"/>
+          </a:xfrm>
+          <a:prstGeom prst="ellipse">
+            <a:avLst/>
+          </a:prstGeom>
+          <a:solidFill>
+            <a:schemeClr val="tx2"/>
+          </a:solidFill>
+          <a:ln/>
+        </p:spPr>
+      </p:sp>
+      <p:pic>
+        <p:nvPicPr>
+          <p:cNvPr id="33" name="Sofia icon" descr="Sofia icon">    </p:cNvPr>
+          <p:cNvPicPr>
+            <a:picLocks noChangeAspect="1"/>
+          </p:cNvPicPr>
+          <p:nvPr/>
+        </p:nvPicPr>
+        <p:blipFill>
+          <a:blip r:embed="rId9"/>
+          <a:stretch>
+            <a:fillRect/>
+          </a:stretch>
+        </p:blipFill>
+        <p:spPr>
+          <a:xfrm>
+            <a:off x="4928616" y="1261872"/>
+            <a:ext cx="201168" cy="201168"/>
+          </a:xfrm>
+          <a:prstGeom prst="rect">
+            <a:avLst/>
+          </a:prstGeom>
+        </p:spPr>
+      </p:pic>
+      <p:sp>
+        <p:nvSpPr>
+          <p:cNvPr id="34" name="Sofia name"/>
+          <p:cNvSpPr txBox="1"/>
+          <p:nvPr/>
+        </p:nvSpPr>
+        <p:spPr>
+          <a:xfrm>
+            <a:off x="5321808" y="1161288"/>
+            <a:ext cx="1188720" cy="402336"/>
+          </a:xfrm>
+          <a:prstGeom prst="rect">
+            <a:avLst/>
+          </a:prstGeom>
+          <a:noFill/>
+          <a:ln/>
+        </p:spPr>
+        <p:txBody>
+          <a:bodyPr wrap="square" lIns="0" tIns="0" rIns="0" bIns="0" rtlCol="0" anchor="ctr"/>
+          <a:lstStyle/>
+          <a:p>
+            <a:pPr indent="0" marL="0">
+              <a:buNone/>
+            </a:pPr>
+            <a:r>
+              <a:rPr lang="en-US" sz="1600" b="1" dirty="0">
+                <a:solidFill>
+                  <a:schemeClr val="tx2"/>
+                </a:solidFill>
+              </a:rPr>
+              <a:t>Sofia, 23</a:t>
+            </a:r>
+            <a:endParaRPr lang="en-US" sz="1600" dirty="0"/>
+          </a:p>
+        </p:txBody>
+      </p:sp>
+      <p:sp>
+        <p:nvSpPr>
+          <p:cNvPr id="35" name="Sofia role"/>
+          <p:cNvSpPr txBox="1"/>
+          <p:nvPr/>
+        </p:nvSpPr>
+        <p:spPr>
+          <a:xfrm>
+            <a:off x="4828032" y="1627632"/>
+            <a:ext cx="1645920" cy="201168"/>
+          </a:xfrm>
+          <a:prstGeom prst="rect">
+            <a:avLst/>
+          </a:prstGeom>
+          <a:noFill/>
+          <a:ln/>
+        </p:spPr>
+        <p:txBody>
+          <a:bodyPr wrap="square" lIns="0" tIns="0" rIns="0" bIns="0" rtlCol="0" anchor="ctr"/>
+          <a:lstStyle/>
+          <a:p>
+            <a:pPr indent="0" marL="0">
+              <a:buNone/>
+            </a:pPr>
+            <a:r>
+              <a:rPr lang="en-US" sz="1100" b="1" dirty="0">
+                <a:solidFill>
+                  <a:schemeClr val="accent2"/>
+                </a:solidFill>
+              </a:rPr>
+              <a:t>Organiser · her event only</a:t>
+            </a:r>
+            <a:endParaRPr lang="en-US" sz="1100" dirty="0"/>
+          </a:p>
+        </p:txBody>
+      </p:sp>
+      <p:pic>
+        <p:nvPicPr>
+          <p:cNvPr id="36" name="Sofia Goal icon" descr="Goal">    </p:cNvPr>
+          <p:cNvPicPr>
+            <a:picLocks noChangeAspect="1"/>
+          </p:cNvPicPr>
+          <p:nvPr/>
+        </p:nvPicPr>
+        <p:blipFill>
+          <a:blip r:embed="rId10"/>
+          <a:stretch>
+            <a:fillRect/>
+          </a:stretch>
+        </p:blipFill>
+        <p:spPr>
+          <a:xfrm>
+            <a:off x="4828032" y="1943100"/>
+            <a:ext cx="146304" cy="146304"/>
+          </a:xfrm>
+          <a:prstGeom prst="rect">
+            <a:avLst/>
+          </a:prstGeom>
+        </p:spPr>
+      </p:pic>
+      <p:sp>
+        <p:nvSpPr>
+          <p:cNvPr id="37" name="Sofia Goal label"/>
+          <p:cNvSpPr txBox="1"/>
+          <p:nvPr/>
+        </p:nvSpPr>
+        <p:spPr>
+          <a:xfrm>
+            <a:off x="5047488" y="1920240"/>
+            <a:ext cx="1371600" cy="182880"/>
+          </a:xfrm>
+          <a:prstGeom prst="rect">
+            <a:avLst/>
+          </a:prstGeom>
+          <a:noFill/>
+          <a:ln/>
+        </p:spPr>
+        <p:txBody>
+          <a:bodyPr wrap="square" lIns="0" tIns="0" rIns="0" bIns="0" rtlCol="0" anchor="ctr"/>
+          <a:lstStyle/>
+          <a:p>
+            <a:pPr indent="0" marL="0">
+              <a:buNone/>
+            </a:pPr>
+            <a:r>
+              <a:rPr lang="en-US" sz="1100" b="1" dirty="0">
+                <a:solidFill>
+                  <a:schemeClr val="tx2"/>
+                </a:solidFill>
+              </a:rPr>
+              <a:t>Goal</a:t>
+            </a:r>
+            <a:endParaRPr lang="en-US" sz="1100" dirty="0"/>
+          </a:p>
+        </p:txBody>
+      </p:sp>
+      <p:sp>
+        <p:nvSpPr>
+          <p:cNvPr id="38" name="Sofia Goal"/>
+          <p:cNvSpPr txBox="1"/>
+          <p:nvPr/>
+        </p:nvSpPr>
+        <p:spPr>
+          <a:xfrm>
+            <a:off x="4828032" y="2112264"/>
+            <a:ext cx="1645920" cy="347472"/>
+          </a:xfrm>
+          <a:prstGeom prst="rect">
+            <a:avLst/>
+          </a:prstGeom>
+          <a:noFill/>
+          <a:ln/>
+        </p:spPr>
+        <p:txBody>
+          <a:bodyPr wrap="square" lIns="0" tIns="0" rIns="0" bIns="0" rtlCol="0" anchor="t"/>
+          <a:lstStyle/>
+          <a:p>
+            <a:pPr indent="0" marL="0">
+              <a:buNone/>
+            </a:pPr>
+            <a:r>
+              <a:rPr lang="en-US" sz="1200" dirty="0">
+                <a:solidFill>
+                  <a:schemeClr val="tx1"/>
+                </a:solidFill>
+              </a:rPr>
+              <a:t>configure once, publish changes live</a:t>
+            </a:r>
+            <a:endParaRPr lang="en-US" sz="1200" dirty="0"/>
+          </a:p>
+        </p:txBody>
+      </p:sp>
+      <p:pic>
+        <p:nvPicPr>
+          <p:cNvPr id="39" name="Sofia Pain icon" descr="Pain">    </p:cNvPr>
+          <p:cNvPicPr>
+            <a:picLocks noChangeAspect="1"/>
+          </p:cNvPicPr>
+          <p:nvPr/>
+        </p:nvPicPr>
+        <p:blipFill>
+          <a:blip r:embed="rId11"/>
+          <a:stretch>
+            <a:fillRect/>
+          </a:stretch>
+        </p:blipFill>
+        <p:spPr>
+          <a:xfrm>
+            <a:off x="4828032" y="2546604"/>
+            <a:ext cx="146304" cy="146304"/>
+          </a:xfrm>
+          <a:prstGeom prst="rect">
+            <a:avLst/>
+          </a:prstGeom>
+        </p:spPr>
+      </p:pic>
+      <p:sp>
+        <p:nvSpPr>
+          <p:cNvPr id="40" name="Sofia Pain label"/>
+          <p:cNvSpPr txBox="1"/>
+          <p:nvPr/>
+        </p:nvSpPr>
+        <p:spPr>
+          <a:xfrm>
+            <a:off x="5047488" y="2523744"/>
+            <a:ext cx="1371600" cy="182880"/>
+          </a:xfrm>
+          <a:prstGeom prst="rect">
+            <a:avLst/>
+          </a:prstGeom>
+          <a:noFill/>
+          <a:ln/>
+        </p:spPr>
+        <p:txBody>
+          <a:bodyPr wrap="square" lIns="0" tIns="0" rIns="0" bIns="0" rtlCol="0" anchor="ctr"/>
+          <a:lstStyle/>
+          <a:p>
+            <a:pPr indent="0" marL="0">
+              <a:buNone/>
+            </a:pPr>
+            <a:r>
+              <a:rPr lang="en-US" sz="1100" b="1" dirty="0">
+                <a:solidFill>
+                  <a:schemeClr val="tx2"/>
+                </a:solidFill>
+              </a:rPr>
+              <a:t>Pain</a:t>
+            </a:r>
+            <a:endParaRPr lang="en-US" sz="1100" dirty="0"/>
+          </a:p>
+        </p:txBody>
+      </p:sp>
+      <p:sp>
+        <p:nvSpPr>
+          <p:cNvPr id="41" name="Sofia Pain"/>
+          <p:cNvSpPr txBox="1"/>
+          <p:nvPr/>
+        </p:nvSpPr>
+        <p:spPr>
+          <a:xfrm>
+            <a:off x="4828032" y="2715768"/>
+            <a:ext cx="1645920" cy="347472"/>
+          </a:xfrm>
+          <a:prstGeom prst="rect">
+            <a:avLst/>
+          </a:prstGeom>
+          <a:noFill/>
+          <a:ln/>
+        </p:spPr>
+        <p:txBody>
+          <a:bodyPr wrap="square" lIns="0" tIns="0" rIns="0" bIns="0" rtlCol="0" anchor="t"/>
+          <a:lstStyle/>
+          <a:p>
+            <a:pPr indent="0" marL="0">
+              <a:buNone/>
+            </a:pPr>
+            <a:r>
+              <a:rPr lang="en-US" sz="1200" dirty="0">
+                <a:solidFill>
+                  <a:schemeClr val="tx1"/>
+                </a:solidFill>
+              </a:rPr>
+              <a:t>each partner talks on its own channel</a:t>
+            </a:r>
+            <a:endParaRPr lang="en-US" sz="1200" dirty="0"/>
+          </a:p>
+        </p:txBody>
+      </p:sp>
+      <p:pic>
+        <p:nvPicPr>
+          <p:cNvPr id="42" name="Sofia Success icon" descr="Success">    </p:cNvPr>
+          <p:cNvPicPr>
+            <a:picLocks noChangeAspect="1"/>
+          </p:cNvPicPr>
+          <p:nvPr/>
+        </p:nvPicPr>
+        <p:blipFill>
+          <a:blip r:embed="rId12"/>
+          <a:stretch>
+            <a:fillRect/>
+          </a:stretch>
+        </p:blipFill>
+        <p:spPr>
+          <a:xfrm>
+            <a:off x="4828032" y="3150108"/>
+            <a:ext cx="146304" cy="146304"/>
+          </a:xfrm>
+          <a:prstGeom prst="rect">
+            <a:avLst/>
+          </a:prstGeom>
+        </p:spPr>
+      </p:pic>
+      <p:sp>
+        <p:nvSpPr>
+          <p:cNvPr id="43" name="Sofia Success label"/>
+          <p:cNvSpPr txBox="1"/>
+          <p:nvPr/>
+        </p:nvSpPr>
+        <p:spPr>
+          <a:xfrm>
+            <a:off x="5047488" y="3127248"/>
+            <a:ext cx="1371600" cy="182880"/>
+          </a:xfrm>
+          <a:prstGeom prst="rect">
+            <a:avLst/>
+          </a:prstGeom>
+          <a:noFill/>
+          <a:ln/>
+        </p:spPr>
+        <p:txBody>
+          <a:bodyPr wrap="square" lIns="0" tIns="0" rIns="0" bIns="0" rtlCol="0" anchor="ctr"/>
+          <a:lstStyle/>
+          <a:p>
+            <a:pPr indent="0" marL="0">
+              <a:buNone/>
+            </a:pPr>
+            <a:r>
+              <a:rPr lang="en-US" sz="1100" b="1" dirty="0">
+                <a:solidFill>
+                  <a:schemeClr val="tx2"/>
+                </a:solidFill>
+              </a:rPr>
+              <a:t>Success</a:t>
+            </a:r>
+            <a:endParaRPr lang="en-US" sz="1100" dirty="0"/>
+          </a:p>
+        </p:txBody>
+      </p:sp>
+      <p:sp>
+        <p:nvSpPr>
+          <p:cNvPr id="44" name="Sofia Success"/>
+          <p:cNvSpPr txBox="1"/>
+          <p:nvPr/>
+        </p:nvSpPr>
+        <p:spPr>
+          <a:xfrm>
+            <a:off x="4828032" y="3319272"/>
+            <a:ext cx="1645920" cy="347472"/>
+          </a:xfrm>
+          <a:prstGeom prst="rect">
+            <a:avLst/>
+          </a:prstGeom>
+          <a:noFill/>
+          <a:ln/>
+        </p:spPr>
+        <p:txBody>
+          <a:bodyPr wrap="square" lIns="0" tIns="0" rIns="0" bIns="0" rtlCol="0" anchor="t"/>
+          <a:lstStyle/>
+          <a:p>
+            <a:pPr indent="0" marL="0">
+              <a:buNone/>
+            </a:pPr>
+            <a:r>
+              <a:rPr lang="en-US" sz="1200" dirty="0">
+                <a:solidFill>
+                  <a:schemeClr val="tx1"/>
+                </a:solidFill>
+              </a:rPr>
+              <a:t>next night ready with configuration only</a:t>
+            </a:r>
+            <a:endParaRPr lang="en-US" sz="1200" dirty="0"/>
+          </a:p>
+        </p:txBody>
+      </p:sp>
+      <p:sp>
+        <p:nvSpPr>
+          <p:cNvPr id="45" name="Daniel card"/>
+          <p:cNvSpPr/>
+          <p:nvPr/>
+        </p:nvSpPr>
+        <p:spPr>
+          <a:xfrm>
+            <a:off x="6766560" y="1005840"/>
+            <a:ext cx="1920240" cy="2761488"/>
+          </a:xfrm>
+          <a:prstGeom prst="roundRect">
+            <a:avLst>
+              <a:gd name="adj" fmla="val 5714"/>
+            </a:avLst>
+          </a:prstGeom>
+          <a:solidFill>
+            <a:schemeClr val="bg2"/>
+          </a:solidFill>
+          <a:ln/>
+        </p:spPr>
+      </p:sp>
+      <p:sp>
+        <p:nvSpPr>
+          <p:cNvPr id="46" name="Daniel icon circle"/>
+          <p:cNvSpPr/>
+          <p:nvPr/>
+        </p:nvSpPr>
+        <p:spPr>
+          <a:xfrm>
+            <a:off x="6931152" y="1161288"/>
+            <a:ext cx="402336" cy="402336"/>
+          </a:xfrm>
+          <a:prstGeom prst="ellipse">
+            <a:avLst/>
+          </a:prstGeom>
+          <a:solidFill>
+            <a:schemeClr val="tx2"/>
+          </a:solidFill>
+          <a:ln/>
+        </p:spPr>
+      </p:sp>
+      <p:pic>
+        <p:nvPicPr>
+          <p:cNvPr id="47" name="Daniel icon" descr="Daniel icon">    </p:cNvPr>
+          <p:cNvPicPr>
+            <a:picLocks noChangeAspect="1"/>
+          </p:cNvPicPr>
+          <p:nvPr/>
+        </p:nvPicPr>
+        <p:blipFill>
+          <a:blip r:embed="rId13"/>
+          <a:stretch>
+            <a:fillRect/>
+          </a:stretch>
+        </p:blipFill>
+        <p:spPr>
+          <a:xfrm>
+            <a:off x="7031736" y="1261872"/>
+            <a:ext cx="201168" cy="201168"/>
+          </a:xfrm>
+          <a:prstGeom prst="rect">
+            <a:avLst/>
+          </a:prstGeom>
+        </p:spPr>
+      </p:pic>
+      <p:sp>
+        <p:nvSpPr>
+          <p:cNvPr id="48" name="Daniel name"/>
+          <p:cNvSpPr txBox="1"/>
+          <p:nvPr/>
+        </p:nvSpPr>
+        <p:spPr>
+          <a:xfrm>
+            <a:off x="7424928" y="1161288"/>
+            <a:ext cx="1188720" cy="402336"/>
+          </a:xfrm>
+          <a:prstGeom prst="rect">
+            <a:avLst/>
+          </a:prstGeom>
+          <a:noFill/>
+          <a:ln/>
+        </p:spPr>
+        <p:txBody>
+          <a:bodyPr wrap="square" lIns="0" tIns="0" rIns="0" bIns="0" rtlCol="0" anchor="ctr"/>
+          <a:lstStyle/>
+          <a:p>
+            <a:pPr indent="0" marL="0">
+              <a:buNone/>
+            </a:pPr>
+            <a:r>
+              <a:rPr lang="en-US" sz="1600" b="1" dirty="0">
+                <a:solidFill>
+                  <a:schemeClr val="tx2"/>
+                </a:solidFill>
+              </a:rPr>
+              <a:t>Daniel, 27</a:t>
+            </a:r>
+            <a:endParaRPr lang="en-US" sz="1600" dirty="0"/>
+          </a:p>
+        </p:txBody>
+      </p:sp>
+      <p:sp>
+        <p:nvSpPr>
+          <p:cNvPr id="49" name="Daniel role"/>
+          <p:cNvSpPr txBox="1"/>
+          <p:nvPr/>
+        </p:nvSpPr>
+        <p:spPr>
+          <a:xfrm>
+            <a:off x="6931152" y="1627632"/>
+            <a:ext cx="1645920" cy="201168"/>
+          </a:xfrm>
+          <a:prstGeom prst="rect">
+            <a:avLst/>
+          </a:prstGeom>
+          <a:noFill/>
+          <a:ln/>
+        </p:spPr>
+        <p:txBody>
+          <a:bodyPr wrap="square" lIns="0" tIns="0" rIns="0" bIns="0" rtlCol="0" anchor="ctr"/>
+          <a:lstStyle/>
+          <a:p>
+            <a:pPr indent="0" marL="0">
+              <a:buNone/>
+            </a:pPr>
+            <a:r>
+              <a:rPr lang="en-US" sz="1100" b="1" dirty="0">
+                <a:solidFill>
+                  <a:schemeClr val="accent2"/>
+                </a:solidFill>
+              </a:rPr>
+              <a:t>Farol team · all events</a:t>
+            </a:r>
+            <a:endParaRPr lang="en-US" sz="1100" dirty="0"/>
+          </a:p>
+        </p:txBody>
+      </p:sp>
+      <p:pic>
+        <p:nvPicPr>
+          <p:cNvPr id="50" name="Daniel Goal icon" descr="Goal">    </p:cNvPr>
+          <p:cNvPicPr>
+            <a:picLocks noChangeAspect="1"/>
+          </p:cNvPicPr>
+          <p:nvPr/>
+        </p:nvPicPr>
+        <p:blipFill>
+          <a:blip r:embed="rId14"/>
+          <a:stretch>
+            <a:fillRect/>
+          </a:stretch>
+        </p:blipFill>
+        <p:spPr>
+          <a:xfrm>
+            <a:off x="6931152" y="1943100"/>
+            <a:ext cx="146304" cy="146304"/>
+          </a:xfrm>
+          <a:prstGeom prst="rect">
+            <a:avLst/>
+          </a:prstGeom>
+        </p:spPr>
+      </p:pic>
+      <p:sp>
+        <p:nvSpPr>
+          <p:cNvPr id="51" name="Daniel Goal label"/>
+          <p:cNvSpPr txBox="1"/>
+          <p:nvPr/>
+        </p:nvSpPr>
+        <p:spPr>
+          <a:xfrm>
+            <a:off x="7150608" y="1920240"/>
+            <a:ext cx="1371600" cy="182880"/>
+          </a:xfrm>
+          <a:prstGeom prst="rect">
+            <a:avLst/>
+          </a:prstGeom>
+          <a:noFill/>
+          <a:ln/>
+        </p:spPr>
+        <p:txBody>
+          <a:bodyPr wrap="square" lIns="0" tIns="0" rIns="0" bIns="0" rtlCol="0" anchor="ctr"/>
+          <a:lstStyle/>
+          <a:p>
+            <a:pPr indent="0" marL="0">
+              <a:buNone/>
+            </a:pPr>
+            <a:r>
+              <a:rPr lang="en-US" sz="1100" b="1" dirty="0">
+                <a:solidFill>
+                  <a:schemeClr val="tx2"/>
+                </a:solidFill>
+              </a:rPr>
+              <a:t>Goal</a:t>
+            </a:r>
+            <a:endParaRPr lang="en-US" sz="1100" dirty="0"/>
+          </a:p>
+        </p:txBody>
+      </p:sp>
+      <p:sp>
+        <p:nvSpPr>
+          <p:cNvPr id="52" name="Daniel Goal"/>
+          <p:cNvSpPr txBox="1"/>
+          <p:nvPr/>
+        </p:nvSpPr>
+        <p:spPr>
+          <a:xfrm>
+            <a:off x="6931152" y="2112264"/>
+            <a:ext cx="1645920" cy="347472"/>
+          </a:xfrm>
+          <a:prstGeom prst="rect">
+            <a:avLst/>
+          </a:prstGeom>
+          <a:noFill/>
+          <a:ln/>
+        </p:spPr>
+        <p:txBody>
+          <a:bodyPr wrap="square" lIns="0" tIns="0" rIns="0" bIns="0" rtlCol="0" anchor="t"/>
+          <a:lstStyle/>
+          <a:p>
+            <a:pPr indent="0" marL="0">
+              <a:buNone/>
+            </a:pPr>
+            <a:r>
+              <a:rPr lang="en-US" sz="1200" dirty="0">
+                <a:solidFill>
+                  <a:schemeClr val="tx1"/>
+                </a:solidFill>
+              </a:rPr>
+              <a:t>onboard real festivals, no new code</a:t>
+            </a:r>
+            <a:endParaRPr lang="en-US" sz="1200" dirty="0"/>
+          </a:p>
+        </p:txBody>
+      </p:sp>
+      <p:pic>
+        <p:nvPicPr>
+          <p:cNvPr id="53" name="Daniel Pain icon" descr="Pain">    </p:cNvPr>
+          <p:cNvPicPr>
+            <a:picLocks noChangeAspect="1"/>
+          </p:cNvPicPr>
+          <p:nvPr/>
+        </p:nvPicPr>
+        <p:blipFill>
+          <a:blip r:embed="rId15"/>
+          <a:stretch>
+            <a:fillRect/>
+          </a:stretch>
+        </p:blipFill>
+        <p:spPr>
+          <a:xfrm>
+            <a:off x="6931152" y="2546604"/>
+            <a:ext cx="146304" cy="146304"/>
+          </a:xfrm>
+          <a:prstGeom prst="rect">
+            <a:avLst/>
+          </a:prstGeom>
+        </p:spPr>
+      </p:pic>
+      <p:sp>
+        <p:nvSpPr>
+          <p:cNvPr id="54" name="Daniel Pain label"/>
+          <p:cNvSpPr txBox="1"/>
+          <p:nvPr/>
+        </p:nvSpPr>
+        <p:spPr>
+          <a:xfrm>
+            <a:off x="7150608" y="2523744"/>
+            <a:ext cx="1371600" cy="182880"/>
+          </a:xfrm>
+          <a:prstGeom prst="rect">
+            <a:avLst/>
+          </a:prstGeom>
+          <a:noFill/>
+          <a:ln/>
+        </p:spPr>
+        <p:txBody>
+          <a:bodyPr wrap="square" lIns="0" tIns="0" rIns="0" bIns="0" rtlCol="0" anchor="ctr"/>
+          <a:lstStyle/>
+          <a:p>
+            <a:pPr indent="0" marL="0">
+              <a:buNone/>
+            </a:pPr>
+            <a:r>
+              <a:rPr lang="en-US" sz="1100" b="1" dirty="0">
+                <a:solidFill>
+                  <a:schemeClr val="tx2"/>
+                </a:solidFill>
+              </a:rPr>
+              <a:t>Pain</a:t>
+            </a:r>
+            <a:endParaRPr lang="en-US" sz="1100" dirty="0"/>
+          </a:p>
+        </p:txBody>
+      </p:sp>
+      <p:sp>
+        <p:nvSpPr>
+          <p:cNvPr id="55" name="Daniel Pain"/>
+          <p:cNvSpPr txBox="1"/>
+          <p:nvPr/>
+        </p:nvSpPr>
+        <p:spPr>
+          <a:xfrm>
+            <a:off x="6931152" y="2715768"/>
+            <a:ext cx="1645920" cy="347472"/>
+          </a:xfrm>
+          <a:prstGeom prst="rect">
+            <a:avLst/>
+          </a:prstGeom>
+          <a:noFill/>
+          <a:ln/>
+        </p:spPr>
+        <p:txBody>
+          <a:bodyPr wrap="square" lIns="0" tIns="0" rIns="0" bIns="0" rtlCol="0" anchor="t"/>
+          <a:lstStyle/>
+          <a:p>
+            <a:pPr indent="0" marL="0">
+              <a:buNone/>
+            </a:pPr>
+            <a:r>
+              <a:rPr lang="en-US" sz="1200" dirty="0">
+                <a:solidFill>
+                  <a:schemeClr val="tx1"/>
+                </a:solidFill>
+              </a:rPr>
+              <a:t>fake events; owners change every year</a:t>
+            </a:r>
+            <a:endParaRPr lang="en-US" sz="1200" dirty="0"/>
+          </a:p>
+        </p:txBody>
+      </p:sp>
+      <p:pic>
+        <p:nvPicPr>
+          <p:cNvPr id="56" name="Daniel Success icon" descr="Success">    </p:cNvPr>
+          <p:cNvPicPr>
+            <a:picLocks noChangeAspect="1"/>
+          </p:cNvPicPr>
+          <p:nvPr/>
+        </p:nvPicPr>
+        <p:blipFill>
+          <a:blip r:embed="rId16"/>
+          <a:stretch>
+            <a:fillRect/>
+          </a:stretch>
+        </p:blipFill>
+        <p:spPr>
+          <a:xfrm>
+            <a:off x="6931152" y="3150108"/>
+            <a:ext cx="146304" cy="146304"/>
+          </a:xfrm>
+          <a:prstGeom prst="rect">
+            <a:avLst/>
+          </a:prstGeom>
+        </p:spPr>
+      </p:pic>
+      <p:sp>
+        <p:nvSpPr>
+          <p:cNvPr id="57" name="Daniel Success label"/>
+          <p:cNvSpPr txBox="1"/>
+          <p:nvPr/>
+        </p:nvSpPr>
+        <p:spPr>
+          <a:xfrm>
+            <a:off x="7150608" y="3127248"/>
+            <a:ext cx="1371600" cy="182880"/>
+          </a:xfrm>
+          <a:prstGeom prst="rect">
+            <a:avLst/>
+          </a:prstGeom>
+          <a:noFill/>
+          <a:ln/>
+        </p:spPr>
+        <p:txBody>
+          <a:bodyPr wrap="square" lIns="0" tIns="0" rIns="0" bIns="0" rtlCol="0" anchor="ctr"/>
+          <a:lstStyle/>
+          <a:p>
+            <a:pPr indent="0" marL="0">
+              <a:buNone/>
+            </a:pPr>
+            <a:r>
+              <a:rPr lang="en-US" sz="1100" b="1" dirty="0">
+                <a:solidFill>
+                  <a:schemeClr val="tx2"/>
+                </a:solidFill>
+              </a:rPr>
+              <a:t>Success</a:t>
+            </a:r>
+            <a:endParaRPr lang="en-US" sz="1100" dirty="0"/>
+          </a:p>
+        </p:txBody>
+      </p:sp>
+      <p:sp>
+        <p:nvSpPr>
+          <p:cNvPr id="58" name="Daniel Success"/>
+          <p:cNvSpPr txBox="1"/>
+          <p:nvPr/>
+        </p:nvSpPr>
+        <p:spPr>
+          <a:xfrm>
+            <a:off x="6931152" y="3319272"/>
+            <a:ext cx="1645920" cy="347472"/>
+          </a:xfrm>
+          <a:prstGeom prst="rect">
+            <a:avLst/>
+          </a:prstGeom>
+          <a:noFill/>
+          <a:ln/>
+        </p:spPr>
+        <p:txBody>
+          <a:bodyPr wrap="square" lIns="0" tIns="0" rIns="0" bIns="0" rtlCol="0" anchor="t"/>
+          <a:lstStyle/>
+          <a:p>
+            <a:pPr indent="0" marL="0">
+              <a:buNone/>
+            </a:pPr>
+            <a:r>
+              <a:rPr lang="en-US" sz="1200" dirty="0">
+                <a:solidFill>
+                  <a:schemeClr val="tx1"/>
+                </a:solidFill>
+              </a:rPr>
+              <a:t>new festival live, its data never seen</a:t>
+            </a:r>
+            <a:endParaRPr lang="en-US" sz="1200" dirty="0"/>
+          </a:p>
+        </p:txBody>
+      </p:sp>
+      <p:sp>
+        <p:nvSpPr>
+          <p:cNvPr id="59" name="Validation band"/>
+          <p:cNvSpPr/>
+          <p:nvPr/>
+        </p:nvSpPr>
+        <p:spPr>
+          <a:xfrm>
+            <a:off x="457200" y="3904488"/>
+            <a:ext cx="8229600" cy="868680"/>
+          </a:xfrm>
+          <a:prstGeom prst="roundRect">
+            <a:avLst>
+              <a:gd name="adj" fmla="val 12632"/>
+            </a:avLst>
+          </a:prstGeom>
+          <a:solidFill>
+            <a:schemeClr val="tx2"/>
+          </a:solidFill>
+          <a:ln/>
+        </p:spPr>
+      </p:sp>
+      <p:pic>
+        <p:nvPicPr>
+          <p:cNvPr id="60" name="Proto-personas icon" descr="Proto-personas icon">    </p:cNvPr>
+          <p:cNvPicPr>
+            <a:picLocks noChangeAspect="1"/>
+          </p:cNvPicPr>
+          <p:nvPr/>
+        </p:nvPicPr>
+        <p:blipFill>
+          <a:blip r:embed="rId17"/>
+          <a:stretch>
+            <a:fillRect/>
+          </a:stretch>
+        </p:blipFill>
+        <p:spPr>
+          <a:xfrm>
+            <a:off x="658368" y="4023360"/>
+            <a:ext cx="274320" cy="274320"/>
+          </a:xfrm>
+          <a:prstGeom prst="rect">
+            <a:avLst/>
+          </a:prstGeom>
+        </p:spPr>
+      </p:pic>
+      <p:sp>
+        <p:nvSpPr>
+          <p:cNvPr id="61" name="Proto-personas heading"/>
+          <p:cNvSpPr txBox="1"/>
+          <p:nvPr/>
+        </p:nvSpPr>
+        <p:spPr>
+          <a:xfrm>
+            <a:off x="1024128" y="3995928"/>
+            <a:ext cx="2194560" cy="329184"/>
+          </a:xfrm>
+          <a:prstGeom prst="rect">
+            <a:avLst/>
+          </a:prstGeom>
+          <a:noFill/>
+          <a:ln/>
+        </p:spPr>
+        <p:txBody>
+          <a:bodyPr wrap="square" lIns="0" tIns="0" rIns="0" bIns="0" rtlCol="0" anchor="ctr"/>
+          <a:lstStyle/>
+          <a:p>
+            <a:pPr indent="0" marL="0">
+              <a:buNone/>
+            </a:pPr>
+            <a:r>
+              <a:rPr lang="en-US" sz="1600" b="1" dirty="0">
+                <a:solidFill>
+                  <a:schemeClr val="bg1"/>
+                </a:solidFill>
+              </a:rPr>
+              <a:t>Proto-personas</a:t>
+            </a:r>
+            <a:endParaRPr lang="en-US" sz="1600" dirty="0"/>
+          </a:p>
+        </p:txBody>
+      </p:sp>
+      <p:sp>
+        <p:nvSpPr>
+          <p:cNvPr id="62" name="Proto-personas text"/>
+          <p:cNvSpPr txBox="1"/>
+          <p:nvPr/>
+        </p:nvSpPr>
+        <p:spPr>
+          <a:xfrm>
+            <a:off x="658368" y="4370832"/>
+            <a:ext cx="2514600" cy="329184"/>
+          </a:xfrm>
+          <a:prstGeom prst="rect">
+            <a:avLst/>
+          </a:prstGeom>
+          <a:noFill/>
+          <a:ln/>
+        </p:spPr>
+        <p:txBody>
+          <a:bodyPr wrap="square" lIns="0" tIns="0" rIns="0" bIns="0" rtlCol="0" anchor="t"/>
+          <a:lstStyle/>
+          <a:p>
+            <a:pPr indent="0" marL="0">
+              <a:buNone/>
+            </a:pPr>
+            <a:r>
+              <a:rPr lang="en-US" sz="1050" dirty="0">
+                <a:solidFill>
+                  <a:schemeClr val="bg1"/>
+                </a:solidFill>
+              </a:rPr>
+              <a:t>From the report and public evidence. Names are fictional; no user data yet.</a:t>
+            </a:r>
+            <a:endParaRPr lang="en-US" sz="1050" dirty="0"/>
+          </a:p>
+        </p:txBody>
+      </p:sp>
+      <p:sp>
+        <p:nvSpPr>
+          <p:cNvPr id="63" name="Student survey circle"/>
+          <p:cNvSpPr/>
+          <p:nvPr/>
+        </p:nvSpPr>
+        <p:spPr>
+          <a:xfrm>
+            <a:off x="3337560" y="4142232"/>
+            <a:ext cx="365760" cy="365760"/>
+          </a:xfrm>
+          <a:prstGeom prst="ellipse">
+            <a:avLst/>
+          </a:prstGeom>
+          <a:solidFill>
+            <a:schemeClr val="accent1"/>
+          </a:solidFill>
+          <a:ln/>
+        </p:spPr>
+      </p:sp>
+      <p:pic>
+        <p:nvPicPr>
+          <p:cNvPr id="64" name="Student survey icon" descr="Student survey">    </p:cNvPr>
+          <p:cNvPicPr>
+            <a:picLocks noChangeAspect="1"/>
+          </p:cNvPicPr>
+          <p:nvPr/>
+        </p:nvPicPr>
+        <p:blipFill>
+          <a:blip r:embed="rId18"/>
+          <a:stretch>
+            <a:fillRect/>
+          </a:stretch>
+        </p:blipFill>
+        <p:spPr>
+          <a:xfrm>
+            <a:off x="3419856" y="4224528"/>
+            <a:ext cx="201168" cy="201168"/>
+          </a:xfrm>
+          <a:prstGeom prst="rect">
+            <a:avLst/>
+          </a:prstGeom>
+        </p:spPr>
+      </p:pic>
+      <p:sp>
+        <p:nvSpPr>
+          <p:cNvPr id="65" name="Student survey label"/>
+          <p:cNvSpPr txBox="1"/>
+          <p:nvPr/>
+        </p:nvSpPr>
+        <p:spPr>
+          <a:xfrm>
+            <a:off x="3794760" y="4114800"/>
+            <a:ext cx="1234440" cy="219456"/>
+          </a:xfrm>
+          <a:prstGeom prst="rect">
+            <a:avLst/>
+          </a:prstGeom>
+          <a:noFill/>
+          <a:ln/>
+        </p:spPr>
+        <p:txBody>
+          <a:bodyPr wrap="square" lIns="0" tIns="0" rIns="0" bIns="0" rtlCol="0" anchor="ctr"/>
+          <a:lstStyle/>
+          <a:p>
+            <a:pPr indent="0" marL="0">
+              <a:buNone/>
+            </a:pPr>
+            <a:r>
+              <a:rPr lang="en-US" sz="1200" b="1" dirty="0">
+                <a:solidFill>
+                  <a:schemeClr val="bg1"/>
+                </a:solidFill>
+              </a:rPr>
+              <a:t>Student survey</a:t>
+            </a:r>
+            <a:endParaRPr lang="en-US" sz="1200" dirty="0"/>
+          </a:p>
+        </p:txBody>
+      </p:sp>
+      <p:sp>
+        <p:nvSpPr>
+          <p:cNvPr id="66" name="Student survey target"/>
+          <p:cNvSpPr txBox="1"/>
+          <p:nvPr/>
+        </p:nvSpPr>
+        <p:spPr>
+          <a:xfrm>
+            <a:off x="3794760" y="4334256"/>
+            <a:ext cx="1234440" cy="201168"/>
+          </a:xfrm>
+          <a:prstGeom prst="rect">
+            <a:avLst/>
+          </a:prstGeom>
+          <a:noFill/>
+          <a:ln/>
+        </p:spPr>
+        <p:txBody>
+          <a:bodyPr wrap="square" lIns="0" tIns="0" rIns="0" bIns="0" rtlCol="0" anchor="ctr"/>
+          <a:lstStyle/>
+          <a:p>
+            <a:pPr indent="0" marL="0">
+              <a:buNone/>
+            </a:pPr>
+            <a:r>
+              <a:rPr lang="en-US" sz="1100" dirty="0">
+                <a:solidFill>
+                  <a:schemeClr val="accent1"/>
+                </a:solidFill>
+              </a:rPr>
+              <a:t>validates Rita</a:t>
+            </a:r>
+            <a:endParaRPr lang="en-US" sz="1100" dirty="0"/>
+          </a:p>
+        </p:txBody>
+      </p:sp>
+      <p:sp>
+        <p:nvSpPr>
+          <p:cNvPr id="67" name="Security interview circle"/>
+          <p:cNvSpPr/>
+          <p:nvPr/>
+        </p:nvSpPr>
+        <p:spPr>
+          <a:xfrm>
+            <a:off x="5120640" y="4142232"/>
+            <a:ext cx="365760" cy="365760"/>
+          </a:xfrm>
+          <a:prstGeom prst="ellipse">
+            <a:avLst/>
+          </a:prstGeom>
+          <a:solidFill>
+            <a:schemeClr val="accent1"/>
+          </a:solidFill>
+          <a:ln/>
+        </p:spPr>
+      </p:sp>
+      <p:pic>
+        <p:nvPicPr>
+          <p:cNvPr id="68" name="Security interview icon" descr="Security interview">    </p:cNvPr>
+          <p:cNvPicPr>
+            <a:picLocks noChangeAspect="1"/>
+          </p:cNvPicPr>
+          <p:nvPr/>
+        </p:nvPicPr>
+        <p:blipFill>
+          <a:blip r:embed="rId19"/>
+          <a:stretch>
+            <a:fillRect/>
+          </a:stretch>
+        </p:blipFill>
+        <p:spPr>
+          <a:xfrm>
+            <a:off x="5202936" y="4224528"/>
+            <a:ext cx="201168" cy="201168"/>
+          </a:xfrm>
+          <a:prstGeom prst="rect">
+            <a:avLst/>
+          </a:prstGeom>
+        </p:spPr>
+      </p:pic>
+      <p:sp>
+        <p:nvSpPr>
+          <p:cNvPr id="69" name="Security interview label"/>
+          <p:cNvSpPr txBox="1"/>
+          <p:nvPr/>
+        </p:nvSpPr>
+        <p:spPr>
+          <a:xfrm>
+            <a:off x="5577840" y="4114800"/>
+            <a:ext cx="1234440" cy="219456"/>
+          </a:xfrm>
+          <a:prstGeom prst="rect">
+            <a:avLst/>
+          </a:prstGeom>
+          <a:noFill/>
+          <a:ln/>
+        </p:spPr>
+        <p:txBody>
+          <a:bodyPr wrap="square" lIns="0" tIns="0" rIns="0" bIns="0" rtlCol="0" anchor="ctr"/>
+          <a:lstStyle/>
+          <a:p>
+            <a:pPr indent="0" marL="0">
+              <a:buNone/>
+            </a:pPr>
+            <a:r>
+              <a:rPr lang="en-US" sz="1200" b="1" dirty="0">
+                <a:solidFill>
+                  <a:schemeClr val="bg1"/>
+                </a:solidFill>
+              </a:rPr>
+              <a:t>Security interview</a:t>
+            </a:r>
+            <a:endParaRPr lang="en-US" sz="1200" dirty="0"/>
+          </a:p>
+        </p:txBody>
+      </p:sp>
+      <p:sp>
+        <p:nvSpPr>
+          <p:cNvPr id="70" name="Security interview target"/>
+          <p:cNvSpPr txBox="1"/>
+          <p:nvPr/>
+        </p:nvSpPr>
+        <p:spPr>
+          <a:xfrm>
+            <a:off x="5577840" y="4334256"/>
+            <a:ext cx="1234440" cy="201168"/>
+          </a:xfrm>
+          <a:prstGeom prst="rect">
+            <a:avLst/>
+          </a:prstGeom>
+          <a:noFill/>
+          <a:ln/>
+        </p:spPr>
+        <p:txBody>
+          <a:bodyPr wrap="square" lIns="0" tIns="0" rIns="0" bIns="0" rtlCol="0" anchor="ctr"/>
+          <a:lstStyle/>
+          <a:p>
+            <a:pPr indent="0" marL="0">
+              <a:buNone/>
+            </a:pPr>
+            <a:r>
+              <a:rPr lang="en-US" sz="1100" dirty="0">
+                <a:solidFill>
+                  <a:schemeClr val="accent1"/>
+                </a:solidFill>
+              </a:rPr>
+              <a:t>validates Miguel</a:t>
+            </a:r>
+            <a:endParaRPr lang="en-US" sz="1100" dirty="0"/>
+          </a:p>
+        </p:txBody>
+      </p:sp>
+      <p:sp>
+        <p:nvSpPr>
+          <p:cNvPr id="71" name="Organiser talk circle"/>
+          <p:cNvSpPr/>
+          <p:nvPr/>
+        </p:nvSpPr>
+        <p:spPr>
+          <a:xfrm>
+            <a:off x="6903720" y="4142232"/>
+            <a:ext cx="365760" cy="365760"/>
+          </a:xfrm>
+          <a:prstGeom prst="ellipse">
+            <a:avLst/>
+          </a:prstGeom>
+          <a:solidFill>
+            <a:schemeClr val="accent1"/>
+          </a:solidFill>
+          <a:ln/>
+        </p:spPr>
+      </p:sp>
+      <p:pic>
+        <p:nvPicPr>
+          <p:cNvPr id="72" name="Organiser talk icon" descr="Organiser talk">    </p:cNvPr>
+          <p:cNvPicPr>
+            <a:picLocks noChangeAspect="1"/>
+          </p:cNvPicPr>
+          <p:nvPr/>
+        </p:nvPicPr>
+        <p:blipFill>
+          <a:blip r:embed="rId20"/>
+          <a:stretch>
+            <a:fillRect/>
+          </a:stretch>
+        </p:blipFill>
+        <p:spPr>
+          <a:xfrm>
+            <a:off x="6986016" y="4224528"/>
+            <a:ext cx="201168" cy="201168"/>
+          </a:xfrm>
+          <a:prstGeom prst="rect">
+            <a:avLst/>
+          </a:prstGeom>
+        </p:spPr>
+      </p:pic>
+      <p:sp>
+        <p:nvSpPr>
+          <p:cNvPr id="73" name="Organiser talk label"/>
+          <p:cNvSpPr txBox="1"/>
+          <p:nvPr/>
+        </p:nvSpPr>
+        <p:spPr>
+          <a:xfrm>
+            <a:off x="7360920" y="4114800"/>
+            <a:ext cx="1234440" cy="219456"/>
+          </a:xfrm>
+          <a:prstGeom prst="rect">
+            <a:avLst/>
+          </a:prstGeom>
+          <a:noFill/>
+          <a:ln/>
+        </p:spPr>
+        <p:txBody>
+          <a:bodyPr wrap="square" lIns="0" tIns="0" rIns="0" bIns="0" rtlCol="0" anchor="ctr"/>
+          <a:lstStyle/>
+          <a:p>
+            <a:pPr indent="0" marL="0">
+              <a:buNone/>
+            </a:pPr>
+            <a:r>
+              <a:rPr lang="en-US" sz="1200" b="1" dirty="0">
+                <a:solidFill>
+                  <a:schemeClr val="bg1"/>
+                </a:solidFill>
+              </a:rPr>
+              <a:t>Organiser talk</a:t>
+            </a:r>
+            <a:endParaRPr lang="en-US" sz="1200" dirty="0"/>
+          </a:p>
+        </p:txBody>
+      </p:sp>
+      <p:sp>
+        <p:nvSpPr>
+          <p:cNvPr id="74" name="Organiser talk target"/>
+          <p:cNvSpPr txBox="1"/>
+          <p:nvPr/>
+        </p:nvSpPr>
+        <p:spPr>
+          <a:xfrm>
+            <a:off x="7360920" y="4334256"/>
+            <a:ext cx="1234440" cy="201168"/>
+          </a:xfrm>
+          <a:prstGeom prst="rect">
+            <a:avLst/>
+          </a:prstGeom>
+          <a:noFill/>
+          <a:ln/>
+        </p:spPr>
+        <p:txBody>
+          <a:bodyPr wrap="square" lIns="0" tIns="0" rIns="0" bIns="0" rtlCol="0" anchor="ctr"/>
+          <a:lstStyle/>
+          <a:p>
+            <a:pPr indent="0" marL="0">
+              <a:buNone/>
+            </a:pPr>
+            <a:r>
+              <a:rPr lang="en-US" sz="1100" dirty="0">
+                <a:solidFill>
+                  <a:schemeClr val="accent1"/>
+                </a:solidFill>
+              </a:rPr>
+              <a:t>validates Sofia</a:t>
+            </a:r>
+            <a:endParaRPr lang="en-US" sz="1100" dirty="0"/>
+          </a:p>
+        </p:txBody>
+      </p:sp>
+    </p:spTree>
+  </p:cSld>
+  <p:clrMapOvr>
+    <a:masterClrMapping/>
+  </p:clrMapOvr>
+</p:sld>
+</file>
+
 <file path=ppt/theme/theme1.xml><?xml version="1.0" encoding="utf-8"?>
 <a:theme xmlns:a="http://schemas.openxmlformats.org/drawingml/2006/main" name="Farol">
   <a:themeElements>

--- a/Docs/Presentation/Farol_First_Presentation.pptx
+++ b/Docs/Presentation/Farol_First_Presentation.pptx
@@ -4,16 +4,17 @@
   <p:sldMasterIdLst>
     <p:sldMasterId id="2147483648" r:id="rId1"/>
   </p:sldMasterIdLst>
+  <p:notesMasterIdLst>
+    <p:notesMasterId r:id="rId7"/>
+  </p:notesMasterIdLst>
   <p:sldIdLst>
     <p:sldId id="256" r:id="rId2"/>
-    <p:sldId id="259" r:id="rId10"/>
-    <p:sldId id="257" r:id="rId3"/>
-    <p:sldId id="258" r:id="rId4"/>
+    <p:sldId id="259" r:id="rId3"/>
+    <p:sldId id="257" r:id="rId4"/>
+    <p:sldId id="258" r:id="rId5"/>
+    <p:sldId id="260" r:id="rId6"/>
   </p:sldIdLst>
-  <p:notesMasterIdLst>
-    <p:notesMasterId r:id="rId5"/>
-  </p:notesMasterIdLst>
-  <p:sldSz cx="9144000" cy="5143500"/>
+  <p:sldSz cx="9144000" cy="5143500" type="screen16x9"/>
   <p:notesSz cx="5143500" cy="9144000"/>
   <p:defaultTextStyle>
     <a:lvl1pPr marL="0" algn="l" defTabSz="914400" rtl="0" eaLnBrk="1" latinLnBrk="0" hangingPunct="1">
@@ -110,20 +111,25 @@
   <p:extLst>
     <p:ext uri="{521415D9-36F7-43E2-AB2F-B90AF26B5E84}">
       <p14:sectionLst xmlns:p14="http://schemas.microsoft.com/office/powerpoint/2010/main">
-        <p14:section name="Cover (Bruno Lopes)" id="{3c1f5a2e-6d4b-4e8a-9b71-2f0c8d9e4a10}">
+        <p14:section name="Cover (Bruno Lopes)" id="{3C1F5A2E-6D4B-4E8A-9B71-2F0C8D9E4A10}">
           <p14:sldIdLst>
             <p14:sldId id="256"/>
           </p14:sldIdLst>
         </p14:section>
-        <p14:section name="Personas (Tiago Teixeira)" id="{7a9e2b44-1c3d-4f6a-8e25-5b0d7c1f9e32}">
+        <p14:section name="Personas (Tiago Teixeira)" id="{7A9E2B44-1C3D-4F6A-8E25-5B0D7C1F9E32}">
           <p14:sldIdLst>
             <p14:sldId id="259"/>
           </p14:sldIdLst>
         </p14:section>
-        <p14:section name="Main features (Bruno Lopes)" id="{b2ef1337-627e-81ae-c510-0d08fb5c3d36}">
+        <p14:section name="Main features (Bruno Lopes)" id="{B2EF1337-627E-81AE-C510-0D08FB5C3D36}">
           <p14:sldIdLst>
             <p14:sldId id="257"/>
             <p14:sldId id="258"/>
+          </p14:sldIdLst>
+        </p14:section>
+        <p14:section name="User workflows (António Guerra)" id="{5D2A7C18-9E41-4B6F-A3D0-8C7E1F24B9A6}">
+          <p14:sldIdLst>
+            <p14:sldId id="260"/>
           </p14:sldIdLst>
         </p14:section>
       </p14:sectionLst>
@@ -157,234 +163,10 @@
           <a:chExt cx="0" cy="0"/>
         </a:xfrm>
       </p:grpSpPr>
-      <p:sp>
-        <p:nvSpPr>
-          <p:cNvPr id="2" name="Header Placeholder 1"/>
-          <p:cNvSpPr>
-            <a:spLocks noGrp="1"/>
-          </p:cNvSpPr>
-          <p:nvPr>
-            <p:ph type="hdr" sz="quarter"/>
-          </p:nvPr>
-        </p:nvSpPr>
-        <p:spPr>
-          <a:xfrm>
-            <a:off x="0" y="0"/>
-            <a:ext cx="2971800" cy="458788"/>
-          </a:xfrm>
-          <a:prstGeom prst="rect">
-            <a:avLst/>
-          </a:prstGeom>
-        </p:spPr>
-        <p:txBody>
-          <a:bodyPr vert="horz" lIns="91440" tIns="45720" rIns="91440" bIns="45720" rtlCol="0"/>
-          <a:lstStyle>
-            <a:lvl1pPr algn="l">
-              <a:defRPr sz="1200"/>
-            </a:lvl1pPr>
-          </a:lstStyle>
-          <a:p>
-            <a:endParaRPr lang="en-US"/>
-          </a:p>
-        </p:txBody>
-      </p:sp>
-      <p:sp>
-        <p:nvSpPr>
-          <p:cNvPr id="3" name="Date Placeholder 2"/>
-          <p:cNvSpPr>
-            <a:spLocks noGrp="1"/>
-          </p:cNvSpPr>
-          <p:nvPr>
-            <p:ph type="dt" idx="1"/>
-          </p:nvPr>
-        </p:nvSpPr>
-        <p:spPr>
-          <a:xfrm>
-            <a:off x="3884613" y="0"/>
-            <a:ext cx="2971800" cy="458788"/>
-          </a:xfrm>
-          <a:prstGeom prst="rect">
-            <a:avLst/>
-          </a:prstGeom>
-        </p:spPr>
-        <p:txBody>
-          <a:bodyPr vert="horz" lIns="91440" tIns="45720" rIns="91440" bIns="45720" rtlCol="0"/>
-          <a:lstStyle>
-            <a:lvl1pPr algn="r">
-              <a:defRPr sz="1200"/>
-            </a:lvl1pPr>
-          </a:lstStyle>
-          <a:p>
-            <a:fld id="{5282F153-3F37-0F45-9E97-73ACFA13230C}" type="datetimeFigureOut">
-              <a:rPr lang="en-US"/>
-              <a:t>7/23/19</a:t>
-            </a:fld>
-            <a:endParaRPr lang="en-US"/>
-          </a:p>
-        </p:txBody>
-      </p:sp>
-      <p:sp>
-        <p:nvSpPr>
-          <p:cNvPr id="4" name="Slide Image Placeholder 3"/>
-          <p:cNvSpPr>
-            <a:spLocks noGrp="1" noRot="1" noChangeAspect="1"/>
-          </p:cNvSpPr>
-          <p:nvPr>
-            <p:ph type="sldImg" idx="2"/>
-          </p:nvPr>
-        </p:nvSpPr>
-        <p:spPr>
-          <a:xfrm>
-            <a:off x="685800" y="1143000"/>
-            <a:ext cx="5486400" cy="3086100"/>
-          </a:xfrm>
-          <a:prstGeom prst="rect">
-            <a:avLst/>
-          </a:prstGeom>
-          <a:noFill/>
-          <a:ln w="12700">
-            <a:solidFill>
-              <a:prstClr val="black"/>
-            </a:solidFill>
-          </a:ln>
-        </p:spPr>
-        <p:txBody>
-          <a:bodyPr vert="horz" lIns="91440" tIns="45720" rIns="91440" bIns="45720" rtlCol="0" anchor="ctr"/>
-          <a:lstStyle/>
-          <a:p>
-            <a:endParaRPr lang="en-US"/>
-          </a:p>
-        </p:txBody>
-      </p:sp>
-      <p:sp>
-        <p:nvSpPr>
-          <p:cNvPr id="5" name="Notes Placeholder 4"/>
-          <p:cNvSpPr>
-            <a:spLocks noGrp="1"/>
-          </p:cNvSpPr>
-          <p:nvPr>
-            <p:ph type="body" sz="quarter" idx="3"/>
-          </p:nvPr>
-        </p:nvSpPr>
-        <p:spPr>
-          <a:xfrm>
-            <a:off x="685800" y="4400550"/>
-            <a:ext cx="5486400" cy="3600450"/>
-          </a:xfrm>
-          <a:prstGeom prst="rect">
-            <a:avLst/>
-          </a:prstGeom>
-        </p:spPr>
-        <p:txBody>
-          <a:bodyPr vert="horz" lIns="91440" tIns="45720" rIns="91440" bIns="45720" rtlCol="0"/>
-          <a:lstStyle/>
-          <a:p>
-            <a:pPr lvl="0"/>
-            <a:r>
-              <a:rPr lang="en-US"/>
-              <a:t>Click to edit Master text styles</a:t>
-            </a:r>
-          </a:p>
-          <a:p>
-            <a:pPr lvl="1"/>
-            <a:r>
-              <a:rPr lang="en-US"/>
-              <a:t>Second level</a:t>
-            </a:r>
-          </a:p>
-          <a:p>
-            <a:pPr lvl="2"/>
-            <a:r>
-              <a:rPr lang="en-US"/>
-              <a:t>Third level</a:t>
-            </a:r>
-          </a:p>
-          <a:p>
-            <a:pPr lvl="3"/>
-            <a:r>
-              <a:rPr lang="en-US"/>
-              <a:t>Fourth level</a:t>
-            </a:r>
-          </a:p>
-          <a:p>
-            <a:pPr lvl="4"/>
-            <a:r>
-              <a:rPr lang="en-US"/>
-              <a:t>Fifth level</a:t>
-            </a:r>
-          </a:p>
-        </p:txBody>
-      </p:sp>
-      <p:sp>
-        <p:nvSpPr>
-          <p:cNvPr id="6" name="Footer Placeholder 5"/>
-          <p:cNvSpPr>
-            <a:spLocks noGrp="1"/>
-          </p:cNvSpPr>
-          <p:nvPr>
-            <p:ph type="ftr" sz="quarter" idx="4"/>
-          </p:nvPr>
-        </p:nvSpPr>
-        <p:spPr>
-          <a:xfrm>
-            <a:off x="0" y="8685213"/>
-            <a:ext cx="2971800" cy="458787"/>
-          </a:xfrm>
-          <a:prstGeom prst="rect">
-            <a:avLst/>
-          </a:prstGeom>
-        </p:spPr>
-        <p:txBody>
-          <a:bodyPr vert="horz" lIns="91440" tIns="45720" rIns="91440" bIns="45720" rtlCol="0" anchor="b"/>
-          <a:lstStyle>
-            <a:lvl1pPr algn="l">
-              <a:defRPr sz="1200"/>
-            </a:lvl1pPr>
-          </a:lstStyle>
-          <a:p>
-            <a:endParaRPr lang="en-US"/>
-          </a:p>
-        </p:txBody>
-      </p:sp>
-      <p:sp>
-        <p:nvSpPr>
-          <p:cNvPr id="7" name="Slide Number Placeholder 6"/>
-          <p:cNvSpPr>
-            <a:spLocks noGrp="1"/>
-          </p:cNvSpPr>
-          <p:nvPr>
-            <p:ph type="sldNum" sz="quarter" idx="5"/>
-          </p:nvPr>
-        </p:nvSpPr>
-        <p:spPr>
-          <a:xfrm>
-            <a:off x="3884613" y="8685213"/>
-            <a:ext cx="2971800" cy="458787"/>
-          </a:xfrm>
-          <a:prstGeom prst="rect">
-            <a:avLst/>
-          </a:prstGeom>
-        </p:spPr>
-        <p:txBody>
-          <a:bodyPr vert="horz" lIns="91440" tIns="45720" rIns="91440" bIns="45720" rtlCol="0" anchor="b"/>
-          <a:lstStyle>
-            <a:lvl1pPr algn="r">
-              <a:defRPr sz="1200"/>
-            </a:lvl1pPr>
-          </a:lstStyle>
-          <a:p>
-            <a:fld id="{CE5E9CC1-C706-0F49-92D6-E571CC5EEA8F}" type="slidenum">
-              <a:rPr lang="en-US"/>
-              <a:t>‹#›</a:t>
-            </a:fld>
-            <a:endParaRPr lang="en-US"/>
-          </a:p>
-        </p:txBody>
-      </p:sp>
     </p:spTree>
     <p:extLst>
       <p:ext uri="{BB962C8B-B14F-4D97-AF65-F5344CB8AC3E}">
-        <p14:creationId xmlns:p14="http://schemas.microsoft.com/office/powerpoint/2010/main" val="1024086991"/>
+        <p14:creationId xmlns:p14="http://schemas.microsoft.com/office/powerpoint/2010/main" val="2181334860"/>
       </p:ext>
     </p:extLst>
   </p:cSld>
@@ -530,9 +312,8 @@
           <a:p>
             <a:r>
               <a:rPr lang="en-US" dirty="0"/>
-              <a:t>(~10 s) O nosso produto chama-se Farol: tal como um farol, orienta as pessoas no caminho para casa e mostra onde está a ajuda. A equipa: Bruno Lopes, Tiago Teixeira, Tomás Oliveira e Antônio Guerra.</a:t>
-            </a:r>
-            <a:endParaRPr lang="en-US" dirty="0"/>
+              <a:t>(~10 s) O nosso produto chama-se Farol: tal como um farol, orienta as pessoas no caminho para casa e mostra onde está a ajuda. A equipa: Bruno Lopes, Tiago Teixeira, Tomás Oliveira e António Guerra.</a:t>
+            </a:r>
           </a:p>
         </p:txBody>
       </p:sp>
@@ -618,9 +399,8 @@
           <a:p>
             <a:r>
               <a:rPr lang="en-US" dirty="0"/>
-              <a:t>(~55 s) O Farol tem dois lados, ligados pela planta do recinto. O participante, depois de fazer login, vê a planta com entradas, casas de banho, primeiros socorros e paragens. O mais importante é o Pedir ajuda: primeiro aparece o Ligar 112; se não for uma emergência, escolhe uma categoria e marca na planta onde está. Vê também como voltar para casa, com as linhas da STCP e os shuttles do evento, recebe avisos em tempo real e pode reportar problemas na planta. Do lado da equipa, a organização cria o evento e gere os papéis e as equipas de resposta: médica, segurança, PCR e logística. Durante a noite, os operadores veem os pedidos chegar em tempo real, na lista e na planta, priorizam, encaminham para a equipa certa e confirmam os reports. Cada organização só vê os dados do seu evento.</a:t>
-            </a:r>
-            <a:endParaRPr lang="en-US" dirty="0"/>
+              <a:t>(~70 s) Desenhámos o Farol para quatro pessoas. O relatório tem dois grupos de utilizadores, os participantes e a equipa do evento, mas dentro da equipa há dois trabalhos diferentes: quem configura o evento e quem trata os pedidos de ajuda durante a noite. A Rita é estudante: está no recinto à noite, com pouca bateria e muito barulho, e quer encontrar a casa de banho, os primeiros socorros e o caminho para casa. Hoje a informação fica desatualizada e a planta é uma imagem nas redes sociais. Para ela, sucesso é pedir ajuda para uma amiga em menos de 30 segundos. O Miguel é voluntário da PCR: recebe muitos pedidos ao mesmo tempo, por rádio e telefone, sem localização nem prioridade. Precisa de ver cada pedido em segundos, já com a triagem da IA. A Sofia é da organização: configura o evento e publica alterações durante as noites, mas só gere o seu evento. Como o Farol tem vários festivais, a Queima do Porto, de Braga, de Coimbra, alguém tem de os criar: é o Daniel, da equipa Farol. Confirma que quem pede o evento é mesmo a organização, cria-o e nomeia o responsável, e transfere esse papel quando a direção muda. Nunca vê os pedidos de ajuda nem os dados dos eventos. Importante: são proto-personas, construídas a partir do relatório e de dados públicos, com nomes fictícios. Vamos validá-las com o inquérito aos estudantes, a entrevista ao voluntário de segurança e uma conversa com a organização.</a:t>
+            </a:r>
           </a:p>
         </p:txBody>
       </p:sp>
@@ -706,9 +486,8 @@
           <a:p>
             <a:r>
               <a:rPr lang="en-US" dirty="0"/>
-              <a:t>(~50 s) Três coisas fazem do Farol mais do que uma planta. Primeiro, a triagem com IA: quando chega um pedido, a IA sugere categoria, prioridade e equipa de resposta em menos de 30 segundos. Quem decide é sempre o operador, e a IA nunca baixa uma prioridade. Segundo, os reports na planta, ao estilo do Waze: filas, casas de banho avariadas, perigos. Só a equipa responsável os confirma, por isso reports falsos não contam. Os reports confirmados e a presença nos eventos dão badges, de Madeira até Diamante. São privados, sem ranking, e nunca há badges por pedidos de ajuda: emergências não são um jogo. Terceiro, a integração externa: as linhas da STCP vêm do feed público GTFS, junto com os shuttles da organização, para os estudantes voltarem para casa em segurança.</a:t>
-            </a:r>
-            <a:endParaRPr lang="en-US" dirty="0"/>
+              <a:t>(~55 s) O Farol tem dois lados, ligados pela planta do recinto. O participante, depois de fazer login, vê a planta com entradas, casas de banho, primeiros socorros e paragens. O mais importante é o Pedir ajuda: primeiro aparece o Ligar 112; se não for uma emergência, escolhe uma categoria e marca na planta onde está. Vê também como voltar para casa, com as linhas da STCP e os shuttles do evento, recebe avisos em tempo real e pode reportar problemas na planta. Do lado da equipa, a organização cria o evento e gere os papéis e as equipas de resposta: médica, segurança, PCR e logística. Durante a noite, os operadores veem os pedidos chegar em tempo real, na lista e na planta, priorizam, encaminham para a equipa certa e confirmam os reports. Cada organização só vê os dados do seu evento.</a:t>
+            </a:r>
           </a:p>
         </p:txBody>
       </p:sp>
@@ -794,9 +573,8 @@
           <a:p>
             <a:r>
               <a:rPr lang="en-US" dirty="0"/>
-              <a:t>(~70 s) Desenhámos o Farol para quatro pessoas. O relatório tem dois grupos de utilizadores, os participantes e a equipa do evento, mas dentro da equipa há dois trabalhos diferentes: quem configura o evento e quem trata os pedidos de ajuda durante a noite. A Rita é estudante: está no recinto à noite, com pouca bateria e muito barulho, e quer encontrar a casa de banho, os primeiros socorros e o caminho para casa. Hoje a informação fica desatualizada e a planta é uma imagem nas redes sociais. Para ela, sucesso é pedir ajuda para uma amiga em menos de 30 segundos. O Miguel é voluntário da PCR: recebe muitos pedidos ao mesmo tempo, por rádio e telefone, sem localização nem prioridade. Precisa de ver cada pedido em segundos, já com a triagem da IA. A Sofia é da organização: configura o evento e publica alterações durante as noites, mas só gere o seu evento. Como o Farol tem vários festivais, a Queima do Porto, de Braga, de Coimbra, alguém tem de os criar: é o Daniel, da equipa Farol. Confirma que quem pede o evento é mesmo a organização, cria-o e nomeia o responsável, e transfere esse papel quando a direção muda. Nunca vê os pedidos de ajuda nem os dados dos eventos. Importante: são proto-personas, construídas a partir do relatório e de dados públicos, com nomes fictícios. Vamos validá-las com o inquérito aos estudantes, a entrevista ao voluntário de segurança e uma conversa com a organização.</a:t>
-            </a:r>
-            <a:endParaRPr lang="en-US" dirty="0"/>
+              <a:t>(~50 s) Três coisas fazem do Farol mais do que uma planta. Primeiro, a triagem com IA: quando chega um pedido, a IA sugere categoria, prioridade e equipa de resposta em menos de 30 segundos. Quem decide é sempre o operador, e a IA nunca baixa uma prioridade. Segundo, os reports na planta, ao estilo do Waze: filas, casas de banho avariadas, perigos. Só a equipa responsável os confirma, por isso reports falsos não contam. Os reports confirmados e a presença nos eventos dão badges, de Madeira até Diamante. São privados, sem ranking, e nunca há badges por pedidos de ajuda: emergências não são um jogo. Terceiro, a integração externa: as linhas da STCP vêm do feed público GTFS, junto com os shuttles da organização, para os estudantes voltarem para casa em segurança.</a:t>
+            </a:r>
           </a:p>
         </p:txBody>
       </p:sp>
@@ -817,7 +595,7 @@
           <a:p>
             <a:fld id="{F7021451-1387-4CA6-816F-3879F97B5CBC}" type="slidenum">
               <a:rPr lang="en-US"/>
-              <a:t>1</a:t>
+              <a:t>4</a:t>
             </a:fld>
             <a:endParaRPr lang="en-US"/>
           </a:p>
@@ -829,6 +607,88 @@
         <p14:creationId xmlns:p14="http://schemas.microsoft.com/office/powerpoint/2010/main" val="1024086991"/>
       </p:ext>
     </p:extLst>
+  </p:cSld>
+  <p:clrMapOvr>
+    <a:masterClrMapping/>
+  </p:clrMapOvr>
+</p:notes>
+</file>
+
+<file path=ppt/notesSlides/notesSlide5.xml><?xml version="1.0" encoding="utf-8"?>
+<p:notes xmlns:a="http://schemas.openxmlformats.org/drawingml/2006/main" xmlns:r="http://schemas.openxmlformats.org/officeDocument/2006/relationships" xmlns:p="http://schemas.openxmlformats.org/presentationml/2006/main">
+  <p:cSld>
+    <p:spTree>
+      <p:nvGrpSpPr>
+        <p:cNvPr id="1" name=""/>
+        <p:cNvGrpSpPr/>
+        <p:nvPr/>
+      </p:nvGrpSpPr>
+      <p:grpSpPr>
+        <a:xfrm>
+          <a:off x="0" y="0"/>
+          <a:ext cx="0" cy="0"/>
+          <a:chOff x="0" y="0"/>
+          <a:chExt cx="0" cy="0"/>
+        </a:xfrm>
+      </p:grpSpPr>
+      <p:sp>
+        <p:nvSpPr>
+          <p:cNvPr id="2" name="Slide Image Placeholder 1"/>
+          <p:cNvSpPr>
+            <a:spLocks noGrp="1" noRot="1" noChangeAspect="1"/>
+          </p:cNvSpPr>
+          <p:nvPr>
+            <p:ph type="sldImg"/>
+          </p:nvPr>
+        </p:nvSpPr>
+        <p:spPr/>
+      </p:sp>
+      <p:sp>
+        <p:nvSpPr>
+          <p:cNvPr id="3" name="Notes Placeholder 2"/>
+          <p:cNvSpPr>
+            <a:spLocks noGrp="1"/>
+          </p:cNvSpPr>
+          <p:nvPr>
+            <p:ph type="body" idx="1"/>
+          </p:nvPr>
+        </p:nvSpPr>
+        <p:spPr/>
+        <p:txBody>
+          <a:bodyPr/>
+          <a:lstStyle/>
+          <a:p>
+            <a:r>
+              <a:rPr lang="pt-PT" dirty="0"/>
+              <a:t>(~60 s) No Farol há duas formas de levantar a mão, e são diferentes de propósito. Se é urgente, ou se é sobre uma pessoa, é um pedido de ajuda. A Rita toca em Pedir ajuda: primeiro aparece o Ligar 112; se não for uma emergência, marca o local na planta. A IA sugere prioridade e equipa em menos de 30 segundos, mas quem decide é o Miguel, que confirma e encaminha para a equipa médica, de segurança ou da PCR. A Rita acompanha o estado em tempo real. Se é sobre um sítio, por exemplo uma fila longa na porta 2, é um report. A equipa responsável, aqui a segurança, vê-o logo e confirma-o. Só então aparece na planta de todos, com a hora, até expirar. E só os reports confirmados contam para os badges da Rita: os falsos expiram e não valem nada.</a:t>
+            </a:r>
+          </a:p>
+        </p:txBody>
+      </p:sp>
+      <p:sp>
+        <p:nvSpPr>
+          <p:cNvPr id="4" name="Slide Number Placeholder 3"/>
+          <p:cNvSpPr>
+            <a:spLocks noGrp="1"/>
+          </p:cNvSpPr>
+          <p:nvPr>
+            <p:ph type="sldNum" sz="quarter" idx="10"/>
+          </p:nvPr>
+        </p:nvSpPr>
+        <p:spPr/>
+        <p:txBody>
+          <a:bodyPr/>
+          <a:lstStyle/>
+          <a:p>
+            <a:fld id="{F7021451-1387-4CA6-816F-3879F97B5CBC}" type="slidenum">
+              <a:rPr lang="en-US"/>
+              <a:t>5</a:t>
+            </a:fld>
+            <a:endParaRPr lang="en-US"/>
+          </a:p>
+        </p:txBody>
+      </p:sp>
+    </p:spTree>
   </p:cSld>
   <p:clrMapOvr>
     <a:masterClrMapping/>
@@ -874,6 +734,7 @@
         <a:solidFill>
           <a:schemeClr val="tx2"/>
         </a:solidFill>
+        <a:effectLst/>
       </p:bgPr>
     </p:bg>
     <p:spTree>
@@ -906,6 +767,7 @@
         <a:solidFill>
           <a:schemeClr val="bg1"/>
         </a:solidFill>
+        <a:effectLst/>
       </p:bgPr>
     </p:bg>
     <p:spTree>
@@ -925,9 +787,11 @@
       <p:sp>
         <p:nvSpPr>
           <p:cNvPr id="2" name="Text 0"/>
-          <p:cNvSpPr/>
+          <p:cNvSpPr>
+            <a:spLocks noGrp="1"/>
+          </p:cNvSpPr>
           <p:nvPr>
-            <p:ph idx="100" type="title" hasCustomPrompt="1"/>
+            <p:ph type="title" idx="100" hasCustomPrompt="1"/>
           </p:nvPr>
         </p:nvSpPr>
         <p:spPr>
@@ -944,7 +808,7 @@
         <p:txBody>
           <a:bodyPr wrap="square" rtlCol="0"/>
           <a:lstStyle>
-            <a:lvl1pPr indent="0" marL="0">
+            <a:lvl1pPr marL="0" indent="0">
               <a:buNone/>
               <a:defRPr lang="en-US" sz="3200" b="1" dirty="0">
                 <a:solidFill>
@@ -954,7 +818,7 @@
             </a:lvl1pPr>
           </a:lstStyle>
           <a:p>
-            <a:pPr indent="0" marL="0">
+            <a:pPr marL="0" indent="0">
               <a:buNone/>
             </a:pPr>
             <a:endParaRPr lang="en-US" sz="3200" dirty="0"/>
@@ -972,6 +836,11 @@
 <file path=ppt/slideMasters/slideMaster1.xml><?xml version="1.0" encoding="utf-8"?>
 <p:sldMaster xmlns:a="http://schemas.openxmlformats.org/drawingml/2006/main" xmlns:r="http://schemas.openxmlformats.org/officeDocument/2006/relationships" xmlns:p="http://schemas.openxmlformats.org/presentationml/2006/main">
   <p:cSld>
+    <p:bg>
+      <p:bgRef idx="1001">
+        <a:schemeClr val="bg1"/>
+      </p:bgRef>
+    </p:bg>
     <p:spTree>
       <p:nvGrpSpPr>
         <p:cNvPr id="1" name=""/>
@@ -1284,17 +1153,24 @@
           </a:solidFill>
           <a:ln/>
         </p:spPr>
+        <p:txBody>
+          <a:bodyPr/>
+          <a:lstStyle/>
+          <a:p>
+            <a:endParaRPr lang="pt-PT"/>
+          </a:p>
+        </p:txBody>
       </p:sp>
       <p:pic>
         <p:nvPicPr>
-          <p:cNvPr id="3" name="Lighthouse icon" descr="Lighthouse icon">    </p:cNvPr>
+          <p:cNvPr id="3" name="Lighthouse icon" descr="Lighthouse icon"/>
           <p:cNvPicPr>
             <a:picLocks noChangeAspect="1"/>
           </p:cNvPicPr>
           <p:nvPr/>
         </p:nvPicPr>
         <p:blipFill>
-          <a:blip r:embed="rId1"/>
+          <a:blip r:embed="rId3"/>
           <a:stretch>
             <a:fillRect/>
           </a:stretch>
@@ -1330,7 +1206,7 @@
           <a:bodyPr wrap="square" lIns="0" tIns="0" rIns="0" bIns="0" rtlCol="0" anchor="ctr"/>
           <a:lstStyle/>
           <a:p>
-            <a:pPr indent="0" marL="0">
+            <a:pPr marL="0" indent="0">
               <a:buNone/>
             </a:pPr>
             <a:r>
@@ -1366,7 +1242,7 @@
           <a:bodyPr wrap="square" lIns="0" tIns="0" rIns="0" bIns="0" rtlCol="0" anchor="t"/>
           <a:lstStyle/>
           <a:p>
-            <a:pPr indent="0" marL="0">
+            <a:pPr marL="0" indent="0">
               <a:buNone/>
             </a:pPr>
             <a:r>
@@ -1380,7 +1256,7 @@
             <a:endParaRPr lang="en-US" sz="1600" dirty="0"/>
           </a:p>
           <a:p>
-            <a:pPr indent="0" marL="0">
+            <a:pPr marL="0" indent="0">
               <a:buNone/>
             </a:pPr>
             <a:r>
@@ -1416,7 +1292,7 @@
           <a:bodyPr wrap="square" lIns="0" tIns="0" rIns="0" bIns="0" rtlCol="0" anchor="t"/>
           <a:lstStyle/>
           <a:p>
-            <a:pPr indent="0" marL="0">
+            <a:pPr marL="0" indent="0">
               <a:buNone/>
             </a:pPr>
             <a:r>
@@ -1430,7 +1306,7 @@
             <a:endParaRPr lang="en-US" sz="1600" dirty="0"/>
           </a:p>
           <a:p>
-            <a:pPr indent="0" marL="0">
+            <a:pPr marL="0" indent="0">
               <a:buNone/>
             </a:pPr>
             <a:r>
@@ -1466,7 +1342,7 @@
           <a:bodyPr wrap="square" lIns="0" tIns="0" rIns="0" bIns="0" rtlCol="0" anchor="t"/>
           <a:lstStyle/>
           <a:p>
-            <a:pPr indent="0" marL="0">
+            <a:pPr marL="0" indent="0">
               <a:buNone/>
             </a:pPr>
             <a:r>
@@ -1480,7 +1356,7 @@
             <a:endParaRPr lang="en-US" sz="1600" dirty="0"/>
           </a:p>
           <a:p>
-            <a:pPr indent="0" marL="0">
+            <a:pPr marL="0" indent="0">
               <a:buNone/>
             </a:pPr>
             <a:r>
@@ -1497,7 +1373,7 @@
       </p:sp>
       <p:sp>
         <p:nvSpPr>
-          <p:cNvPr id="8" name="Member Antônio Guerra"/>
+          <p:cNvPr id="8" name="Member António Guerra"/>
           <p:cNvSpPr txBox="1"/>
           <p:nvPr/>
         </p:nvSpPr>
@@ -1516,7 +1392,7 @@
           <a:bodyPr wrap="square" lIns="0" tIns="0" rIns="0" bIns="0" rtlCol="0" anchor="t"/>
           <a:lstStyle/>
           <a:p>
-            <a:pPr indent="0" marL="0">
+            <a:pPr marL="0" indent="0">
               <a:buNone/>
             </a:pPr>
             <a:r>
@@ -1525,12 +1401,12 @@
                   <a:schemeClr val="bg1"/>
                 </a:solidFill>
               </a:rPr>
-              <a:t>Antônio Guerra</a:t>
+              <a:t>António Guerra</a:t>
             </a:r>
             <a:endParaRPr lang="en-US" sz="1600" dirty="0"/>
           </a:p>
           <a:p>
-            <a:pPr indent="0" marL="0">
+            <a:pPr marL="0" indent="0">
               <a:buNone/>
             </a:pPr>
             <a:r>
@@ -1554,6 +1430,2325 @@
 </file>
 
 <file path=ppt/slides/slide2.xml><?xml version="1.0" encoding="utf-8"?>
+<p:sld xmlns:a="http://schemas.openxmlformats.org/drawingml/2006/main" xmlns:r="http://schemas.openxmlformats.org/officeDocument/2006/relationships" xmlns:p="http://schemas.openxmlformats.org/presentationml/2006/main">
+  <p:cSld name="Slide 1">
+    <p:spTree>
+      <p:nvGrpSpPr>
+        <p:cNvPr id="1" name=""/>
+        <p:cNvGrpSpPr/>
+        <p:nvPr/>
+      </p:nvGrpSpPr>
+      <p:grpSpPr>
+        <a:xfrm>
+          <a:off x="0" y="0"/>
+          <a:ext cx="0" cy="0"/>
+          <a:chOff x="0" y="0"/>
+          <a:chExt cx="0" cy="0"/>
+        </a:xfrm>
+      </p:grpSpPr>
+      <p:sp>
+        <p:nvSpPr>
+          <p:cNvPr id="2" name="Text 0"/>
+          <p:cNvSpPr>
+            <a:spLocks noGrp="1"/>
+          </p:cNvSpPr>
+          <p:nvPr>
+            <p:ph type="title" idx="100" hasCustomPrompt="1"/>
+          </p:nvPr>
+        </p:nvSpPr>
+        <p:spPr>
+          <a:xfrm>
+            <a:off x="457200" y="274320"/>
+            <a:ext cx="8229600" cy="640080"/>
+          </a:xfrm>
+          <a:prstGeom prst="rect">
+            <a:avLst/>
+          </a:prstGeom>
+          <a:noFill/>
+          <a:ln/>
+        </p:spPr>
+        <p:txBody>
+          <a:bodyPr wrap="square" lIns="0" tIns="0" rIns="0" bIns="0" rtlCol="0" anchor="ctr"/>
+          <a:lstStyle/>
+          <a:p>
+            <a:pPr marL="0" indent="0" algn="ctr">
+              <a:buNone/>
+            </a:pPr>
+            <a:r>
+              <a:rPr lang="en-US" sz="3200" b="1" dirty="0">
+                <a:solidFill>
+                  <a:schemeClr val="tx2"/>
+                </a:solidFill>
+              </a:rPr>
+              <a:t>Who we design for</a:t>
+            </a:r>
+            <a:endParaRPr lang="en-US" sz="3200" dirty="0"/>
+          </a:p>
+        </p:txBody>
+      </p:sp>
+      <p:sp>
+        <p:nvSpPr>
+          <p:cNvPr id="3" name="Rita card"/>
+          <p:cNvSpPr/>
+          <p:nvPr/>
+        </p:nvSpPr>
+        <p:spPr>
+          <a:xfrm>
+            <a:off x="457200" y="1005840"/>
+            <a:ext cx="1920240" cy="2761488"/>
+          </a:xfrm>
+          <a:prstGeom prst="roundRect">
+            <a:avLst>
+              <a:gd name="adj" fmla="val 5714"/>
+            </a:avLst>
+          </a:prstGeom>
+          <a:solidFill>
+            <a:schemeClr val="bg2"/>
+          </a:solidFill>
+          <a:ln/>
+        </p:spPr>
+        <p:txBody>
+          <a:bodyPr/>
+          <a:lstStyle/>
+          <a:p>
+            <a:endParaRPr lang="pt-PT"/>
+          </a:p>
+        </p:txBody>
+      </p:sp>
+      <p:sp>
+        <p:nvSpPr>
+          <p:cNvPr id="4" name="Rita icon circle"/>
+          <p:cNvSpPr/>
+          <p:nvPr/>
+        </p:nvSpPr>
+        <p:spPr>
+          <a:xfrm>
+            <a:off x="621792" y="1161288"/>
+            <a:ext cx="402336" cy="402336"/>
+          </a:xfrm>
+          <a:prstGeom prst="ellipse">
+            <a:avLst/>
+          </a:prstGeom>
+          <a:solidFill>
+            <a:schemeClr val="tx2"/>
+          </a:solidFill>
+          <a:ln/>
+        </p:spPr>
+        <p:txBody>
+          <a:bodyPr/>
+          <a:lstStyle/>
+          <a:p>
+            <a:endParaRPr lang="pt-PT"/>
+          </a:p>
+        </p:txBody>
+      </p:sp>
+      <p:pic>
+        <p:nvPicPr>
+          <p:cNvPr id="5" name="Rita icon" descr="Rita icon"/>
+          <p:cNvPicPr>
+            <a:picLocks noChangeAspect="1"/>
+          </p:cNvPicPr>
+          <p:nvPr/>
+        </p:nvPicPr>
+        <p:blipFill>
+          <a:blip r:embed="rId3"/>
+          <a:stretch>
+            <a:fillRect/>
+          </a:stretch>
+        </p:blipFill>
+        <p:spPr>
+          <a:xfrm>
+            <a:off x="722376" y="1261872"/>
+            <a:ext cx="201168" cy="201168"/>
+          </a:xfrm>
+          <a:prstGeom prst="rect">
+            <a:avLst/>
+          </a:prstGeom>
+        </p:spPr>
+      </p:pic>
+      <p:sp>
+        <p:nvSpPr>
+          <p:cNvPr id="6" name="Rita name"/>
+          <p:cNvSpPr txBox="1"/>
+          <p:nvPr/>
+        </p:nvSpPr>
+        <p:spPr>
+          <a:xfrm>
+            <a:off x="1115568" y="1161288"/>
+            <a:ext cx="1188720" cy="402336"/>
+          </a:xfrm>
+          <a:prstGeom prst="rect">
+            <a:avLst/>
+          </a:prstGeom>
+          <a:noFill/>
+          <a:ln/>
+        </p:spPr>
+        <p:txBody>
+          <a:bodyPr wrap="square" lIns="0" tIns="0" rIns="0" bIns="0" rtlCol="0" anchor="ctr"/>
+          <a:lstStyle/>
+          <a:p>
+            <a:pPr marL="0" indent="0">
+              <a:buNone/>
+            </a:pPr>
+            <a:r>
+              <a:rPr lang="en-US" sz="1600" b="1" dirty="0">
+                <a:solidFill>
+                  <a:schemeClr val="tx2"/>
+                </a:solidFill>
+              </a:rPr>
+              <a:t>Rita, 21</a:t>
+            </a:r>
+            <a:endParaRPr lang="en-US" sz="1600" dirty="0"/>
+          </a:p>
+        </p:txBody>
+      </p:sp>
+      <p:sp>
+        <p:nvSpPr>
+          <p:cNvPr id="7" name="Rita role"/>
+          <p:cNvSpPr txBox="1"/>
+          <p:nvPr/>
+        </p:nvSpPr>
+        <p:spPr>
+          <a:xfrm>
+            <a:off x="621792" y="1627632"/>
+            <a:ext cx="1645920" cy="201168"/>
+          </a:xfrm>
+          <a:prstGeom prst="rect">
+            <a:avLst/>
+          </a:prstGeom>
+          <a:noFill/>
+          <a:ln/>
+        </p:spPr>
+        <p:txBody>
+          <a:bodyPr wrap="square" lIns="0" tIns="0" rIns="0" bIns="0" rtlCol="0" anchor="ctr"/>
+          <a:lstStyle/>
+          <a:p>
+            <a:pPr marL="0" indent="0">
+              <a:buNone/>
+            </a:pPr>
+            <a:r>
+              <a:rPr lang="en-US" sz="1100" b="1" dirty="0">
+                <a:solidFill>
+                  <a:schemeClr val="accent2"/>
+                </a:solidFill>
+              </a:rPr>
+              <a:t>Student · participant app</a:t>
+            </a:r>
+            <a:endParaRPr lang="en-US" sz="1100" dirty="0"/>
+          </a:p>
+        </p:txBody>
+      </p:sp>
+      <p:pic>
+        <p:nvPicPr>
+          <p:cNvPr id="8" name="Rita Goal icon" descr="Goal"/>
+          <p:cNvPicPr>
+            <a:picLocks noChangeAspect="1"/>
+          </p:cNvPicPr>
+          <p:nvPr/>
+        </p:nvPicPr>
+        <p:blipFill>
+          <a:blip r:embed="rId4"/>
+          <a:stretch>
+            <a:fillRect/>
+          </a:stretch>
+        </p:blipFill>
+        <p:spPr>
+          <a:xfrm>
+            <a:off x="621792" y="1943100"/>
+            <a:ext cx="146304" cy="146304"/>
+          </a:xfrm>
+          <a:prstGeom prst="rect">
+            <a:avLst/>
+          </a:prstGeom>
+        </p:spPr>
+      </p:pic>
+      <p:sp>
+        <p:nvSpPr>
+          <p:cNvPr id="9" name="Rita Goal label"/>
+          <p:cNvSpPr txBox="1"/>
+          <p:nvPr/>
+        </p:nvSpPr>
+        <p:spPr>
+          <a:xfrm>
+            <a:off x="841248" y="1920240"/>
+            <a:ext cx="1371600" cy="182880"/>
+          </a:xfrm>
+          <a:prstGeom prst="rect">
+            <a:avLst/>
+          </a:prstGeom>
+          <a:noFill/>
+          <a:ln/>
+        </p:spPr>
+        <p:txBody>
+          <a:bodyPr wrap="square" lIns="0" tIns="0" rIns="0" bIns="0" rtlCol="0" anchor="ctr"/>
+          <a:lstStyle/>
+          <a:p>
+            <a:pPr marL="0" indent="0">
+              <a:buNone/>
+            </a:pPr>
+            <a:r>
+              <a:rPr lang="en-US" sz="1100" b="1" dirty="0">
+                <a:solidFill>
+                  <a:schemeClr val="tx2"/>
+                </a:solidFill>
+              </a:rPr>
+              <a:t>Goal</a:t>
+            </a:r>
+            <a:endParaRPr lang="en-US" sz="1100" dirty="0"/>
+          </a:p>
+        </p:txBody>
+      </p:sp>
+      <p:sp>
+        <p:nvSpPr>
+          <p:cNvPr id="10" name="Rita Goal"/>
+          <p:cNvSpPr txBox="1"/>
+          <p:nvPr/>
+        </p:nvSpPr>
+        <p:spPr>
+          <a:xfrm>
+            <a:off x="621792" y="2112264"/>
+            <a:ext cx="1645920" cy="347472"/>
+          </a:xfrm>
+          <a:prstGeom prst="rect">
+            <a:avLst/>
+          </a:prstGeom>
+          <a:noFill/>
+          <a:ln/>
+        </p:spPr>
+        <p:txBody>
+          <a:bodyPr wrap="square" lIns="0" tIns="0" rIns="0" bIns="0" rtlCol="0" anchor="t"/>
+          <a:lstStyle/>
+          <a:p>
+            <a:pPr marL="0" indent="0">
+              <a:buNone/>
+            </a:pPr>
+            <a:r>
+              <a:rPr lang="en-US" sz="1200" dirty="0">
+                <a:solidFill>
+                  <a:schemeClr val="tx1"/>
+                </a:solidFill>
+              </a:rPr>
+              <a:t>find WC, first aid and the way home, fast</a:t>
+            </a:r>
+            <a:endParaRPr lang="en-US" sz="1200" dirty="0"/>
+          </a:p>
+        </p:txBody>
+      </p:sp>
+      <p:pic>
+        <p:nvPicPr>
+          <p:cNvPr id="11" name="Rita Pain icon" descr="Pain"/>
+          <p:cNvPicPr>
+            <a:picLocks noChangeAspect="1"/>
+          </p:cNvPicPr>
+          <p:nvPr/>
+        </p:nvPicPr>
+        <p:blipFill>
+          <a:blip r:embed="rId5"/>
+          <a:stretch>
+            <a:fillRect/>
+          </a:stretch>
+        </p:blipFill>
+        <p:spPr>
+          <a:xfrm>
+            <a:off x="621792" y="2546604"/>
+            <a:ext cx="146304" cy="146304"/>
+          </a:xfrm>
+          <a:prstGeom prst="rect">
+            <a:avLst/>
+          </a:prstGeom>
+        </p:spPr>
+      </p:pic>
+      <p:sp>
+        <p:nvSpPr>
+          <p:cNvPr id="12" name="Rita Pain label"/>
+          <p:cNvSpPr txBox="1"/>
+          <p:nvPr/>
+        </p:nvSpPr>
+        <p:spPr>
+          <a:xfrm>
+            <a:off x="841248" y="2523744"/>
+            <a:ext cx="1371600" cy="182880"/>
+          </a:xfrm>
+          <a:prstGeom prst="rect">
+            <a:avLst/>
+          </a:prstGeom>
+          <a:noFill/>
+          <a:ln/>
+        </p:spPr>
+        <p:txBody>
+          <a:bodyPr wrap="square" lIns="0" tIns="0" rIns="0" bIns="0" rtlCol="0" anchor="ctr"/>
+          <a:lstStyle/>
+          <a:p>
+            <a:pPr marL="0" indent="0">
+              <a:buNone/>
+            </a:pPr>
+            <a:r>
+              <a:rPr lang="en-US" sz="1100" b="1" dirty="0">
+                <a:solidFill>
+                  <a:schemeClr val="tx2"/>
+                </a:solidFill>
+              </a:rPr>
+              <a:t>Pain</a:t>
+            </a:r>
+            <a:endParaRPr lang="en-US" sz="1100" dirty="0"/>
+          </a:p>
+        </p:txBody>
+      </p:sp>
+      <p:sp>
+        <p:nvSpPr>
+          <p:cNvPr id="13" name="Rita Pain"/>
+          <p:cNvSpPr txBox="1"/>
+          <p:nvPr/>
+        </p:nvSpPr>
+        <p:spPr>
+          <a:xfrm>
+            <a:off x="621792" y="2715768"/>
+            <a:ext cx="1645920" cy="347472"/>
+          </a:xfrm>
+          <a:prstGeom prst="rect">
+            <a:avLst/>
+          </a:prstGeom>
+          <a:noFill/>
+          <a:ln/>
+        </p:spPr>
+        <p:txBody>
+          <a:bodyPr wrap="square" lIns="0" tIns="0" rIns="0" bIns="0" rtlCol="0" anchor="t"/>
+          <a:lstStyle/>
+          <a:p>
+            <a:pPr marL="0" indent="0">
+              <a:buNone/>
+            </a:pPr>
+            <a:r>
+              <a:rPr lang="en-US" sz="1200" dirty="0">
+                <a:solidFill>
+                  <a:schemeClr val="tx1"/>
+                </a:solidFill>
+              </a:rPr>
+              <a:t>info goes stale; the map is an image</a:t>
+            </a:r>
+            <a:endParaRPr lang="en-US" sz="1200" dirty="0"/>
+          </a:p>
+        </p:txBody>
+      </p:sp>
+      <p:pic>
+        <p:nvPicPr>
+          <p:cNvPr id="14" name="Rita Success icon" descr="Success"/>
+          <p:cNvPicPr>
+            <a:picLocks noChangeAspect="1"/>
+          </p:cNvPicPr>
+          <p:nvPr/>
+        </p:nvPicPr>
+        <p:blipFill>
+          <a:blip r:embed="rId6"/>
+          <a:stretch>
+            <a:fillRect/>
+          </a:stretch>
+        </p:blipFill>
+        <p:spPr>
+          <a:xfrm>
+            <a:off x="621792" y="3150108"/>
+            <a:ext cx="146304" cy="146304"/>
+          </a:xfrm>
+          <a:prstGeom prst="rect">
+            <a:avLst/>
+          </a:prstGeom>
+        </p:spPr>
+      </p:pic>
+      <p:sp>
+        <p:nvSpPr>
+          <p:cNvPr id="15" name="Rita Success label"/>
+          <p:cNvSpPr txBox="1"/>
+          <p:nvPr/>
+        </p:nvSpPr>
+        <p:spPr>
+          <a:xfrm>
+            <a:off x="841248" y="3127248"/>
+            <a:ext cx="1371600" cy="182880"/>
+          </a:xfrm>
+          <a:prstGeom prst="rect">
+            <a:avLst/>
+          </a:prstGeom>
+          <a:noFill/>
+          <a:ln/>
+        </p:spPr>
+        <p:txBody>
+          <a:bodyPr wrap="square" lIns="0" tIns="0" rIns="0" bIns="0" rtlCol="0" anchor="ctr"/>
+          <a:lstStyle/>
+          <a:p>
+            <a:pPr marL="0" indent="0">
+              <a:buNone/>
+            </a:pPr>
+            <a:r>
+              <a:rPr lang="en-US" sz="1100" b="1" dirty="0">
+                <a:solidFill>
+                  <a:schemeClr val="tx2"/>
+                </a:solidFill>
+              </a:rPr>
+              <a:t>Success</a:t>
+            </a:r>
+            <a:endParaRPr lang="en-US" sz="1100" dirty="0"/>
+          </a:p>
+        </p:txBody>
+      </p:sp>
+      <p:sp>
+        <p:nvSpPr>
+          <p:cNvPr id="16" name="Rita Success"/>
+          <p:cNvSpPr txBox="1"/>
+          <p:nvPr/>
+        </p:nvSpPr>
+        <p:spPr>
+          <a:xfrm>
+            <a:off x="621792" y="3319272"/>
+            <a:ext cx="1645920" cy="347472"/>
+          </a:xfrm>
+          <a:prstGeom prst="rect">
+            <a:avLst/>
+          </a:prstGeom>
+          <a:noFill/>
+          <a:ln/>
+        </p:spPr>
+        <p:txBody>
+          <a:bodyPr wrap="square" lIns="0" tIns="0" rIns="0" bIns="0" rtlCol="0" anchor="t"/>
+          <a:lstStyle/>
+          <a:p>
+            <a:pPr marL="0" indent="0">
+              <a:buNone/>
+            </a:pPr>
+            <a:r>
+              <a:rPr lang="en-US" sz="1200" dirty="0">
+                <a:solidFill>
+                  <a:schemeClr val="tx1"/>
+                </a:solidFill>
+              </a:rPr>
+              <a:t>asks help for a friend in under 30 s</a:t>
+            </a:r>
+            <a:endParaRPr lang="en-US" sz="1200" dirty="0"/>
+          </a:p>
+        </p:txBody>
+      </p:sp>
+      <p:sp>
+        <p:nvSpPr>
+          <p:cNvPr id="17" name="Miguel card"/>
+          <p:cNvSpPr/>
+          <p:nvPr/>
+        </p:nvSpPr>
+        <p:spPr>
+          <a:xfrm>
+            <a:off x="2560320" y="1005840"/>
+            <a:ext cx="1920240" cy="2761488"/>
+          </a:xfrm>
+          <a:prstGeom prst="roundRect">
+            <a:avLst>
+              <a:gd name="adj" fmla="val 5714"/>
+            </a:avLst>
+          </a:prstGeom>
+          <a:solidFill>
+            <a:schemeClr val="bg2"/>
+          </a:solidFill>
+          <a:ln/>
+        </p:spPr>
+        <p:txBody>
+          <a:bodyPr/>
+          <a:lstStyle/>
+          <a:p>
+            <a:endParaRPr lang="pt-PT"/>
+          </a:p>
+        </p:txBody>
+      </p:sp>
+      <p:sp>
+        <p:nvSpPr>
+          <p:cNvPr id="18" name="Miguel icon circle"/>
+          <p:cNvSpPr/>
+          <p:nvPr/>
+        </p:nvSpPr>
+        <p:spPr>
+          <a:xfrm>
+            <a:off x="2724912" y="1161288"/>
+            <a:ext cx="402336" cy="402336"/>
+          </a:xfrm>
+          <a:prstGeom prst="ellipse">
+            <a:avLst/>
+          </a:prstGeom>
+          <a:solidFill>
+            <a:schemeClr val="tx2"/>
+          </a:solidFill>
+          <a:ln/>
+        </p:spPr>
+        <p:txBody>
+          <a:bodyPr/>
+          <a:lstStyle/>
+          <a:p>
+            <a:endParaRPr lang="pt-PT"/>
+          </a:p>
+        </p:txBody>
+      </p:sp>
+      <p:pic>
+        <p:nvPicPr>
+          <p:cNvPr id="19" name="Miguel icon" descr="Miguel icon"/>
+          <p:cNvPicPr>
+            <a:picLocks noChangeAspect="1"/>
+          </p:cNvPicPr>
+          <p:nvPr/>
+        </p:nvPicPr>
+        <p:blipFill>
+          <a:blip r:embed="rId7"/>
+          <a:stretch>
+            <a:fillRect/>
+          </a:stretch>
+        </p:blipFill>
+        <p:spPr>
+          <a:xfrm>
+            <a:off x="2825496" y="1261872"/>
+            <a:ext cx="201168" cy="201168"/>
+          </a:xfrm>
+          <a:prstGeom prst="rect">
+            <a:avLst/>
+          </a:prstGeom>
+        </p:spPr>
+      </p:pic>
+      <p:sp>
+        <p:nvSpPr>
+          <p:cNvPr id="20" name="Miguel name"/>
+          <p:cNvSpPr txBox="1"/>
+          <p:nvPr/>
+        </p:nvSpPr>
+        <p:spPr>
+          <a:xfrm>
+            <a:off x="3218688" y="1161288"/>
+            <a:ext cx="1188720" cy="402336"/>
+          </a:xfrm>
+          <a:prstGeom prst="rect">
+            <a:avLst/>
+          </a:prstGeom>
+          <a:noFill/>
+          <a:ln/>
+        </p:spPr>
+        <p:txBody>
+          <a:bodyPr wrap="square" lIns="0" tIns="0" rIns="0" bIns="0" rtlCol="0" anchor="ctr"/>
+          <a:lstStyle/>
+          <a:p>
+            <a:pPr marL="0" indent="0">
+              <a:buNone/>
+            </a:pPr>
+            <a:r>
+              <a:rPr lang="en-US" sz="1600" b="1" dirty="0">
+                <a:solidFill>
+                  <a:schemeClr val="tx2"/>
+                </a:solidFill>
+              </a:rPr>
+              <a:t>Miguel, 24</a:t>
+            </a:r>
+            <a:endParaRPr lang="en-US" sz="1600" dirty="0"/>
+          </a:p>
+        </p:txBody>
+      </p:sp>
+      <p:sp>
+        <p:nvSpPr>
+          <p:cNvPr id="21" name="Miguel role"/>
+          <p:cNvSpPr txBox="1"/>
+          <p:nvPr/>
+        </p:nvSpPr>
+        <p:spPr>
+          <a:xfrm>
+            <a:off x="2724912" y="1627632"/>
+            <a:ext cx="1645920" cy="201168"/>
+          </a:xfrm>
+          <a:prstGeom prst="rect">
+            <a:avLst/>
+          </a:prstGeom>
+          <a:noFill/>
+          <a:ln/>
+        </p:spPr>
+        <p:txBody>
+          <a:bodyPr wrap="square" lIns="0" tIns="0" rIns="0" bIns="0" rtlCol="0" anchor="ctr"/>
+          <a:lstStyle/>
+          <a:p>
+            <a:pPr marL="0" indent="0">
+              <a:buNone/>
+            </a:pPr>
+            <a:r>
+              <a:rPr lang="en-US" sz="1100" b="1" dirty="0">
+                <a:solidFill>
+                  <a:schemeClr val="accent2"/>
+                </a:solidFill>
+              </a:rPr>
+              <a:t>PCR volunteer · operator</a:t>
+            </a:r>
+            <a:endParaRPr lang="en-US" sz="1100" dirty="0"/>
+          </a:p>
+        </p:txBody>
+      </p:sp>
+      <p:pic>
+        <p:nvPicPr>
+          <p:cNvPr id="22" name="Miguel Goal icon" descr="Goal"/>
+          <p:cNvPicPr>
+            <a:picLocks noChangeAspect="1"/>
+          </p:cNvPicPr>
+          <p:nvPr/>
+        </p:nvPicPr>
+        <p:blipFill>
+          <a:blip r:embed="rId4"/>
+          <a:stretch>
+            <a:fillRect/>
+          </a:stretch>
+        </p:blipFill>
+        <p:spPr>
+          <a:xfrm>
+            <a:off x="2724912" y="1943100"/>
+            <a:ext cx="146304" cy="146304"/>
+          </a:xfrm>
+          <a:prstGeom prst="rect">
+            <a:avLst/>
+          </a:prstGeom>
+        </p:spPr>
+      </p:pic>
+      <p:sp>
+        <p:nvSpPr>
+          <p:cNvPr id="23" name="Miguel Goal label"/>
+          <p:cNvSpPr txBox="1"/>
+          <p:nvPr/>
+        </p:nvSpPr>
+        <p:spPr>
+          <a:xfrm>
+            <a:off x="2944368" y="1920240"/>
+            <a:ext cx="1371600" cy="182880"/>
+          </a:xfrm>
+          <a:prstGeom prst="rect">
+            <a:avLst/>
+          </a:prstGeom>
+          <a:noFill/>
+          <a:ln/>
+        </p:spPr>
+        <p:txBody>
+          <a:bodyPr wrap="square" lIns="0" tIns="0" rIns="0" bIns="0" rtlCol="0" anchor="ctr"/>
+          <a:lstStyle/>
+          <a:p>
+            <a:pPr marL="0" indent="0">
+              <a:buNone/>
+            </a:pPr>
+            <a:r>
+              <a:rPr lang="en-US" sz="1100" b="1" dirty="0">
+                <a:solidFill>
+                  <a:schemeClr val="tx2"/>
+                </a:solidFill>
+              </a:rPr>
+              <a:t>Goal</a:t>
+            </a:r>
+            <a:endParaRPr lang="en-US" sz="1100" dirty="0"/>
+          </a:p>
+        </p:txBody>
+      </p:sp>
+      <p:sp>
+        <p:nvSpPr>
+          <p:cNvPr id="24" name="Miguel Goal"/>
+          <p:cNvSpPr txBox="1"/>
+          <p:nvPr/>
+        </p:nvSpPr>
+        <p:spPr>
+          <a:xfrm>
+            <a:off x="2724912" y="2112264"/>
+            <a:ext cx="1645920" cy="347472"/>
+          </a:xfrm>
+          <a:prstGeom prst="rect">
+            <a:avLst/>
+          </a:prstGeom>
+          <a:noFill/>
+          <a:ln/>
+        </p:spPr>
+        <p:txBody>
+          <a:bodyPr wrap="square" lIns="0" tIns="0" rIns="0" bIns="0" rtlCol="0" anchor="t"/>
+          <a:lstStyle/>
+          <a:p>
+            <a:pPr marL="0" indent="0">
+              <a:buNone/>
+            </a:pPr>
+            <a:r>
+              <a:rPr lang="en-US" sz="1200" dirty="0">
+                <a:solidFill>
+                  <a:schemeClr val="tx1"/>
+                </a:solidFill>
+              </a:rPr>
+              <a:t>see every request: what, where, status</a:t>
+            </a:r>
+            <a:endParaRPr lang="en-US" sz="1200" dirty="0"/>
+          </a:p>
+        </p:txBody>
+      </p:sp>
+      <p:pic>
+        <p:nvPicPr>
+          <p:cNvPr id="25" name="Miguel Pain icon" descr="Pain"/>
+          <p:cNvPicPr>
+            <a:picLocks noChangeAspect="1"/>
+          </p:cNvPicPr>
+          <p:nvPr/>
+        </p:nvPicPr>
+        <p:blipFill>
+          <a:blip r:embed="rId5"/>
+          <a:stretch>
+            <a:fillRect/>
+          </a:stretch>
+        </p:blipFill>
+        <p:spPr>
+          <a:xfrm>
+            <a:off x="2724912" y="2546604"/>
+            <a:ext cx="146304" cy="146304"/>
+          </a:xfrm>
+          <a:prstGeom prst="rect">
+            <a:avLst/>
+          </a:prstGeom>
+        </p:spPr>
+      </p:pic>
+      <p:sp>
+        <p:nvSpPr>
+          <p:cNvPr id="26" name="Miguel Pain label"/>
+          <p:cNvSpPr txBox="1"/>
+          <p:nvPr/>
+        </p:nvSpPr>
+        <p:spPr>
+          <a:xfrm>
+            <a:off x="2944368" y="2523744"/>
+            <a:ext cx="1371600" cy="182880"/>
+          </a:xfrm>
+          <a:prstGeom prst="rect">
+            <a:avLst/>
+          </a:prstGeom>
+          <a:noFill/>
+          <a:ln/>
+        </p:spPr>
+        <p:txBody>
+          <a:bodyPr wrap="square" lIns="0" tIns="0" rIns="0" bIns="0" rtlCol="0" anchor="ctr"/>
+          <a:lstStyle/>
+          <a:p>
+            <a:pPr marL="0" indent="0">
+              <a:buNone/>
+            </a:pPr>
+            <a:r>
+              <a:rPr lang="en-US" sz="1100" b="1" dirty="0">
+                <a:solidFill>
+                  <a:schemeClr val="tx2"/>
+                </a:solidFill>
+              </a:rPr>
+              <a:t>Pain</a:t>
+            </a:r>
+            <a:endParaRPr lang="en-US" sz="1100" dirty="0"/>
+          </a:p>
+        </p:txBody>
+      </p:sp>
+      <p:sp>
+        <p:nvSpPr>
+          <p:cNvPr id="27" name="Miguel Pain"/>
+          <p:cNvSpPr txBox="1"/>
+          <p:nvPr/>
+        </p:nvSpPr>
+        <p:spPr>
+          <a:xfrm>
+            <a:off x="2724912" y="2715768"/>
+            <a:ext cx="1645920" cy="347472"/>
+          </a:xfrm>
+          <a:prstGeom prst="rect">
+            <a:avLst/>
+          </a:prstGeom>
+          <a:noFill/>
+          <a:ln/>
+        </p:spPr>
+        <p:txBody>
+          <a:bodyPr wrap="square" lIns="0" tIns="0" rIns="0" bIns="0" rtlCol="0" anchor="t"/>
+          <a:lstStyle/>
+          <a:p>
+            <a:pPr marL="0" indent="0">
+              <a:buNone/>
+            </a:pPr>
+            <a:r>
+              <a:rPr lang="en-US" sz="1200" dirty="0">
+                <a:solidFill>
+                  <a:schemeClr val="tx1"/>
+                </a:solidFill>
+              </a:rPr>
+              <a:t>radio and phone, no location or priority</a:t>
+            </a:r>
+            <a:endParaRPr lang="en-US" sz="1200" dirty="0"/>
+          </a:p>
+        </p:txBody>
+      </p:sp>
+      <p:pic>
+        <p:nvPicPr>
+          <p:cNvPr id="28" name="Miguel Success icon" descr="Success"/>
+          <p:cNvPicPr>
+            <a:picLocks noChangeAspect="1"/>
+          </p:cNvPicPr>
+          <p:nvPr/>
+        </p:nvPicPr>
+        <p:blipFill>
+          <a:blip r:embed="rId6"/>
+          <a:stretch>
+            <a:fillRect/>
+          </a:stretch>
+        </p:blipFill>
+        <p:spPr>
+          <a:xfrm>
+            <a:off x="2724912" y="3150108"/>
+            <a:ext cx="146304" cy="146304"/>
+          </a:xfrm>
+          <a:prstGeom prst="rect">
+            <a:avLst/>
+          </a:prstGeom>
+        </p:spPr>
+      </p:pic>
+      <p:sp>
+        <p:nvSpPr>
+          <p:cNvPr id="29" name="Miguel Success label"/>
+          <p:cNvSpPr txBox="1"/>
+          <p:nvPr/>
+        </p:nvSpPr>
+        <p:spPr>
+          <a:xfrm>
+            <a:off x="2944368" y="3127248"/>
+            <a:ext cx="1371600" cy="182880"/>
+          </a:xfrm>
+          <a:prstGeom prst="rect">
+            <a:avLst/>
+          </a:prstGeom>
+          <a:noFill/>
+          <a:ln/>
+        </p:spPr>
+        <p:txBody>
+          <a:bodyPr wrap="square" lIns="0" tIns="0" rIns="0" bIns="0" rtlCol="0" anchor="ctr"/>
+          <a:lstStyle/>
+          <a:p>
+            <a:pPr marL="0" indent="0">
+              <a:buNone/>
+            </a:pPr>
+            <a:r>
+              <a:rPr lang="en-US" sz="1100" b="1" dirty="0">
+                <a:solidFill>
+                  <a:schemeClr val="tx2"/>
+                </a:solidFill>
+              </a:rPr>
+              <a:t>Success</a:t>
+            </a:r>
+            <a:endParaRPr lang="en-US" sz="1100" dirty="0"/>
+          </a:p>
+        </p:txBody>
+      </p:sp>
+      <p:sp>
+        <p:nvSpPr>
+          <p:cNvPr id="30" name="Miguel Success"/>
+          <p:cNvSpPr txBox="1"/>
+          <p:nvPr/>
+        </p:nvSpPr>
+        <p:spPr>
+          <a:xfrm>
+            <a:off x="2724912" y="3319272"/>
+            <a:ext cx="1645920" cy="347472"/>
+          </a:xfrm>
+          <a:prstGeom prst="rect">
+            <a:avLst/>
+          </a:prstGeom>
+          <a:noFill/>
+          <a:ln/>
+        </p:spPr>
+        <p:txBody>
+          <a:bodyPr wrap="square" lIns="0" tIns="0" rIns="0" bIns="0" rtlCol="0" anchor="t"/>
+          <a:lstStyle/>
+          <a:p>
+            <a:pPr marL="0" indent="0">
+              <a:buNone/>
+            </a:pPr>
+            <a:r>
+              <a:rPr lang="en-US" sz="1200" dirty="0">
+                <a:solidFill>
+                  <a:schemeClr val="tx1"/>
+                </a:solidFill>
+              </a:rPr>
+              <a:t>each request in seconds, triaged in ≤ 30 s</a:t>
+            </a:r>
+            <a:endParaRPr lang="en-US" sz="1200" dirty="0"/>
+          </a:p>
+        </p:txBody>
+      </p:sp>
+      <p:sp>
+        <p:nvSpPr>
+          <p:cNvPr id="31" name="Sofia card"/>
+          <p:cNvSpPr/>
+          <p:nvPr/>
+        </p:nvSpPr>
+        <p:spPr>
+          <a:xfrm>
+            <a:off x="4663440" y="1005840"/>
+            <a:ext cx="1920240" cy="2761488"/>
+          </a:xfrm>
+          <a:prstGeom prst="roundRect">
+            <a:avLst>
+              <a:gd name="adj" fmla="val 5714"/>
+            </a:avLst>
+          </a:prstGeom>
+          <a:solidFill>
+            <a:schemeClr val="bg2"/>
+          </a:solidFill>
+          <a:ln/>
+        </p:spPr>
+        <p:txBody>
+          <a:bodyPr/>
+          <a:lstStyle/>
+          <a:p>
+            <a:endParaRPr lang="pt-PT"/>
+          </a:p>
+        </p:txBody>
+      </p:sp>
+      <p:sp>
+        <p:nvSpPr>
+          <p:cNvPr id="32" name="Sofia icon circle"/>
+          <p:cNvSpPr/>
+          <p:nvPr/>
+        </p:nvSpPr>
+        <p:spPr>
+          <a:xfrm>
+            <a:off x="4828032" y="1161288"/>
+            <a:ext cx="402336" cy="402336"/>
+          </a:xfrm>
+          <a:prstGeom prst="ellipse">
+            <a:avLst/>
+          </a:prstGeom>
+          <a:solidFill>
+            <a:schemeClr val="tx2"/>
+          </a:solidFill>
+          <a:ln/>
+        </p:spPr>
+        <p:txBody>
+          <a:bodyPr/>
+          <a:lstStyle/>
+          <a:p>
+            <a:endParaRPr lang="pt-PT"/>
+          </a:p>
+        </p:txBody>
+      </p:sp>
+      <p:pic>
+        <p:nvPicPr>
+          <p:cNvPr id="33" name="Sofia icon" descr="Sofia icon"/>
+          <p:cNvPicPr>
+            <a:picLocks noChangeAspect="1"/>
+          </p:cNvPicPr>
+          <p:nvPr/>
+        </p:nvPicPr>
+        <p:blipFill>
+          <a:blip r:embed="rId8"/>
+          <a:stretch>
+            <a:fillRect/>
+          </a:stretch>
+        </p:blipFill>
+        <p:spPr>
+          <a:xfrm>
+            <a:off x="4928616" y="1261872"/>
+            <a:ext cx="201168" cy="201168"/>
+          </a:xfrm>
+          <a:prstGeom prst="rect">
+            <a:avLst/>
+          </a:prstGeom>
+        </p:spPr>
+      </p:pic>
+      <p:sp>
+        <p:nvSpPr>
+          <p:cNvPr id="34" name="Sofia name"/>
+          <p:cNvSpPr txBox="1"/>
+          <p:nvPr/>
+        </p:nvSpPr>
+        <p:spPr>
+          <a:xfrm>
+            <a:off x="5321808" y="1161288"/>
+            <a:ext cx="1188720" cy="402336"/>
+          </a:xfrm>
+          <a:prstGeom prst="rect">
+            <a:avLst/>
+          </a:prstGeom>
+          <a:noFill/>
+          <a:ln/>
+        </p:spPr>
+        <p:txBody>
+          <a:bodyPr wrap="square" lIns="0" tIns="0" rIns="0" bIns="0" rtlCol="0" anchor="ctr"/>
+          <a:lstStyle/>
+          <a:p>
+            <a:pPr marL="0" indent="0">
+              <a:buNone/>
+            </a:pPr>
+            <a:r>
+              <a:rPr lang="en-US" sz="1600" b="1" dirty="0">
+                <a:solidFill>
+                  <a:schemeClr val="tx2"/>
+                </a:solidFill>
+              </a:rPr>
+              <a:t>Sofia, 23</a:t>
+            </a:r>
+            <a:endParaRPr lang="en-US" sz="1600" dirty="0"/>
+          </a:p>
+        </p:txBody>
+      </p:sp>
+      <p:sp>
+        <p:nvSpPr>
+          <p:cNvPr id="35" name="Sofia role"/>
+          <p:cNvSpPr txBox="1"/>
+          <p:nvPr/>
+        </p:nvSpPr>
+        <p:spPr>
+          <a:xfrm>
+            <a:off x="4828032" y="1627632"/>
+            <a:ext cx="1645920" cy="201168"/>
+          </a:xfrm>
+          <a:prstGeom prst="rect">
+            <a:avLst/>
+          </a:prstGeom>
+          <a:noFill/>
+          <a:ln/>
+        </p:spPr>
+        <p:txBody>
+          <a:bodyPr wrap="square" lIns="0" tIns="0" rIns="0" bIns="0" rtlCol="0" anchor="ctr"/>
+          <a:lstStyle/>
+          <a:p>
+            <a:pPr marL="0" indent="0">
+              <a:buNone/>
+            </a:pPr>
+            <a:r>
+              <a:rPr lang="en-US" sz="1100" b="1" dirty="0">
+                <a:solidFill>
+                  <a:schemeClr val="accent2"/>
+                </a:solidFill>
+              </a:rPr>
+              <a:t>Organiser · her event only</a:t>
+            </a:r>
+            <a:endParaRPr lang="en-US" sz="1100" dirty="0"/>
+          </a:p>
+        </p:txBody>
+      </p:sp>
+      <p:pic>
+        <p:nvPicPr>
+          <p:cNvPr id="36" name="Sofia Goal icon" descr="Goal"/>
+          <p:cNvPicPr>
+            <a:picLocks noChangeAspect="1"/>
+          </p:cNvPicPr>
+          <p:nvPr/>
+        </p:nvPicPr>
+        <p:blipFill>
+          <a:blip r:embed="rId4"/>
+          <a:stretch>
+            <a:fillRect/>
+          </a:stretch>
+        </p:blipFill>
+        <p:spPr>
+          <a:xfrm>
+            <a:off x="4828032" y="1943100"/>
+            <a:ext cx="146304" cy="146304"/>
+          </a:xfrm>
+          <a:prstGeom prst="rect">
+            <a:avLst/>
+          </a:prstGeom>
+        </p:spPr>
+      </p:pic>
+      <p:sp>
+        <p:nvSpPr>
+          <p:cNvPr id="37" name="Sofia Goal label"/>
+          <p:cNvSpPr txBox="1"/>
+          <p:nvPr/>
+        </p:nvSpPr>
+        <p:spPr>
+          <a:xfrm>
+            <a:off x="5047488" y="1920240"/>
+            <a:ext cx="1371600" cy="182880"/>
+          </a:xfrm>
+          <a:prstGeom prst="rect">
+            <a:avLst/>
+          </a:prstGeom>
+          <a:noFill/>
+          <a:ln/>
+        </p:spPr>
+        <p:txBody>
+          <a:bodyPr wrap="square" lIns="0" tIns="0" rIns="0" bIns="0" rtlCol="0" anchor="ctr"/>
+          <a:lstStyle/>
+          <a:p>
+            <a:pPr marL="0" indent="0">
+              <a:buNone/>
+            </a:pPr>
+            <a:r>
+              <a:rPr lang="en-US" sz="1100" b="1" dirty="0">
+                <a:solidFill>
+                  <a:schemeClr val="tx2"/>
+                </a:solidFill>
+              </a:rPr>
+              <a:t>Goal</a:t>
+            </a:r>
+            <a:endParaRPr lang="en-US" sz="1100" dirty="0"/>
+          </a:p>
+        </p:txBody>
+      </p:sp>
+      <p:sp>
+        <p:nvSpPr>
+          <p:cNvPr id="38" name="Sofia Goal"/>
+          <p:cNvSpPr txBox="1"/>
+          <p:nvPr/>
+        </p:nvSpPr>
+        <p:spPr>
+          <a:xfrm>
+            <a:off x="4828032" y="2112264"/>
+            <a:ext cx="1645920" cy="347472"/>
+          </a:xfrm>
+          <a:prstGeom prst="rect">
+            <a:avLst/>
+          </a:prstGeom>
+          <a:noFill/>
+          <a:ln/>
+        </p:spPr>
+        <p:txBody>
+          <a:bodyPr wrap="square" lIns="0" tIns="0" rIns="0" bIns="0" rtlCol="0" anchor="t"/>
+          <a:lstStyle/>
+          <a:p>
+            <a:pPr marL="0" indent="0">
+              <a:buNone/>
+            </a:pPr>
+            <a:r>
+              <a:rPr lang="en-US" sz="1200" dirty="0">
+                <a:solidFill>
+                  <a:schemeClr val="tx1"/>
+                </a:solidFill>
+              </a:rPr>
+              <a:t>configure once, publish changes live</a:t>
+            </a:r>
+            <a:endParaRPr lang="en-US" sz="1200" dirty="0"/>
+          </a:p>
+        </p:txBody>
+      </p:sp>
+      <p:pic>
+        <p:nvPicPr>
+          <p:cNvPr id="39" name="Sofia Pain icon" descr="Pain"/>
+          <p:cNvPicPr>
+            <a:picLocks noChangeAspect="1"/>
+          </p:cNvPicPr>
+          <p:nvPr/>
+        </p:nvPicPr>
+        <p:blipFill>
+          <a:blip r:embed="rId5"/>
+          <a:stretch>
+            <a:fillRect/>
+          </a:stretch>
+        </p:blipFill>
+        <p:spPr>
+          <a:xfrm>
+            <a:off x="4828032" y="2546604"/>
+            <a:ext cx="146304" cy="146304"/>
+          </a:xfrm>
+          <a:prstGeom prst="rect">
+            <a:avLst/>
+          </a:prstGeom>
+        </p:spPr>
+      </p:pic>
+      <p:sp>
+        <p:nvSpPr>
+          <p:cNvPr id="40" name="Sofia Pain label"/>
+          <p:cNvSpPr txBox="1"/>
+          <p:nvPr/>
+        </p:nvSpPr>
+        <p:spPr>
+          <a:xfrm>
+            <a:off x="5047488" y="2523744"/>
+            <a:ext cx="1371600" cy="182880"/>
+          </a:xfrm>
+          <a:prstGeom prst="rect">
+            <a:avLst/>
+          </a:prstGeom>
+          <a:noFill/>
+          <a:ln/>
+        </p:spPr>
+        <p:txBody>
+          <a:bodyPr wrap="square" lIns="0" tIns="0" rIns="0" bIns="0" rtlCol="0" anchor="ctr"/>
+          <a:lstStyle/>
+          <a:p>
+            <a:pPr marL="0" indent="0">
+              <a:buNone/>
+            </a:pPr>
+            <a:r>
+              <a:rPr lang="en-US" sz="1100" b="1" dirty="0">
+                <a:solidFill>
+                  <a:schemeClr val="tx2"/>
+                </a:solidFill>
+              </a:rPr>
+              <a:t>Pain</a:t>
+            </a:r>
+            <a:endParaRPr lang="en-US" sz="1100" dirty="0"/>
+          </a:p>
+        </p:txBody>
+      </p:sp>
+      <p:sp>
+        <p:nvSpPr>
+          <p:cNvPr id="41" name="Sofia Pain"/>
+          <p:cNvSpPr txBox="1"/>
+          <p:nvPr/>
+        </p:nvSpPr>
+        <p:spPr>
+          <a:xfrm>
+            <a:off x="4828032" y="2715768"/>
+            <a:ext cx="1645920" cy="347472"/>
+          </a:xfrm>
+          <a:prstGeom prst="rect">
+            <a:avLst/>
+          </a:prstGeom>
+          <a:noFill/>
+          <a:ln/>
+        </p:spPr>
+        <p:txBody>
+          <a:bodyPr wrap="square" lIns="0" tIns="0" rIns="0" bIns="0" rtlCol="0" anchor="t"/>
+          <a:lstStyle/>
+          <a:p>
+            <a:pPr marL="0" indent="0">
+              <a:buNone/>
+            </a:pPr>
+            <a:r>
+              <a:rPr lang="en-US" sz="1200" dirty="0">
+                <a:solidFill>
+                  <a:schemeClr val="tx1"/>
+                </a:solidFill>
+              </a:rPr>
+              <a:t>each partner talks on its own channel</a:t>
+            </a:r>
+            <a:endParaRPr lang="en-US" sz="1200" dirty="0"/>
+          </a:p>
+        </p:txBody>
+      </p:sp>
+      <p:pic>
+        <p:nvPicPr>
+          <p:cNvPr id="42" name="Sofia Success icon" descr="Success"/>
+          <p:cNvPicPr>
+            <a:picLocks noChangeAspect="1"/>
+          </p:cNvPicPr>
+          <p:nvPr/>
+        </p:nvPicPr>
+        <p:blipFill>
+          <a:blip r:embed="rId6"/>
+          <a:stretch>
+            <a:fillRect/>
+          </a:stretch>
+        </p:blipFill>
+        <p:spPr>
+          <a:xfrm>
+            <a:off x="4828032" y="3150108"/>
+            <a:ext cx="146304" cy="146304"/>
+          </a:xfrm>
+          <a:prstGeom prst="rect">
+            <a:avLst/>
+          </a:prstGeom>
+        </p:spPr>
+      </p:pic>
+      <p:sp>
+        <p:nvSpPr>
+          <p:cNvPr id="43" name="Sofia Success label"/>
+          <p:cNvSpPr txBox="1"/>
+          <p:nvPr/>
+        </p:nvSpPr>
+        <p:spPr>
+          <a:xfrm>
+            <a:off x="5047488" y="3127248"/>
+            <a:ext cx="1371600" cy="182880"/>
+          </a:xfrm>
+          <a:prstGeom prst="rect">
+            <a:avLst/>
+          </a:prstGeom>
+          <a:noFill/>
+          <a:ln/>
+        </p:spPr>
+        <p:txBody>
+          <a:bodyPr wrap="square" lIns="0" tIns="0" rIns="0" bIns="0" rtlCol="0" anchor="ctr"/>
+          <a:lstStyle/>
+          <a:p>
+            <a:pPr marL="0" indent="0">
+              <a:buNone/>
+            </a:pPr>
+            <a:r>
+              <a:rPr lang="en-US" sz="1100" b="1" dirty="0">
+                <a:solidFill>
+                  <a:schemeClr val="tx2"/>
+                </a:solidFill>
+              </a:rPr>
+              <a:t>Success</a:t>
+            </a:r>
+            <a:endParaRPr lang="en-US" sz="1100" dirty="0"/>
+          </a:p>
+        </p:txBody>
+      </p:sp>
+      <p:sp>
+        <p:nvSpPr>
+          <p:cNvPr id="44" name="Sofia Success"/>
+          <p:cNvSpPr txBox="1"/>
+          <p:nvPr/>
+        </p:nvSpPr>
+        <p:spPr>
+          <a:xfrm>
+            <a:off x="4828032" y="3319272"/>
+            <a:ext cx="1645920" cy="347472"/>
+          </a:xfrm>
+          <a:prstGeom prst="rect">
+            <a:avLst/>
+          </a:prstGeom>
+          <a:noFill/>
+          <a:ln/>
+        </p:spPr>
+        <p:txBody>
+          <a:bodyPr wrap="square" lIns="0" tIns="0" rIns="0" bIns="0" rtlCol="0" anchor="t"/>
+          <a:lstStyle/>
+          <a:p>
+            <a:pPr marL="0" indent="0">
+              <a:buNone/>
+            </a:pPr>
+            <a:r>
+              <a:rPr lang="en-US" sz="1200" dirty="0">
+                <a:solidFill>
+                  <a:schemeClr val="tx1"/>
+                </a:solidFill>
+              </a:rPr>
+              <a:t>next night ready with configuration only</a:t>
+            </a:r>
+            <a:endParaRPr lang="en-US" sz="1200" dirty="0"/>
+          </a:p>
+        </p:txBody>
+      </p:sp>
+      <p:sp>
+        <p:nvSpPr>
+          <p:cNvPr id="45" name="Daniel card"/>
+          <p:cNvSpPr/>
+          <p:nvPr/>
+        </p:nvSpPr>
+        <p:spPr>
+          <a:xfrm>
+            <a:off x="6766560" y="1005840"/>
+            <a:ext cx="1920240" cy="2761488"/>
+          </a:xfrm>
+          <a:prstGeom prst="roundRect">
+            <a:avLst>
+              <a:gd name="adj" fmla="val 5714"/>
+            </a:avLst>
+          </a:prstGeom>
+          <a:solidFill>
+            <a:schemeClr val="bg2"/>
+          </a:solidFill>
+          <a:ln/>
+        </p:spPr>
+        <p:txBody>
+          <a:bodyPr/>
+          <a:lstStyle/>
+          <a:p>
+            <a:endParaRPr lang="pt-PT"/>
+          </a:p>
+        </p:txBody>
+      </p:sp>
+      <p:sp>
+        <p:nvSpPr>
+          <p:cNvPr id="46" name="Daniel icon circle"/>
+          <p:cNvSpPr/>
+          <p:nvPr/>
+        </p:nvSpPr>
+        <p:spPr>
+          <a:xfrm>
+            <a:off x="6931152" y="1161288"/>
+            <a:ext cx="402336" cy="402336"/>
+          </a:xfrm>
+          <a:prstGeom prst="ellipse">
+            <a:avLst/>
+          </a:prstGeom>
+          <a:solidFill>
+            <a:schemeClr val="tx2"/>
+          </a:solidFill>
+          <a:ln/>
+        </p:spPr>
+        <p:txBody>
+          <a:bodyPr/>
+          <a:lstStyle/>
+          <a:p>
+            <a:endParaRPr lang="pt-PT"/>
+          </a:p>
+        </p:txBody>
+      </p:sp>
+      <p:pic>
+        <p:nvPicPr>
+          <p:cNvPr id="47" name="Daniel icon" descr="Daniel icon"/>
+          <p:cNvPicPr>
+            <a:picLocks noChangeAspect="1"/>
+          </p:cNvPicPr>
+          <p:nvPr/>
+        </p:nvPicPr>
+        <p:blipFill>
+          <a:blip r:embed="rId9"/>
+          <a:stretch>
+            <a:fillRect/>
+          </a:stretch>
+        </p:blipFill>
+        <p:spPr>
+          <a:xfrm>
+            <a:off x="7031736" y="1261872"/>
+            <a:ext cx="201168" cy="201168"/>
+          </a:xfrm>
+          <a:prstGeom prst="rect">
+            <a:avLst/>
+          </a:prstGeom>
+        </p:spPr>
+      </p:pic>
+      <p:sp>
+        <p:nvSpPr>
+          <p:cNvPr id="48" name="Daniel name"/>
+          <p:cNvSpPr txBox="1"/>
+          <p:nvPr/>
+        </p:nvSpPr>
+        <p:spPr>
+          <a:xfrm>
+            <a:off x="7424928" y="1161288"/>
+            <a:ext cx="1188720" cy="402336"/>
+          </a:xfrm>
+          <a:prstGeom prst="rect">
+            <a:avLst/>
+          </a:prstGeom>
+          <a:noFill/>
+          <a:ln/>
+        </p:spPr>
+        <p:txBody>
+          <a:bodyPr wrap="square" lIns="0" tIns="0" rIns="0" bIns="0" rtlCol="0" anchor="ctr"/>
+          <a:lstStyle/>
+          <a:p>
+            <a:pPr marL="0" indent="0">
+              <a:buNone/>
+            </a:pPr>
+            <a:r>
+              <a:rPr lang="en-US" sz="1600" b="1" dirty="0">
+                <a:solidFill>
+                  <a:schemeClr val="tx2"/>
+                </a:solidFill>
+              </a:rPr>
+              <a:t>Daniel, 27</a:t>
+            </a:r>
+            <a:endParaRPr lang="en-US" sz="1600" dirty="0"/>
+          </a:p>
+        </p:txBody>
+      </p:sp>
+      <p:sp>
+        <p:nvSpPr>
+          <p:cNvPr id="49" name="Daniel role"/>
+          <p:cNvSpPr txBox="1"/>
+          <p:nvPr/>
+        </p:nvSpPr>
+        <p:spPr>
+          <a:xfrm>
+            <a:off x="6931152" y="1627632"/>
+            <a:ext cx="1645920" cy="201168"/>
+          </a:xfrm>
+          <a:prstGeom prst="rect">
+            <a:avLst/>
+          </a:prstGeom>
+          <a:noFill/>
+          <a:ln/>
+        </p:spPr>
+        <p:txBody>
+          <a:bodyPr wrap="square" lIns="0" tIns="0" rIns="0" bIns="0" rtlCol="0" anchor="ctr"/>
+          <a:lstStyle/>
+          <a:p>
+            <a:pPr marL="0" indent="0">
+              <a:buNone/>
+            </a:pPr>
+            <a:r>
+              <a:rPr lang="en-US" sz="1100" b="1" dirty="0">
+                <a:solidFill>
+                  <a:schemeClr val="accent2"/>
+                </a:solidFill>
+              </a:rPr>
+              <a:t>Farol team · all events</a:t>
+            </a:r>
+            <a:endParaRPr lang="en-US" sz="1100" dirty="0"/>
+          </a:p>
+        </p:txBody>
+      </p:sp>
+      <p:pic>
+        <p:nvPicPr>
+          <p:cNvPr id="50" name="Daniel Goal icon" descr="Goal"/>
+          <p:cNvPicPr>
+            <a:picLocks noChangeAspect="1"/>
+          </p:cNvPicPr>
+          <p:nvPr/>
+        </p:nvPicPr>
+        <p:blipFill>
+          <a:blip r:embed="rId4"/>
+          <a:stretch>
+            <a:fillRect/>
+          </a:stretch>
+        </p:blipFill>
+        <p:spPr>
+          <a:xfrm>
+            <a:off x="6931152" y="1943100"/>
+            <a:ext cx="146304" cy="146304"/>
+          </a:xfrm>
+          <a:prstGeom prst="rect">
+            <a:avLst/>
+          </a:prstGeom>
+        </p:spPr>
+      </p:pic>
+      <p:sp>
+        <p:nvSpPr>
+          <p:cNvPr id="51" name="Daniel Goal label"/>
+          <p:cNvSpPr txBox="1"/>
+          <p:nvPr/>
+        </p:nvSpPr>
+        <p:spPr>
+          <a:xfrm>
+            <a:off x="7150608" y="1920240"/>
+            <a:ext cx="1371600" cy="182880"/>
+          </a:xfrm>
+          <a:prstGeom prst="rect">
+            <a:avLst/>
+          </a:prstGeom>
+          <a:noFill/>
+          <a:ln/>
+        </p:spPr>
+        <p:txBody>
+          <a:bodyPr wrap="square" lIns="0" tIns="0" rIns="0" bIns="0" rtlCol="0" anchor="ctr"/>
+          <a:lstStyle/>
+          <a:p>
+            <a:pPr marL="0" indent="0">
+              <a:buNone/>
+            </a:pPr>
+            <a:r>
+              <a:rPr lang="en-US" sz="1100" b="1" dirty="0">
+                <a:solidFill>
+                  <a:schemeClr val="tx2"/>
+                </a:solidFill>
+              </a:rPr>
+              <a:t>Goal</a:t>
+            </a:r>
+            <a:endParaRPr lang="en-US" sz="1100" dirty="0"/>
+          </a:p>
+        </p:txBody>
+      </p:sp>
+      <p:sp>
+        <p:nvSpPr>
+          <p:cNvPr id="52" name="Daniel Goal"/>
+          <p:cNvSpPr txBox="1"/>
+          <p:nvPr/>
+        </p:nvSpPr>
+        <p:spPr>
+          <a:xfrm>
+            <a:off x="6931152" y="2112264"/>
+            <a:ext cx="1645920" cy="347472"/>
+          </a:xfrm>
+          <a:prstGeom prst="rect">
+            <a:avLst/>
+          </a:prstGeom>
+          <a:noFill/>
+          <a:ln/>
+        </p:spPr>
+        <p:txBody>
+          <a:bodyPr wrap="square" lIns="0" tIns="0" rIns="0" bIns="0" rtlCol="0" anchor="t"/>
+          <a:lstStyle/>
+          <a:p>
+            <a:pPr marL="0" indent="0">
+              <a:buNone/>
+            </a:pPr>
+            <a:r>
+              <a:rPr lang="en-US" sz="1200" dirty="0">
+                <a:solidFill>
+                  <a:schemeClr val="tx1"/>
+                </a:solidFill>
+              </a:rPr>
+              <a:t>onboard real festivals, no new code</a:t>
+            </a:r>
+            <a:endParaRPr lang="en-US" sz="1200" dirty="0"/>
+          </a:p>
+        </p:txBody>
+      </p:sp>
+      <p:pic>
+        <p:nvPicPr>
+          <p:cNvPr id="53" name="Daniel Pain icon" descr="Pain"/>
+          <p:cNvPicPr>
+            <a:picLocks noChangeAspect="1"/>
+          </p:cNvPicPr>
+          <p:nvPr/>
+        </p:nvPicPr>
+        <p:blipFill>
+          <a:blip r:embed="rId5"/>
+          <a:stretch>
+            <a:fillRect/>
+          </a:stretch>
+        </p:blipFill>
+        <p:spPr>
+          <a:xfrm>
+            <a:off x="6931152" y="2546604"/>
+            <a:ext cx="146304" cy="146304"/>
+          </a:xfrm>
+          <a:prstGeom prst="rect">
+            <a:avLst/>
+          </a:prstGeom>
+        </p:spPr>
+      </p:pic>
+      <p:sp>
+        <p:nvSpPr>
+          <p:cNvPr id="54" name="Daniel Pain label"/>
+          <p:cNvSpPr txBox="1"/>
+          <p:nvPr/>
+        </p:nvSpPr>
+        <p:spPr>
+          <a:xfrm>
+            <a:off x="7150608" y="2523744"/>
+            <a:ext cx="1371600" cy="182880"/>
+          </a:xfrm>
+          <a:prstGeom prst="rect">
+            <a:avLst/>
+          </a:prstGeom>
+          <a:noFill/>
+          <a:ln/>
+        </p:spPr>
+        <p:txBody>
+          <a:bodyPr wrap="square" lIns="0" tIns="0" rIns="0" bIns="0" rtlCol="0" anchor="ctr"/>
+          <a:lstStyle/>
+          <a:p>
+            <a:pPr marL="0" indent="0">
+              <a:buNone/>
+            </a:pPr>
+            <a:r>
+              <a:rPr lang="en-US" sz="1100" b="1" dirty="0">
+                <a:solidFill>
+                  <a:schemeClr val="tx2"/>
+                </a:solidFill>
+              </a:rPr>
+              <a:t>Pain</a:t>
+            </a:r>
+            <a:endParaRPr lang="en-US" sz="1100" dirty="0"/>
+          </a:p>
+        </p:txBody>
+      </p:sp>
+      <p:sp>
+        <p:nvSpPr>
+          <p:cNvPr id="55" name="Daniel Pain"/>
+          <p:cNvSpPr txBox="1"/>
+          <p:nvPr/>
+        </p:nvSpPr>
+        <p:spPr>
+          <a:xfrm>
+            <a:off x="6931152" y="2715768"/>
+            <a:ext cx="1645920" cy="347472"/>
+          </a:xfrm>
+          <a:prstGeom prst="rect">
+            <a:avLst/>
+          </a:prstGeom>
+          <a:noFill/>
+          <a:ln/>
+        </p:spPr>
+        <p:txBody>
+          <a:bodyPr wrap="square" lIns="0" tIns="0" rIns="0" bIns="0" rtlCol="0" anchor="t"/>
+          <a:lstStyle/>
+          <a:p>
+            <a:pPr marL="0" indent="0">
+              <a:buNone/>
+            </a:pPr>
+            <a:r>
+              <a:rPr lang="en-US" sz="1200" dirty="0">
+                <a:solidFill>
+                  <a:schemeClr val="tx1"/>
+                </a:solidFill>
+              </a:rPr>
+              <a:t>fake events; owners change every year</a:t>
+            </a:r>
+            <a:endParaRPr lang="en-US" sz="1200" dirty="0"/>
+          </a:p>
+        </p:txBody>
+      </p:sp>
+      <p:pic>
+        <p:nvPicPr>
+          <p:cNvPr id="56" name="Daniel Success icon" descr="Success"/>
+          <p:cNvPicPr>
+            <a:picLocks noChangeAspect="1"/>
+          </p:cNvPicPr>
+          <p:nvPr/>
+        </p:nvPicPr>
+        <p:blipFill>
+          <a:blip r:embed="rId6"/>
+          <a:stretch>
+            <a:fillRect/>
+          </a:stretch>
+        </p:blipFill>
+        <p:spPr>
+          <a:xfrm>
+            <a:off x="6931152" y="3150108"/>
+            <a:ext cx="146304" cy="146304"/>
+          </a:xfrm>
+          <a:prstGeom prst="rect">
+            <a:avLst/>
+          </a:prstGeom>
+        </p:spPr>
+      </p:pic>
+      <p:sp>
+        <p:nvSpPr>
+          <p:cNvPr id="57" name="Daniel Success label"/>
+          <p:cNvSpPr txBox="1"/>
+          <p:nvPr/>
+        </p:nvSpPr>
+        <p:spPr>
+          <a:xfrm>
+            <a:off x="7150608" y="3127248"/>
+            <a:ext cx="1371600" cy="182880"/>
+          </a:xfrm>
+          <a:prstGeom prst="rect">
+            <a:avLst/>
+          </a:prstGeom>
+          <a:noFill/>
+          <a:ln/>
+        </p:spPr>
+        <p:txBody>
+          <a:bodyPr wrap="square" lIns="0" tIns="0" rIns="0" bIns="0" rtlCol="0" anchor="ctr"/>
+          <a:lstStyle/>
+          <a:p>
+            <a:pPr marL="0" indent="0">
+              <a:buNone/>
+            </a:pPr>
+            <a:r>
+              <a:rPr lang="en-US" sz="1100" b="1" dirty="0">
+                <a:solidFill>
+                  <a:schemeClr val="tx2"/>
+                </a:solidFill>
+              </a:rPr>
+              <a:t>Success</a:t>
+            </a:r>
+            <a:endParaRPr lang="en-US" sz="1100" dirty="0"/>
+          </a:p>
+        </p:txBody>
+      </p:sp>
+      <p:sp>
+        <p:nvSpPr>
+          <p:cNvPr id="58" name="Daniel Success"/>
+          <p:cNvSpPr txBox="1"/>
+          <p:nvPr/>
+        </p:nvSpPr>
+        <p:spPr>
+          <a:xfrm>
+            <a:off x="6931152" y="3319272"/>
+            <a:ext cx="1645920" cy="347472"/>
+          </a:xfrm>
+          <a:prstGeom prst="rect">
+            <a:avLst/>
+          </a:prstGeom>
+          <a:noFill/>
+          <a:ln/>
+        </p:spPr>
+        <p:txBody>
+          <a:bodyPr wrap="square" lIns="0" tIns="0" rIns="0" bIns="0" rtlCol="0" anchor="t"/>
+          <a:lstStyle/>
+          <a:p>
+            <a:pPr marL="0" indent="0">
+              <a:buNone/>
+            </a:pPr>
+            <a:r>
+              <a:rPr lang="en-US" sz="1200" dirty="0">
+                <a:solidFill>
+                  <a:schemeClr val="tx1"/>
+                </a:solidFill>
+              </a:rPr>
+              <a:t>new festival live, its data never seen</a:t>
+            </a:r>
+            <a:endParaRPr lang="en-US" sz="1200" dirty="0"/>
+          </a:p>
+        </p:txBody>
+      </p:sp>
+      <p:sp>
+        <p:nvSpPr>
+          <p:cNvPr id="59" name="Validation band"/>
+          <p:cNvSpPr/>
+          <p:nvPr/>
+        </p:nvSpPr>
+        <p:spPr>
+          <a:xfrm>
+            <a:off x="457200" y="3904488"/>
+            <a:ext cx="8229600" cy="868680"/>
+          </a:xfrm>
+          <a:prstGeom prst="roundRect">
+            <a:avLst>
+              <a:gd name="adj" fmla="val 12632"/>
+            </a:avLst>
+          </a:prstGeom>
+          <a:solidFill>
+            <a:schemeClr val="tx2"/>
+          </a:solidFill>
+          <a:ln/>
+        </p:spPr>
+        <p:txBody>
+          <a:bodyPr/>
+          <a:lstStyle/>
+          <a:p>
+            <a:endParaRPr lang="pt-PT"/>
+          </a:p>
+        </p:txBody>
+      </p:sp>
+      <p:pic>
+        <p:nvPicPr>
+          <p:cNvPr id="60" name="Proto-personas icon" descr="Proto-personas icon"/>
+          <p:cNvPicPr>
+            <a:picLocks noChangeAspect="1"/>
+          </p:cNvPicPr>
+          <p:nvPr/>
+        </p:nvPicPr>
+        <p:blipFill>
+          <a:blip r:embed="rId10"/>
+          <a:stretch>
+            <a:fillRect/>
+          </a:stretch>
+        </p:blipFill>
+        <p:spPr>
+          <a:xfrm>
+            <a:off x="658368" y="4023360"/>
+            <a:ext cx="274320" cy="274320"/>
+          </a:xfrm>
+          <a:prstGeom prst="rect">
+            <a:avLst/>
+          </a:prstGeom>
+        </p:spPr>
+      </p:pic>
+      <p:sp>
+        <p:nvSpPr>
+          <p:cNvPr id="61" name="Proto-personas heading"/>
+          <p:cNvSpPr txBox="1"/>
+          <p:nvPr/>
+        </p:nvSpPr>
+        <p:spPr>
+          <a:xfrm>
+            <a:off x="1024128" y="3995928"/>
+            <a:ext cx="2194560" cy="329184"/>
+          </a:xfrm>
+          <a:prstGeom prst="rect">
+            <a:avLst/>
+          </a:prstGeom>
+          <a:noFill/>
+          <a:ln/>
+        </p:spPr>
+        <p:txBody>
+          <a:bodyPr wrap="square" lIns="0" tIns="0" rIns="0" bIns="0" rtlCol="0" anchor="ctr"/>
+          <a:lstStyle/>
+          <a:p>
+            <a:pPr marL="0" indent="0">
+              <a:buNone/>
+            </a:pPr>
+            <a:r>
+              <a:rPr lang="en-US" sz="1600" b="1" dirty="0">
+                <a:solidFill>
+                  <a:schemeClr val="bg1"/>
+                </a:solidFill>
+              </a:rPr>
+              <a:t>Proto-personas</a:t>
+            </a:r>
+            <a:endParaRPr lang="en-US" sz="1600" dirty="0"/>
+          </a:p>
+        </p:txBody>
+      </p:sp>
+      <p:sp>
+        <p:nvSpPr>
+          <p:cNvPr id="62" name="Proto-personas text"/>
+          <p:cNvSpPr txBox="1"/>
+          <p:nvPr/>
+        </p:nvSpPr>
+        <p:spPr>
+          <a:xfrm>
+            <a:off x="658368" y="4370832"/>
+            <a:ext cx="2514600" cy="329184"/>
+          </a:xfrm>
+          <a:prstGeom prst="rect">
+            <a:avLst/>
+          </a:prstGeom>
+          <a:noFill/>
+          <a:ln/>
+        </p:spPr>
+        <p:txBody>
+          <a:bodyPr wrap="square" lIns="0" tIns="0" rIns="0" bIns="0" rtlCol="0" anchor="t"/>
+          <a:lstStyle/>
+          <a:p>
+            <a:pPr marL="0" indent="0">
+              <a:buNone/>
+            </a:pPr>
+            <a:r>
+              <a:rPr lang="en-US" sz="1050" dirty="0">
+                <a:solidFill>
+                  <a:schemeClr val="bg1"/>
+                </a:solidFill>
+              </a:rPr>
+              <a:t>From the report and public evidence. Names are fictional; no user data yet.</a:t>
+            </a:r>
+            <a:endParaRPr lang="en-US" sz="1050" dirty="0"/>
+          </a:p>
+        </p:txBody>
+      </p:sp>
+      <p:sp>
+        <p:nvSpPr>
+          <p:cNvPr id="63" name="Student survey circle"/>
+          <p:cNvSpPr/>
+          <p:nvPr/>
+        </p:nvSpPr>
+        <p:spPr>
+          <a:xfrm>
+            <a:off x="3337560" y="4142232"/>
+            <a:ext cx="365760" cy="365760"/>
+          </a:xfrm>
+          <a:prstGeom prst="ellipse">
+            <a:avLst/>
+          </a:prstGeom>
+          <a:solidFill>
+            <a:schemeClr val="accent1"/>
+          </a:solidFill>
+          <a:ln/>
+        </p:spPr>
+        <p:txBody>
+          <a:bodyPr/>
+          <a:lstStyle/>
+          <a:p>
+            <a:endParaRPr lang="pt-PT"/>
+          </a:p>
+        </p:txBody>
+      </p:sp>
+      <p:pic>
+        <p:nvPicPr>
+          <p:cNvPr id="64" name="Student survey icon" descr="Student survey"/>
+          <p:cNvPicPr>
+            <a:picLocks noChangeAspect="1"/>
+          </p:cNvPicPr>
+          <p:nvPr/>
+        </p:nvPicPr>
+        <p:blipFill>
+          <a:blip r:embed="rId11"/>
+          <a:stretch>
+            <a:fillRect/>
+          </a:stretch>
+        </p:blipFill>
+        <p:spPr>
+          <a:xfrm>
+            <a:off x="3419856" y="4224528"/>
+            <a:ext cx="201168" cy="201168"/>
+          </a:xfrm>
+          <a:prstGeom prst="rect">
+            <a:avLst/>
+          </a:prstGeom>
+        </p:spPr>
+      </p:pic>
+      <p:sp>
+        <p:nvSpPr>
+          <p:cNvPr id="65" name="Student survey label"/>
+          <p:cNvSpPr txBox="1"/>
+          <p:nvPr/>
+        </p:nvSpPr>
+        <p:spPr>
+          <a:xfrm>
+            <a:off x="3794760" y="4114800"/>
+            <a:ext cx="1234440" cy="219456"/>
+          </a:xfrm>
+          <a:prstGeom prst="rect">
+            <a:avLst/>
+          </a:prstGeom>
+          <a:noFill/>
+          <a:ln/>
+        </p:spPr>
+        <p:txBody>
+          <a:bodyPr wrap="square" lIns="0" tIns="0" rIns="0" bIns="0" rtlCol="0" anchor="ctr"/>
+          <a:lstStyle/>
+          <a:p>
+            <a:pPr marL="0" indent="0">
+              <a:buNone/>
+            </a:pPr>
+            <a:r>
+              <a:rPr lang="en-US" sz="1200" b="1" dirty="0">
+                <a:solidFill>
+                  <a:schemeClr val="bg1"/>
+                </a:solidFill>
+              </a:rPr>
+              <a:t>Student survey</a:t>
+            </a:r>
+            <a:endParaRPr lang="en-US" sz="1200" dirty="0"/>
+          </a:p>
+        </p:txBody>
+      </p:sp>
+      <p:sp>
+        <p:nvSpPr>
+          <p:cNvPr id="66" name="Student survey target"/>
+          <p:cNvSpPr txBox="1"/>
+          <p:nvPr/>
+        </p:nvSpPr>
+        <p:spPr>
+          <a:xfrm>
+            <a:off x="3794760" y="4334256"/>
+            <a:ext cx="1234440" cy="201168"/>
+          </a:xfrm>
+          <a:prstGeom prst="rect">
+            <a:avLst/>
+          </a:prstGeom>
+          <a:noFill/>
+          <a:ln/>
+        </p:spPr>
+        <p:txBody>
+          <a:bodyPr wrap="square" lIns="0" tIns="0" rIns="0" bIns="0" rtlCol="0" anchor="ctr"/>
+          <a:lstStyle/>
+          <a:p>
+            <a:pPr marL="0" indent="0">
+              <a:buNone/>
+            </a:pPr>
+            <a:r>
+              <a:rPr lang="en-US" sz="1100" dirty="0">
+                <a:solidFill>
+                  <a:schemeClr val="accent1"/>
+                </a:solidFill>
+              </a:rPr>
+              <a:t>validates Rita</a:t>
+            </a:r>
+            <a:endParaRPr lang="en-US" sz="1100" dirty="0"/>
+          </a:p>
+        </p:txBody>
+      </p:sp>
+      <p:sp>
+        <p:nvSpPr>
+          <p:cNvPr id="67" name="Security interview circle"/>
+          <p:cNvSpPr/>
+          <p:nvPr/>
+        </p:nvSpPr>
+        <p:spPr>
+          <a:xfrm>
+            <a:off x="5120640" y="4142232"/>
+            <a:ext cx="365760" cy="365760"/>
+          </a:xfrm>
+          <a:prstGeom prst="ellipse">
+            <a:avLst/>
+          </a:prstGeom>
+          <a:solidFill>
+            <a:schemeClr val="accent1"/>
+          </a:solidFill>
+          <a:ln/>
+        </p:spPr>
+        <p:txBody>
+          <a:bodyPr/>
+          <a:lstStyle/>
+          <a:p>
+            <a:endParaRPr lang="pt-PT"/>
+          </a:p>
+        </p:txBody>
+      </p:sp>
+      <p:pic>
+        <p:nvPicPr>
+          <p:cNvPr id="68" name="Security interview icon" descr="Security interview"/>
+          <p:cNvPicPr>
+            <a:picLocks noChangeAspect="1"/>
+          </p:cNvPicPr>
+          <p:nvPr/>
+        </p:nvPicPr>
+        <p:blipFill>
+          <a:blip r:embed="rId12"/>
+          <a:stretch>
+            <a:fillRect/>
+          </a:stretch>
+        </p:blipFill>
+        <p:spPr>
+          <a:xfrm>
+            <a:off x="5202936" y="4224528"/>
+            <a:ext cx="201168" cy="201168"/>
+          </a:xfrm>
+          <a:prstGeom prst="rect">
+            <a:avLst/>
+          </a:prstGeom>
+        </p:spPr>
+      </p:pic>
+      <p:sp>
+        <p:nvSpPr>
+          <p:cNvPr id="69" name="Security interview label"/>
+          <p:cNvSpPr txBox="1"/>
+          <p:nvPr/>
+        </p:nvSpPr>
+        <p:spPr>
+          <a:xfrm>
+            <a:off x="5577840" y="4114800"/>
+            <a:ext cx="1234440" cy="219456"/>
+          </a:xfrm>
+          <a:prstGeom prst="rect">
+            <a:avLst/>
+          </a:prstGeom>
+          <a:noFill/>
+          <a:ln/>
+        </p:spPr>
+        <p:txBody>
+          <a:bodyPr wrap="square" lIns="0" tIns="0" rIns="0" bIns="0" rtlCol="0" anchor="ctr"/>
+          <a:lstStyle/>
+          <a:p>
+            <a:pPr marL="0" indent="0">
+              <a:buNone/>
+            </a:pPr>
+            <a:r>
+              <a:rPr lang="en-US" sz="1200" b="1" dirty="0">
+                <a:solidFill>
+                  <a:schemeClr val="bg1"/>
+                </a:solidFill>
+              </a:rPr>
+              <a:t>Security interview</a:t>
+            </a:r>
+            <a:endParaRPr lang="en-US" sz="1200" dirty="0"/>
+          </a:p>
+        </p:txBody>
+      </p:sp>
+      <p:sp>
+        <p:nvSpPr>
+          <p:cNvPr id="70" name="Security interview target"/>
+          <p:cNvSpPr txBox="1"/>
+          <p:nvPr/>
+        </p:nvSpPr>
+        <p:spPr>
+          <a:xfrm>
+            <a:off x="5577840" y="4334256"/>
+            <a:ext cx="1234440" cy="201168"/>
+          </a:xfrm>
+          <a:prstGeom prst="rect">
+            <a:avLst/>
+          </a:prstGeom>
+          <a:noFill/>
+          <a:ln/>
+        </p:spPr>
+        <p:txBody>
+          <a:bodyPr wrap="square" lIns="0" tIns="0" rIns="0" bIns="0" rtlCol="0" anchor="ctr"/>
+          <a:lstStyle/>
+          <a:p>
+            <a:pPr marL="0" indent="0">
+              <a:buNone/>
+            </a:pPr>
+            <a:r>
+              <a:rPr lang="en-US" sz="1100" dirty="0">
+                <a:solidFill>
+                  <a:schemeClr val="accent1"/>
+                </a:solidFill>
+              </a:rPr>
+              <a:t>validates Miguel</a:t>
+            </a:r>
+            <a:endParaRPr lang="en-US" sz="1100" dirty="0"/>
+          </a:p>
+        </p:txBody>
+      </p:sp>
+      <p:sp>
+        <p:nvSpPr>
+          <p:cNvPr id="71" name="Organiser talk circle"/>
+          <p:cNvSpPr/>
+          <p:nvPr/>
+        </p:nvSpPr>
+        <p:spPr>
+          <a:xfrm>
+            <a:off x="6903720" y="4142232"/>
+            <a:ext cx="365760" cy="365760"/>
+          </a:xfrm>
+          <a:prstGeom prst="ellipse">
+            <a:avLst/>
+          </a:prstGeom>
+          <a:solidFill>
+            <a:schemeClr val="accent1"/>
+          </a:solidFill>
+          <a:ln/>
+        </p:spPr>
+        <p:txBody>
+          <a:bodyPr/>
+          <a:lstStyle/>
+          <a:p>
+            <a:endParaRPr lang="pt-PT"/>
+          </a:p>
+        </p:txBody>
+      </p:sp>
+      <p:pic>
+        <p:nvPicPr>
+          <p:cNvPr id="72" name="Organiser talk icon" descr="Organiser talk"/>
+          <p:cNvPicPr>
+            <a:picLocks noChangeAspect="1"/>
+          </p:cNvPicPr>
+          <p:nvPr/>
+        </p:nvPicPr>
+        <p:blipFill>
+          <a:blip r:embed="rId13"/>
+          <a:stretch>
+            <a:fillRect/>
+          </a:stretch>
+        </p:blipFill>
+        <p:spPr>
+          <a:xfrm>
+            <a:off x="6986016" y="4224528"/>
+            <a:ext cx="201168" cy="201168"/>
+          </a:xfrm>
+          <a:prstGeom prst="rect">
+            <a:avLst/>
+          </a:prstGeom>
+        </p:spPr>
+      </p:pic>
+      <p:sp>
+        <p:nvSpPr>
+          <p:cNvPr id="73" name="Organiser talk label"/>
+          <p:cNvSpPr txBox="1"/>
+          <p:nvPr/>
+        </p:nvSpPr>
+        <p:spPr>
+          <a:xfrm>
+            <a:off x="7360920" y="4114800"/>
+            <a:ext cx="1234440" cy="219456"/>
+          </a:xfrm>
+          <a:prstGeom prst="rect">
+            <a:avLst/>
+          </a:prstGeom>
+          <a:noFill/>
+          <a:ln/>
+        </p:spPr>
+        <p:txBody>
+          <a:bodyPr wrap="square" lIns="0" tIns="0" rIns="0" bIns="0" rtlCol="0" anchor="ctr"/>
+          <a:lstStyle/>
+          <a:p>
+            <a:pPr marL="0" indent="0">
+              <a:buNone/>
+            </a:pPr>
+            <a:r>
+              <a:rPr lang="en-US" sz="1200" b="1" dirty="0">
+                <a:solidFill>
+                  <a:schemeClr val="bg1"/>
+                </a:solidFill>
+              </a:rPr>
+              <a:t>Organiser talk</a:t>
+            </a:r>
+            <a:endParaRPr lang="en-US" sz="1200" dirty="0"/>
+          </a:p>
+        </p:txBody>
+      </p:sp>
+      <p:sp>
+        <p:nvSpPr>
+          <p:cNvPr id="74" name="Organiser talk target"/>
+          <p:cNvSpPr txBox="1"/>
+          <p:nvPr/>
+        </p:nvSpPr>
+        <p:spPr>
+          <a:xfrm>
+            <a:off x="7360920" y="4334256"/>
+            <a:ext cx="1234440" cy="201168"/>
+          </a:xfrm>
+          <a:prstGeom prst="rect">
+            <a:avLst/>
+          </a:prstGeom>
+          <a:noFill/>
+          <a:ln/>
+        </p:spPr>
+        <p:txBody>
+          <a:bodyPr wrap="square" lIns="0" tIns="0" rIns="0" bIns="0" rtlCol="0" anchor="ctr"/>
+          <a:lstStyle/>
+          <a:p>
+            <a:pPr marL="0" indent="0">
+              <a:buNone/>
+            </a:pPr>
+            <a:r>
+              <a:rPr lang="en-US" sz="1100" dirty="0">
+                <a:solidFill>
+                  <a:schemeClr val="accent1"/>
+                </a:solidFill>
+              </a:rPr>
+              <a:t>validates Sofia</a:t>
+            </a:r>
+            <a:endParaRPr lang="en-US" sz="1100" dirty="0"/>
+          </a:p>
+        </p:txBody>
+      </p:sp>
+    </p:spTree>
+  </p:cSld>
+  <p:clrMapOvr>
+    <a:masterClrMapping/>
+  </p:clrMapOvr>
+</p:sld>
+</file>
+
+<file path=ppt/slides/slide3.xml><?xml version="1.0" encoding="utf-8"?>
 <p:sld xmlns:a="http://schemas.openxmlformats.org/drawingml/2006/main" xmlns:r="http://schemas.openxmlformats.org/officeDocument/2006/relationships" xmlns:p="http://schemas.openxmlformats.org/presentationml/2006/main">
   <p:cSld name="Slide 2">
     <p:spTree>
@@ -1573,9 +3768,11 @@
       <p:sp>
         <p:nvSpPr>
           <p:cNvPr id="2" name="Text 0"/>
-          <p:cNvSpPr/>
+          <p:cNvSpPr>
+            <a:spLocks noGrp="1"/>
+          </p:cNvSpPr>
           <p:nvPr>
-            <p:ph idx="100" type="title" hasCustomPrompt="1"/>
+            <p:ph type="title" idx="100" hasCustomPrompt="1"/>
           </p:nvPr>
         </p:nvSpPr>
         <p:spPr>
@@ -1593,7 +3790,7 @@
           <a:bodyPr wrap="square" lIns="0" tIns="0" rIns="0" bIns="0" rtlCol="0" anchor="ctr"/>
           <a:lstStyle/>
           <a:p>
-            <a:pPr indent="0" marL="0">
+            <a:pPr marL="0" indent="0">
               <a:buNone/>
             </a:pPr>
             <a:r>
@@ -1629,170 +3826,17 @@
           </a:solidFill>
           <a:ln/>
         </p:spPr>
+        <p:txBody>
+          <a:bodyPr/>
+          <a:lstStyle/>
+          <a:p>
+            <a:endParaRPr lang="pt-PT"/>
+          </a:p>
+        </p:txBody>
       </p:sp>
       <p:pic>
         <p:nvPicPr>
-          <p:cNvPr id="4" name="Participant app icon" descr="Participant app icon">    </p:cNvPr>
-          <p:cNvPicPr>
-            <a:picLocks noChangeAspect="1"/>
-          </p:cNvPicPr>
-          <p:nvPr/>
-        </p:nvPicPr>
-        <p:blipFill>
-          <a:blip r:embed="rId1"/>
-          <a:stretch>
-            <a:fillRect/>
-          </a:stretch>
-        </p:blipFill>
-        <p:spPr>
-          <a:xfrm>
-            <a:off x="685800" y="1298448"/>
-            <a:ext cx="365760" cy="365760"/>
-          </a:xfrm>
-          <a:prstGeom prst="rect">
-            <a:avLst/>
-          </a:prstGeom>
-        </p:spPr>
-      </p:pic>
-      <p:sp>
-        <p:nvSpPr>
-          <p:cNvPr id="5" name="Participant app heading"/>
-          <p:cNvSpPr txBox="1"/>
-          <p:nvPr/>
-        </p:nvSpPr>
-        <p:spPr>
-          <a:xfrm>
-            <a:off x="1188720" y="1252728"/>
-            <a:ext cx="2514600" cy="457200"/>
-          </a:xfrm>
-          <a:prstGeom prst="rect">
-            <a:avLst/>
-          </a:prstGeom>
-          <a:noFill/>
-          <a:ln/>
-        </p:spPr>
-        <p:txBody>
-          <a:bodyPr wrap="square" lIns="0" tIns="0" rIns="0" bIns="0" rtlCol="0" anchor="ctr"/>
-          <a:lstStyle/>
-          <a:p>
-            <a:pPr indent="0" marL="0">
-              <a:buNone/>
-            </a:pPr>
-            <a:r>
-              <a:rPr lang="en-US" sz="2000" b="1" dirty="0">
-                <a:solidFill>
-                  <a:schemeClr val="tx2"/>
-                </a:solidFill>
-              </a:rPr>
-              <a:t>Participant app</a:t>
-            </a:r>
-            <a:endParaRPr lang="en-US" sz="2000" dirty="0"/>
-          </a:p>
-        </p:txBody>
-      </p:sp>
-      <p:sp>
-        <p:nvSpPr>
-          <p:cNvPr id="6" name="Icon circle: Venue map with points of interest"/>
-          <p:cNvSpPr/>
-          <p:nvPr/>
-        </p:nvSpPr>
-        <p:spPr>
-          <a:xfrm>
-            <a:off x="685800" y="1911096"/>
-            <a:ext cx="365760" cy="365760"/>
-          </a:xfrm>
-          <a:prstGeom prst="ellipse">
-            <a:avLst/>
-          </a:prstGeom>
-          <a:solidFill>
-            <a:schemeClr val="tx2"/>
-          </a:solidFill>
-          <a:ln/>
-        </p:spPr>
-      </p:sp>
-      <p:pic>
-        <p:nvPicPr>
-          <p:cNvPr id="7" name="Icon: Venue map with points of interest" descr="Venue map with points of interest">    </p:cNvPr>
-          <p:cNvPicPr>
-            <a:picLocks noChangeAspect="1"/>
-          </p:cNvPicPr>
-          <p:nvPr/>
-        </p:nvPicPr>
-        <p:blipFill>
-          <a:blip r:embed="rId2"/>
-          <a:stretch>
-            <a:fillRect/>
-          </a:stretch>
-        </p:blipFill>
-        <p:spPr>
-          <a:xfrm>
-            <a:off x="768096" y="1993392"/>
-            <a:ext cx="201168" cy="201168"/>
-          </a:xfrm>
-          <a:prstGeom prst="rect">
-            <a:avLst/>
-          </a:prstGeom>
-        </p:spPr>
-      </p:pic>
-      <p:sp>
-        <p:nvSpPr>
-          <p:cNvPr id="8" name="Feature: Venue map with points of interest"/>
-          <p:cNvSpPr txBox="1"/>
-          <p:nvPr/>
-        </p:nvSpPr>
-        <p:spPr>
-          <a:xfrm>
-            <a:off x="1188720" y="1874520"/>
-            <a:ext cx="2560320" cy="438912"/>
-          </a:xfrm>
-          <a:prstGeom prst="rect">
-            <a:avLst/>
-          </a:prstGeom>
-          <a:noFill/>
-          <a:ln/>
-        </p:spPr>
-        <p:txBody>
-          <a:bodyPr wrap="square" lIns="0" tIns="0" rIns="0" bIns="0" rtlCol="0" anchor="ctr"/>
-          <a:lstStyle/>
-          <a:p>
-            <a:pPr indent="0" marL="0">
-              <a:buNone/>
-            </a:pPr>
-            <a:r>
-              <a:rPr lang="en-US" sz="1400" dirty="0">
-                <a:solidFill>
-                  <a:schemeClr val="tx1"/>
-                </a:solidFill>
-              </a:rPr>
-              <a:t>Venue map with points of interest</a:t>
-            </a:r>
-            <a:endParaRPr lang="en-US" sz="1400" dirty="0"/>
-          </a:p>
-        </p:txBody>
-      </p:sp>
-      <p:sp>
-        <p:nvSpPr>
-          <p:cNvPr id="9" name="Icon circle: Ask for help, 112 shown first"/>
-          <p:cNvSpPr/>
-          <p:nvPr/>
-        </p:nvSpPr>
-        <p:spPr>
-          <a:xfrm>
-            <a:off x="685800" y="2404872"/>
-            <a:ext cx="365760" cy="365760"/>
-          </a:xfrm>
-          <a:prstGeom prst="ellipse">
-            <a:avLst/>
-          </a:prstGeom>
-          <a:solidFill>
-            <a:schemeClr val="tx2"/>
-          </a:solidFill>
-          <a:ln/>
-        </p:spPr>
-      </p:sp>
-      <p:pic>
-        <p:nvPicPr>
-          <p:cNvPr id="10" name="Icon: Ask for help, 112 shown first" descr="Ask for help, 112 shown first">    </p:cNvPr>
+          <p:cNvPr id="4" name="Participant app icon" descr="Participant app icon"/>
           <p:cNvPicPr>
             <a:picLocks noChangeAspect="1"/>
           </p:cNvPicPr>
@@ -1806,8 +3850,8 @@
         </p:blipFill>
         <p:spPr>
           <a:xfrm>
-            <a:off x="768096" y="2487168"/>
-            <a:ext cx="201168" cy="201168"/>
+            <a:off x="685800" y="1298448"/>
+            <a:ext cx="365760" cy="365760"/>
           </a:xfrm>
           <a:prstGeom prst="rect">
             <a:avLst/>
@@ -1816,14 +3860,14 @@
       </p:pic>
       <p:sp>
         <p:nvSpPr>
-          <p:cNvPr id="11" name="Feature: Ask for help, 112 shown first"/>
-          <p:cNvSpPr txBox="1"/>
-          <p:nvPr/>
-        </p:nvSpPr>
-        <p:spPr>
-          <a:xfrm>
-            <a:off x="1188720" y="2368296"/>
-            <a:ext cx="2560320" cy="438912"/>
+          <p:cNvPr id="5" name="Participant app heading"/>
+          <p:cNvSpPr txBox="1"/>
+          <p:nvPr/>
+        </p:nvSpPr>
+        <p:spPr>
+          <a:xfrm>
+            <a:off x="1188720" y="1252728"/>
+            <a:ext cx="2514600" cy="457200"/>
           </a:xfrm>
           <a:prstGeom prst="rect">
             <a:avLst/>
@@ -1835,30 +3879,30 @@
           <a:bodyPr wrap="square" lIns="0" tIns="0" rIns="0" bIns="0" rtlCol="0" anchor="ctr"/>
           <a:lstStyle/>
           <a:p>
-            <a:pPr indent="0" marL="0">
-              <a:buNone/>
-            </a:pPr>
-            <a:r>
-              <a:rPr lang="en-US" sz="1400" dirty="0">
-                <a:solidFill>
-                  <a:schemeClr val="tx1"/>
-                </a:solidFill>
-              </a:rPr>
-              <a:t>Ask for help, 112 shown first</a:t>
-            </a:r>
-            <a:endParaRPr lang="en-US" sz="1400" dirty="0"/>
-          </a:p>
-        </p:txBody>
-      </p:sp>
-      <p:sp>
-        <p:nvSpPr>
-          <p:cNvPr id="12" name="Icon circle: Transport home: STCP + shuttles"/>
+            <a:pPr marL="0" indent="0">
+              <a:buNone/>
+            </a:pPr>
+            <a:r>
+              <a:rPr lang="en-US" sz="2000" b="1" dirty="0">
+                <a:solidFill>
+                  <a:schemeClr val="tx2"/>
+                </a:solidFill>
+              </a:rPr>
+              <a:t>Participant app</a:t>
+            </a:r>
+            <a:endParaRPr lang="en-US" sz="2000" dirty="0"/>
+          </a:p>
+        </p:txBody>
+      </p:sp>
+      <p:sp>
+        <p:nvSpPr>
+          <p:cNvPr id="6" name="Icon circle: Venue map with points of interest"/>
           <p:cNvSpPr/>
           <p:nvPr/>
         </p:nvSpPr>
         <p:spPr>
           <a:xfrm>
-            <a:off x="685800" y="2898648"/>
+            <a:off x="685800" y="1911096"/>
             <a:ext cx="365760" cy="365760"/>
           </a:xfrm>
           <a:prstGeom prst="ellipse">
@@ -1869,10 +3913,17 @@
           </a:solidFill>
           <a:ln/>
         </p:spPr>
+        <p:txBody>
+          <a:bodyPr/>
+          <a:lstStyle/>
+          <a:p>
+            <a:endParaRPr lang="pt-PT"/>
+          </a:p>
+        </p:txBody>
       </p:sp>
       <p:pic>
         <p:nvPicPr>
-          <p:cNvPr id="13" name="Icon: Transport home: STCP + shuttles" descr="Transport home: STCP + shuttles">    </p:cNvPr>
+          <p:cNvPr id="7" name="Icon: Venue map with points of interest" descr="Venue map with points of interest"/>
           <p:cNvPicPr>
             <a:picLocks noChangeAspect="1"/>
           </p:cNvPicPr>
@@ -1886,7 +3937,7 @@
         </p:blipFill>
         <p:spPr>
           <a:xfrm>
-            <a:off x="768096" y="2980944"/>
+            <a:off x="768096" y="1993392"/>
             <a:ext cx="201168" cy="201168"/>
           </a:xfrm>
           <a:prstGeom prst="rect">
@@ -1896,13 +3947,13 @@
       </p:pic>
       <p:sp>
         <p:nvSpPr>
-          <p:cNvPr id="14" name="Feature: Transport home: STCP + shuttles"/>
-          <p:cNvSpPr txBox="1"/>
-          <p:nvPr/>
-        </p:nvSpPr>
-        <p:spPr>
-          <a:xfrm>
-            <a:off x="1188720" y="2862072"/>
+          <p:cNvPr id="8" name="Feature: Venue map with points of interest"/>
+          <p:cNvSpPr txBox="1"/>
+          <p:nvPr/>
+        </p:nvSpPr>
+        <p:spPr>
+          <a:xfrm>
+            <a:off x="1188720" y="1874520"/>
             <a:ext cx="2560320" cy="438912"/>
           </a:xfrm>
           <a:prstGeom prst="rect">
@@ -1915,7 +3966,7 @@
           <a:bodyPr wrap="square" lIns="0" tIns="0" rIns="0" bIns="0" rtlCol="0" anchor="ctr"/>
           <a:lstStyle/>
           <a:p>
-            <a:pPr indent="0" marL="0">
+            <a:pPr marL="0" indent="0">
               <a:buNone/>
             </a:pPr>
             <a:r>
@@ -1924,7 +3975,7 @@
                   <a:schemeClr val="tx1"/>
                 </a:solidFill>
               </a:rPr>
-              <a:t>Transport home: STCP + shuttles</a:t>
+              <a:t>Venue map with points of interest</a:t>
             </a:r>
             <a:endParaRPr lang="en-US" sz="1400" dirty="0"/>
           </a:p>
@@ -1932,13 +3983,13 @@
       </p:sp>
       <p:sp>
         <p:nvSpPr>
-          <p:cNvPr id="15" name="Icon circle: Live announcements, timestamped"/>
+          <p:cNvPr id="9" name="Icon circle: Ask for help, 112 shown first"/>
           <p:cNvSpPr/>
           <p:nvPr/>
         </p:nvSpPr>
         <p:spPr>
           <a:xfrm>
-            <a:off x="685800" y="3392424"/>
+            <a:off x="685800" y="2404872"/>
             <a:ext cx="365760" cy="365760"/>
           </a:xfrm>
           <a:prstGeom prst="ellipse">
@@ -1949,10 +4000,17 @@
           </a:solidFill>
           <a:ln/>
         </p:spPr>
+        <p:txBody>
+          <a:bodyPr/>
+          <a:lstStyle/>
+          <a:p>
+            <a:endParaRPr lang="pt-PT"/>
+          </a:p>
+        </p:txBody>
       </p:sp>
       <p:pic>
         <p:nvPicPr>
-          <p:cNvPr id="16" name="Icon: Live announcements, timestamped" descr="Live announcements, timestamped">    </p:cNvPr>
+          <p:cNvPr id="10" name="Icon: Ask for help, 112 shown first" descr="Ask for help, 112 shown first"/>
           <p:cNvPicPr>
             <a:picLocks noChangeAspect="1"/>
           </p:cNvPicPr>
@@ -1966,7 +4024,7 @@
         </p:blipFill>
         <p:spPr>
           <a:xfrm>
-            <a:off x="768096" y="3474720"/>
+            <a:off x="768096" y="2487168"/>
             <a:ext cx="201168" cy="201168"/>
           </a:xfrm>
           <a:prstGeom prst="rect">
@@ -1976,13 +4034,13 @@
       </p:pic>
       <p:sp>
         <p:nvSpPr>
-          <p:cNvPr id="17" name="Feature: Live announcements, timestamped"/>
-          <p:cNvSpPr txBox="1"/>
-          <p:nvPr/>
-        </p:nvSpPr>
-        <p:spPr>
-          <a:xfrm>
-            <a:off x="1188720" y="3355848"/>
+          <p:cNvPr id="11" name="Feature: Ask for help, 112 shown first"/>
+          <p:cNvSpPr txBox="1"/>
+          <p:nvPr/>
+        </p:nvSpPr>
+        <p:spPr>
+          <a:xfrm>
+            <a:off x="1188720" y="2368296"/>
             <a:ext cx="2560320" cy="438912"/>
           </a:xfrm>
           <a:prstGeom prst="rect">
@@ -1995,7 +4053,7 @@
           <a:bodyPr wrap="square" lIns="0" tIns="0" rIns="0" bIns="0" rtlCol="0" anchor="ctr"/>
           <a:lstStyle/>
           <a:p>
-            <a:pPr indent="0" marL="0">
+            <a:pPr marL="0" indent="0">
               <a:buNone/>
             </a:pPr>
             <a:r>
@@ -2004,7 +4062,7 @@
                   <a:schemeClr val="tx1"/>
                 </a:solidFill>
               </a:rPr>
-              <a:t>Live announcements, timestamped</a:t>
+              <a:t>Ask for help, 112 shown first</a:t>
             </a:r>
             <a:endParaRPr lang="en-US" sz="1400" dirty="0"/>
           </a:p>
@@ -2012,13 +4070,13 @@
       </p:sp>
       <p:sp>
         <p:nvSpPr>
-          <p:cNvPr id="18" name="Icon circle: Report problems on the map"/>
+          <p:cNvPr id="12" name="Icon circle: Transport home: STCP + shuttles"/>
           <p:cNvSpPr/>
           <p:nvPr/>
         </p:nvSpPr>
         <p:spPr>
           <a:xfrm>
-            <a:off x="685800" y="3886200"/>
+            <a:off x="685800" y="2898648"/>
             <a:ext cx="365760" cy="365760"/>
           </a:xfrm>
           <a:prstGeom prst="ellipse">
@@ -2029,10 +4087,17 @@
           </a:solidFill>
           <a:ln/>
         </p:spPr>
+        <p:txBody>
+          <a:bodyPr/>
+          <a:lstStyle/>
+          <a:p>
+            <a:endParaRPr lang="pt-PT"/>
+          </a:p>
+        </p:txBody>
       </p:sp>
       <p:pic>
         <p:nvPicPr>
-          <p:cNvPr id="19" name="Icon: Report problems on the map" descr="Report problems on the map">    </p:cNvPr>
+          <p:cNvPr id="13" name="Icon: Transport home: STCP + shuttles" descr="Transport home: STCP + shuttles"/>
           <p:cNvPicPr>
             <a:picLocks noChangeAspect="1"/>
           </p:cNvPicPr>
@@ -2046,7 +4111,7 @@
         </p:blipFill>
         <p:spPr>
           <a:xfrm>
-            <a:off x="768096" y="3968496"/>
+            <a:off x="768096" y="2980944"/>
             <a:ext cx="201168" cy="201168"/>
           </a:xfrm>
           <a:prstGeom prst="rect">
@@ -2056,13 +4121,13 @@
       </p:pic>
       <p:sp>
         <p:nvSpPr>
-          <p:cNvPr id="20" name="Feature: Report problems on the map"/>
-          <p:cNvSpPr txBox="1"/>
-          <p:nvPr/>
-        </p:nvSpPr>
-        <p:spPr>
-          <a:xfrm>
-            <a:off x="1188720" y="3849624"/>
+          <p:cNvPr id="14" name="Feature: Transport home: STCP + shuttles"/>
+          <p:cNvSpPr txBox="1"/>
+          <p:nvPr/>
+        </p:nvSpPr>
+        <p:spPr>
+          <a:xfrm>
+            <a:off x="1188720" y="2862072"/>
             <a:ext cx="2560320" cy="438912"/>
           </a:xfrm>
           <a:prstGeom prst="rect">
@@ -2075,7 +4140,7 @@
           <a:bodyPr wrap="square" lIns="0" tIns="0" rIns="0" bIns="0" rtlCol="0" anchor="ctr"/>
           <a:lstStyle/>
           <a:p>
-            <a:pPr indent="0" marL="0">
+            <a:pPr marL="0" indent="0">
               <a:buNone/>
             </a:pPr>
             <a:r>
@@ -2084,7 +4149,7 @@
                   <a:schemeClr val="tx1"/>
                 </a:solidFill>
               </a:rPr>
-              <a:t>Report problems on the map</a:t>
+              <a:t>Transport home: STCP + shuttles</a:t>
             </a:r>
             <a:endParaRPr lang="en-US" sz="1400" dirty="0"/>
           </a:p>
@@ -2092,29 +4157,34 @@
       </p:sp>
       <p:sp>
         <p:nvSpPr>
-          <p:cNvPr id="21" name="Event team backoffice card"/>
+          <p:cNvPr id="15" name="Icon circle: Live announcements, timestamped"/>
           <p:cNvSpPr/>
           <p:nvPr/>
         </p:nvSpPr>
         <p:spPr>
           <a:xfrm>
-            <a:off x="5257800" y="1097280"/>
-            <a:ext cx="3429000" cy="3337560"/>
-          </a:xfrm>
-          <a:prstGeom prst="roundRect">
-            <a:avLst>
-              <a:gd name="adj" fmla="val 3288"/>
-            </a:avLst>
+            <a:off x="685800" y="3392424"/>
+            <a:ext cx="365760" cy="365760"/>
+          </a:xfrm>
+          <a:prstGeom prst="ellipse">
+            <a:avLst/>
           </a:prstGeom>
           <a:solidFill>
-            <a:schemeClr val="bg2"/>
+            <a:schemeClr val="tx2"/>
           </a:solidFill>
           <a:ln/>
         </p:spPr>
+        <p:txBody>
+          <a:bodyPr/>
+          <a:lstStyle/>
+          <a:p>
+            <a:endParaRPr lang="pt-PT"/>
+          </a:p>
+        </p:txBody>
       </p:sp>
       <p:pic>
         <p:nvPicPr>
-          <p:cNvPr id="22" name="Event team backoffice icon" descr="Event team backoffice icon">    </p:cNvPr>
+          <p:cNvPr id="16" name="Icon: Live announcements, timestamped" descr="Live announcements, timestamped"/>
           <p:cNvPicPr>
             <a:picLocks noChangeAspect="1"/>
           </p:cNvPicPr>
@@ -2128,8 +4198,8 @@
         </p:blipFill>
         <p:spPr>
           <a:xfrm>
-            <a:off x="5486400" y="1298448"/>
-            <a:ext cx="365760" cy="365760"/>
+            <a:off x="768096" y="3474720"/>
+            <a:ext cx="201168" cy="201168"/>
           </a:xfrm>
           <a:prstGeom prst="rect">
             <a:avLst/>
@@ -2138,14 +4208,14 @@
       </p:pic>
       <p:sp>
         <p:nvSpPr>
-          <p:cNvPr id="23" name="Event team backoffice heading"/>
-          <p:cNvSpPr txBox="1"/>
-          <p:nvPr/>
-        </p:nvSpPr>
-        <p:spPr>
-          <a:xfrm>
-            <a:off x="5989320" y="1252728"/>
-            <a:ext cx="2514600" cy="457200"/>
+          <p:cNvPr id="17" name="Feature: Live announcements, timestamped"/>
+          <p:cNvSpPr txBox="1"/>
+          <p:nvPr/>
+        </p:nvSpPr>
+        <p:spPr>
+          <a:xfrm>
+            <a:off x="1188720" y="3355848"/>
+            <a:ext cx="2560320" cy="438912"/>
           </a:xfrm>
           <a:prstGeom prst="rect">
             <a:avLst/>
@@ -2157,30 +4227,30 @@
           <a:bodyPr wrap="square" lIns="0" tIns="0" rIns="0" bIns="0" rtlCol="0" anchor="ctr"/>
           <a:lstStyle/>
           <a:p>
-            <a:pPr indent="0" marL="0">
-              <a:buNone/>
-            </a:pPr>
-            <a:r>
-              <a:rPr lang="en-US" sz="2000" b="1" dirty="0">
-                <a:solidFill>
-                  <a:schemeClr val="tx2"/>
-                </a:solidFill>
-              </a:rPr>
-              <a:t>Event team backoffice</a:t>
-            </a:r>
-            <a:endParaRPr lang="en-US" sz="2000" dirty="0"/>
-          </a:p>
-        </p:txBody>
-      </p:sp>
-      <p:sp>
-        <p:nvSpPr>
-          <p:cNvPr id="24" name="Icon circle: Events, roles and response teams"/>
+            <a:pPr marL="0" indent="0">
+              <a:buNone/>
+            </a:pPr>
+            <a:r>
+              <a:rPr lang="en-US" sz="1400" dirty="0">
+                <a:solidFill>
+                  <a:schemeClr val="tx1"/>
+                </a:solidFill>
+              </a:rPr>
+              <a:t>Live announcements, timestamped</a:t>
+            </a:r>
+            <a:endParaRPr lang="en-US" sz="1400" dirty="0"/>
+          </a:p>
+        </p:txBody>
+      </p:sp>
+      <p:sp>
+        <p:nvSpPr>
+          <p:cNvPr id="18" name="Icon circle: Report problems on the map"/>
           <p:cNvSpPr/>
           <p:nvPr/>
         </p:nvSpPr>
         <p:spPr>
           <a:xfrm>
-            <a:off x="5486400" y="1911096"/>
+            <a:off x="685800" y="3886200"/>
             <a:ext cx="365760" cy="365760"/>
           </a:xfrm>
           <a:prstGeom prst="ellipse">
@@ -2191,10 +4261,17 @@
           </a:solidFill>
           <a:ln/>
         </p:spPr>
+        <p:txBody>
+          <a:bodyPr/>
+          <a:lstStyle/>
+          <a:p>
+            <a:endParaRPr lang="pt-PT"/>
+          </a:p>
+        </p:txBody>
       </p:sp>
       <p:pic>
         <p:nvPicPr>
-          <p:cNvPr id="25" name="Icon: Events, roles and response teams" descr="Events, roles and response teams">    </p:cNvPr>
+          <p:cNvPr id="19" name="Icon: Report problems on the map" descr="Report problems on the map"/>
           <p:cNvPicPr>
             <a:picLocks noChangeAspect="1"/>
           </p:cNvPicPr>
@@ -2208,7 +4285,7 @@
         </p:blipFill>
         <p:spPr>
           <a:xfrm>
-            <a:off x="5568696" y="1993392"/>
+            <a:off x="768096" y="3968496"/>
             <a:ext cx="201168" cy="201168"/>
           </a:xfrm>
           <a:prstGeom prst="rect">
@@ -2218,13 +4295,13 @@
       </p:pic>
       <p:sp>
         <p:nvSpPr>
-          <p:cNvPr id="26" name="Feature: Events, roles and response teams"/>
-          <p:cNvSpPr txBox="1"/>
-          <p:nvPr/>
-        </p:nvSpPr>
-        <p:spPr>
-          <a:xfrm>
-            <a:off x="5989320" y="1874520"/>
+          <p:cNvPr id="20" name="Feature: Report problems on the map"/>
+          <p:cNvSpPr txBox="1"/>
+          <p:nvPr/>
+        </p:nvSpPr>
+        <p:spPr>
+          <a:xfrm>
+            <a:off x="1188720" y="3849624"/>
             <a:ext cx="2560320" cy="438912"/>
           </a:xfrm>
           <a:prstGeom prst="rect">
@@ -2237,7 +4314,7 @@
           <a:bodyPr wrap="square" lIns="0" tIns="0" rIns="0" bIns="0" rtlCol="0" anchor="ctr"/>
           <a:lstStyle/>
           <a:p>
-            <a:pPr indent="0" marL="0">
+            <a:pPr marL="0" indent="0">
               <a:buNone/>
             </a:pPr>
             <a:r>
@@ -2246,7 +4323,7 @@
                   <a:schemeClr val="tx1"/>
                 </a:solidFill>
               </a:rPr>
-              <a:t>Events, roles and response teams</a:t>
+              <a:t>Report problems on the map</a:t>
             </a:r>
             <a:endParaRPr lang="en-US" sz="1400" dirty="0"/>
           </a:p>
@@ -2254,27 +4331,36 @@
       </p:sp>
       <p:sp>
         <p:nvSpPr>
-          <p:cNvPr id="27" name="Icon circle: Live help requests on the map"/>
+          <p:cNvPr id="21" name="Event team backoffice card"/>
           <p:cNvSpPr/>
           <p:nvPr/>
         </p:nvSpPr>
         <p:spPr>
           <a:xfrm>
-            <a:off x="5486400" y="2404872"/>
-            <a:ext cx="365760" cy="365760"/>
-          </a:xfrm>
-          <a:prstGeom prst="ellipse">
-            <a:avLst/>
+            <a:off x="5257800" y="1097280"/>
+            <a:ext cx="3429000" cy="3337560"/>
+          </a:xfrm>
+          <a:prstGeom prst="roundRect">
+            <a:avLst>
+              <a:gd name="adj" fmla="val 3288"/>
+            </a:avLst>
           </a:prstGeom>
           <a:solidFill>
-            <a:schemeClr val="tx2"/>
+            <a:schemeClr val="bg2"/>
           </a:solidFill>
           <a:ln/>
         </p:spPr>
+        <p:txBody>
+          <a:bodyPr/>
+          <a:lstStyle/>
+          <a:p>
+            <a:endParaRPr lang="pt-PT"/>
+          </a:p>
+        </p:txBody>
       </p:sp>
       <p:pic>
         <p:nvPicPr>
-          <p:cNvPr id="28" name="Icon: Live help requests on the map" descr="Live help requests on the map">    </p:cNvPr>
+          <p:cNvPr id="22" name="Event team backoffice icon" descr="Event team backoffice icon"/>
           <p:cNvPicPr>
             <a:picLocks noChangeAspect="1"/>
           </p:cNvPicPr>
@@ -2288,8 +4374,8 @@
         </p:blipFill>
         <p:spPr>
           <a:xfrm>
-            <a:off x="5568696" y="2487168"/>
-            <a:ext cx="201168" cy="201168"/>
+            <a:off x="5486400" y="1298448"/>
+            <a:ext cx="365760" cy="365760"/>
           </a:xfrm>
           <a:prstGeom prst="rect">
             <a:avLst/>
@@ -2298,14 +4384,14 @@
       </p:pic>
       <p:sp>
         <p:nvSpPr>
-          <p:cNvPr id="29" name="Feature: Live help requests on the map"/>
-          <p:cNvSpPr txBox="1"/>
-          <p:nvPr/>
-        </p:nvSpPr>
-        <p:spPr>
-          <a:xfrm>
-            <a:off x="5989320" y="2368296"/>
-            <a:ext cx="2560320" cy="438912"/>
+          <p:cNvPr id="23" name="Event team backoffice heading"/>
+          <p:cNvSpPr txBox="1"/>
+          <p:nvPr/>
+        </p:nvSpPr>
+        <p:spPr>
+          <a:xfrm>
+            <a:off x="5989320" y="1252728"/>
+            <a:ext cx="2514600" cy="457200"/>
           </a:xfrm>
           <a:prstGeom prst="rect">
             <a:avLst/>
@@ -2317,30 +4403,30 @@
           <a:bodyPr wrap="square" lIns="0" tIns="0" rIns="0" bIns="0" rtlCol="0" anchor="ctr"/>
           <a:lstStyle/>
           <a:p>
-            <a:pPr indent="0" marL="0">
-              <a:buNone/>
-            </a:pPr>
-            <a:r>
-              <a:rPr lang="en-US" sz="1400" dirty="0">
-                <a:solidFill>
-                  <a:schemeClr val="tx1"/>
-                </a:solidFill>
-              </a:rPr>
-              <a:t>Live help requests on the map</a:t>
-            </a:r>
-            <a:endParaRPr lang="en-US" sz="1400" dirty="0"/>
-          </a:p>
-        </p:txBody>
-      </p:sp>
-      <p:sp>
-        <p:nvSpPr>
-          <p:cNvPr id="30" name="Icon circle: Prioritise and route requests"/>
+            <a:pPr marL="0" indent="0">
+              <a:buNone/>
+            </a:pPr>
+            <a:r>
+              <a:rPr lang="en-US" sz="2000" b="1" dirty="0">
+                <a:solidFill>
+                  <a:schemeClr val="tx2"/>
+                </a:solidFill>
+              </a:rPr>
+              <a:t>Event team backoffice</a:t>
+            </a:r>
+            <a:endParaRPr lang="en-US" sz="2000" dirty="0"/>
+          </a:p>
+        </p:txBody>
+      </p:sp>
+      <p:sp>
+        <p:nvSpPr>
+          <p:cNvPr id="24" name="Icon circle: Events, roles and response teams"/>
           <p:cNvSpPr/>
           <p:nvPr/>
         </p:nvSpPr>
         <p:spPr>
           <a:xfrm>
-            <a:off x="5486400" y="2898648"/>
+            <a:off x="5486400" y="1911096"/>
             <a:ext cx="365760" cy="365760"/>
           </a:xfrm>
           <a:prstGeom prst="ellipse">
@@ -2351,10 +4437,17 @@
           </a:solidFill>
           <a:ln/>
         </p:spPr>
+        <p:txBody>
+          <a:bodyPr/>
+          <a:lstStyle/>
+          <a:p>
+            <a:endParaRPr lang="pt-PT"/>
+          </a:p>
+        </p:txBody>
       </p:sp>
       <p:pic>
         <p:nvPicPr>
-          <p:cNvPr id="31" name="Icon: Prioritise and route requests" descr="Prioritise and route requests">    </p:cNvPr>
+          <p:cNvPr id="25" name="Icon: Events, roles and response teams" descr="Events, roles and response teams"/>
           <p:cNvPicPr>
             <a:picLocks noChangeAspect="1"/>
           </p:cNvPicPr>
@@ -2368,7 +4461,7 @@
         </p:blipFill>
         <p:spPr>
           <a:xfrm>
-            <a:off x="5568696" y="2980944"/>
+            <a:off x="5568696" y="1993392"/>
             <a:ext cx="201168" cy="201168"/>
           </a:xfrm>
           <a:prstGeom prst="rect">
@@ -2378,13 +4471,13 @@
       </p:pic>
       <p:sp>
         <p:nvSpPr>
-          <p:cNvPr id="32" name="Feature: Prioritise and route requests"/>
-          <p:cNvSpPr txBox="1"/>
-          <p:nvPr/>
-        </p:nvSpPr>
-        <p:spPr>
-          <a:xfrm>
-            <a:off x="5989320" y="2862072"/>
+          <p:cNvPr id="26" name="Feature: Events, roles and response teams"/>
+          <p:cNvSpPr txBox="1"/>
+          <p:nvPr/>
+        </p:nvSpPr>
+        <p:spPr>
+          <a:xfrm>
+            <a:off x="5989320" y="1874520"/>
             <a:ext cx="2560320" cy="438912"/>
           </a:xfrm>
           <a:prstGeom prst="rect">
@@ -2397,7 +4490,7 @@
           <a:bodyPr wrap="square" lIns="0" tIns="0" rIns="0" bIns="0" rtlCol="0" anchor="ctr"/>
           <a:lstStyle/>
           <a:p>
-            <a:pPr indent="0" marL="0">
+            <a:pPr marL="0" indent="0">
               <a:buNone/>
             </a:pPr>
             <a:r>
@@ -2406,7 +4499,7 @@
                   <a:schemeClr val="tx1"/>
                 </a:solidFill>
               </a:rPr>
-              <a:t>Prioritise and route requests</a:t>
+              <a:t>Events, roles and response teams</a:t>
             </a:r>
             <a:endParaRPr lang="en-US" sz="1400" dirty="0"/>
           </a:p>
@@ -2414,13 +4507,13 @@
       </p:sp>
       <p:sp>
         <p:nvSpPr>
-          <p:cNvPr id="33" name="Icon circle: Confirm or reject reports"/>
+          <p:cNvPr id="27" name="Icon circle: Live help requests on the map"/>
           <p:cNvSpPr/>
           <p:nvPr/>
         </p:nvSpPr>
         <p:spPr>
           <a:xfrm>
-            <a:off x="5486400" y="3392424"/>
+            <a:off x="5486400" y="2404872"/>
             <a:ext cx="365760" cy="365760"/>
           </a:xfrm>
           <a:prstGeom prst="ellipse">
@@ -2431,10 +4524,17 @@
           </a:solidFill>
           <a:ln/>
         </p:spPr>
+        <p:txBody>
+          <a:bodyPr/>
+          <a:lstStyle/>
+          <a:p>
+            <a:endParaRPr lang="pt-PT"/>
+          </a:p>
+        </p:txBody>
       </p:sp>
       <p:pic>
         <p:nvPicPr>
-          <p:cNvPr id="34" name="Icon: Confirm or reject reports" descr="Confirm or reject reports">    </p:cNvPr>
+          <p:cNvPr id="28" name="Icon: Live help requests on the map" descr="Live help requests on the map"/>
           <p:cNvPicPr>
             <a:picLocks noChangeAspect="1"/>
           </p:cNvPicPr>
@@ -2448,7 +4548,7 @@
         </p:blipFill>
         <p:spPr>
           <a:xfrm>
-            <a:off x="5568696" y="3474720"/>
+            <a:off x="5568696" y="2487168"/>
             <a:ext cx="201168" cy="201168"/>
           </a:xfrm>
           <a:prstGeom prst="rect">
@@ -2458,13 +4558,13 @@
       </p:pic>
       <p:sp>
         <p:nvSpPr>
-          <p:cNvPr id="35" name="Feature: Confirm or reject reports"/>
-          <p:cNvSpPr txBox="1"/>
-          <p:nvPr/>
-        </p:nvSpPr>
-        <p:spPr>
-          <a:xfrm>
-            <a:off x="5989320" y="3355848"/>
+          <p:cNvPr id="29" name="Feature: Live help requests on the map"/>
+          <p:cNvSpPr txBox="1"/>
+          <p:nvPr/>
+        </p:nvSpPr>
+        <p:spPr>
+          <a:xfrm>
+            <a:off x="5989320" y="2368296"/>
             <a:ext cx="2560320" cy="438912"/>
           </a:xfrm>
           <a:prstGeom prst="rect">
@@ -2477,7 +4577,7 @@
           <a:bodyPr wrap="square" lIns="0" tIns="0" rIns="0" bIns="0" rtlCol="0" anchor="ctr"/>
           <a:lstStyle/>
           <a:p>
-            <a:pPr indent="0" marL="0">
+            <a:pPr marL="0" indent="0">
               <a:buNone/>
             </a:pPr>
             <a:r>
@@ -2486,7 +4586,7 @@
                   <a:schemeClr val="tx1"/>
                 </a:solidFill>
               </a:rPr>
-              <a:t>Confirm or reject reports</a:t>
+              <a:t>Live help requests on the map</a:t>
             </a:r>
             <a:endParaRPr lang="en-US" sz="1400" dirty="0"/>
           </a:p>
@@ -2494,13 +4594,13 @@
       </p:sp>
       <p:sp>
         <p:nvSpPr>
-          <p:cNvPr id="36" name="Icon circle: Publish news and shuttles"/>
+          <p:cNvPr id="30" name="Icon circle: Prioritise and route requests"/>
           <p:cNvSpPr/>
           <p:nvPr/>
         </p:nvSpPr>
         <p:spPr>
           <a:xfrm>
-            <a:off x="5486400" y="3886200"/>
+            <a:off x="5486400" y="2898648"/>
             <a:ext cx="365760" cy="365760"/>
           </a:xfrm>
           <a:prstGeom prst="ellipse">
@@ -2511,10 +4611,17 @@
           </a:solidFill>
           <a:ln/>
         </p:spPr>
+        <p:txBody>
+          <a:bodyPr/>
+          <a:lstStyle/>
+          <a:p>
+            <a:endParaRPr lang="pt-PT"/>
+          </a:p>
+        </p:txBody>
       </p:sp>
       <p:pic>
         <p:nvPicPr>
-          <p:cNvPr id="37" name="Icon: Publish news and shuttles" descr="Publish news and shuttles">    </p:cNvPr>
+          <p:cNvPr id="31" name="Icon: Prioritise and route requests" descr="Prioritise and route requests"/>
           <p:cNvPicPr>
             <a:picLocks noChangeAspect="1"/>
           </p:cNvPicPr>
@@ -2528,7 +4635,7 @@
         </p:blipFill>
         <p:spPr>
           <a:xfrm>
-            <a:off x="5568696" y="3968496"/>
+            <a:off x="5568696" y="2980944"/>
             <a:ext cx="201168" cy="201168"/>
           </a:xfrm>
           <a:prstGeom prst="rect">
@@ -2538,13 +4645,13 @@
       </p:pic>
       <p:sp>
         <p:nvSpPr>
-          <p:cNvPr id="38" name="Feature: Publish news and shuttles"/>
-          <p:cNvSpPr txBox="1"/>
-          <p:nvPr/>
-        </p:nvSpPr>
-        <p:spPr>
-          <a:xfrm>
-            <a:off x="5989320" y="3849624"/>
+          <p:cNvPr id="32" name="Feature: Prioritise and route requests"/>
+          <p:cNvSpPr txBox="1"/>
+          <p:nvPr/>
+        </p:nvSpPr>
+        <p:spPr>
+          <a:xfrm>
+            <a:off x="5989320" y="2862072"/>
             <a:ext cx="2560320" cy="438912"/>
           </a:xfrm>
           <a:prstGeom prst="rect">
@@ -2557,7 +4664,7 @@
           <a:bodyPr wrap="square" lIns="0" tIns="0" rIns="0" bIns="0" rtlCol="0" anchor="ctr"/>
           <a:lstStyle/>
           <a:p>
-            <a:pPr indent="0" marL="0">
+            <a:pPr marL="0" indent="0">
               <a:buNone/>
             </a:pPr>
             <a:r>
@@ -2566,7 +4673,7 @@
                   <a:schemeClr val="tx1"/>
                 </a:solidFill>
               </a:rPr>
-              <a:t>Publish news and shuttles</a:t>
+              <a:t>Prioritise and route requests</a:t>
             </a:r>
             <a:endParaRPr lang="en-US" sz="1400" dirty="0"/>
           </a:p>
@@ -2574,27 +4681,34 @@
       </p:sp>
       <p:sp>
         <p:nvSpPr>
-          <p:cNvPr id="39" name="Shared map circle"/>
+          <p:cNvPr id="33" name="Icon circle: Confirm or reject reports"/>
           <p:cNvSpPr/>
           <p:nvPr/>
         </p:nvSpPr>
         <p:spPr>
           <a:xfrm>
-            <a:off x="4114800" y="2148840"/>
-            <a:ext cx="914400" cy="914400"/>
+            <a:off x="5486400" y="3392424"/>
+            <a:ext cx="365760" cy="365760"/>
           </a:xfrm>
           <a:prstGeom prst="ellipse">
             <a:avLst/>
           </a:prstGeom>
           <a:solidFill>
-            <a:schemeClr val="accent1"/>
+            <a:schemeClr val="tx2"/>
           </a:solidFill>
           <a:ln/>
         </p:spPr>
+        <p:txBody>
+          <a:bodyPr/>
+          <a:lstStyle/>
+          <a:p>
+            <a:endParaRPr lang="pt-PT"/>
+          </a:p>
+        </p:txBody>
       </p:sp>
       <p:pic>
         <p:nvPicPr>
-          <p:cNvPr id="40" name="Shared map icon" descr="Lighthouse icon">    </p:cNvPr>
+          <p:cNvPr id="34" name="Icon: Confirm or reject reports" descr="Confirm or reject reports"/>
           <p:cNvPicPr>
             <a:picLocks noChangeAspect="1"/>
           </p:cNvPicPr>
@@ -2608,6 +4722,180 @@
         </p:blipFill>
         <p:spPr>
           <a:xfrm>
+            <a:off x="5568696" y="3474720"/>
+            <a:ext cx="201168" cy="201168"/>
+          </a:xfrm>
+          <a:prstGeom prst="rect">
+            <a:avLst/>
+          </a:prstGeom>
+        </p:spPr>
+      </p:pic>
+      <p:sp>
+        <p:nvSpPr>
+          <p:cNvPr id="35" name="Feature: Confirm or reject reports"/>
+          <p:cNvSpPr txBox="1"/>
+          <p:nvPr/>
+        </p:nvSpPr>
+        <p:spPr>
+          <a:xfrm>
+            <a:off x="5989320" y="3355848"/>
+            <a:ext cx="2560320" cy="438912"/>
+          </a:xfrm>
+          <a:prstGeom prst="rect">
+            <a:avLst/>
+          </a:prstGeom>
+          <a:noFill/>
+          <a:ln/>
+        </p:spPr>
+        <p:txBody>
+          <a:bodyPr wrap="square" lIns="0" tIns="0" rIns="0" bIns="0" rtlCol="0" anchor="ctr"/>
+          <a:lstStyle/>
+          <a:p>
+            <a:pPr marL="0" indent="0">
+              <a:buNone/>
+            </a:pPr>
+            <a:r>
+              <a:rPr lang="en-US" sz="1400" dirty="0">
+                <a:solidFill>
+                  <a:schemeClr val="tx1"/>
+                </a:solidFill>
+              </a:rPr>
+              <a:t>Confirm or reject reports</a:t>
+            </a:r>
+            <a:endParaRPr lang="en-US" sz="1400" dirty="0"/>
+          </a:p>
+        </p:txBody>
+      </p:sp>
+      <p:sp>
+        <p:nvSpPr>
+          <p:cNvPr id="36" name="Icon circle: Publish news and shuttles"/>
+          <p:cNvSpPr/>
+          <p:nvPr/>
+        </p:nvSpPr>
+        <p:spPr>
+          <a:xfrm>
+            <a:off x="5486400" y="3886200"/>
+            <a:ext cx="365760" cy="365760"/>
+          </a:xfrm>
+          <a:prstGeom prst="ellipse">
+            <a:avLst/>
+          </a:prstGeom>
+          <a:solidFill>
+            <a:schemeClr val="tx2"/>
+          </a:solidFill>
+          <a:ln/>
+        </p:spPr>
+        <p:txBody>
+          <a:bodyPr/>
+          <a:lstStyle/>
+          <a:p>
+            <a:endParaRPr lang="pt-PT"/>
+          </a:p>
+        </p:txBody>
+      </p:sp>
+      <p:pic>
+        <p:nvPicPr>
+          <p:cNvPr id="37" name="Icon: Publish news and shuttles" descr="Publish news and shuttles"/>
+          <p:cNvPicPr>
+            <a:picLocks noChangeAspect="1"/>
+          </p:cNvPicPr>
+          <p:nvPr/>
+        </p:nvPicPr>
+        <p:blipFill>
+          <a:blip r:embed="rId7"/>
+          <a:stretch>
+            <a:fillRect/>
+          </a:stretch>
+        </p:blipFill>
+        <p:spPr>
+          <a:xfrm>
+            <a:off x="5568696" y="3968496"/>
+            <a:ext cx="201168" cy="201168"/>
+          </a:xfrm>
+          <a:prstGeom prst="rect">
+            <a:avLst/>
+          </a:prstGeom>
+        </p:spPr>
+      </p:pic>
+      <p:sp>
+        <p:nvSpPr>
+          <p:cNvPr id="38" name="Feature: Publish news and shuttles"/>
+          <p:cNvSpPr txBox="1"/>
+          <p:nvPr/>
+        </p:nvSpPr>
+        <p:spPr>
+          <a:xfrm>
+            <a:off x="5989320" y="3849624"/>
+            <a:ext cx="2560320" cy="438912"/>
+          </a:xfrm>
+          <a:prstGeom prst="rect">
+            <a:avLst/>
+          </a:prstGeom>
+          <a:noFill/>
+          <a:ln/>
+        </p:spPr>
+        <p:txBody>
+          <a:bodyPr wrap="square" lIns="0" tIns="0" rIns="0" bIns="0" rtlCol="0" anchor="ctr"/>
+          <a:lstStyle/>
+          <a:p>
+            <a:pPr marL="0" indent="0">
+              <a:buNone/>
+            </a:pPr>
+            <a:r>
+              <a:rPr lang="en-US" sz="1400" dirty="0">
+                <a:solidFill>
+                  <a:schemeClr val="tx1"/>
+                </a:solidFill>
+              </a:rPr>
+              <a:t>Publish news and shuttles</a:t>
+            </a:r>
+            <a:endParaRPr lang="en-US" sz="1400" dirty="0"/>
+          </a:p>
+        </p:txBody>
+      </p:sp>
+      <p:sp>
+        <p:nvSpPr>
+          <p:cNvPr id="39" name="Shared map circle"/>
+          <p:cNvSpPr/>
+          <p:nvPr/>
+        </p:nvSpPr>
+        <p:spPr>
+          <a:xfrm>
+            <a:off x="4114800" y="2148840"/>
+            <a:ext cx="914400" cy="914400"/>
+          </a:xfrm>
+          <a:prstGeom prst="ellipse">
+            <a:avLst/>
+          </a:prstGeom>
+          <a:solidFill>
+            <a:schemeClr val="accent1"/>
+          </a:solidFill>
+          <a:ln/>
+        </p:spPr>
+        <p:txBody>
+          <a:bodyPr/>
+          <a:lstStyle/>
+          <a:p>
+            <a:endParaRPr lang="pt-PT"/>
+          </a:p>
+        </p:txBody>
+      </p:sp>
+      <p:pic>
+        <p:nvPicPr>
+          <p:cNvPr id="40" name="Shared map icon" descr="Lighthouse icon"/>
+          <p:cNvPicPr>
+            <a:picLocks noChangeAspect="1"/>
+          </p:cNvPicPr>
+          <p:nvPr/>
+        </p:nvPicPr>
+        <p:blipFill>
+          <a:blip r:embed="rId14"/>
+          <a:stretch>
+            <a:fillRect/>
+          </a:stretch>
+        </p:blipFill>
+        <p:spPr>
+          <a:xfrm>
             <a:off x="4343400" y="2377440"/>
             <a:ext cx="457200" cy="457200"/>
           </a:xfrm>
@@ -2637,7 +4925,7 @@
           <a:bodyPr wrap="square" lIns="0" tIns="0" rIns="0" bIns="0" rtlCol="0" anchor="t"/>
           <a:lstStyle/>
           <a:p>
-            <a:pPr algn="ctr" indent="0" marL="0">
+            <a:pPr marL="0" indent="0" algn="ctr">
               <a:buNone/>
             </a:pPr>
             <a:r>
@@ -2674,6 +4962,13 @@
             <a:prstDash val="solid"/>
           </a:ln>
         </p:spPr>
+        <p:txBody>
+          <a:bodyPr/>
+          <a:lstStyle/>
+          <a:p>
+            <a:endParaRPr lang="pt-PT"/>
+          </a:p>
+        </p:txBody>
       </p:sp>
       <p:sp>
         <p:nvSpPr>
@@ -2697,6 +4992,13 @@
             <a:prstDash val="solid"/>
           </a:ln>
         </p:spPr>
+        <p:txBody>
+          <a:bodyPr/>
+          <a:lstStyle/>
+          <a:p>
+            <a:endParaRPr lang="pt-PT"/>
+          </a:p>
+        </p:txBody>
       </p:sp>
       <p:sp>
         <p:nvSpPr>
@@ -2719,7 +5021,7 @@
           <a:bodyPr wrap="square" lIns="0" tIns="0" rIns="0" bIns="0" rtlCol="0" anchor="ctr"/>
           <a:lstStyle/>
           <a:p>
-            <a:pPr indent="0" marL="0">
+            <a:pPr marL="0" indent="0">
               <a:buNone/>
             </a:pPr>
             <a:r>
@@ -2742,7 +5044,7 @@
 </p:sld>
 </file>
 
-<file path=ppt/slides/slide3.xml><?xml version="1.0" encoding="utf-8"?>
+<file path=ppt/slides/slide4.xml><?xml version="1.0" encoding="utf-8"?>
 <p:sld xmlns:a="http://schemas.openxmlformats.org/drawingml/2006/main" xmlns:r="http://schemas.openxmlformats.org/officeDocument/2006/relationships" xmlns:p="http://schemas.openxmlformats.org/presentationml/2006/main">
   <p:cSld name="Slide 3">
     <p:spTree>
@@ -2762,9 +5064,11 @@
       <p:sp>
         <p:nvSpPr>
           <p:cNvPr id="2" name="Text 0"/>
-          <p:cNvSpPr/>
+          <p:cNvSpPr>
+            <a:spLocks noGrp="1"/>
+          </p:cNvSpPr>
           <p:nvPr>
-            <p:ph idx="100" type="title" hasCustomPrompt="1"/>
+            <p:ph type="title" idx="100" hasCustomPrompt="1"/>
           </p:nvPr>
         </p:nvSpPr>
         <p:spPr>
@@ -2782,7 +5086,7 @@
           <a:bodyPr wrap="square" lIns="0" tIns="0" rIns="0" bIns="0" rtlCol="0" anchor="ctr"/>
           <a:lstStyle/>
           <a:p>
-            <a:pPr indent="0" marL="0">
+            <a:pPr marL="0" indent="0">
               <a:buNone/>
             </a:pPr>
             <a:r>
@@ -2818,6 +5122,13 @@
           </a:solidFill>
           <a:ln/>
         </p:spPr>
+        <p:txBody>
+          <a:bodyPr/>
+          <a:lstStyle/>
+          <a:p>
+            <a:endParaRPr lang="pt-PT"/>
+          </a:p>
+        </p:txBody>
       </p:sp>
       <p:sp>
         <p:nvSpPr>
@@ -2838,330 +5149,17 @@
           </a:solidFill>
           <a:ln/>
         </p:spPr>
+        <p:txBody>
+          <a:bodyPr/>
+          <a:lstStyle/>
+          <a:p>
+            <a:endParaRPr lang="pt-PT"/>
+          </a:p>
+        </p:txBody>
       </p:sp>
       <p:pic>
         <p:nvPicPr>
-          <p:cNvPr id="5" name="AI triage icon" descr="AI triage icon">    </p:cNvPr>
-          <p:cNvPicPr>
-            <a:picLocks noChangeAspect="1"/>
-          </p:cNvPicPr>
-          <p:nvPr/>
-        </p:nvPicPr>
-        <p:blipFill>
-          <a:blip r:embed="rId1"/>
-          <a:stretch>
-            <a:fillRect/>
-          </a:stretch>
-        </p:blipFill>
-        <p:spPr>
-          <a:xfrm>
-            <a:off x="795528" y="1362456"/>
-            <a:ext cx="237744" cy="237744"/>
-          </a:xfrm>
-          <a:prstGeom prst="rect">
-            <a:avLst/>
-          </a:prstGeom>
-        </p:spPr>
-      </p:pic>
-      <p:sp>
-        <p:nvSpPr>
-          <p:cNvPr id="6" name="AI triage heading"/>
-          <p:cNvSpPr txBox="1"/>
-          <p:nvPr/>
-        </p:nvSpPr>
-        <p:spPr>
-          <a:xfrm>
-            <a:off x="1280160" y="1252728"/>
-            <a:ext cx="1600200" cy="457200"/>
-          </a:xfrm>
-          <a:prstGeom prst="rect">
-            <a:avLst/>
-          </a:prstGeom>
-          <a:noFill/>
-          <a:ln/>
-        </p:spPr>
-        <p:txBody>
-          <a:bodyPr wrap="square" lIns="0" tIns="0" rIns="0" bIns="0" rtlCol="0" anchor="ctr"/>
-          <a:lstStyle/>
-          <a:p>
-            <a:pPr indent="0" marL="0">
-              <a:buNone/>
-            </a:pPr>
-            <a:r>
-              <a:rPr lang="en-US" sz="1800" b="1" dirty="0">
-                <a:solidFill>
-                  <a:schemeClr val="tx2"/>
-                </a:solidFill>
-              </a:rPr>
-              <a:t>AI triage</a:t>
-            </a:r>
-            <a:endParaRPr lang="en-US" sz="1800" dirty="0"/>
-          </a:p>
-        </p:txBody>
-      </p:sp>
-      <p:sp>
-        <p:nvSpPr>
-          <p:cNvPr id="7" name="AI triage text"/>
-          <p:cNvSpPr txBox="1"/>
-          <p:nvPr/>
-        </p:nvSpPr>
-        <p:spPr>
-          <a:xfrm>
-            <a:off x="685800" y="1874520"/>
-            <a:ext cx="2148840" cy="1325880"/>
-          </a:xfrm>
-          <a:prstGeom prst="rect">
-            <a:avLst/>
-          </a:prstGeom>
-          <a:noFill/>
-          <a:ln/>
-        </p:spPr>
-        <p:txBody>
-          <a:bodyPr wrap="square" lIns="0" tIns="0" rIns="0" bIns="0" rtlCol="0" anchor="t"/>
-          <a:lstStyle/>
-          <a:p>
-            <a:pPr marL="177800" indent="-177800">
-              <a:spcAft>
-                <a:spcPts val="600"/>
-              </a:spcAft>
-              <a:buSzPct val="100000"/>
-              <a:buChar char="•"/>
-            </a:pPr>
-            <a:r>
-              <a:rPr lang="en-US" sz="1400" dirty="0">
-                <a:solidFill>
-                  <a:schemeClr val="tx1"/>
-                </a:solidFill>
-              </a:rPr>
-              <a:t>Suggests category, priority and response team in under 30 s</a:t>
-            </a:r>
-            <a:endParaRPr lang="en-US" sz="1400" dirty="0"/>
-          </a:p>
-          <a:p>
-            <a:pPr marL="177800" indent="-177800">
-              <a:spcAft>
-                <a:spcPts val="600"/>
-              </a:spcAft>
-              <a:buSzPct val="100000"/>
-              <a:buChar char="•"/>
-            </a:pPr>
-            <a:r>
-              <a:rPr lang="en-US" sz="1400" dirty="0">
-                <a:solidFill>
-                  <a:schemeClr val="tx1"/>
-                </a:solidFill>
-              </a:rPr>
-              <a:t>The operator always decides; AI never lowers a priority</a:t>
-            </a:r>
-            <a:endParaRPr lang="en-US" sz="1400" dirty="0"/>
-          </a:p>
-        </p:txBody>
-      </p:sp>
-      <p:sp>
-        <p:nvSpPr>
-          <p:cNvPr id="8" name="Map reports card"/>
-          <p:cNvSpPr/>
-          <p:nvPr/>
-        </p:nvSpPr>
-        <p:spPr>
-          <a:xfrm>
-            <a:off x="3291840" y="1051560"/>
-            <a:ext cx="2560320" cy="2286000"/>
-          </a:xfrm>
-          <a:prstGeom prst="roundRect">
-            <a:avLst>
-              <a:gd name="adj" fmla="val 4800"/>
-            </a:avLst>
-          </a:prstGeom>
-          <a:solidFill>
-            <a:schemeClr val="bg2"/>
-          </a:solidFill>
-          <a:ln/>
-        </p:spPr>
-      </p:sp>
-      <p:sp>
-        <p:nvSpPr>
-          <p:cNvPr id="9" name="Map reports icon circle"/>
-          <p:cNvSpPr/>
-          <p:nvPr/>
-        </p:nvSpPr>
-        <p:spPr>
-          <a:xfrm>
-            <a:off x="3520440" y="1252728"/>
-            <a:ext cx="457200" cy="457200"/>
-          </a:xfrm>
-          <a:prstGeom prst="ellipse">
-            <a:avLst/>
-          </a:prstGeom>
-          <a:solidFill>
-            <a:schemeClr val="tx2"/>
-          </a:solidFill>
-          <a:ln/>
-        </p:spPr>
-      </p:sp>
-      <p:pic>
-        <p:nvPicPr>
-          <p:cNvPr id="10" name="Map reports icon" descr="Map reports icon">    </p:cNvPr>
-          <p:cNvPicPr>
-            <a:picLocks noChangeAspect="1"/>
-          </p:cNvPicPr>
-          <p:nvPr/>
-        </p:nvPicPr>
-        <p:blipFill>
-          <a:blip r:embed="rId2"/>
-          <a:stretch>
-            <a:fillRect/>
-          </a:stretch>
-        </p:blipFill>
-        <p:spPr>
-          <a:xfrm>
-            <a:off x="3630168" y="1362456"/>
-            <a:ext cx="237744" cy="237744"/>
-          </a:xfrm>
-          <a:prstGeom prst="rect">
-            <a:avLst/>
-          </a:prstGeom>
-        </p:spPr>
-      </p:pic>
-      <p:sp>
-        <p:nvSpPr>
-          <p:cNvPr id="11" name="Map reports heading"/>
-          <p:cNvSpPr txBox="1"/>
-          <p:nvPr/>
-        </p:nvSpPr>
-        <p:spPr>
-          <a:xfrm>
-            <a:off x="4114800" y="1252728"/>
-            <a:ext cx="1600200" cy="457200"/>
-          </a:xfrm>
-          <a:prstGeom prst="rect">
-            <a:avLst/>
-          </a:prstGeom>
-          <a:noFill/>
-          <a:ln/>
-        </p:spPr>
-        <p:txBody>
-          <a:bodyPr wrap="square" lIns="0" tIns="0" rIns="0" bIns="0" rtlCol="0" anchor="ctr"/>
-          <a:lstStyle/>
-          <a:p>
-            <a:pPr indent="0" marL="0">
-              <a:buNone/>
-            </a:pPr>
-            <a:r>
-              <a:rPr lang="en-US" sz="1800" b="1" dirty="0">
-                <a:solidFill>
-                  <a:schemeClr val="tx2"/>
-                </a:solidFill>
-              </a:rPr>
-              <a:t>Map reports</a:t>
-            </a:r>
-            <a:endParaRPr lang="en-US" sz="1800" dirty="0"/>
-          </a:p>
-        </p:txBody>
-      </p:sp>
-      <p:sp>
-        <p:nvSpPr>
-          <p:cNvPr id="12" name="Map reports text"/>
-          <p:cNvSpPr txBox="1"/>
-          <p:nvPr/>
-        </p:nvSpPr>
-        <p:spPr>
-          <a:xfrm>
-            <a:off x="3520440" y="1874520"/>
-            <a:ext cx="2148840" cy="1325880"/>
-          </a:xfrm>
-          <a:prstGeom prst="rect">
-            <a:avLst/>
-          </a:prstGeom>
-          <a:noFill/>
-          <a:ln/>
-        </p:spPr>
-        <p:txBody>
-          <a:bodyPr wrap="square" lIns="0" tIns="0" rIns="0" bIns="0" rtlCol="0" anchor="t"/>
-          <a:lstStyle/>
-          <a:p>
-            <a:pPr marL="177800" indent="-177800">
-              <a:spcAft>
-                <a:spcPts val="600"/>
-              </a:spcAft>
-              <a:buSzPct val="100000"/>
-              <a:buChar char="•"/>
-            </a:pPr>
-            <a:r>
-              <a:rPr lang="en-US" sz="1400" dirty="0">
-                <a:solidFill>
-                  <a:schemeClr val="tx1"/>
-                </a:solidFill>
-              </a:rPr>
-              <a:t>Waze-style: queues, broken WC, hazards</a:t>
-            </a:r>
-            <a:endParaRPr lang="en-US" sz="1400" dirty="0"/>
-          </a:p>
-          <a:p>
-            <a:pPr marL="177800" indent="-177800">
-              <a:spcAft>
-                <a:spcPts val="600"/>
-              </a:spcAft>
-              <a:buSzPct val="100000"/>
-              <a:buChar char="•"/>
-            </a:pPr>
-            <a:r>
-              <a:rPr lang="en-US" sz="1400" dirty="0">
-                <a:solidFill>
-                  <a:schemeClr val="tx1"/>
-                </a:solidFill>
-              </a:rPr>
-              <a:t>Only the responsible team confirms a report</a:t>
-            </a:r>
-            <a:endParaRPr lang="en-US" sz="1400" dirty="0"/>
-          </a:p>
-        </p:txBody>
-      </p:sp>
-      <p:sp>
-        <p:nvSpPr>
-          <p:cNvPr id="13" name="Live transport card"/>
-          <p:cNvSpPr/>
-          <p:nvPr/>
-        </p:nvSpPr>
-        <p:spPr>
-          <a:xfrm>
-            <a:off x="6126480" y="1051560"/>
-            <a:ext cx="2560320" cy="2286000"/>
-          </a:xfrm>
-          <a:prstGeom prst="roundRect">
-            <a:avLst>
-              <a:gd name="adj" fmla="val 4800"/>
-            </a:avLst>
-          </a:prstGeom>
-          <a:solidFill>
-            <a:schemeClr val="bg2"/>
-          </a:solidFill>
-          <a:ln/>
-        </p:spPr>
-      </p:sp>
-      <p:sp>
-        <p:nvSpPr>
-          <p:cNvPr id="14" name="Live transport icon circle"/>
-          <p:cNvSpPr/>
-          <p:nvPr/>
-        </p:nvSpPr>
-        <p:spPr>
-          <a:xfrm>
-            <a:off x="6355080" y="1252728"/>
-            <a:ext cx="457200" cy="457200"/>
-          </a:xfrm>
-          <a:prstGeom prst="ellipse">
-            <a:avLst/>
-          </a:prstGeom>
-          <a:solidFill>
-            <a:schemeClr val="tx2"/>
-          </a:solidFill>
-          <a:ln/>
-        </p:spPr>
-      </p:sp>
-      <p:pic>
-        <p:nvPicPr>
-          <p:cNvPr id="15" name="Live transport icon" descr="Live transport icon">    </p:cNvPr>
+          <p:cNvPr id="5" name="AI triage icon" descr="AI triage icon"/>
           <p:cNvPicPr>
             <a:picLocks noChangeAspect="1"/>
           </p:cNvPicPr>
@@ -3175,7 +5173,7 @@
         </p:blipFill>
         <p:spPr>
           <a:xfrm>
-            <a:off x="6464808" y="1362456"/>
+            <a:off x="795528" y="1362456"/>
             <a:ext cx="237744" cy="237744"/>
           </a:xfrm>
           <a:prstGeom prst="rect">
@@ -3185,13 +5183,13 @@
       </p:pic>
       <p:sp>
         <p:nvSpPr>
-          <p:cNvPr id="16" name="Live transport heading"/>
-          <p:cNvSpPr txBox="1"/>
-          <p:nvPr/>
-        </p:nvSpPr>
-        <p:spPr>
-          <a:xfrm>
-            <a:off x="6949440" y="1252728"/>
+          <p:cNvPr id="6" name="AI triage heading"/>
+          <p:cNvSpPr txBox="1"/>
+          <p:nvPr/>
+        </p:nvSpPr>
+        <p:spPr>
+          <a:xfrm>
+            <a:off x="1280160" y="1252728"/>
             <a:ext cx="1600200" cy="457200"/>
           </a:xfrm>
           <a:prstGeom prst="rect">
@@ -3204,7 +5202,7 @@
           <a:bodyPr wrap="square" lIns="0" tIns="0" rIns="0" bIns="0" rtlCol="0" anchor="ctr"/>
           <a:lstStyle/>
           <a:p>
-            <a:pPr indent="0" marL="0">
+            <a:pPr marL="0" indent="0">
               <a:buNone/>
             </a:pPr>
             <a:r>
@@ -3213,7 +5211,7 @@
                   <a:schemeClr val="tx2"/>
                 </a:solidFill>
               </a:rPr>
-              <a:t>Live transport</a:t>
+              <a:t>AI triage</a:t>
             </a:r>
             <a:endParaRPr lang="en-US" sz="1800" dirty="0"/>
           </a:p>
@@ -3221,13 +5219,13 @@
       </p:sp>
       <p:sp>
         <p:nvSpPr>
-          <p:cNvPr id="17" name="Live transport text"/>
-          <p:cNvSpPr txBox="1"/>
-          <p:nvPr/>
-        </p:nvSpPr>
-        <p:spPr>
-          <a:xfrm>
-            <a:off x="6355080" y="1874520"/>
+          <p:cNvPr id="7" name="AI triage text"/>
+          <p:cNvSpPr txBox="1"/>
+          <p:nvPr/>
+        </p:nvSpPr>
+        <p:spPr>
+          <a:xfrm>
+            <a:off x="685800" y="1874520"/>
             <a:ext cx="2148840" cy="1325880"/>
           </a:xfrm>
           <a:prstGeom prst="rect">
@@ -3253,7 +5251,7 @@
                   <a:schemeClr val="tx1"/>
                 </a:solidFill>
               </a:rPr>
-              <a:t>Regular STCP lines from the public GTFS feed</a:t>
+              <a:t>Suggests category, priority and response team in under 30 s</a:t>
             </a:r>
             <a:endParaRPr lang="en-US" sz="1400" dirty="0"/>
           </a:p>
@@ -3271,7 +5269,7 @@
                   <a:schemeClr val="tx1"/>
                 </a:solidFill>
               </a:rPr>
-              <a:t>Plus event shuttles set by the team</a:t>
+              <a:t>The operator always decides; AI never lowers a priority</a:t>
             </a:r>
             <a:endParaRPr lang="en-US" sz="1400" dirty="0"/>
           </a:p>
@@ -3279,29 +5277,63 @@
       </p:sp>
       <p:sp>
         <p:nvSpPr>
-          <p:cNvPr id="18" name="Badges band"/>
+          <p:cNvPr id="8" name="Map reports card"/>
           <p:cNvSpPr/>
           <p:nvPr/>
         </p:nvSpPr>
         <p:spPr>
           <a:xfrm>
-            <a:off x="457200" y="3520440"/>
-            <a:ext cx="8229600" cy="1325880"/>
+            <a:off x="3291840" y="1051560"/>
+            <a:ext cx="2560320" cy="2286000"/>
           </a:xfrm>
           <a:prstGeom prst="roundRect">
             <a:avLst>
-              <a:gd name="adj" fmla="val 8276"/>
+              <a:gd name="adj" fmla="val 4800"/>
             </a:avLst>
+          </a:prstGeom>
+          <a:solidFill>
+            <a:schemeClr val="bg2"/>
+          </a:solidFill>
+          <a:ln/>
+        </p:spPr>
+        <p:txBody>
+          <a:bodyPr/>
+          <a:lstStyle/>
+          <a:p>
+            <a:endParaRPr lang="pt-PT"/>
+          </a:p>
+        </p:txBody>
+      </p:sp>
+      <p:sp>
+        <p:nvSpPr>
+          <p:cNvPr id="9" name="Map reports icon circle"/>
+          <p:cNvSpPr/>
+          <p:nvPr/>
+        </p:nvSpPr>
+        <p:spPr>
+          <a:xfrm>
+            <a:off x="3520440" y="1252728"/>
+            <a:ext cx="457200" cy="457200"/>
+          </a:xfrm>
+          <a:prstGeom prst="ellipse">
+            <a:avLst/>
           </a:prstGeom>
           <a:solidFill>
             <a:schemeClr val="tx2"/>
           </a:solidFill>
           <a:ln/>
         </p:spPr>
+        <p:txBody>
+          <a:bodyPr/>
+          <a:lstStyle/>
+          <a:p>
+            <a:endParaRPr lang="pt-PT"/>
+          </a:p>
+        </p:txBody>
       </p:sp>
       <p:pic>
         <p:nvPicPr>
-          <p:cNvPr id="19" name="Badges icon" descr="Medal icon">    </p:cNvPr>
+          <p:cNvPr id="10" name="Map reports icon" descr="Map reports icon"/>
           <p:cNvPicPr>
             <a:picLocks noChangeAspect="1"/>
           </p:cNvPicPr>
@@ -3315,6 +5347,327 @@
         </p:blipFill>
         <p:spPr>
           <a:xfrm>
+            <a:off x="3630168" y="1362456"/>
+            <a:ext cx="237744" cy="237744"/>
+          </a:xfrm>
+          <a:prstGeom prst="rect">
+            <a:avLst/>
+          </a:prstGeom>
+        </p:spPr>
+      </p:pic>
+      <p:sp>
+        <p:nvSpPr>
+          <p:cNvPr id="11" name="Map reports heading"/>
+          <p:cNvSpPr txBox="1"/>
+          <p:nvPr/>
+        </p:nvSpPr>
+        <p:spPr>
+          <a:xfrm>
+            <a:off x="4114800" y="1252728"/>
+            <a:ext cx="1600200" cy="457200"/>
+          </a:xfrm>
+          <a:prstGeom prst="rect">
+            <a:avLst/>
+          </a:prstGeom>
+          <a:noFill/>
+          <a:ln/>
+        </p:spPr>
+        <p:txBody>
+          <a:bodyPr wrap="square" lIns="0" tIns="0" rIns="0" bIns="0" rtlCol="0" anchor="ctr"/>
+          <a:lstStyle/>
+          <a:p>
+            <a:pPr marL="0" indent="0">
+              <a:buNone/>
+            </a:pPr>
+            <a:r>
+              <a:rPr lang="en-US" sz="1800" b="1" dirty="0">
+                <a:solidFill>
+                  <a:schemeClr val="tx2"/>
+                </a:solidFill>
+              </a:rPr>
+              <a:t>Map reports</a:t>
+            </a:r>
+            <a:endParaRPr lang="en-US" sz="1800" dirty="0"/>
+          </a:p>
+        </p:txBody>
+      </p:sp>
+      <p:sp>
+        <p:nvSpPr>
+          <p:cNvPr id="12" name="Map reports text"/>
+          <p:cNvSpPr txBox="1"/>
+          <p:nvPr/>
+        </p:nvSpPr>
+        <p:spPr>
+          <a:xfrm>
+            <a:off x="3520440" y="1874520"/>
+            <a:ext cx="2148840" cy="1325880"/>
+          </a:xfrm>
+          <a:prstGeom prst="rect">
+            <a:avLst/>
+          </a:prstGeom>
+          <a:noFill/>
+          <a:ln/>
+        </p:spPr>
+        <p:txBody>
+          <a:bodyPr wrap="square" lIns="0" tIns="0" rIns="0" bIns="0" rtlCol="0" anchor="t"/>
+          <a:lstStyle/>
+          <a:p>
+            <a:pPr marL="177800" indent="-177800">
+              <a:spcAft>
+                <a:spcPts val="600"/>
+              </a:spcAft>
+              <a:buSzPct val="100000"/>
+              <a:buChar char="•"/>
+            </a:pPr>
+            <a:r>
+              <a:rPr lang="en-US" sz="1400" dirty="0">
+                <a:solidFill>
+                  <a:schemeClr val="tx1"/>
+                </a:solidFill>
+              </a:rPr>
+              <a:t>Waze-style: queues, broken WC, hazards</a:t>
+            </a:r>
+            <a:endParaRPr lang="en-US" sz="1400" dirty="0"/>
+          </a:p>
+          <a:p>
+            <a:pPr marL="177800" indent="-177800">
+              <a:spcAft>
+                <a:spcPts val="600"/>
+              </a:spcAft>
+              <a:buSzPct val="100000"/>
+              <a:buChar char="•"/>
+            </a:pPr>
+            <a:r>
+              <a:rPr lang="en-US" sz="1400" dirty="0">
+                <a:solidFill>
+                  <a:schemeClr val="tx1"/>
+                </a:solidFill>
+              </a:rPr>
+              <a:t>Only the responsible team confirms a report</a:t>
+            </a:r>
+            <a:endParaRPr lang="en-US" sz="1400" dirty="0"/>
+          </a:p>
+        </p:txBody>
+      </p:sp>
+      <p:sp>
+        <p:nvSpPr>
+          <p:cNvPr id="13" name="Live transport card"/>
+          <p:cNvSpPr/>
+          <p:nvPr/>
+        </p:nvSpPr>
+        <p:spPr>
+          <a:xfrm>
+            <a:off x="6126480" y="1051560"/>
+            <a:ext cx="2560320" cy="2286000"/>
+          </a:xfrm>
+          <a:prstGeom prst="roundRect">
+            <a:avLst>
+              <a:gd name="adj" fmla="val 4800"/>
+            </a:avLst>
+          </a:prstGeom>
+          <a:solidFill>
+            <a:schemeClr val="bg2"/>
+          </a:solidFill>
+          <a:ln/>
+        </p:spPr>
+        <p:txBody>
+          <a:bodyPr/>
+          <a:lstStyle/>
+          <a:p>
+            <a:endParaRPr lang="pt-PT"/>
+          </a:p>
+        </p:txBody>
+      </p:sp>
+      <p:sp>
+        <p:nvSpPr>
+          <p:cNvPr id="14" name="Live transport icon circle"/>
+          <p:cNvSpPr/>
+          <p:nvPr/>
+        </p:nvSpPr>
+        <p:spPr>
+          <a:xfrm>
+            <a:off x="6355080" y="1252728"/>
+            <a:ext cx="457200" cy="457200"/>
+          </a:xfrm>
+          <a:prstGeom prst="ellipse">
+            <a:avLst/>
+          </a:prstGeom>
+          <a:solidFill>
+            <a:schemeClr val="tx2"/>
+          </a:solidFill>
+          <a:ln/>
+        </p:spPr>
+        <p:txBody>
+          <a:bodyPr/>
+          <a:lstStyle/>
+          <a:p>
+            <a:endParaRPr lang="pt-PT"/>
+          </a:p>
+        </p:txBody>
+      </p:sp>
+      <p:pic>
+        <p:nvPicPr>
+          <p:cNvPr id="15" name="Live transport icon" descr="Live transport icon"/>
+          <p:cNvPicPr>
+            <a:picLocks noChangeAspect="1"/>
+          </p:cNvPicPr>
+          <p:nvPr/>
+        </p:nvPicPr>
+        <p:blipFill>
+          <a:blip r:embed="rId5"/>
+          <a:stretch>
+            <a:fillRect/>
+          </a:stretch>
+        </p:blipFill>
+        <p:spPr>
+          <a:xfrm>
+            <a:off x="6464808" y="1362456"/>
+            <a:ext cx="237744" cy="237744"/>
+          </a:xfrm>
+          <a:prstGeom prst="rect">
+            <a:avLst/>
+          </a:prstGeom>
+        </p:spPr>
+      </p:pic>
+      <p:sp>
+        <p:nvSpPr>
+          <p:cNvPr id="16" name="Live transport heading"/>
+          <p:cNvSpPr txBox="1"/>
+          <p:nvPr/>
+        </p:nvSpPr>
+        <p:spPr>
+          <a:xfrm>
+            <a:off x="6949440" y="1252728"/>
+            <a:ext cx="1600200" cy="457200"/>
+          </a:xfrm>
+          <a:prstGeom prst="rect">
+            <a:avLst/>
+          </a:prstGeom>
+          <a:noFill/>
+          <a:ln/>
+        </p:spPr>
+        <p:txBody>
+          <a:bodyPr wrap="square" lIns="0" tIns="0" rIns="0" bIns="0" rtlCol="0" anchor="ctr"/>
+          <a:lstStyle/>
+          <a:p>
+            <a:pPr marL="0" indent="0">
+              <a:buNone/>
+            </a:pPr>
+            <a:r>
+              <a:rPr lang="en-US" sz="1800" b="1" dirty="0">
+                <a:solidFill>
+                  <a:schemeClr val="tx2"/>
+                </a:solidFill>
+              </a:rPr>
+              <a:t>Live transport</a:t>
+            </a:r>
+            <a:endParaRPr lang="en-US" sz="1800" dirty="0"/>
+          </a:p>
+        </p:txBody>
+      </p:sp>
+      <p:sp>
+        <p:nvSpPr>
+          <p:cNvPr id="17" name="Live transport text"/>
+          <p:cNvSpPr txBox="1"/>
+          <p:nvPr/>
+        </p:nvSpPr>
+        <p:spPr>
+          <a:xfrm>
+            <a:off x="6355080" y="1874520"/>
+            <a:ext cx="2148840" cy="1325880"/>
+          </a:xfrm>
+          <a:prstGeom prst="rect">
+            <a:avLst/>
+          </a:prstGeom>
+          <a:noFill/>
+          <a:ln/>
+        </p:spPr>
+        <p:txBody>
+          <a:bodyPr wrap="square" lIns="0" tIns="0" rIns="0" bIns="0" rtlCol="0" anchor="t"/>
+          <a:lstStyle/>
+          <a:p>
+            <a:pPr marL="177800" indent="-177800">
+              <a:spcAft>
+                <a:spcPts val="600"/>
+              </a:spcAft>
+              <a:buSzPct val="100000"/>
+              <a:buChar char="•"/>
+            </a:pPr>
+            <a:r>
+              <a:rPr lang="en-US" sz="1400" dirty="0">
+                <a:solidFill>
+                  <a:schemeClr val="tx1"/>
+                </a:solidFill>
+              </a:rPr>
+              <a:t>Regular STCP lines from the public GTFS feed</a:t>
+            </a:r>
+            <a:endParaRPr lang="en-US" sz="1400" dirty="0"/>
+          </a:p>
+          <a:p>
+            <a:pPr marL="177800" indent="-177800">
+              <a:spcAft>
+                <a:spcPts val="600"/>
+              </a:spcAft>
+              <a:buSzPct val="100000"/>
+              <a:buChar char="•"/>
+            </a:pPr>
+            <a:r>
+              <a:rPr lang="en-US" sz="1400" dirty="0">
+                <a:solidFill>
+                  <a:schemeClr val="tx1"/>
+                </a:solidFill>
+              </a:rPr>
+              <a:t>Plus event shuttles set by the team</a:t>
+            </a:r>
+            <a:endParaRPr lang="en-US" sz="1400" dirty="0"/>
+          </a:p>
+        </p:txBody>
+      </p:sp>
+      <p:sp>
+        <p:nvSpPr>
+          <p:cNvPr id="18" name="Badges band"/>
+          <p:cNvSpPr/>
+          <p:nvPr/>
+        </p:nvSpPr>
+        <p:spPr>
+          <a:xfrm>
+            <a:off x="457200" y="3520440"/>
+            <a:ext cx="8229600" cy="1325880"/>
+          </a:xfrm>
+          <a:prstGeom prst="roundRect">
+            <a:avLst>
+              <a:gd name="adj" fmla="val 8276"/>
+            </a:avLst>
+          </a:prstGeom>
+          <a:solidFill>
+            <a:schemeClr val="tx2"/>
+          </a:solidFill>
+          <a:ln/>
+        </p:spPr>
+        <p:txBody>
+          <a:bodyPr/>
+          <a:lstStyle/>
+          <a:p>
+            <a:endParaRPr lang="pt-PT"/>
+          </a:p>
+        </p:txBody>
+      </p:sp>
+      <p:pic>
+        <p:nvPicPr>
+          <p:cNvPr id="19" name="Badges icon" descr="Medal icon"/>
+          <p:cNvPicPr>
+            <a:picLocks noChangeAspect="1"/>
+          </p:cNvPicPr>
+          <p:nvPr/>
+        </p:nvPicPr>
+        <p:blipFill>
+          <a:blip r:embed="rId6"/>
+          <a:stretch>
+            <a:fillRect/>
+          </a:stretch>
+        </p:blipFill>
+        <p:spPr>
+          <a:xfrm>
             <a:off x="685800" y="3721608"/>
             <a:ext cx="365760" cy="365760"/>
           </a:xfrm>
@@ -3344,7 +5697,7 @@
           <a:bodyPr wrap="square" lIns="0" tIns="0" rIns="0" bIns="0" rtlCol="0" anchor="ctr"/>
           <a:lstStyle/>
           <a:p>
-            <a:pPr indent="0" marL="0">
+            <a:pPr marL="0" indent="0">
               <a:buNone/>
             </a:pPr>
             <a:r>
@@ -3380,7 +5733,7 @@
           <a:bodyPr wrap="square" lIns="0" tIns="0" rIns="0" bIns="0" rtlCol="0" anchor="t"/>
           <a:lstStyle/>
           <a:p>
-            <a:pPr indent="0" marL="0">
+            <a:pPr marL="0" indent="0">
               <a:buNone/>
             </a:pPr>
             <a:r>
@@ -3419,6 +5772,13 @@
             <a:prstDash val="solid"/>
           </a:ln>
         </p:spPr>
+        <p:txBody>
+          <a:bodyPr/>
+          <a:lstStyle/>
+          <a:p>
+            <a:endParaRPr lang="pt-PT"/>
+          </a:p>
+        </p:txBody>
       </p:sp>
       <p:sp>
         <p:nvSpPr>
@@ -3441,7 +5801,7 @@
           <a:bodyPr wrap="square" lIns="0" tIns="0" rIns="0" bIns="0" rtlCol="0" anchor="t"/>
           <a:lstStyle/>
           <a:p>
-            <a:pPr algn="ctr" indent="0" marL="0">
+            <a:pPr marL="0" indent="0" algn="ctr">
               <a:buNone/>
             </a:pPr>
             <a:r>
@@ -3455,7 +5815,7 @@
             <a:endParaRPr lang="en-US" sz="1200" dirty="0"/>
           </a:p>
           <a:p>
-            <a:pPr algn="ctr" indent="0" marL="0">
+            <a:pPr marL="0" indent="0" algn="ctr">
               <a:buNone/>
             </a:pPr>
             <a:r>
@@ -3494,6 +5854,13 @@
             <a:prstDash val="solid"/>
           </a:ln>
         </p:spPr>
+        <p:txBody>
+          <a:bodyPr/>
+          <a:lstStyle/>
+          <a:p>
+            <a:endParaRPr lang="pt-PT"/>
+          </a:p>
+        </p:txBody>
       </p:sp>
       <p:sp>
         <p:nvSpPr>
@@ -3516,7 +5883,7 @@
           <a:bodyPr wrap="square" lIns="0" tIns="0" rIns="0" bIns="0" rtlCol="0" anchor="t"/>
           <a:lstStyle/>
           <a:p>
-            <a:pPr algn="ctr" indent="0" marL="0">
+            <a:pPr marL="0" indent="0" algn="ctr">
               <a:buNone/>
             </a:pPr>
             <a:r>
@@ -3530,7 +5897,7 @@
             <a:endParaRPr lang="en-US" sz="1200" dirty="0"/>
           </a:p>
           <a:p>
-            <a:pPr algn="ctr" indent="0" marL="0">
+            <a:pPr marL="0" indent="0" algn="ctr">
               <a:buNone/>
             </a:pPr>
             <a:r>
@@ -3569,6 +5936,13 @@
             <a:prstDash val="solid"/>
           </a:ln>
         </p:spPr>
+        <p:txBody>
+          <a:bodyPr/>
+          <a:lstStyle/>
+          <a:p>
+            <a:endParaRPr lang="pt-PT"/>
+          </a:p>
+        </p:txBody>
       </p:sp>
       <p:sp>
         <p:nvSpPr>
@@ -3591,7 +5965,7 @@
           <a:bodyPr wrap="square" lIns="0" tIns="0" rIns="0" bIns="0" rtlCol="0" anchor="t"/>
           <a:lstStyle/>
           <a:p>
-            <a:pPr algn="ctr" indent="0" marL="0">
+            <a:pPr marL="0" indent="0" algn="ctr">
               <a:buNone/>
             </a:pPr>
             <a:r>
@@ -3605,7 +5979,7 @@
             <a:endParaRPr lang="en-US" sz="1200" dirty="0"/>
           </a:p>
           <a:p>
-            <a:pPr algn="ctr" indent="0" marL="0">
+            <a:pPr marL="0" indent="0" algn="ctr">
               <a:buNone/>
             </a:pPr>
             <a:r>
@@ -3644,6 +6018,13 @@
             <a:prstDash val="solid"/>
           </a:ln>
         </p:spPr>
+        <p:txBody>
+          <a:bodyPr/>
+          <a:lstStyle/>
+          <a:p>
+            <a:endParaRPr lang="pt-PT"/>
+          </a:p>
+        </p:txBody>
       </p:sp>
       <p:sp>
         <p:nvSpPr>
@@ -3666,7 +6047,7 @@
           <a:bodyPr wrap="square" lIns="0" tIns="0" rIns="0" bIns="0" rtlCol="0" anchor="t"/>
           <a:lstStyle/>
           <a:p>
-            <a:pPr algn="ctr" indent="0" marL="0">
+            <a:pPr marL="0" indent="0" algn="ctr">
               <a:buNone/>
             </a:pPr>
             <a:r>
@@ -3680,7 +6061,7 @@
             <a:endParaRPr lang="en-US" sz="1200" dirty="0"/>
           </a:p>
           <a:p>
-            <a:pPr algn="ctr" indent="0" marL="0">
+            <a:pPr marL="0" indent="0" algn="ctr">
               <a:buNone/>
             </a:pPr>
             <a:r>
@@ -3719,6 +6100,13 @@
             <a:prstDash val="solid"/>
           </a:ln>
         </p:spPr>
+        <p:txBody>
+          <a:bodyPr/>
+          <a:lstStyle/>
+          <a:p>
+            <a:endParaRPr lang="pt-PT"/>
+          </a:p>
+        </p:txBody>
       </p:sp>
       <p:sp>
         <p:nvSpPr>
@@ -3741,7 +6129,7 @@
           <a:bodyPr wrap="square" lIns="0" tIns="0" rIns="0" bIns="0" rtlCol="0" anchor="t"/>
           <a:lstStyle/>
           <a:p>
-            <a:pPr algn="ctr" indent="0" marL="0">
+            <a:pPr marL="0" indent="0" algn="ctr">
               <a:buNone/>
             </a:pPr>
             <a:r>
@@ -3755,7 +6143,7 @@
             <a:endParaRPr lang="en-US" sz="1200" dirty="0"/>
           </a:p>
           <a:p>
-            <a:pPr algn="ctr" indent="0" marL="0">
+            <a:pPr marL="0" indent="0" algn="ctr">
               <a:buNone/>
             </a:pPr>
             <a:r>
@@ -3794,6 +6182,13 @@
             <a:prstDash val="solid"/>
           </a:ln>
         </p:spPr>
+        <p:txBody>
+          <a:bodyPr/>
+          <a:lstStyle/>
+          <a:p>
+            <a:endParaRPr lang="pt-PT"/>
+          </a:p>
+        </p:txBody>
       </p:sp>
       <p:sp>
         <p:nvSpPr>
@@ -3816,7 +6211,7 @@
           <a:bodyPr wrap="square" lIns="0" tIns="0" rIns="0" bIns="0" rtlCol="0" anchor="t"/>
           <a:lstStyle/>
           <a:p>
-            <a:pPr algn="ctr" indent="0" marL="0">
+            <a:pPr marL="0" indent="0" algn="ctr">
               <a:buNone/>
             </a:pPr>
             <a:r>
@@ -3830,7 +6225,7 @@
             <a:endParaRPr lang="en-US" sz="1200" dirty="0"/>
           </a:p>
           <a:p>
-            <a:pPr algn="ctr" indent="0" marL="0">
+            <a:pPr marL="0" indent="0" algn="ctr">
               <a:buNone/>
             </a:pPr>
             <a:r>
@@ -3853,9 +6248,9 @@
 </p:sld>
 </file>
 
-<file path=ppt/slides/slide4.xml><?xml version="1.0" encoding="utf-8"?>
+<file path=ppt/slides/slide5.xml><?xml version="1.0" encoding="utf-8"?>
 <p:sld xmlns:a="http://schemas.openxmlformats.org/drawingml/2006/main" xmlns:r="http://schemas.openxmlformats.org/officeDocument/2006/relationships" xmlns:p="http://schemas.openxmlformats.org/presentationml/2006/main">
-  <p:cSld name="Slide 1">
+  <p:cSld name="User workflows">
     <p:spTree>
       <p:nvGrpSpPr>
         <p:cNvPr id="1" name=""/>
@@ -3873,9 +6268,11 @@
       <p:sp>
         <p:nvSpPr>
           <p:cNvPr id="2" name="Text 0"/>
-          <p:cNvSpPr/>
+          <p:cNvSpPr>
+            <a:spLocks noGrp="1"/>
+          </p:cNvSpPr>
           <p:nvPr>
-            <p:ph idx="100" type="title" hasCustomPrompt="1"/>
+            <p:ph type="title" idx="100" hasCustomPrompt="1"/>
           </p:nvPr>
         </p:nvSpPr>
         <p:spPr>
@@ -3893,7 +6290,7 @@
           <a:bodyPr wrap="square" lIns="0" tIns="0" rIns="0" bIns="0" rtlCol="0" anchor="ctr"/>
           <a:lstStyle/>
           <a:p>
-            <a:pPr algn="ctr" indent="0" marL="0">
+            <a:pPr marL="0" indent="0">
               <a:buNone/>
             </a:pPr>
             <a:r>
@@ -3902,7 +6299,7 @@
                   <a:schemeClr val="tx2"/>
                 </a:solidFill>
               </a:rPr>
-              <a:t>Who we design for</a:t>
+              <a:t>Help for people, reports for places</a:t>
             </a:r>
             <a:endParaRPr lang="en-US" sz="3200" dirty="0"/>
           </a:p>
@@ -3910,18 +6307,18 @@
       </p:sp>
       <p:sp>
         <p:nvSpPr>
-          <p:cNvPr id="3" name="Rita card"/>
+          <p:cNvPr id="3" name="Ask for help card"/>
           <p:cNvSpPr/>
           <p:nvPr/>
         </p:nvSpPr>
         <p:spPr>
           <a:xfrm>
             <a:off x="457200" y="1005840"/>
-            <a:ext cx="1920240" cy="2761488"/>
+            <a:ext cx="8229600" cy="1572768"/>
           </a:xfrm>
           <a:prstGeom prst="roundRect">
             <a:avLst>
-              <a:gd name="adj" fmla="val 5714"/>
+              <a:gd name="adj" fmla="val 6000"/>
             </a:avLst>
           </a:prstGeom>
           <a:solidFill>
@@ -3929,17 +6326,24 @@
           </a:solidFill>
           <a:ln/>
         </p:spPr>
-      </p:sp>
-      <p:sp>
-        <p:nvSpPr>
-          <p:cNvPr id="4" name="Rita icon circle"/>
+        <p:txBody>
+          <a:bodyPr/>
+          <a:lstStyle/>
+          <a:p>
+            <a:endParaRPr lang="pt-PT"/>
+          </a:p>
+        </p:txBody>
+      </p:sp>
+      <p:sp>
+        <p:nvSpPr>
+          <p:cNvPr id="4" name="Ask for help icon circle"/>
           <p:cNvSpPr/>
           <p:nvPr/>
         </p:nvSpPr>
         <p:spPr>
           <a:xfrm>
-            <a:off x="621792" y="1161288"/>
-            <a:ext cx="402336" cy="402336"/>
+            <a:off x="685800" y="1225296"/>
+            <a:ext cx="457200" cy="457200"/>
           </a:xfrm>
           <a:prstGeom prst="ellipse">
             <a:avLst/>
@@ -3949,202 +6353,17 @@
           </a:solidFill>
           <a:ln/>
         </p:spPr>
+        <p:txBody>
+          <a:bodyPr/>
+          <a:lstStyle/>
+          <a:p>
+            <a:endParaRPr lang="pt-PT"/>
+          </a:p>
+        </p:txBody>
       </p:sp>
       <p:pic>
         <p:nvPicPr>
-          <p:cNvPr id="5" name="Rita icon" descr="Rita icon">    </p:cNvPr>
-          <p:cNvPicPr>
-            <a:picLocks noChangeAspect="1"/>
-          </p:cNvPicPr>
-          <p:nvPr/>
-        </p:nvPicPr>
-        <p:blipFill>
-          <a:blip r:embed="rId1"/>
-          <a:stretch>
-            <a:fillRect/>
-          </a:stretch>
-        </p:blipFill>
-        <p:spPr>
-          <a:xfrm>
-            <a:off x="722376" y="1261872"/>
-            <a:ext cx="201168" cy="201168"/>
-          </a:xfrm>
-          <a:prstGeom prst="rect">
-            <a:avLst/>
-          </a:prstGeom>
-        </p:spPr>
-      </p:pic>
-      <p:sp>
-        <p:nvSpPr>
-          <p:cNvPr id="6" name="Rita name"/>
-          <p:cNvSpPr txBox="1"/>
-          <p:nvPr/>
-        </p:nvSpPr>
-        <p:spPr>
-          <a:xfrm>
-            <a:off x="1115568" y="1161288"/>
-            <a:ext cx="1188720" cy="402336"/>
-          </a:xfrm>
-          <a:prstGeom prst="rect">
-            <a:avLst/>
-          </a:prstGeom>
-          <a:noFill/>
-          <a:ln/>
-        </p:spPr>
-        <p:txBody>
-          <a:bodyPr wrap="square" lIns="0" tIns="0" rIns="0" bIns="0" rtlCol="0" anchor="ctr"/>
-          <a:lstStyle/>
-          <a:p>
-            <a:pPr indent="0" marL="0">
-              <a:buNone/>
-            </a:pPr>
-            <a:r>
-              <a:rPr lang="en-US" sz="1600" b="1" dirty="0">
-                <a:solidFill>
-                  <a:schemeClr val="tx2"/>
-                </a:solidFill>
-              </a:rPr>
-              <a:t>Rita, 21</a:t>
-            </a:r>
-            <a:endParaRPr lang="en-US" sz="1600" dirty="0"/>
-          </a:p>
-        </p:txBody>
-      </p:sp>
-      <p:sp>
-        <p:nvSpPr>
-          <p:cNvPr id="7" name="Rita role"/>
-          <p:cNvSpPr txBox="1"/>
-          <p:nvPr/>
-        </p:nvSpPr>
-        <p:spPr>
-          <a:xfrm>
-            <a:off x="621792" y="1627632"/>
-            <a:ext cx="1645920" cy="201168"/>
-          </a:xfrm>
-          <a:prstGeom prst="rect">
-            <a:avLst/>
-          </a:prstGeom>
-          <a:noFill/>
-          <a:ln/>
-        </p:spPr>
-        <p:txBody>
-          <a:bodyPr wrap="square" lIns="0" tIns="0" rIns="0" bIns="0" rtlCol="0" anchor="ctr"/>
-          <a:lstStyle/>
-          <a:p>
-            <a:pPr indent="0" marL="0">
-              <a:buNone/>
-            </a:pPr>
-            <a:r>
-              <a:rPr lang="en-US" sz="1100" b="1" dirty="0">
-                <a:solidFill>
-                  <a:schemeClr val="accent2"/>
-                </a:solidFill>
-              </a:rPr>
-              <a:t>Student · participant app</a:t>
-            </a:r>
-            <a:endParaRPr lang="en-US" sz="1100" dirty="0"/>
-          </a:p>
-        </p:txBody>
-      </p:sp>
-      <p:pic>
-        <p:nvPicPr>
-          <p:cNvPr id="8" name="Rita Goal icon" descr="Goal">    </p:cNvPr>
-          <p:cNvPicPr>
-            <a:picLocks noChangeAspect="1"/>
-          </p:cNvPicPr>
-          <p:nvPr/>
-        </p:nvPicPr>
-        <p:blipFill>
-          <a:blip r:embed="rId2"/>
-          <a:stretch>
-            <a:fillRect/>
-          </a:stretch>
-        </p:blipFill>
-        <p:spPr>
-          <a:xfrm>
-            <a:off x="621792" y="1943100"/>
-            <a:ext cx="146304" cy="146304"/>
-          </a:xfrm>
-          <a:prstGeom prst="rect">
-            <a:avLst/>
-          </a:prstGeom>
-        </p:spPr>
-      </p:pic>
-      <p:sp>
-        <p:nvSpPr>
-          <p:cNvPr id="9" name="Rita Goal label"/>
-          <p:cNvSpPr txBox="1"/>
-          <p:nvPr/>
-        </p:nvSpPr>
-        <p:spPr>
-          <a:xfrm>
-            <a:off x="841248" y="1920240"/>
-            <a:ext cx="1371600" cy="182880"/>
-          </a:xfrm>
-          <a:prstGeom prst="rect">
-            <a:avLst/>
-          </a:prstGeom>
-          <a:noFill/>
-          <a:ln/>
-        </p:spPr>
-        <p:txBody>
-          <a:bodyPr wrap="square" lIns="0" tIns="0" rIns="0" bIns="0" rtlCol="0" anchor="ctr"/>
-          <a:lstStyle/>
-          <a:p>
-            <a:pPr indent="0" marL="0">
-              <a:buNone/>
-            </a:pPr>
-            <a:r>
-              <a:rPr lang="en-US" sz="1100" b="1" dirty="0">
-                <a:solidFill>
-                  <a:schemeClr val="tx2"/>
-                </a:solidFill>
-              </a:rPr>
-              <a:t>Goal</a:t>
-            </a:r>
-            <a:endParaRPr lang="en-US" sz="1100" dirty="0"/>
-          </a:p>
-        </p:txBody>
-      </p:sp>
-      <p:sp>
-        <p:nvSpPr>
-          <p:cNvPr id="10" name="Rita Goal"/>
-          <p:cNvSpPr txBox="1"/>
-          <p:nvPr/>
-        </p:nvSpPr>
-        <p:spPr>
-          <a:xfrm>
-            <a:off x="621792" y="2112264"/>
-            <a:ext cx="1645920" cy="347472"/>
-          </a:xfrm>
-          <a:prstGeom prst="rect">
-            <a:avLst/>
-          </a:prstGeom>
-          <a:noFill/>
-          <a:ln/>
-        </p:spPr>
-        <p:txBody>
-          <a:bodyPr wrap="square" lIns="0" tIns="0" rIns="0" bIns="0" rtlCol="0" anchor="t"/>
-          <a:lstStyle/>
-          <a:p>
-            <a:pPr indent="0" marL="0">
-              <a:buNone/>
-            </a:pPr>
-            <a:r>
-              <a:rPr lang="en-US" sz="1200" dirty="0">
-                <a:solidFill>
-                  <a:schemeClr val="tx1"/>
-                </a:solidFill>
-              </a:rPr>
-              <a:t>find WC, first aid and the way home, fast</a:t>
-            </a:r>
-            <a:endParaRPr lang="en-US" sz="1200" dirty="0"/>
-          </a:p>
-        </p:txBody>
-      </p:sp>
-      <p:pic>
-        <p:nvPicPr>
-          <p:cNvPr id="11" name="Rita Pain icon" descr="Pain">    </p:cNvPr>
+          <p:cNvPr id="5" name="Ask for help icon" descr="Ask for help icon"/>
           <p:cNvPicPr>
             <a:picLocks noChangeAspect="1"/>
           </p:cNvPicPr>
@@ -4158,8 +6377,8 @@
         </p:blipFill>
         <p:spPr>
           <a:xfrm>
-            <a:off x="621792" y="2546604"/>
-            <a:ext cx="146304" cy="146304"/>
+            <a:off x="788670" y="1328166"/>
+            <a:ext cx="251460" cy="251460"/>
           </a:xfrm>
           <a:prstGeom prst="rect">
             <a:avLst/>
@@ -4168,14 +6387,14 @@
       </p:pic>
       <p:sp>
         <p:nvSpPr>
-          <p:cNvPr id="12" name="Rita Pain label"/>
-          <p:cNvSpPr txBox="1"/>
-          <p:nvPr/>
-        </p:nvSpPr>
-        <p:spPr>
-          <a:xfrm>
-            <a:off x="841248" y="2523744"/>
-            <a:ext cx="1371600" cy="182880"/>
+          <p:cNvPr id="6" name="Ask for help heading"/>
+          <p:cNvSpPr txBox="1"/>
+          <p:nvPr/>
+        </p:nvSpPr>
+        <p:spPr>
+          <a:xfrm>
+            <a:off x="685800" y="1792224"/>
+            <a:ext cx="1691640" cy="292608"/>
           </a:xfrm>
           <a:prstGeom prst="rect">
             <a:avLst/>
@@ -4187,16 +6406,52 @@
           <a:bodyPr wrap="square" lIns="0" tIns="0" rIns="0" bIns="0" rtlCol="0" anchor="ctr"/>
           <a:lstStyle/>
           <a:p>
-            <a:pPr indent="0" marL="0">
-              <a:buNone/>
-            </a:pPr>
-            <a:r>
-              <a:rPr lang="en-US" sz="1100" b="1" dirty="0">
+            <a:pPr marL="0" indent="0" algn="l">
+              <a:buNone/>
+            </a:pPr>
+            <a:r>
+              <a:rPr lang="en-US" sz="1600" b="1" dirty="0">
                 <a:solidFill>
                   <a:schemeClr val="tx2"/>
                 </a:solidFill>
               </a:rPr>
-              <a:t>Pain</a:t>
+              <a:t>Ask for help</a:t>
+            </a:r>
+            <a:endParaRPr lang="en-US" sz="1600" dirty="0"/>
+          </a:p>
+        </p:txBody>
+      </p:sp>
+      <p:sp>
+        <p:nvSpPr>
+          <p:cNvPr id="7" name="Ask for help subtitle"/>
+          <p:cNvSpPr txBox="1"/>
+          <p:nvPr/>
+        </p:nvSpPr>
+        <p:spPr>
+          <a:xfrm>
+            <a:off x="685800" y="2103120"/>
+            <a:ext cx="1600200" cy="411480"/>
+          </a:xfrm>
+          <a:prstGeom prst="rect">
+            <a:avLst/>
+          </a:prstGeom>
+          <a:noFill/>
+          <a:ln/>
+        </p:spPr>
+        <p:txBody>
+          <a:bodyPr wrap="square" lIns="0" tIns="0" rIns="0" bIns="0" rtlCol="0" anchor="t"/>
+          <a:lstStyle/>
+          <a:p>
+            <a:pPr marL="0" indent="0" algn="l">
+              <a:buNone/>
+            </a:pPr>
+            <a:r>
+              <a:rPr lang="en-US" sz="1100" dirty="0">
+                <a:solidFill>
+                  <a:schemeClr val="accent2"/>
+                </a:solidFill>
+              </a:rPr>
+              <a:t>Urgent, or about a person</a:t>
             </a:r>
             <a:endParaRPr lang="en-US" sz="1100" dirty="0"/>
           </a:p>
@@ -4204,43 +6459,34 @@
       </p:sp>
       <p:sp>
         <p:nvSpPr>
-          <p:cNvPr id="13" name="Rita Pain"/>
-          <p:cNvSpPr txBox="1"/>
-          <p:nvPr/>
-        </p:nvSpPr>
-        <p:spPr>
-          <a:xfrm>
-            <a:off x="621792" y="2715768"/>
-            <a:ext cx="1645920" cy="347472"/>
-          </a:xfrm>
-          <a:prstGeom prst="rect">
-            <a:avLst/>
-          </a:prstGeom>
-          <a:noFill/>
-          <a:ln/>
-        </p:spPr>
-        <p:txBody>
-          <a:bodyPr wrap="square" lIns="0" tIns="0" rIns="0" bIns="0" rtlCol="0" anchor="t"/>
-          <a:lstStyle/>
-          <a:p>
-            <a:pPr indent="0" marL="0">
-              <a:buNone/>
-            </a:pPr>
-            <a:r>
-              <a:rPr lang="en-US" sz="1200" dirty="0">
-                <a:solidFill>
-                  <a:schemeClr val="tx1"/>
-                </a:solidFill>
-              </a:rPr>
-              <a:t>info goes stale; the map is an image</a:t>
-            </a:r>
-            <a:endParaRPr lang="en-US" sz="1200" dirty="0"/>
+          <p:cNvPr id="8" name="Ask for help step 1 icon circle"/>
+          <p:cNvSpPr/>
+          <p:nvPr/>
+        </p:nvSpPr>
+        <p:spPr>
+          <a:xfrm>
+            <a:off x="2560320" y="1225296"/>
+            <a:ext cx="384048" cy="384048"/>
+          </a:xfrm>
+          <a:prstGeom prst="ellipse">
+            <a:avLst/>
+          </a:prstGeom>
+          <a:solidFill>
+            <a:schemeClr val="tx2"/>
+          </a:solidFill>
+          <a:ln/>
+        </p:spPr>
+        <p:txBody>
+          <a:bodyPr/>
+          <a:lstStyle/>
+          <a:p>
+            <a:endParaRPr lang="pt-PT"/>
           </a:p>
         </p:txBody>
       </p:sp>
       <p:pic>
         <p:nvPicPr>
-          <p:cNvPr id="14" name="Rita Success icon" descr="Success">    </p:cNvPr>
+          <p:cNvPr id="9" name="Ask for help step 1 icon" descr="Ask for help step 1 icon"/>
           <p:cNvPicPr>
             <a:picLocks noChangeAspect="1"/>
           </p:cNvPicPr>
@@ -4254,8 +6500,8 @@
         </p:blipFill>
         <p:spPr>
           <a:xfrm>
-            <a:off x="621792" y="3150108"/>
-            <a:ext cx="146304" cy="146304"/>
+            <a:off x="2646731" y="1311707"/>
+            <a:ext cx="211226" cy="211226"/>
           </a:xfrm>
           <a:prstGeom prst="rect">
             <a:avLst/>
@@ -4264,14 +6510,14 @@
       </p:pic>
       <p:sp>
         <p:nvSpPr>
-          <p:cNvPr id="15" name="Rita Success label"/>
-          <p:cNvSpPr txBox="1"/>
-          <p:nvPr/>
-        </p:nvSpPr>
-        <p:spPr>
-          <a:xfrm>
-            <a:off x="841248" y="3127248"/>
-            <a:ext cx="1371600" cy="182880"/>
+          <p:cNvPr id="10" name="Ask for help step 1 actor"/>
+          <p:cNvSpPr txBox="1"/>
+          <p:nvPr/>
+        </p:nvSpPr>
+        <p:spPr>
+          <a:xfrm>
+            <a:off x="3017520" y="1225296"/>
+            <a:ext cx="868680" cy="384048"/>
           </a:xfrm>
           <a:prstGeom prst="rect">
             <a:avLst/>
@@ -4283,31 +6529,31 @@
           <a:bodyPr wrap="square" lIns="0" tIns="0" rIns="0" bIns="0" rtlCol="0" anchor="ctr"/>
           <a:lstStyle/>
           <a:p>
-            <a:pPr indent="0" marL="0">
-              <a:buNone/>
-            </a:pPr>
-            <a:r>
-              <a:rPr lang="en-US" sz="1100" b="1" dirty="0">
+            <a:pPr marL="0" indent="0" algn="l">
+              <a:buNone/>
+            </a:pPr>
+            <a:r>
+              <a:rPr lang="en-US" sz="1200" b="1" dirty="0">
                 <a:solidFill>
                   <a:schemeClr val="tx2"/>
                 </a:solidFill>
               </a:rPr>
-              <a:t>Success</a:t>
-            </a:r>
-            <a:endParaRPr lang="en-US" sz="1100" dirty="0"/>
-          </a:p>
-        </p:txBody>
-      </p:sp>
-      <p:sp>
-        <p:nvSpPr>
-          <p:cNvPr id="16" name="Rita Success"/>
-          <p:cNvSpPr txBox="1"/>
-          <p:nvPr/>
-        </p:nvSpPr>
-        <p:spPr>
-          <a:xfrm>
-            <a:off x="621792" y="3319272"/>
-            <a:ext cx="1645920" cy="347472"/>
+              <a:t>Rita</a:t>
+            </a:r>
+            <a:endParaRPr lang="en-US" sz="1200" dirty="0"/>
+          </a:p>
+        </p:txBody>
+      </p:sp>
+      <p:sp>
+        <p:nvSpPr>
+          <p:cNvPr id="11" name="Ask for help step 1 text"/>
+          <p:cNvSpPr txBox="1"/>
+          <p:nvPr/>
+        </p:nvSpPr>
+        <p:spPr>
+          <a:xfrm>
+            <a:off x="2560320" y="1719072"/>
+            <a:ext cx="1325880" cy="822960"/>
           </a:xfrm>
           <a:prstGeom prst="rect">
             <a:avLst/>
@@ -4319,7 +6565,7 @@
           <a:bodyPr wrap="square" lIns="0" tIns="0" rIns="0" bIns="0" rtlCol="0" anchor="t"/>
           <a:lstStyle/>
           <a:p>
-            <a:pPr indent="0" marL="0">
+            <a:pPr marL="0" indent="0" algn="l">
               <a:buNone/>
             </a:pPr>
             <a:r>
@@ -4328,44 +6574,47 @@
                   <a:schemeClr val="tx1"/>
                 </a:solidFill>
               </a:rPr>
-              <a:t>asks help for a friend in under 30 s</a:t>
+              <a:t>112 shown first; marks the spot on the map</a:t>
             </a:r>
             <a:endParaRPr lang="en-US" sz="1200" dirty="0"/>
           </a:p>
         </p:txBody>
       </p:sp>
-      <p:sp>
-        <p:nvSpPr>
-          <p:cNvPr id="17" name="Miguel card"/>
+      <p:cxnSp>
+        <p:nvCxnSpPr>
+          <p:cNvPr id="12" name="Ask for help arrow 1"/>
+          <p:cNvCxnSpPr/>
+          <p:nvPr/>
+        </p:nvCxnSpPr>
+        <p:spPr>
+          <a:xfrm>
+            <a:off x="3867912" y="1417320"/>
+            <a:ext cx="155448" cy="0"/>
+          </a:xfrm>
+          <a:prstGeom prst="line">
+            <a:avLst/>
+          </a:prstGeom>
+          <a:noFill/>
+          <a:ln w="15875">
+            <a:solidFill>
+              <a:schemeClr val="tx2"/>
+            </a:solidFill>
+            <a:prstDash val="solid"/>
+            <a:round/>
+            <a:tailEnd type="triangle" w="med" len="med"/>
+          </a:ln>
+        </p:spPr>
+      </p:cxnSp>
+      <p:sp>
+        <p:nvSpPr>
+          <p:cNvPr id="13" name="Ask for help step 2 icon circle"/>
           <p:cNvSpPr/>
           <p:nvPr/>
         </p:nvSpPr>
         <p:spPr>
           <a:xfrm>
-            <a:off x="2560320" y="1005840"/>
-            <a:ext cx="1920240" cy="2761488"/>
-          </a:xfrm>
-          <a:prstGeom prst="roundRect">
-            <a:avLst>
-              <a:gd name="adj" fmla="val 5714"/>
-            </a:avLst>
-          </a:prstGeom>
-          <a:solidFill>
-            <a:schemeClr val="bg2"/>
-          </a:solidFill>
-          <a:ln/>
-        </p:spPr>
-      </p:sp>
-      <p:sp>
-        <p:nvSpPr>
-          <p:cNvPr id="18" name="Miguel icon circle"/>
-          <p:cNvSpPr/>
-          <p:nvPr/>
-        </p:nvSpPr>
-        <p:spPr>
-          <a:xfrm>
-            <a:off x="2724912" y="1161288"/>
-            <a:ext cx="402336" cy="402336"/>
+            <a:off x="4096512" y="1225296"/>
+            <a:ext cx="384048" cy="384048"/>
           </a:xfrm>
           <a:prstGeom prst="ellipse">
             <a:avLst/>
@@ -4375,10 +6624,17 @@
           </a:solidFill>
           <a:ln/>
         </p:spPr>
+        <p:txBody>
+          <a:bodyPr/>
+          <a:lstStyle/>
+          <a:p>
+            <a:endParaRPr lang="pt-PT"/>
+          </a:p>
+        </p:txBody>
       </p:sp>
       <p:pic>
         <p:nvPicPr>
-          <p:cNvPr id="19" name="Miguel icon" descr="Miguel icon">    </p:cNvPr>
+          <p:cNvPr id="14" name="Ask for help step 2 icon" descr="Ask for help step 2 icon"/>
           <p:cNvPicPr>
             <a:picLocks noChangeAspect="1"/>
           </p:cNvPicPr>
@@ -4392,8 +6648,8 @@
         </p:blipFill>
         <p:spPr>
           <a:xfrm>
-            <a:off x="2825496" y="1261872"/>
-            <a:ext cx="201168" cy="201168"/>
+            <a:off x="4182923" y="1311707"/>
+            <a:ext cx="211226" cy="211226"/>
           </a:xfrm>
           <a:prstGeom prst="rect">
             <a:avLst/>
@@ -4402,14 +6658,14 @@
       </p:pic>
       <p:sp>
         <p:nvSpPr>
-          <p:cNvPr id="20" name="Miguel name"/>
-          <p:cNvSpPr txBox="1"/>
-          <p:nvPr/>
-        </p:nvSpPr>
-        <p:spPr>
-          <a:xfrm>
-            <a:off x="3218688" y="1161288"/>
-            <a:ext cx="1188720" cy="402336"/>
+          <p:cNvPr id="15" name="Ask for help step 2 actor"/>
+          <p:cNvSpPr txBox="1"/>
+          <p:nvPr/>
+        </p:nvSpPr>
+        <p:spPr>
+          <a:xfrm>
+            <a:off x="4553712" y="1225296"/>
+            <a:ext cx="868680" cy="384048"/>
           </a:xfrm>
           <a:prstGeom prst="rect">
             <a:avLst/>
@@ -4421,60 +6677,112 @@
           <a:bodyPr wrap="square" lIns="0" tIns="0" rIns="0" bIns="0" rtlCol="0" anchor="ctr"/>
           <a:lstStyle/>
           <a:p>
-            <a:pPr indent="0" marL="0">
-              <a:buNone/>
-            </a:pPr>
-            <a:r>
-              <a:rPr lang="en-US" sz="1600" b="1" dirty="0">
+            <a:pPr marL="0" indent="0" algn="l">
+              <a:buNone/>
+            </a:pPr>
+            <a:r>
+              <a:rPr lang="en-US" sz="1200" b="1" dirty="0">
                 <a:solidFill>
                   <a:schemeClr val="tx2"/>
                 </a:solidFill>
               </a:rPr>
-              <a:t>Miguel, 24</a:t>
-            </a:r>
-            <a:endParaRPr lang="en-US" sz="1600" dirty="0"/>
-          </a:p>
-        </p:txBody>
-      </p:sp>
-      <p:sp>
-        <p:nvSpPr>
-          <p:cNvPr id="21" name="Miguel role"/>
-          <p:cNvSpPr txBox="1"/>
-          <p:nvPr/>
-        </p:nvSpPr>
-        <p:spPr>
-          <a:xfrm>
-            <a:off x="2724912" y="1627632"/>
-            <a:ext cx="1645920" cy="201168"/>
-          </a:xfrm>
-          <a:prstGeom prst="rect">
-            <a:avLst/>
-          </a:prstGeom>
-          <a:noFill/>
-          <a:ln/>
-        </p:spPr>
-        <p:txBody>
-          <a:bodyPr wrap="square" lIns="0" tIns="0" rIns="0" bIns="0" rtlCol="0" anchor="ctr"/>
-          <a:lstStyle/>
-          <a:p>
-            <a:pPr indent="0" marL="0">
-              <a:buNone/>
-            </a:pPr>
-            <a:r>
-              <a:rPr lang="en-US" sz="1100" b="1" dirty="0">
-                <a:solidFill>
-                  <a:schemeClr val="accent2"/>
-                </a:solidFill>
-              </a:rPr>
-              <a:t>PCR volunteer · operator</a:t>
-            </a:r>
-            <a:endParaRPr lang="en-US" sz="1100" dirty="0"/>
+              <a:t>Farol AI</a:t>
+            </a:r>
+            <a:endParaRPr lang="en-US" sz="1200" dirty="0"/>
+          </a:p>
+        </p:txBody>
+      </p:sp>
+      <p:sp>
+        <p:nvSpPr>
+          <p:cNvPr id="16" name="Ask for help step 2 text"/>
+          <p:cNvSpPr txBox="1"/>
+          <p:nvPr/>
+        </p:nvSpPr>
+        <p:spPr>
+          <a:xfrm>
+            <a:off x="4096512" y="1719072"/>
+            <a:ext cx="1325880" cy="822960"/>
+          </a:xfrm>
+          <a:prstGeom prst="rect">
+            <a:avLst/>
+          </a:prstGeom>
+          <a:noFill/>
+          <a:ln/>
+        </p:spPr>
+        <p:txBody>
+          <a:bodyPr wrap="square" lIns="0" tIns="0" rIns="0" bIns="0" rtlCol="0" anchor="t"/>
+          <a:lstStyle/>
+          <a:p>
+            <a:pPr marL="0" indent="0" algn="l">
+              <a:buNone/>
+            </a:pPr>
+            <a:r>
+              <a:rPr lang="en-US" sz="1200" dirty="0">
+                <a:solidFill>
+                  <a:schemeClr val="tx1"/>
+                </a:solidFill>
+              </a:rPr>
+              <a:t>Suggests priority and team in ≤ 30 s</a:t>
+            </a:r>
+            <a:endParaRPr lang="en-US" sz="1200" dirty="0"/>
+          </a:p>
+        </p:txBody>
+      </p:sp>
+      <p:cxnSp>
+        <p:nvCxnSpPr>
+          <p:cNvPr id="17" name="Ask for help arrow 2"/>
+          <p:cNvCxnSpPr/>
+          <p:nvPr/>
+        </p:nvCxnSpPr>
+        <p:spPr>
+          <a:xfrm>
+            <a:off x="5404104" y="1417320"/>
+            <a:ext cx="155448" cy="0"/>
+          </a:xfrm>
+          <a:prstGeom prst="line">
+            <a:avLst/>
+          </a:prstGeom>
+          <a:noFill/>
+          <a:ln w="15875">
+            <a:solidFill>
+              <a:schemeClr val="tx2"/>
+            </a:solidFill>
+            <a:prstDash val="solid"/>
+            <a:round/>
+            <a:tailEnd type="triangle" w="med" len="med"/>
+          </a:ln>
+        </p:spPr>
+      </p:cxnSp>
+      <p:sp>
+        <p:nvSpPr>
+          <p:cNvPr id="18" name="Ask for help step 3 icon circle"/>
+          <p:cNvSpPr/>
+          <p:nvPr/>
+        </p:nvSpPr>
+        <p:spPr>
+          <a:xfrm>
+            <a:off x="5632704" y="1225296"/>
+            <a:ext cx="384048" cy="384048"/>
+          </a:xfrm>
+          <a:prstGeom prst="ellipse">
+            <a:avLst/>
+          </a:prstGeom>
+          <a:solidFill>
+            <a:schemeClr val="tx2"/>
+          </a:solidFill>
+          <a:ln/>
+        </p:spPr>
+        <p:txBody>
+          <a:bodyPr/>
+          <a:lstStyle/>
+          <a:p>
+            <a:endParaRPr lang="pt-PT"/>
           </a:p>
         </p:txBody>
       </p:sp>
       <p:pic>
         <p:nvPicPr>
-          <p:cNvPr id="22" name="Miguel Goal icon" descr="Goal">    </p:cNvPr>
+          <p:cNvPr id="19" name="Ask for help step 3 icon" descr="Ask for help step 3 icon"/>
           <p:cNvPicPr>
             <a:picLocks noChangeAspect="1"/>
           </p:cNvPicPr>
@@ -4488,8 +6796,8 @@
         </p:blipFill>
         <p:spPr>
           <a:xfrm>
-            <a:off x="2724912" y="1943100"/>
-            <a:ext cx="146304" cy="146304"/>
+            <a:off x="5719115" y="1311707"/>
+            <a:ext cx="211226" cy="211226"/>
           </a:xfrm>
           <a:prstGeom prst="rect">
             <a:avLst/>
@@ -4498,14 +6806,14 @@
       </p:pic>
       <p:sp>
         <p:nvSpPr>
-          <p:cNvPr id="23" name="Miguel Goal label"/>
-          <p:cNvSpPr txBox="1"/>
-          <p:nvPr/>
-        </p:nvSpPr>
-        <p:spPr>
-          <a:xfrm>
-            <a:off x="2944368" y="1920240"/>
-            <a:ext cx="1371600" cy="182880"/>
+          <p:cNvPr id="20" name="Ask for help step 3 actor"/>
+          <p:cNvSpPr txBox="1"/>
+          <p:nvPr/>
+        </p:nvSpPr>
+        <p:spPr>
+          <a:xfrm>
+            <a:off x="6089904" y="1225296"/>
+            <a:ext cx="868680" cy="384048"/>
           </a:xfrm>
           <a:prstGeom prst="rect">
             <a:avLst/>
@@ -4517,31 +6825,31 @@
           <a:bodyPr wrap="square" lIns="0" tIns="0" rIns="0" bIns="0" rtlCol="0" anchor="ctr"/>
           <a:lstStyle/>
           <a:p>
-            <a:pPr indent="0" marL="0">
-              <a:buNone/>
-            </a:pPr>
-            <a:r>
-              <a:rPr lang="en-US" sz="1100" b="1" dirty="0">
+            <a:pPr marL="0" indent="0" algn="l">
+              <a:buNone/>
+            </a:pPr>
+            <a:r>
+              <a:rPr lang="en-US" sz="1200" b="1" dirty="0">
                 <a:solidFill>
                   <a:schemeClr val="tx2"/>
                 </a:solidFill>
               </a:rPr>
-              <a:t>Goal</a:t>
-            </a:r>
-            <a:endParaRPr lang="en-US" sz="1100" dirty="0"/>
-          </a:p>
-        </p:txBody>
-      </p:sp>
-      <p:sp>
-        <p:nvSpPr>
-          <p:cNvPr id="24" name="Miguel Goal"/>
-          <p:cNvSpPr txBox="1"/>
-          <p:nvPr/>
-        </p:nvSpPr>
-        <p:spPr>
-          <a:xfrm>
-            <a:off x="2724912" y="2112264"/>
-            <a:ext cx="1645920" cy="347472"/>
+              <a:t>Miguel</a:t>
+            </a:r>
+            <a:endParaRPr lang="en-US" sz="1200" dirty="0"/>
+          </a:p>
+        </p:txBody>
+      </p:sp>
+      <p:sp>
+        <p:nvSpPr>
+          <p:cNvPr id="21" name="Ask for help step 3 text"/>
+          <p:cNvSpPr txBox="1"/>
+          <p:nvPr/>
+        </p:nvSpPr>
+        <p:spPr>
+          <a:xfrm>
+            <a:off x="5632704" y="1719072"/>
+            <a:ext cx="1325880" cy="822960"/>
           </a:xfrm>
           <a:prstGeom prst="rect">
             <a:avLst/>
@@ -4553,7 +6861,7 @@
           <a:bodyPr wrap="square" lIns="0" tIns="0" rIns="0" bIns="0" rtlCol="0" anchor="t"/>
           <a:lstStyle/>
           <a:p>
-            <a:pPr indent="0" marL="0">
+            <a:pPr marL="0" indent="0" algn="l">
               <a:buNone/>
             </a:pPr>
             <a:r>
@@ -4562,15 +6870,67 @@
                   <a:schemeClr val="tx1"/>
                 </a:solidFill>
               </a:rPr>
-              <a:t>see every request: what, where, status</a:t>
+              <a:t>Confirms, routes to Medical, Security or PCR</a:t>
             </a:r>
             <a:endParaRPr lang="en-US" sz="1200" dirty="0"/>
+          </a:p>
+        </p:txBody>
+      </p:sp>
+      <p:cxnSp>
+        <p:nvCxnSpPr>
+          <p:cNvPr id="22" name="Ask for help arrow 3"/>
+          <p:cNvCxnSpPr/>
+          <p:nvPr/>
+        </p:nvCxnSpPr>
+        <p:spPr>
+          <a:xfrm>
+            <a:off x="6940296" y="1417320"/>
+            <a:ext cx="155448" cy="0"/>
+          </a:xfrm>
+          <a:prstGeom prst="line">
+            <a:avLst/>
+          </a:prstGeom>
+          <a:noFill/>
+          <a:ln w="15875">
+            <a:solidFill>
+              <a:schemeClr val="tx2"/>
+            </a:solidFill>
+            <a:prstDash val="solid"/>
+            <a:round/>
+            <a:tailEnd type="triangle" w="med" len="med"/>
+          </a:ln>
+        </p:spPr>
+      </p:cxnSp>
+      <p:sp>
+        <p:nvSpPr>
+          <p:cNvPr id="23" name="Ask for help step 4 icon circle"/>
+          <p:cNvSpPr/>
+          <p:nvPr/>
+        </p:nvSpPr>
+        <p:spPr>
+          <a:xfrm>
+            <a:off x="7168896" y="1225296"/>
+            <a:ext cx="384048" cy="384048"/>
+          </a:xfrm>
+          <a:prstGeom prst="ellipse">
+            <a:avLst/>
+          </a:prstGeom>
+          <a:solidFill>
+            <a:schemeClr val="tx2"/>
+          </a:solidFill>
+          <a:ln/>
+        </p:spPr>
+        <p:txBody>
+          <a:bodyPr/>
+          <a:lstStyle/>
+          <a:p>
+            <a:endParaRPr lang="pt-PT"/>
           </a:p>
         </p:txBody>
       </p:sp>
       <p:pic>
         <p:nvPicPr>
-          <p:cNvPr id="25" name="Miguel Pain icon" descr="Pain">    </p:cNvPr>
+          <p:cNvPr id="24" name="Ask for help step 4 icon" descr="Ask for help step 4 icon"/>
           <p:cNvPicPr>
             <a:picLocks noChangeAspect="1"/>
           </p:cNvPicPr>
@@ -4584,8 +6944,8 @@
         </p:blipFill>
         <p:spPr>
           <a:xfrm>
-            <a:off x="2724912" y="2546604"/>
-            <a:ext cx="146304" cy="146304"/>
+            <a:off x="7255307" y="1311707"/>
+            <a:ext cx="211226" cy="211226"/>
           </a:xfrm>
           <a:prstGeom prst="rect">
             <a:avLst/>
@@ -4594,14 +6954,14 @@
       </p:pic>
       <p:sp>
         <p:nvSpPr>
-          <p:cNvPr id="26" name="Miguel Pain label"/>
-          <p:cNvSpPr txBox="1"/>
-          <p:nvPr/>
-        </p:nvSpPr>
-        <p:spPr>
-          <a:xfrm>
-            <a:off x="2944368" y="2523744"/>
-            <a:ext cx="1371600" cy="182880"/>
+          <p:cNvPr id="25" name="Ask for help step 4 actor"/>
+          <p:cNvSpPr txBox="1"/>
+          <p:nvPr/>
+        </p:nvSpPr>
+        <p:spPr>
+          <a:xfrm>
+            <a:off x="7626096" y="1225296"/>
+            <a:ext cx="868680" cy="384048"/>
           </a:xfrm>
           <a:prstGeom prst="rect">
             <a:avLst/>
@@ -4613,31 +6973,31 @@
           <a:bodyPr wrap="square" lIns="0" tIns="0" rIns="0" bIns="0" rtlCol="0" anchor="ctr"/>
           <a:lstStyle/>
           <a:p>
-            <a:pPr indent="0" marL="0">
-              <a:buNone/>
-            </a:pPr>
-            <a:r>
-              <a:rPr lang="en-US" sz="1100" b="1" dirty="0">
+            <a:pPr marL="0" indent="0" algn="l">
+              <a:buNone/>
+            </a:pPr>
+            <a:r>
+              <a:rPr lang="en-US" sz="1200" b="1" dirty="0">
                 <a:solidFill>
                   <a:schemeClr val="tx2"/>
                 </a:solidFill>
               </a:rPr>
-              <a:t>Pain</a:t>
-            </a:r>
-            <a:endParaRPr lang="en-US" sz="1100" dirty="0"/>
-          </a:p>
-        </p:txBody>
-      </p:sp>
-      <p:sp>
-        <p:nvSpPr>
-          <p:cNvPr id="27" name="Miguel Pain"/>
-          <p:cNvSpPr txBox="1"/>
-          <p:nvPr/>
-        </p:nvSpPr>
-        <p:spPr>
-          <a:xfrm>
-            <a:off x="2724912" y="2715768"/>
-            <a:ext cx="1645920" cy="347472"/>
+              <a:t>Rita</a:t>
+            </a:r>
+            <a:endParaRPr lang="en-US" sz="1200" dirty="0"/>
+          </a:p>
+        </p:txBody>
+      </p:sp>
+      <p:sp>
+        <p:nvSpPr>
+          <p:cNvPr id="26" name="Ask for help step 4 text"/>
+          <p:cNvSpPr txBox="1"/>
+          <p:nvPr/>
+        </p:nvSpPr>
+        <p:spPr>
+          <a:xfrm>
+            <a:off x="7168896" y="1719072"/>
+            <a:ext cx="1325880" cy="822960"/>
           </a:xfrm>
           <a:prstGeom prst="rect">
             <a:avLst/>
@@ -4649,7 +7009,7 @@
           <a:bodyPr wrap="square" lIns="0" tIns="0" rIns="0" bIns="0" rtlCol="0" anchor="t"/>
           <a:lstStyle/>
           <a:p>
-            <a:pPr indent="0" marL="0">
+            <a:pPr marL="0" indent="0" algn="l">
               <a:buNone/>
             </a:pPr>
             <a:r>
@@ -4658,15 +7018,71 @@
                   <a:schemeClr val="tx1"/>
                 </a:solidFill>
               </a:rPr>
-              <a:t>radio and phone, no location or priority</a:t>
+              <a:t>Follows it live: “Help is on the way”</a:t>
             </a:r>
             <a:endParaRPr lang="en-US" sz="1200" dirty="0"/>
+          </a:p>
+        </p:txBody>
+      </p:sp>
+      <p:sp>
+        <p:nvSpPr>
+          <p:cNvPr id="27" name="Report a problem card"/>
+          <p:cNvSpPr/>
+          <p:nvPr/>
+        </p:nvSpPr>
+        <p:spPr>
+          <a:xfrm>
+            <a:off x="457200" y="2715768"/>
+            <a:ext cx="8229600" cy="1572768"/>
+          </a:xfrm>
+          <a:prstGeom prst="roundRect">
+            <a:avLst>
+              <a:gd name="adj" fmla="val 6000"/>
+            </a:avLst>
+          </a:prstGeom>
+          <a:solidFill>
+            <a:schemeClr val="bg2"/>
+          </a:solidFill>
+          <a:ln/>
+        </p:spPr>
+        <p:txBody>
+          <a:bodyPr/>
+          <a:lstStyle/>
+          <a:p>
+            <a:endParaRPr lang="pt-PT"/>
+          </a:p>
+        </p:txBody>
+      </p:sp>
+      <p:sp>
+        <p:nvSpPr>
+          <p:cNvPr id="28" name="Report a problem icon circle"/>
+          <p:cNvSpPr/>
+          <p:nvPr/>
+        </p:nvSpPr>
+        <p:spPr>
+          <a:xfrm>
+            <a:off x="685800" y="2935224"/>
+            <a:ext cx="457200" cy="457200"/>
+          </a:xfrm>
+          <a:prstGeom prst="ellipse">
+            <a:avLst/>
+          </a:prstGeom>
+          <a:solidFill>
+            <a:schemeClr val="tx2"/>
+          </a:solidFill>
+          <a:ln/>
+        </p:spPr>
+        <p:txBody>
+          <a:bodyPr/>
+          <a:lstStyle/>
+          <a:p>
+            <a:endParaRPr lang="pt-PT"/>
           </a:p>
         </p:txBody>
       </p:sp>
       <p:pic>
         <p:nvPicPr>
-          <p:cNvPr id="28" name="Miguel Success icon" descr="Success">    </p:cNvPr>
+          <p:cNvPr id="29" name="Report a problem icon" descr="Report a problem icon"/>
           <p:cNvPicPr>
             <a:picLocks noChangeAspect="1"/>
           </p:cNvPicPr>
@@ -4680,8 +7096,8 @@
         </p:blipFill>
         <p:spPr>
           <a:xfrm>
-            <a:off x="2724912" y="3150108"/>
-            <a:ext cx="146304" cy="146304"/>
+            <a:off x="788670" y="3038094"/>
+            <a:ext cx="251460" cy="251460"/>
           </a:xfrm>
           <a:prstGeom prst="rect">
             <a:avLst/>
@@ -4690,14 +7106,14 @@
       </p:pic>
       <p:sp>
         <p:nvSpPr>
-          <p:cNvPr id="29" name="Miguel Success label"/>
-          <p:cNvSpPr txBox="1"/>
-          <p:nvPr/>
-        </p:nvSpPr>
-        <p:spPr>
-          <a:xfrm>
-            <a:off x="2944368" y="3127248"/>
-            <a:ext cx="1371600" cy="182880"/>
+          <p:cNvPr id="30" name="Report a problem heading"/>
+          <p:cNvSpPr txBox="1"/>
+          <p:nvPr/>
+        </p:nvSpPr>
+        <p:spPr>
+          <a:xfrm>
+            <a:off x="685800" y="3502152"/>
+            <a:ext cx="1691640" cy="292608"/>
           </a:xfrm>
           <a:prstGeom prst="rect">
             <a:avLst/>
@@ -4709,16 +7125,52 @@
           <a:bodyPr wrap="square" lIns="0" tIns="0" rIns="0" bIns="0" rtlCol="0" anchor="ctr"/>
           <a:lstStyle/>
           <a:p>
-            <a:pPr indent="0" marL="0">
-              <a:buNone/>
-            </a:pPr>
-            <a:r>
-              <a:rPr lang="en-US" sz="1100" b="1" dirty="0">
+            <a:pPr marL="0" indent="0" algn="l">
+              <a:buNone/>
+            </a:pPr>
+            <a:r>
+              <a:rPr lang="en-US" sz="1600" b="1" dirty="0">
                 <a:solidFill>
                   <a:schemeClr val="tx2"/>
                 </a:solidFill>
               </a:rPr>
-              <a:t>Success</a:t>
+              <a:t>Report a problem</a:t>
+            </a:r>
+            <a:endParaRPr lang="en-US" sz="1600" dirty="0"/>
+          </a:p>
+        </p:txBody>
+      </p:sp>
+      <p:sp>
+        <p:nvSpPr>
+          <p:cNvPr id="31" name="Report a problem subtitle"/>
+          <p:cNvSpPr txBox="1"/>
+          <p:nvPr/>
+        </p:nvSpPr>
+        <p:spPr>
+          <a:xfrm>
+            <a:off x="685800" y="3813048"/>
+            <a:ext cx="1600200" cy="411480"/>
+          </a:xfrm>
+          <a:prstGeom prst="rect">
+            <a:avLst/>
+          </a:prstGeom>
+          <a:noFill/>
+          <a:ln/>
+        </p:spPr>
+        <p:txBody>
+          <a:bodyPr wrap="square" lIns="0" tIns="0" rIns="0" bIns="0" rtlCol="0" anchor="t"/>
+          <a:lstStyle/>
+          <a:p>
+            <a:pPr marL="0" indent="0" algn="l">
+              <a:buNone/>
+            </a:pPr>
+            <a:r>
+              <a:rPr lang="en-US" sz="1100" dirty="0">
+                <a:solidFill>
+                  <a:schemeClr val="accent2"/>
+                </a:solidFill>
+              </a:rPr>
+              <a:t>About a place: queues, WC, hazards</a:t>
             </a:r>
             <a:endParaRPr lang="en-US" sz="1100" dirty="0"/>
           </a:p>
@@ -4726,72 +7178,14 @@
       </p:sp>
       <p:sp>
         <p:nvSpPr>
-          <p:cNvPr id="30" name="Miguel Success"/>
-          <p:cNvSpPr txBox="1"/>
-          <p:nvPr/>
-        </p:nvSpPr>
-        <p:spPr>
-          <a:xfrm>
-            <a:off x="2724912" y="3319272"/>
-            <a:ext cx="1645920" cy="347472"/>
-          </a:xfrm>
-          <a:prstGeom prst="rect">
-            <a:avLst/>
-          </a:prstGeom>
-          <a:noFill/>
-          <a:ln/>
-        </p:spPr>
-        <p:txBody>
-          <a:bodyPr wrap="square" lIns="0" tIns="0" rIns="0" bIns="0" rtlCol="0" anchor="t"/>
-          <a:lstStyle/>
-          <a:p>
-            <a:pPr indent="0" marL="0">
-              <a:buNone/>
-            </a:pPr>
-            <a:r>
-              <a:rPr lang="en-US" sz="1200" dirty="0">
-                <a:solidFill>
-                  <a:schemeClr val="tx1"/>
-                </a:solidFill>
-              </a:rPr>
-              <a:t>each request in seconds, triaged in ≤ 30 s</a:t>
-            </a:r>
-            <a:endParaRPr lang="en-US" sz="1200" dirty="0"/>
-          </a:p>
-        </p:txBody>
-      </p:sp>
-      <p:sp>
-        <p:nvSpPr>
-          <p:cNvPr id="31" name="Sofia card"/>
+          <p:cNvPr id="32" name="Report a problem step 1 icon circle"/>
           <p:cNvSpPr/>
           <p:nvPr/>
         </p:nvSpPr>
         <p:spPr>
           <a:xfrm>
-            <a:off x="4663440" y="1005840"/>
-            <a:ext cx="1920240" cy="2761488"/>
-          </a:xfrm>
-          <a:prstGeom prst="roundRect">
-            <a:avLst>
-              <a:gd name="adj" fmla="val 5714"/>
-            </a:avLst>
-          </a:prstGeom>
-          <a:solidFill>
-            <a:schemeClr val="bg2"/>
-          </a:solidFill>
-          <a:ln/>
-        </p:spPr>
-      </p:sp>
-      <p:sp>
-        <p:nvSpPr>
-          <p:cNvPr id="32" name="Sofia icon circle"/>
-          <p:cNvSpPr/>
-          <p:nvPr/>
-        </p:nvSpPr>
-        <p:spPr>
-          <a:xfrm>
-            <a:off x="4828032" y="1161288"/>
-            <a:ext cx="402336" cy="402336"/>
+            <a:off x="2560320" y="2935224"/>
+            <a:ext cx="384048" cy="384048"/>
           </a:xfrm>
           <a:prstGeom prst="ellipse">
             <a:avLst/>
@@ -4801,10 +7195,17 @@
           </a:solidFill>
           <a:ln/>
         </p:spPr>
+        <p:txBody>
+          <a:bodyPr/>
+          <a:lstStyle/>
+          <a:p>
+            <a:endParaRPr lang="pt-PT"/>
+          </a:p>
+        </p:txBody>
       </p:sp>
       <p:pic>
         <p:nvPicPr>
-          <p:cNvPr id="33" name="Sofia icon" descr="Sofia icon">    </p:cNvPr>
+          <p:cNvPr id="33" name="Report a problem step 1 icon" descr="Report a problem step 1 icon"/>
           <p:cNvPicPr>
             <a:picLocks noChangeAspect="1"/>
           </p:cNvPicPr>
@@ -4818,8 +7219,8 @@
         </p:blipFill>
         <p:spPr>
           <a:xfrm>
-            <a:off x="4928616" y="1261872"/>
-            <a:ext cx="201168" cy="201168"/>
+            <a:off x="2646731" y="3021635"/>
+            <a:ext cx="211226" cy="211226"/>
           </a:xfrm>
           <a:prstGeom prst="rect">
             <a:avLst/>
@@ -4828,14 +7229,14 @@
       </p:pic>
       <p:sp>
         <p:nvSpPr>
-          <p:cNvPr id="34" name="Sofia name"/>
-          <p:cNvSpPr txBox="1"/>
-          <p:nvPr/>
-        </p:nvSpPr>
-        <p:spPr>
-          <a:xfrm>
-            <a:off x="5321808" y="1161288"/>
-            <a:ext cx="1188720" cy="402336"/>
+          <p:cNvPr id="34" name="Report a problem step 1 actor"/>
+          <p:cNvSpPr txBox="1"/>
+          <p:nvPr/>
+        </p:nvSpPr>
+        <p:spPr>
+          <a:xfrm>
+            <a:off x="3017520" y="2935224"/>
+            <a:ext cx="868680" cy="384048"/>
           </a:xfrm>
           <a:prstGeom prst="rect">
             <a:avLst/>
@@ -4847,60 +7248,112 @@
           <a:bodyPr wrap="square" lIns="0" tIns="0" rIns="0" bIns="0" rtlCol="0" anchor="ctr"/>
           <a:lstStyle/>
           <a:p>
-            <a:pPr indent="0" marL="0">
-              <a:buNone/>
-            </a:pPr>
-            <a:r>
-              <a:rPr lang="en-US" sz="1600" b="1" dirty="0">
+            <a:pPr marL="0" indent="0" algn="l">
+              <a:buNone/>
+            </a:pPr>
+            <a:r>
+              <a:rPr lang="en-US" sz="1200" b="1" dirty="0">
                 <a:solidFill>
                   <a:schemeClr val="tx2"/>
                 </a:solidFill>
               </a:rPr>
-              <a:t>Sofia, 23</a:t>
-            </a:r>
-            <a:endParaRPr lang="en-US" sz="1600" dirty="0"/>
-          </a:p>
-        </p:txBody>
-      </p:sp>
-      <p:sp>
-        <p:nvSpPr>
-          <p:cNvPr id="35" name="Sofia role"/>
-          <p:cNvSpPr txBox="1"/>
-          <p:nvPr/>
-        </p:nvSpPr>
-        <p:spPr>
-          <a:xfrm>
-            <a:off x="4828032" y="1627632"/>
-            <a:ext cx="1645920" cy="201168"/>
-          </a:xfrm>
-          <a:prstGeom prst="rect">
-            <a:avLst/>
-          </a:prstGeom>
-          <a:noFill/>
-          <a:ln/>
-        </p:spPr>
-        <p:txBody>
-          <a:bodyPr wrap="square" lIns="0" tIns="0" rIns="0" bIns="0" rtlCol="0" anchor="ctr"/>
-          <a:lstStyle/>
-          <a:p>
-            <a:pPr indent="0" marL="0">
-              <a:buNone/>
-            </a:pPr>
-            <a:r>
-              <a:rPr lang="en-US" sz="1100" b="1" dirty="0">
-                <a:solidFill>
-                  <a:schemeClr val="accent2"/>
-                </a:solidFill>
-              </a:rPr>
-              <a:t>Organiser · her event only</a:t>
-            </a:r>
-            <a:endParaRPr lang="en-US" sz="1100" dirty="0"/>
+              <a:t>Rita</a:t>
+            </a:r>
+            <a:endParaRPr lang="en-US" sz="1200" dirty="0"/>
+          </a:p>
+        </p:txBody>
+      </p:sp>
+      <p:sp>
+        <p:nvSpPr>
+          <p:cNvPr id="35" name="Report a problem step 1 text"/>
+          <p:cNvSpPr txBox="1"/>
+          <p:nvPr/>
+        </p:nvSpPr>
+        <p:spPr>
+          <a:xfrm>
+            <a:off x="2560320" y="3429000"/>
+            <a:ext cx="1325880" cy="822960"/>
+          </a:xfrm>
+          <a:prstGeom prst="rect">
+            <a:avLst/>
+          </a:prstGeom>
+          <a:noFill/>
+          <a:ln/>
+        </p:spPr>
+        <p:txBody>
+          <a:bodyPr wrap="square" lIns="0" tIns="0" rIns="0" bIns="0" rtlCol="0" anchor="t"/>
+          <a:lstStyle/>
+          <a:p>
+            <a:pPr marL="0" indent="0" algn="l">
+              <a:buNone/>
+            </a:pPr>
+            <a:r>
+              <a:rPr lang="en-US" sz="1200" dirty="0">
+                <a:solidFill>
+                  <a:schemeClr val="tx1"/>
+                </a:solidFill>
+              </a:rPr>
+              <a:t>Pins “long queue at Gate 2” on the map</a:t>
+            </a:r>
+            <a:endParaRPr lang="en-US" sz="1200" dirty="0"/>
+          </a:p>
+        </p:txBody>
+      </p:sp>
+      <p:cxnSp>
+        <p:nvCxnSpPr>
+          <p:cNvPr id="36" name="Report a problem arrow 1"/>
+          <p:cNvCxnSpPr/>
+          <p:nvPr/>
+        </p:nvCxnSpPr>
+        <p:spPr>
+          <a:xfrm>
+            <a:off x="3867912" y="3127248"/>
+            <a:ext cx="155448" cy="0"/>
+          </a:xfrm>
+          <a:prstGeom prst="line">
+            <a:avLst/>
+          </a:prstGeom>
+          <a:noFill/>
+          <a:ln w="15875">
+            <a:solidFill>
+              <a:schemeClr val="tx2"/>
+            </a:solidFill>
+            <a:prstDash val="solid"/>
+            <a:round/>
+            <a:tailEnd type="triangle" w="med" len="med"/>
+          </a:ln>
+        </p:spPr>
+      </p:cxnSp>
+      <p:sp>
+        <p:nvSpPr>
+          <p:cNvPr id="37" name="Report a problem step 2 icon circle"/>
+          <p:cNvSpPr/>
+          <p:nvPr/>
+        </p:nvSpPr>
+        <p:spPr>
+          <a:xfrm>
+            <a:off x="4096512" y="2935224"/>
+            <a:ext cx="384048" cy="384048"/>
+          </a:xfrm>
+          <a:prstGeom prst="ellipse">
+            <a:avLst/>
+          </a:prstGeom>
+          <a:solidFill>
+            <a:schemeClr val="tx2"/>
+          </a:solidFill>
+          <a:ln/>
+        </p:spPr>
+        <p:txBody>
+          <a:bodyPr/>
+          <a:lstStyle/>
+          <a:p>
+            <a:endParaRPr lang="pt-PT"/>
           </a:p>
         </p:txBody>
       </p:sp>
       <p:pic>
         <p:nvPicPr>
-          <p:cNvPr id="36" name="Sofia Goal icon" descr="Goal">    </p:cNvPr>
+          <p:cNvPr id="38" name="Report a problem step 2 icon" descr="Report a problem step 2 icon"/>
           <p:cNvPicPr>
             <a:picLocks noChangeAspect="1"/>
           </p:cNvPicPr>
@@ -4914,8 +7367,8 @@
         </p:blipFill>
         <p:spPr>
           <a:xfrm>
-            <a:off x="4828032" y="1943100"/>
-            <a:ext cx="146304" cy="146304"/>
+            <a:off x="4182923" y="3021635"/>
+            <a:ext cx="211226" cy="211226"/>
           </a:xfrm>
           <a:prstGeom prst="rect">
             <a:avLst/>
@@ -4924,14 +7377,14 @@
       </p:pic>
       <p:sp>
         <p:nvSpPr>
-          <p:cNvPr id="37" name="Sofia Goal label"/>
-          <p:cNvSpPr txBox="1"/>
-          <p:nvPr/>
-        </p:nvSpPr>
-        <p:spPr>
-          <a:xfrm>
-            <a:off x="5047488" y="1920240"/>
-            <a:ext cx="1371600" cy="182880"/>
+          <p:cNvPr id="39" name="Report a problem step 2 actor"/>
+          <p:cNvSpPr txBox="1"/>
+          <p:nvPr/>
+        </p:nvSpPr>
+        <p:spPr>
+          <a:xfrm>
+            <a:off x="4553712" y="2935224"/>
+            <a:ext cx="868680" cy="384048"/>
           </a:xfrm>
           <a:prstGeom prst="rect">
             <a:avLst/>
@@ -4943,31 +7396,31 @@
           <a:bodyPr wrap="square" lIns="0" tIns="0" rIns="0" bIns="0" rtlCol="0" anchor="ctr"/>
           <a:lstStyle/>
           <a:p>
-            <a:pPr indent="0" marL="0">
-              <a:buNone/>
-            </a:pPr>
-            <a:r>
-              <a:rPr lang="en-US" sz="1100" b="1" dirty="0">
+            <a:pPr marL="0" indent="0" algn="l">
+              <a:buNone/>
+            </a:pPr>
+            <a:r>
+              <a:rPr lang="en-US" sz="1200" b="1" dirty="0">
                 <a:solidFill>
                   <a:schemeClr val="tx2"/>
                 </a:solidFill>
               </a:rPr>
-              <a:t>Goal</a:t>
-            </a:r>
-            <a:endParaRPr lang="en-US" sz="1100" dirty="0"/>
-          </a:p>
-        </p:txBody>
-      </p:sp>
-      <p:sp>
-        <p:nvSpPr>
-          <p:cNvPr id="38" name="Sofia Goal"/>
-          <p:cNvSpPr txBox="1"/>
-          <p:nvPr/>
-        </p:nvSpPr>
-        <p:spPr>
-          <a:xfrm>
-            <a:off x="4828032" y="2112264"/>
-            <a:ext cx="1645920" cy="347472"/>
+              <a:t>Security</a:t>
+            </a:r>
+            <a:endParaRPr lang="en-US" sz="1200" dirty="0"/>
+          </a:p>
+        </p:txBody>
+      </p:sp>
+      <p:sp>
+        <p:nvSpPr>
+          <p:cNvPr id="40" name="Report a problem step 2 text"/>
+          <p:cNvSpPr txBox="1"/>
+          <p:nvPr/>
+        </p:nvSpPr>
+        <p:spPr>
+          <a:xfrm>
+            <a:off x="4096512" y="3429000"/>
+            <a:ext cx="1325880" cy="822960"/>
           </a:xfrm>
           <a:prstGeom prst="rect">
             <a:avLst/>
@@ -4979,7 +7432,7 @@
           <a:bodyPr wrap="square" lIns="0" tIns="0" rIns="0" bIns="0" rtlCol="0" anchor="t"/>
           <a:lstStyle/>
           <a:p>
-            <a:pPr indent="0" marL="0">
+            <a:pPr marL="0" indent="0" algn="l">
               <a:buNone/>
             </a:pPr>
             <a:r>
@@ -4988,15 +7441,67 @@
                   <a:schemeClr val="tx1"/>
                 </a:solidFill>
               </a:rPr>
-              <a:t>configure once, publish changes live</a:t>
+              <a:t>Sees it at once and confirms it</a:t>
             </a:r>
             <a:endParaRPr lang="en-US" sz="1200" dirty="0"/>
+          </a:p>
+        </p:txBody>
+      </p:sp>
+      <p:cxnSp>
+        <p:nvCxnSpPr>
+          <p:cNvPr id="41" name="Report a problem arrow 2"/>
+          <p:cNvCxnSpPr/>
+          <p:nvPr/>
+        </p:nvCxnSpPr>
+        <p:spPr>
+          <a:xfrm>
+            <a:off x="5404104" y="3127248"/>
+            <a:ext cx="155448" cy="0"/>
+          </a:xfrm>
+          <a:prstGeom prst="line">
+            <a:avLst/>
+          </a:prstGeom>
+          <a:noFill/>
+          <a:ln w="15875">
+            <a:solidFill>
+              <a:schemeClr val="tx2"/>
+            </a:solidFill>
+            <a:prstDash val="solid"/>
+            <a:round/>
+            <a:tailEnd type="triangle" w="med" len="med"/>
+          </a:ln>
+        </p:spPr>
+      </p:cxnSp>
+      <p:sp>
+        <p:nvSpPr>
+          <p:cNvPr id="42" name="Report a problem step 3 icon circle"/>
+          <p:cNvSpPr/>
+          <p:nvPr/>
+        </p:nvSpPr>
+        <p:spPr>
+          <a:xfrm>
+            <a:off x="5632704" y="2935224"/>
+            <a:ext cx="384048" cy="384048"/>
+          </a:xfrm>
+          <a:prstGeom prst="ellipse">
+            <a:avLst/>
+          </a:prstGeom>
+          <a:solidFill>
+            <a:schemeClr val="tx2"/>
+          </a:solidFill>
+          <a:ln/>
+        </p:spPr>
+        <p:txBody>
+          <a:bodyPr/>
+          <a:lstStyle/>
+          <a:p>
+            <a:endParaRPr lang="pt-PT"/>
           </a:p>
         </p:txBody>
       </p:sp>
       <p:pic>
         <p:nvPicPr>
-          <p:cNvPr id="39" name="Sofia Pain icon" descr="Pain">    </p:cNvPr>
+          <p:cNvPr id="43" name="Report a problem step 3 icon" descr="Report a problem step 3 icon"/>
           <p:cNvPicPr>
             <a:picLocks noChangeAspect="1"/>
           </p:cNvPicPr>
@@ -5010,8 +7515,8 @@
         </p:blipFill>
         <p:spPr>
           <a:xfrm>
-            <a:off x="4828032" y="2546604"/>
-            <a:ext cx="146304" cy="146304"/>
+            <a:off x="5719115" y="3021635"/>
+            <a:ext cx="211226" cy="211226"/>
           </a:xfrm>
           <a:prstGeom prst="rect">
             <a:avLst/>
@@ -5020,14 +7525,14 @@
       </p:pic>
       <p:sp>
         <p:nvSpPr>
-          <p:cNvPr id="40" name="Sofia Pain label"/>
-          <p:cNvSpPr txBox="1"/>
-          <p:nvPr/>
-        </p:nvSpPr>
-        <p:spPr>
-          <a:xfrm>
-            <a:off x="5047488" y="2523744"/>
-            <a:ext cx="1371600" cy="182880"/>
+          <p:cNvPr id="44" name="Report a problem step 3 actor"/>
+          <p:cNvSpPr txBox="1"/>
+          <p:nvPr/>
+        </p:nvSpPr>
+        <p:spPr>
+          <a:xfrm>
+            <a:off x="6089904" y="2935224"/>
+            <a:ext cx="868680" cy="384048"/>
           </a:xfrm>
           <a:prstGeom prst="rect">
             <a:avLst/>
@@ -5039,31 +7544,31 @@
           <a:bodyPr wrap="square" lIns="0" tIns="0" rIns="0" bIns="0" rtlCol="0" anchor="ctr"/>
           <a:lstStyle/>
           <a:p>
-            <a:pPr indent="0" marL="0">
-              <a:buNone/>
-            </a:pPr>
-            <a:r>
-              <a:rPr lang="en-US" sz="1100" b="1" dirty="0">
+            <a:pPr marL="0" indent="0" algn="l">
+              <a:buNone/>
+            </a:pPr>
+            <a:r>
+              <a:rPr lang="en-US" sz="1200" b="1" dirty="0">
                 <a:solidFill>
                   <a:schemeClr val="tx2"/>
                 </a:solidFill>
               </a:rPr>
-              <a:t>Pain</a:t>
-            </a:r>
-            <a:endParaRPr lang="en-US" sz="1100" dirty="0"/>
-          </a:p>
-        </p:txBody>
-      </p:sp>
-      <p:sp>
-        <p:nvSpPr>
-          <p:cNvPr id="41" name="Sofia Pain"/>
-          <p:cNvSpPr txBox="1"/>
-          <p:nvPr/>
-        </p:nvSpPr>
-        <p:spPr>
-          <a:xfrm>
-            <a:off x="4828032" y="2715768"/>
-            <a:ext cx="1645920" cy="347472"/>
+              <a:t>Everyone</a:t>
+            </a:r>
+            <a:endParaRPr lang="en-US" sz="1200" dirty="0"/>
+          </a:p>
+        </p:txBody>
+      </p:sp>
+      <p:sp>
+        <p:nvSpPr>
+          <p:cNvPr id="45" name="Report a problem step 3 text"/>
+          <p:cNvSpPr txBox="1"/>
+          <p:nvPr/>
+        </p:nvSpPr>
+        <p:spPr>
+          <a:xfrm>
+            <a:off x="5632704" y="3429000"/>
+            <a:ext cx="1325880" cy="822960"/>
           </a:xfrm>
           <a:prstGeom prst="rect">
             <a:avLst/>
@@ -5075,7 +7580,7 @@
           <a:bodyPr wrap="square" lIns="0" tIns="0" rIns="0" bIns="0" rtlCol="0" anchor="t"/>
           <a:lstStyle/>
           <a:p>
-            <a:pPr indent="0" marL="0">
+            <a:pPr marL="0" indent="0" algn="l">
               <a:buNone/>
             </a:pPr>
             <a:r>
@@ -5084,15 +7589,67 @@
                   <a:schemeClr val="tx1"/>
                 </a:solidFill>
               </a:rPr>
-              <a:t>each partner talks on its own channel</a:t>
+              <a:t>See it on the map, with its time, until it expires</a:t>
             </a:r>
             <a:endParaRPr lang="en-US" sz="1200" dirty="0"/>
+          </a:p>
+        </p:txBody>
+      </p:sp>
+      <p:cxnSp>
+        <p:nvCxnSpPr>
+          <p:cNvPr id="46" name="Report a problem arrow 3"/>
+          <p:cNvCxnSpPr/>
+          <p:nvPr/>
+        </p:nvCxnSpPr>
+        <p:spPr>
+          <a:xfrm>
+            <a:off x="6940296" y="3127248"/>
+            <a:ext cx="155448" cy="0"/>
+          </a:xfrm>
+          <a:prstGeom prst="line">
+            <a:avLst/>
+          </a:prstGeom>
+          <a:noFill/>
+          <a:ln w="15875">
+            <a:solidFill>
+              <a:schemeClr val="tx2"/>
+            </a:solidFill>
+            <a:prstDash val="solid"/>
+            <a:round/>
+            <a:tailEnd type="triangle" w="med" len="med"/>
+          </a:ln>
+        </p:spPr>
+      </p:cxnSp>
+      <p:sp>
+        <p:nvSpPr>
+          <p:cNvPr id="47" name="Report a problem step 4 icon circle"/>
+          <p:cNvSpPr/>
+          <p:nvPr/>
+        </p:nvSpPr>
+        <p:spPr>
+          <a:xfrm>
+            <a:off x="7168896" y="2935224"/>
+            <a:ext cx="384048" cy="384048"/>
+          </a:xfrm>
+          <a:prstGeom prst="ellipse">
+            <a:avLst/>
+          </a:prstGeom>
+          <a:solidFill>
+            <a:schemeClr val="tx2"/>
+          </a:solidFill>
+          <a:ln/>
+        </p:spPr>
+        <p:txBody>
+          <a:bodyPr/>
+          <a:lstStyle/>
+          <a:p>
+            <a:endParaRPr lang="pt-PT"/>
           </a:p>
         </p:txBody>
       </p:sp>
       <p:pic>
         <p:nvPicPr>
-          <p:cNvPr id="42" name="Sofia Success icon" descr="Success">    </p:cNvPr>
+          <p:cNvPr id="48" name="Report a problem step 4 icon" descr="Report a problem step 4 icon"/>
           <p:cNvPicPr>
             <a:picLocks noChangeAspect="1"/>
           </p:cNvPicPr>
@@ -5106,8 +7663,8 @@
         </p:blipFill>
         <p:spPr>
           <a:xfrm>
-            <a:off x="4828032" y="3150108"/>
-            <a:ext cx="146304" cy="146304"/>
+            <a:off x="7255307" y="3021635"/>
+            <a:ext cx="211226" cy="211226"/>
           </a:xfrm>
           <a:prstGeom prst="rect">
             <a:avLst/>
@@ -5116,14 +7673,14 @@
       </p:pic>
       <p:sp>
         <p:nvSpPr>
-          <p:cNvPr id="43" name="Sofia Success label"/>
-          <p:cNvSpPr txBox="1"/>
-          <p:nvPr/>
-        </p:nvSpPr>
-        <p:spPr>
-          <a:xfrm>
-            <a:off x="5047488" y="3127248"/>
-            <a:ext cx="1371600" cy="182880"/>
+          <p:cNvPr id="49" name="Report a problem step 4 actor"/>
+          <p:cNvSpPr txBox="1"/>
+          <p:nvPr/>
+        </p:nvSpPr>
+        <p:spPr>
+          <a:xfrm>
+            <a:off x="7626096" y="2935224"/>
+            <a:ext cx="868680" cy="384048"/>
           </a:xfrm>
           <a:prstGeom prst="rect">
             <a:avLst/>
@@ -5135,31 +7692,31 @@
           <a:bodyPr wrap="square" lIns="0" tIns="0" rIns="0" bIns="0" rtlCol="0" anchor="ctr"/>
           <a:lstStyle/>
           <a:p>
-            <a:pPr indent="0" marL="0">
-              <a:buNone/>
-            </a:pPr>
-            <a:r>
-              <a:rPr lang="en-US" sz="1100" b="1" dirty="0">
+            <a:pPr marL="0" indent="0" algn="l">
+              <a:buNone/>
+            </a:pPr>
+            <a:r>
+              <a:rPr lang="en-US" sz="1200" b="1" dirty="0">
                 <a:solidFill>
                   <a:schemeClr val="tx2"/>
                 </a:solidFill>
               </a:rPr>
-              <a:t>Success</a:t>
-            </a:r>
-            <a:endParaRPr lang="en-US" sz="1100" dirty="0"/>
-          </a:p>
-        </p:txBody>
-      </p:sp>
-      <p:sp>
-        <p:nvSpPr>
-          <p:cNvPr id="44" name="Sofia Success"/>
-          <p:cNvSpPr txBox="1"/>
-          <p:nvPr/>
-        </p:nvSpPr>
-        <p:spPr>
-          <a:xfrm>
-            <a:off x="4828032" y="3319272"/>
-            <a:ext cx="1645920" cy="347472"/>
+              <a:t>Rita</a:t>
+            </a:r>
+            <a:endParaRPr lang="en-US" sz="1200" dirty="0"/>
+          </a:p>
+        </p:txBody>
+      </p:sp>
+      <p:sp>
+        <p:nvSpPr>
+          <p:cNvPr id="50" name="Report a problem step 4 text"/>
+          <p:cNvSpPr txBox="1"/>
+          <p:nvPr/>
+        </p:nvSpPr>
+        <p:spPr>
+          <a:xfrm>
+            <a:off x="7168896" y="3429000"/>
+            <a:ext cx="1325880" cy="822960"/>
           </a:xfrm>
           <a:prstGeom prst="rect">
             <a:avLst/>
@@ -5171,7 +7728,7 @@
           <a:bodyPr wrap="square" lIns="0" tIns="0" rIns="0" bIns="0" rtlCol="0" anchor="t"/>
           <a:lstStyle/>
           <a:p>
-            <a:pPr indent="0" marL="0">
+            <a:pPr marL="0" indent="0" algn="l">
               <a:buNone/>
             </a:pPr>
             <a:r>
@@ -5180,7 +7737,7 @@
                   <a:schemeClr val="tx1"/>
                 </a:solidFill>
               </a:rPr>
-              <a:t>next night ready with configuration only</a:t>
+              <a:t>The confirmed report counts toward her badges</a:t>
             </a:r>
             <a:endParaRPr lang="en-US" sz="1200" dirty="0"/>
           </a:p>
@@ -5188,80 +7745,14 @@
       </p:sp>
       <p:sp>
         <p:nvSpPr>
-          <p:cNvPr id="45" name="Daniel card"/>
-          <p:cNvSpPr/>
-          <p:nvPr/>
-        </p:nvSpPr>
-        <p:spPr>
-          <a:xfrm>
-            <a:off x="6766560" y="1005840"/>
-            <a:ext cx="1920240" cy="2761488"/>
-          </a:xfrm>
-          <a:prstGeom prst="roundRect">
-            <a:avLst>
-              <a:gd name="adj" fmla="val 5714"/>
-            </a:avLst>
-          </a:prstGeom>
-          <a:solidFill>
-            <a:schemeClr val="bg2"/>
-          </a:solidFill>
-          <a:ln/>
-        </p:spPr>
-      </p:sp>
-      <p:sp>
-        <p:nvSpPr>
-          <p:cNvPr id="46" name="Daniel icon circle"/>
-          <p:cNvSpPr/>
-          <p:nvPr/>
-        </p:nvSpPr>
-        <p:spPr>
-          <a:xfrm>
-            <a:off x="6931152" y="1161288"/>
-            <a:ext cx="402336" cy="402336"/>
-          </a:xfrm>
-          <a:prstGeom prst="ellipse">
-            <a:avLst/>
-          </a:prstGeom>
-          <a:solidFill>
-            <a:schemeClr val="tx2"/>
-          </a:solidFill>
-          <a:ln/>
-        </p:spPr>
-      </p:sp>
-      <p:pic>
-        <p:nvPicPr>
-          <p:cNvPr id="47" name="Daniel icon" descr="Daniel icon">    </p:cNvPr>
-          <p:cNvPicPr>
-            <a:picLocks noChangeAspect="1"/>
-          </p:cNvPicPr>
-          <p:nvPr/>
-        </p:nvPicPr>
-        <p:blipFill>
-          <a:blip r:embed="rId13"/>
-          <a:stretch>
-            <a:fillRect/>
-          </a:stretch>
-        </p:blipFill>
-        <p:spPr>
-          <a:xfrm>
-            <a:off x="7031736" y="1261872"/>
-            <a:ext cx="201168" cy="201168"/>
-          </a:xfrm>
-          <a:prstGeom prst="rect">
-            <a:avLst/>
-          </a:prstGeom>
-        </p:spPr>
-      </p:pic>
-      <p:sp>
-        <p:nvSpPr>
-          <p:cNvPr id="48" name="Daniel name"/>
-          <p:cNvSpPr txBox="1"/>
-          <p:nvPr/>
-        </p:nvSpPr>
-        <p:spPr>
-          <a:xfrm>
-            <a:off x="7424928" y="1161288"/>
-            <a:ext cx="1188720" cy="402336"/>
+          <p:cNvPr id="51" name="Footnote"/>
+          <p:cNvSpPr txBox="1"/>
+          <p:nvPr/>
+        </p:nvSpPr>
+        <p:spPr>
+          <a:xfrm>
+            <a:off x="457200" y="4407408"/>
+            <a:ext cx="8229600" cy="292608"/>
           </a:xfrm>
           <a:prstGeom prst="rect">
             <a:avLst/>
@@ -5273,808 +7764,18 @@
           <a:bodyPr wrap="square" lIns="0" tIns="0" rIns="0" bIns="0" rtlCol="0" anchor="ctr"/>
           <a:lstStyle/>
           <a:p>
-            <a:pPr indent="0" marL="0">
-              <a:buNone/>
-            </a:pPr>
-            <a:r>
-              <a:rPr lang="en-US" sz="1600" b="1" dirty="0">
-                <a:solidFill>
-                  <a:schemeClr val="tx2"/>
-                </a:solidFill>
-              </a:rPr>
-              <a:t>Daniel, 27</a:t>
-            </a:r>
-            <a:endParaRPr lang="en-US" sz="1600" dirty="0"/>
-          </a:p>
-        </p:txBody>
-      </p:sp>
-      <p:sp>
-        <p:nvSpPr>
-          <p:cNvPr id="49" name="Daniel role"/>
-          <p:cNvSpPr txBox="1"/>
-          <p:nvPr/>
-        </p:nvSpPr>
-        <p:spPr>
-          <a:xfrm>
-            <a:off x="6931152" y="1627632"/>
-            <a:ext cx="1645920" cy="201168"/>
-          </a:xfrm>
-          <a:prstGeom prst="rect">
-            <a:avLst/>
-          </a:prstGeom>
-          <a:noFill/>
-          <a:ln/>
-        </p:spPr>
-        <p:txBody>
-          <a:bodyPr wrap="square" lIns="0" tIns="0" rIns="0" bIns="0" rtlCol="0" anchor="ctr"/>
-          <a:lstStyle/>
-          <a:p>
-            <a:pPr indent="0" marL="0">
-              <a:buNone/>
-            </a:pPr>
-            <a:r>
-              <a:rPr lang="en-US" sz="1100" b="1" dirty="0">
-                <a:solidFill>
-                  <a:schemeClr val="accent2"/>
-                </a:solidFill>
-              </a:rPr>
-              <a:t>Farol team · all events</a:t>
-            </a:r>
-            <a:endParaRPr lang="en-US" sz="1100" dirty="0"/>
-          </a:p>
-        </p:txBody>
-      </p:sp>
-      <p:pic>
-        <p:nvPicPr>
-          <p:cNvPr id="50" name="Daniel Goal icon" descr="Goal">    </p:cNvPr>
-          <p:cNvPicPr>
-            <a:picLocks noChangeAspect="1"/>
-          </p:cNvPicPr>
-          <p:nvPr/>
-        </p:nvPicPr>
-        <p:blipFill>
-          <a:blip r:embed="rId14"/>
-          <a:stretch>
-            <a:fillRect/>
-          </a:stretch>
-        </p:blipFill>
-        <p:spPr>
-          <a:xfrm>
-            <a:off x="6931152" y="1943100"/>
-            <a:ext cx="146304" cy="146304"/>
-          </a:xfrm>
-          <a:prstGeom prst="rect">
-            <a:avLst/>
-          </a:prstGeom>
-        </p:spPr>
-      </p:pic>
-      <p:sp>
-        <p:nvSpPr>
-          <p:cNvPr id="51" name="Daniel Goal label"/>
-          <p:cNvSpPr txBox="1"/>
-          <p:nvPr/>
-        </p:nvSpPr>
-        <p:spPr>
-          <a:xfrm>
-            <a:off x="7150608" y="1920240"/>
-            <a:ext cx="1371600" cy="182880"/>
-          </a:xfrm>
-          <a:prstGeom prst="rect">
-            <a:avLst/>
-          </a:prstGeom>
-          <a:noFill/>
-          <a:ln/>
-        </p:spPr>
-        <p:txBody>
-          <a:bodyPr wrap="square" lIns="0" tIns="0" rIns="0" bIns="0" rtlCol="0" anchor="ctr"/>
-          <a:lstStyle/>
-          <a:p>
-            <a:pPr indent="0" marL="0">
-              <a:buNone/>
-            </a:pPr>
-            <a:r>
-              <a:rPr lang="en-US" sz="1100" b="1" dirty="0">
-                <a:solidFill>
-                  <a:schemeClr val="tx2"/>
-                </a:solidFill>
-              </a:rPr>
-              <a:t>Goal</a:t>
-            </a:r>
-            <a:endParaRPr lang="en-US" sz="1100" dirty="0"/>
-          </a:p>
-        </p:txBody>
-      </p:sp>
-      <p:sp>
-        <p:nvSpPr>
-          <p:cNvPr id="52" name="Daniel Goal"/>
-          <p:cNvSpPr txBox="1"/>
-          <p:nvPr/>
-        </p:nvSpPr>
-        <p:spPr>
-          <a:xfrm>
-            <a:off x="6931152" y="2112264"/>
-            <a:ext cx="1645920" cy="347472"/>
-          </a:xfrm>
-          <a:prstGeom prst="rect">
-            <a:avLst/>
-          </a:prstGeom>
-          <a:noFill/>
-          <a:ln/>
-        </p:spPr>
-        <p:txBody>
-          <a:bodyPr wrap="square" lIns="0" tIns="0" rIns="0" bIns="0" rtlCol="0" anchor="t"/>
-          <a:lstStyle/>
-          <a:p>
-            <a:pPr indent="0" marL="0">
+            <a:pPr marL="0" indent="0" algn="l">
               <a:buNone/>
             </a:pPr>
             <a:r>
               <a:rPr lang="en-US" sz="1200" dirty="0">
                 <a:solidFill>
-                  <a:schemeClr val="tx1"/>
-                </a:solidFill>
-              </a:rPr>
-              <a:t>onboard real festivals, no new code</a:t>
+                  <a:schemeClr val="accent3"/>
+                </a:solidFill>
+              </a:rPr>
+              <a:t>AI only suggests, the operator decides · unconfirmed reports expire and earn nothing · no badges for help requests</a:t>
             </a:r>
             <a:endParaRPr lang="en-US" sz="1200" dirty="0"/>
-          </a:p>
-        </p:txBody>
-      </p:sp>
-      <p:pic>
-        <p:nvPicPr>
-          <p:cNvPr id="53" name="Daniel Pain icon" descr="Pain">    </p:cNvPr>
-          <p:cNvPicPr>
-            <a:picLocks noChangeAspect="1"/>
-          </p:cNvPicPr>
-          <p:nvPr/>
-        </p:nvPicPr>
-        <p:blipFill>
-          <a:blip r:embed="rId15"/>
-          <a:stretch>
-            <a:fillRect/>
-          </a:stretch>
-        </p:blipFill>
-        <p:spPr>
-          <a:xfrm>
-            <a:off x="6931152" y="2546604"/>
-            <a:ext cx="146304" cy="146304"/>
-          </a:xfrm>
-          <a:prstGeom prst="rect">
-            <a:avLst/>
-          </a:prstGeom>
-        </p:spPr>
-      </p:pic>
-      <p:sp>
-        <p:nvSpPr>
-          <p:cNvPr id="54" name="Daniel Pain label"/>
-          <p:cNvSpPr txBox="1"/>
-          <p:nvPr/>
-        </p:nvSpPr>
-        <p:spPr>
-          <a:xfrm>
-            <a:off x="7150608" y="2523744"/>
-            <a:ext cx="1371600" cy="182880"/>
-          </a:xfrm>
-          <a:prstGeom prst="rect">
-            <a:avLst/>
-          </a:prstGeom>
-          <a:noFill/>
-          <a:ln/>
-        </p:spPr>
-        <p:txBody>
-          <a:bodyPr wrap="square" lIns="0" tIns="0" rIns="0" bIns="0" rtlCol="0" anchor="ctr"/>
-          <a:lstStyle/>
-          <a:p>
-            <a:pPr indent="0" marL="0">
-              <a:buNone/>
-            </a:pPr>
-            <a:r>
-              <a:rPr lang="en-US" sz="1100" b="1" dirty="0">
-                <a:solidFill>
-                  <a:schemeClr val="tx2"/>
-                </a:solidFill>
-              </a:rPr>
-              <a:t>Pain</a:t>
-            </a:r>
-            <a:endParaRPr lang="en-US" sz="1100" dirty="0"/>
-          </a:p>
-        </p:txBody>
-      </p:sp>
-      <p:sp>
-        <p:nvSpPr>
-          <p:cNvPr id="55" name="Daniel Pain"/>
-          <p:cNvSpPr txBox="1"/>
-          <p:nvPr/>
-        </p:nvSpPr>
-        <p:spPr>
-          <a:xfrm>
-            <a:off x="6931152" y="2715768"/>
-            <a:ext cx="1645920" cy="347472"/>
-          </a:xfrm>
-          <a:prstGeom prst="rect">
-            <a:avLst/>
-          </a:prstGeom>
-          <a:noFill/>
-          <a:ln/>
-        </p:spPr>
-        <p:txBody>
-          <a:bodyPr wrap="square" lIns="0" tIns="0" rIns="0" bIns="0" rtlCol="0" anchor="t"/>
-          <a:lstStyle/>
-          <a:p>
-            <a:pPr indent="0" marL="0">
-              <a:buNone/>
-            </a:pPr>
-            <a:r>
-              <a:rPr lang="en-US" sz="1200" dirty="0">
-                <a:solidFill>
-                  <a:schemeClr val="tx1"/>
-                </a:solidFill>
-              </a:rPr>
-              <a:t>fake events; owners change every year</a:t>
-            </a:r>
-            <a:endParaRPr lang="en-US" sz="1200" dirty="0"/>
-          </a:p>
-        </p:txBody>
-      </p:sp>
-      <p:pic>
-        <p:nvPicPr>
-          <p:cNvPr id="56" name="Daniel Success icon" descr="Success">    </p:cNvPr>
-          <p:cNvPicPr>
-            <a:picLocks noChangeAspect="1"/>
-          </p:cNvPicPr>
-          <p:nvPr/>
-        </p:nvPicPr>
-        <p:blipFill>
-          <a:blip r:embed="rId16"/>
-          <a:stretch>
-            <a:fillRect/>
-          </a:stretch>
-        </p:blipFill>
-        <p:spPr>
-          <a:xfrm>
-            <a:off x="6931152" y="3150108"/>
-            <a:ext cx="146304" cy="146304"/>
-          </a:xfrm>
-          <a:prstGeom prst="rect">
-            <a:avLst/>
-          </a:prstGeom>
-        </p:spPr>
-      </p:pic>
-      <p:sp>
-        <p:nvSpPr>
-          <p:cNvPr id="57" name="Daniel Success label"/>
-          <p:cNvSpPr txBox="1"/>
-          <p:nvPr/>
-        </p:nvSpPr>
-        <p:spPr>
-          <a:xfrm>
-            <a:off x="7150608" y="3127248"/>
-            <a:ext cx="1371600" cy="182880"/>
-          </a:xfrm>
-          <a:prstGeom prst="rect">
-            <a:avLst/>
-          </a:prstGeom>
-          <a:noFill/>
-          <a:ln/>
-        </p:spPr>
-        <p:txBody>
-          <a:bodyPr wrap="square" lIns="0" tIns="0" rIns="0" bIns="0" rtlCol="0" anchor="ctr"/>
-          <a:lstStyle/>
-          <a:p>
-            <a:pPr indent="0" marL="0">
-              <a:buNone/>
-            </a:pPr>
-            <a:r>
-              <a:rPr lang="en-US" sz="1100" b="1" dirty="0">
-                <a:solidFill>
-                  <a:schemeClr val="tx2"/>
-                </a:solidFill>
-              </a:rPr>
-              <a:t>Success</a:t>
-            </a:r>
-            <a:endParaRPr lang="en-US" sz="1100" dirty="0"/>
-          </a:p>
-        </p:txBody>
-      </p:sp>
-      <p:sp>
-        <p:nvSpPr>
-          <p:cNvPr id="58" name="Daniel Success"/>
-          <p:cNvSpPr txBox="1"/>
-          <p:nvPr/>
-        </p:nvSpPr>
-        <p:spPr>
-          <a:xfrm>
-            <a:off x="6931152" y="3319272"/>
-            <a:ext cx="1645920" cy="347472"/>
-          </a:xfrm>
-          <a:prstGeom prst="rect">
-            <a:avLst/>
-          </a:prstGeom>
-          <a:noFill/>
-          <a:ln/>
-        </p:spPr>
-        <p:txBody>
-          <a:bodyPr wrap="square" lIns="0" tIns="0" rIns="0" bIns="0" rtlCol="0" anchor="t"/>
-          <a:lstStyle/>
-          <a:p>
-            <a:pPr indent="0" marL="0">
-              <a:buNone/>
-            </a:pPr>
-            <a:r>
-              <a:rPr lang="en-US" sz="1200" dirty="0">
-                <a:solidFill>
-                  <a:schemeClr val="tx1"/>
-                </a:solidFill>
-              </a:rPr>
-              <a:t>new festival live, its data never seen</a:t>
-            </a:r>
-            <a:endParaRPr lang="en-US" sz="1200" dirty="0"/>
-          </a:p>
-        </p:txBody>
-      </p:sp>
-      <p:sp>
-        <p:nvSpPr>
-          <p:cNvPr id="59" name="Validation band"/>
-          <p:cNvSpPr/>
-          <p:nvPr/>
-        </p:nvSpPr>
-        <p:spPr>
-          <a:xfrm>
-            <a:off x="457200" y="3904488"/>
-            <a:ext cx="8229600" cy="868680"/>
-          </a:xfrm>
-          <a:prstGeom prst="roundRect">
-            <a:avLst>
-              <a:gd name="adj" fmla="val 12632"/>
-            </a:avLst>
-          </a:prstGeom>
-          <a:solidFill>
-            <a:schemeClr val="tx2"/>
-          </a:solidFill>
-          <a:ln/>
-        </p:spPr>
-      </p:sp>
-      <p:pic>
-        <p:nvPicPr>
-          <p:cNvPr id="60" name="Proto-personas icon" descr="Proto-personas icon">    </p:cNvPr>
-          <p:cNvPicPr>
-            <a:picLocks noChangeAspect="1"/>
-          </p:cNvPicPr>
-          <p:nvPr/>
-        </p:nvPicPr>
-        <p:blipFill>
-          <a:blip r:embed="rId17"/>
-          <a:stretch>
-            <a:fillRect/>
-          </a:stretch>
-        </p:blipFill>
-        <p:spPr>
-          <a:xfrm>
-            <a:off x="658368" y="4023360"/>
-            <a:ext cx="274320" cy="274320"/>
-          </a:xfrm>
-          <a:prstGeom prst="rect">
-            <a:avLst/>
-          </a:prstGeom>
-        </p:spPr>
-      </p:pic>
-      <p:sp>
-        <p:nvSpPr>
-          <p:cNvPr id="61" name="Proto-personas heading"/>
-          <p:cNvSpPr txBox="1"/>
-          <p:nvPr/>
-        </p:nvSpPr>
-        <p:spPr>
-          <a:xfrm>
-            <a:off x="1024128" y="3995928"/>
-            <a:ext cx="2194560" cy="329184"/>
-          </a:xfrm>
-          <a:prstGeom prst="rect">
-            <a:avLst/>
-          </a:prstGeom>
-          <a:noFill/>
-          <a:ln/>
-        </p:spPr>
-        <p:txBody>
-          <a:bodyPr wrap="square" lIns="0" tIns="0" rIns="0" bIns="0" rtlCol="0" anchor="ctr"/>
-          <a:lstStyle/>
-          <a:p>
-            <a:pPr indent="0" marL="0">
-              <a:buNone/>
-            </a:pPr>
-            <a:r>
-              <a:rPr lang="en-US" sz="1600" b="1" dirty="0">
-                <a:solidFill>
-                  <a:schemeClr val="bg1"/>
-                </a:solidFill>
-              </a:rPr>
-              <a:t>Proto-personas</a:t>
-            </a:r>
-            <a:endParaRPr lang="en-US" sz="1600" dirty="0"/>
-          </a:p>
-        </p:txBody>
-      </p:sp>
-      <p:sp>
-        <p:nvSpPr>
-          <p:cNvPr id="62" name="Proto-personas text"/>
-          <p:cNvSpPr txBox="1"/>
-          <p:nvPr/>
-        </p:nvSpPr>
-        <p:spPr>
-          <a:xfrm>
-            <a:off x="658368" y="4370832"/>
-            <a:ext cx="2514600" cy="329184"/>
-          </a:xfrm>
-          <a:prstGeom prst="rect">
-            <a:avLst/>
-          </a:prstGeom>
-          <a:noFill/>
-          <a:ln/>
-        </p:spPr>
-        <p:txBody>
-          <a:bodyPr wrap="square" lIns="0" tIns="0" rIns="0" bIns="0" rtlCol="0" anchor="t"/>
-          <a:lstStyle/>
-          <a:p>
-            <a:pPr indent="0" marL="0">
-              <a:buNone/>
-            </a:pPr>
-            <a:r>
-              <a:rPr lang="en-US" sz="1050" dirty="0">
-                <a:solidFill>
-                  <a:schemeClr val="bg1"/>
-                </a:solidFill>
-              </a:rPr>
-              <a:t>From the report and public evidence. Names are fictional; no user data yet.</a:t>
-            </a:r>
-            <a:endParaRPr lang="en-US" sz="1050" dirty="0"/>
-          </a:p>
-        </p:txBody>
-      </p:sp>
-      <p:sp>
-        <p:nvSpPr>
-          <p:cNvPr id="63" name="Student survey circle"/>
-          <p:cNvSpPr/>
-          <p:nvPr/>
-        </p:nvSpPr>
-        <p:spPr>
-          <a:xfrm>
-            <a:off x="3337560" y="4142232"/>
-            <a:ext cx="365760" cy="365760"/>
-          </a:xfrm>
-          <a:prstGeom prst="ellipse">
-            <a:avLst/>
-          </a:prstGeom>
-          <a:solidFill>
-            <a:schemeClr val="accent1"/>
-          </a:solidFill>
-          <a:ln/>
-        </p:spPr>
-      </p:sp>
-      <p:pic>
-        <p:nvPicPr>
-          <p:cNvPr id="64" name="Student survey icon" descr="Student survey">    </p:cNvPr>
-          <p:cNvPicPr>
-            <a:picLocks noChangeAspect="1"/>
-          </p:cNvPicPr>
-          <p:nvPr/>
-        </p:nvPicPr>
-        <p:blipFill>
-          <a:blip r:embed="rId18"/>
-          <a:stretch>
-            <a:fillRect/>
-          </a:stretch>
-        </p:blipFill>
-        <p:spPr>
-          <a:xfrm>
-            <a:off x="3419856" y="4224528"/>
-            <a:ext cx="201168" cy="201168"/>
-          </a:xfrm>
-          <a:prstGeom prst="rect">
-            <a:avLst/>
-          </a:prstGeom>
-        </p:spPr>
-      </p:pic>
-      <p:sp>
-        <p:nvSpPr>
-          <p:cNvPr id="65" name="Student survey label"/>
-          <p:cNvSpPr txBox="1"/>
-          <p:nvPr/>
-        </p:nvSpPr>
-        <p:spPr>
-          <a:xfrm>
-            <a:off x="3794760" y="4114800"/>
-            <a:ext cx="1234440" cy="219456"/>
-          </a:xfrm>
-          <a:prstGeom prst="rect">
-            <a:avLst/>
-          </a:prstGeom>
-          <a:noFill/>
-          <a:ln/>
-        </p:spPr>
-        <p:txBody>
-          <a:bodyPr wrap="square" lIns="0" tIns="0" rIns="0" bIns="0" rtlCol="0" anchor="ctr"/>
-          <a:lstStyle/>
-          <a:p>
-            <a:pPr indent="0" marL="0">
-              <a:buNone/>
-            </a:pPr>
-            <a:r>
-              <a:rPr lang="en-US" sz="1200" b="1" dirty="0">
-                <a:solidFill>
-                  <a:schemeClr val="bg1"/>
-                </a:solidFill>
-              </a:rPr>
-              <a:t>Student survey</a:t>
-            </a:r>
-            <a:endParaRPr lang="en-US" sz="1200" dirty="0"/>
-          </a:p>
-        </p:txBody>
-      </p:sp>
-      <p:sp>
-        <p:nvSpPr>
-          <p:cNvPr id="66" name="Student survey target"/>
-          <p:cNvSpPr txBox="1"/>
-          <p:nvPr/>
-        </p:nvSpPr>
-        <p:spPr>
-          <a:xfrm>
-            <a:off x="3794760" y="4334256"/>
-            <a:ext cx="1234440" cy="201168"/>
-          </a:xfrm>
-          <a:prstGeom prst="rect">
-            <a:avLst/>
-          </a:prstGeom>
-          <a:noFill/>
-          <a:ln/>
-        </p:spPr>
-        <p:txBody>
-          <a:bodyPr wrap="square" lIns="0" tIns="0" rIns="0" bIns="0" rtlCol="0" anchor="ctr"/>
-          <a:lstStyle/>
-          <a:p>
-            <a:pPr indent="0" marL="0">
-              <a:buNone/>
-            </a:pPr>
-            <a:r>
-              <a:rPr lang="en-US" sz="1100" dirty="0">
-                <a:solidFill>
-                  <a:schemeClr val="accent1"/>
-                </a:solidFill>
-              </a:rPr>
-              <a:t>validates Rita</a:t>
-            </a:r>
-            <a:endParaRPr lang="en-US" sz="1100" dirty="0"/>
-          </a:p>
-        </p:txBody>
-      </p:sp>
-      <p:sp>
-        <p:nvSpPr>
-          <p:cNvPr id="67" name="Security interview circle"/>
-          <p:cNvSpPr/>
-          <p:nvPr/>
-        </p:nvSpPr>
-        <p:spPr>
-          <a:xfrm>
-            <a:off x="5120640" y="4142232"/>
-            <a:ext cx="365760" cy="365760"/>
-          </a:xfrm>
-          <a:prstGeom prst="ellipse">
-            <a:avLst/>
-          </a:prstGeom>
-          <a:solidFill>
-            <a:schemeClr val="accent1"/>
-          </a:solidFill>
-          <a:ln/>
-        </p:spPr>
-      </p:sp>
-      <p:pic>
-        <p:nvPicPr>
-          <p:cNvPr id="68" name="Security interview icon" descr="Security interview">    </p:cNvPr>
-          <p:cNvPicPr>
-            <a:picLocks noChangeAspect="1"/>
-          </p:cNvPicPr>
-          <p:nvPr/>
-        </p:nvPicPr>
-        <p:blipFill>
-          <a:blip r:embed="rId19"/>
-          <a:stretch>
-            <a:fillRect/>
-          </a:stretch>
-        </p:blipFill>
-        <p:spPr>
-          <a:xfrm>
-            <a:off x="5202936" y="4224528"/>
-            <a:ext cx="201168" cy="201168"/>
-          </a:xfrm>
-          <a:prstGeom prst="rect">
-            <a:avLst/>
-          </a:prstGeom>
-        </p:spPr>
-      </p:pic>
-      <p:sp>
-        <p:nvSpPr>
-          <p:cNvPr id="69" name="Security interview label"/>
-          <p:cNvSpPr txBox="1"/>
-          <p:nvPr/>
-        </p:nvSpPr>
-        <p:spPr>
-          <a:xfrm>
-            <a:off x="5577840" y="4114800"/>
-            <a:ext cx="1234440" cy="219456"/>
-          </a:xfrm>
-          <a:prstGeom prst="rect">
-            <a:avLst/>
-          </a:prstGeom>
-          <a:noFill/>
-          <a:ln/>
-        </p:spPr>
-        <p:txBody>
-          <a:bodyPr wrap="square" lIns="0" tIns="0" rIns="0" bIns="0" rtlCol="0" anchor="ctr"/>
-          <a:lstStyle/>
-          <a:p>
-            <a:pPr indent="0" marL="0">
-              <a:buNone/>
-            </a:pPr>
-            <a:r>
-              <a:rPr lang="en-US" sz="1200" b="1" dirty="0">
-                <a:solidFill>
-                  <a:schemeClr val="bg1"/>
-                </a:solidFill>
-              </a:rPr>
-              <a:t>Security interview</a:t>
-            </a:r>
-            <a:endParaRPr lang="en-US" sz="1200" dirty="0"/>
-          </a:p>
-        </p:txBody>
-      </p:sp>
-      <p:sp>
-        <p:nvSpPr>
-          <p:cNvPr id="70" name="Security interview target"/>
-          <p:cNvSpPr txBox="1"/>
-          <p:nvPr/>
-        </p:nvSpPr>
-        <p:spPr>
-          <a:xfrm>
-            <a:off x="5577840" y="4334256"/>
-            <a:ext cx="1234440" cy="201168"/>
-          </a:xfrm>
-          <a:prstGeom prst="rect">
-            <a:avLst/>
-          </a:prstGeom>
-          <a:noFill/>
-          <a:ln/>
-        </p:spPr>
-        <p:txBody>
-          <a:bodyPr wrap="square" lIns="0" tIns="0" rIns="0" bIns="0" rtlCol="0" anchor="ctr"/>
-          <a:lstStyle/>
-          <a:p>
-            <a:pPr indent="0" marL="0">
-              <a:buNone/>
-            </a:pPr>
-            <a:r>
-              <a:rPr lang="en-US" sz="1100" dirty="0">
-                <a:solidFill>
-                  <a:schemeClr val="accent1"/>
-                </a:solidFill>
-              </a:rPr>
-              <a:t>validates Miguel</a:t>
-            </a:r>
-            <a:endParaRPr lang="en-US" sz="1100" dirty="0"/>
-          </a:p>
-        </p:txBody>
-      </p:sp>
-      <p:sp>
-        <p:nvSpPr>
-          <p:cNvPr id="71" name="Organiser talk circle"/>
-          <p:cNvSpPr/>
-          <p:nvPr/>
-        </p:nvSpPr>
-        <p:spPr>
-          <a:xfrm>
-            <a:off x="6903720" y="4142232"/>
-            <a:ext cx="365760" cy="365760"/>
-          </a:xfrm>
-          <a:prstGeom prst="ellipse">
-            <a:avLst/>
-          </a:prstGeom>
-          <a:solidFill>
-            <a:schemeClr val="accent1"/>
-          </a:solidFill>
-          <a:ln/>
-        </p:spPr>
-      </p:sp>
-      <p:pic>
-        <p:nvPicPr>
-          <p:cNvPr id="72" name="Organiser talk icon" descr="Organiser talk">    </p:cNvPr>
-          <p:cNvPicPr>
-            <a:picLocks noChangeAspect="1"/>
-          </p:cNvPicPr>
-          <p:nvPr/>
-        </p:nvPicPr>
-        <p:blipFill>
-          <a:blip r:embed="rId20"/>
-          <a:stretch>
-            <a:fillRect/>
-          </a:stretch>
-        </p:blipFill>
-        <p:spPr>
-          <a:xfrm>
-            <a:off x="6986016" y="4224528"/>
-            <a:ext cx="201168" cy="201168"/>
-          </a:xfrm>
-          <a:prstGeom prst="rect">
-            <a:avLst/>
-          </a:prstGeom>
-        </p:spPr>
-      </p:pic>
-      <p:sp>
-        <p:nvSpPr>
-          <p:cNvPr id="73" name="Organiser talk label"/>
-          <p:cNvSpPr txBox="1"/>
-          <p:nvPr/>
-        </p:nvSpPr>
-        <p:spPr>
-          <a:xfrm>
-            <a:off x="7360920" y="4114800"/>
-            <a:ext cx="1234440" cy="219456"/>
-          </a:xfrm>
-          <a:prstGeom prst="rect">
-            <a:avLst/>
-          </a:prstGeom>
-          <a:noFill/>
-          <a:ln/>
-        </p:spPr>
-        <p:txBody>
-          <a:bodyPr wrap="square" lIns="0" tIns="0" rIns="0" bIns="0" rtlCol="0" anchor="ctr"/>
-          <a:lstStyle/>
-          <a:p>
-            <a:pPr indent="0" marL="0">
-              <a:buNone/>
-            </a:pPr>
-            <a:r>
-              <a:rPr lang="en-US" sz="1200" b="1" dirty="0">
-                <a:solidFill>
-                  <a:schemeClr val="bg1"/>
-                </a:solidFill>
-              </a:rPr>
-              <a:t>Organiser talk</a:t>
-            </a:r>
-            <a:endParaRPr lang="en-US" sz="1200" dirty="0"/>
-          </a:p>
-        </p:txBody>
-      </p:sp>
-      <p:sp>
-        <p:nvSpPr>
-          <p:cNvPr id="74" name="Organiser talk target"/>
-          <p:cNvSpPr txBox="1"/>
-          <p:nvPr/>
-        </p:nvSpPr>
-        <p:spPr>
-          <a:xfrm>
-            <a:off x="7360920" y="4334256"/>
-            <a:ext cx="1234440" cy="201168"/>
-          </a:xfrm>
-          <a:prstGeom prst="rect">
-            <a:avLst/>
-          </a:prstGeom>
-          <a:noFill/>
-          <a:ln/>
-        </p:spPr>
-        <p:txBody>
-          <a:bodyPr wrap="square" lIns="0" tIns="0" rIns="0" bIns="0" rtlCol="0" anchor="ctr"/>
-          <a:lstStyle/>
-          <a:p>
-            <a:pPr indent="0" marL="0">
-              <a:buNone/>
-            </a:pPr>
-            <a:r>
-              <a:rPr lang="en-US" sz="1100" dirty="0">
-                <a:solidFill>
-                  <a:schemeClr val="accent1"/>
-                </a:solidFill>
-              </a:rPr>
-              <a:t>validates Sofia</a:t>
-            </a:r>
-            <a:endParaRPr lang="en-US" sz="1100" dirty="0"/>
           </a:p>
         </p:txBody>
       </p:sp>
@@ -6379,4 +8080,319 @@
     </a:ext>
   </a:extLst>
 </a:theme>
+</file>
+
+<file path=ppt/theme/theme2.xml><?xml version="1.0" encoding="utf-8"?>
+<a:theme xmlns:a="http://schemas.openxmlformats.org/drawingml/2006/main" name="Office Theme">
+  <a:themeElements>
+    <a:clrScheme name="Office">
+      <a:dk1>
+        <a:sysClr val="windowText" lastClr="000000"/>
+      </a:dk1>
+      <a:lt1>
+        <a:sysClr val="window" lastClr="FFFFFF"/>
+      </a:lt1>
+      <a:dk2>
+        <a:srgbClr val="0E2841"/>
+      </a:dk2>
+      <a:lt2>
+        <a:srgbClr val="E8E8E8"/>
+      </a:lt2>
+      <a:accent1>
+        <a:srgbClr val="156082"/>
+      </a:accent1>
+      <a:accent2>
+        <a:srgbClr val="E97132"/>
+      </a:accent2>
+      <a:accent3>
+        <a:srgbClr val="196B24"/>
+      </a:accent3>
+      <a:accent4>
+        <a:srgbClr val="0F9ED5"/>
+      </a:accent4>
+      <a:accent5>
+        <a:srgbClr val="A02B93"/>
+      </a:accent5>
+      <a:accent6>
+        <a:srgbClr val="4EA72E"/>
+      </a:accent6>
+      <a:hlink>
+        <a:srgbClr val="467886"/>
+      </a:hlink>
+      <a:folHlink>
+        <a:srgbClr val="96607D"/>
+      </a:folHlink>
+    </a:clrScheme>
+    <a:fontScheme name="Office">
+      <a:majorFont>
+        <a:latin typeface="Aptos Display" panose="02110004020202020204"/>
+        <a:ea typeface=""/>
+        <a:cs typeface=""/>
+        <a:font script="Jpan" typeface="游ゴシック Light"/>
+        <a:font script="Hang" typeface="맑은 고딕"/>
+        <a:font script="Hans" typeface="等线 Light"/>
+        <a:font script="Hant" typeface="新細明體"/>
+        <a:font script="Arab" typeface="Times New Roman"/>
+        <a:font script="Hebr" typeface="Times New Roman"/>
+        <a:font script="Thai" typeface="Angsana New"/>
+        <a:font script="Ethi" typeface="Nyala"/>
+        <a:font script="Beng" typeface="Vrinda"/>
+        <a:font script="Gujr" typeface="Shruti"/>
+        <a:font script="Khmr" typeface="MoolBoran"/>
+        <a:font script="Knda" typeface="Tunga"/>
+        <a:font script="Guru" typeface="Raavi"/>
+        <a:font script="Cans" typeface="Euphemia"/>
+        <a:font script="Cher" typeface="Plantagenet Cherokee"/>
+        <a:font script="Yiii" typeface="Microsoft Yi Baiti"/>
+        <a:font script="Tibt" typeface="Microsoft Himalaya"/>
+        <a:font script="Thaa" typeface="MV Boli"/>
+        <a:font script="Deva" typeface="Mangal"/>
+        <a:font script="Telu" typeface="Gautami"/>
+        <a:font script="Taml" typeface="Latha"/>
+        <a:font script="Syrc" typeface="Estrangelo Edessa"/>
+        <a:font script="Orya" typeface="Kalinga"/>
+        <a:font script="Mlym" typeface="Kartika"/>
+        <a:font script="Laoo" typeface="DokChampa"/>
+        <a:font script="Sinh" typeface="Iskoola Pota"/>
+        <a:font script="Mong" typeface="Mongolian Baiti"/>
+        <a:font script="Viet" typeface="Times New Roman"/>
+        <a:font script="Uigh" typeface="Microsoft Uighur"/>
+        <a:font script="Geor" typeface="Sylfaen"/>
+        <a:font script="Armn" typeface="Arial"/>
+        <a:font script="Bugi" typeface="Leelawadee UI"/>
+        <a:font script="Bopo" typeface="Microsoft JhengHei"/>
+        <a:font script="Java" typeface="Javanese Text"/>
+        <a:font script="Lisu" typeface="Segoe UI"/>
+        <a:font script="Mymr" typeface="Myanmar Text"/>
+        <a:font script="Nkoo" typeface="Ebrima"/>
+        <a:font script="Olck" typeface="Nirmala UI"/>
+        <a:font script="Osma" typeface="Ebrima"/>
+        <a:font script="Phag" typeface="Phagspa"/>
+        <a:font script="Syrn" typeface="Estrangelo Edessa"/>
+        <a:font script="Syrj" typeface="Estrangelo Edessa"/>
+        <a:font script="Syre" typeface="Estrangelo Edessa"/>
+        <a:font script="Sora" typeface="Nirmala UI"/>
+        <a:font script="Tale" typeface="Microsoft Tai Le"/>
+        <a:font script="Talu" typeface="Microsoft New Tai Lue"/>
+        <a:font script="Tfng" typeface="Ebrima"/>
+      </a:majorFont>
+      <a:minorFont>
+        <a:latin typeface="Aptos" panose="02110004020202020204"/>
+        <a:ea typeface=""/>
+        <a:cs typeface=""/>
+        <a:font script="Jpan" typeface="游ゴシック"/>
+        <a:font script="Hang" typeface="맑은 고딕"/>
+        <a:font script="Hans" typeface="等线"/>
+        <a:font script="Hant" typeface="新細明體"/>
+        <a:font script="Arab" typeface="Arial"/>
+        <a:font script="Hebr" typeface="Arial"/>
+        <a:font script="Thai" typeface="Cordia New"/>
+        <a:font script="Ethi" typeface="Nyala"/>
+        <a:font script="Beng" typeface="Vrinda"/>
+        <a:font script="Gujr" typeface="Shruti"/>
+        <a:font script="Khmr" typeface="DaunPenh"/>
+        <a:font script="Knda" typeface="Tunga"/>
+        <a:font script="Guru" typeface="Raavi"/>
+        <a:font script="Cans" typeface="Euphemia"/>
+        <a:font script="Cher" typeface="Plantagenet Cherokee"/>
+        <a:font script="Yiii" typeface="Microsoft Yi Baiti"/>
+        <a:font script="Tibt" typeface="Microsoft Himalaya"/>
+        <a:font script="Thaa" typeface="MV Boli"/>
+        <a:font script="Deva" typeface="Mangal"/>
+        <a:font script="Telu" typeface="Gautami"/>
+        <a:font script="Taml" typeface="Latha"/>
+        <a:font script="Syrc" typeface="Estrangelo Edessa"/>
+        <a:font script="Orya" typeface="Kalinga"/>
+        <a:font script="Mlym" typeface="Kartika"/>
+        <a:font script="Laoo" typeface="DokChampa"/>
+        <a:font script="Sinh" typeface="Iskoola Pota"/>
+        <a:font script="Mong" typeface="Mongolian Baiti"/>
+        <a:font script="Viet" typeface="Arial"/>
+        <a:font script="Uigh" typeface="Microsoft Uighur"/>
+        <a:font script="Geor" typeface="Sylfaen"/>
+        <a:font script="Armn" typeface="Arial"/>
+        <a:font script="Bugi" typeface="Leelawadee UI"/>
+        <a:font script="Bopo" typeface="Microsoft JhengHei"/>
+        <a:font script="Java" typeface="Javanese Text"/>
+        <a:font script="Lisu" typeface="Segoe UI"/>
+        <a:font script="Mymr" typeface="Myanmar Text"/>
+        <a:font script="Nkoo" typeface="Ebrima"/>
+        <a:font script="Olck" typeface="Nirmala UI"/>
+        <a:font script="Osma" typeface="Ebrima"/>
+        <a:font script="Phag" typeface="Phagspa"/>
+        <a:font script="Syrn" typeface="Estrangelo Edessa"/>
+        <a:font script="Syrj" typeface="Estrangelo Edessa"/>
+        <a:font script="Syre" typeface="Estrangelo Edessa"/>
+        <a:font script="Sora" typeface="Nirmala UI"/>
+        <a:font script="Tale" typeface="Microsoft Tai Le"/>
+        <a:font script="Talu" typeface="Microsoft New Tai Lue"/>
+        <a:font script="Tfng" typeface="Ebrima"/>
+      </a:minorFont>
+    </a:fontScheme>
+    <a:fmtScheme name="Office">
+      <a:fillStyleLst>
+        <a:solidFill>
+          <a:schemeClr val="phClr"/>
+        </a:solidFill>
+        <a:gradFill rotWithShape="1">
+          <a:gsLst>
+            <a:gs pos="0">
+              <a:schemeClr val="phClr">
+                <a:lumMod val="110000"/>
+                <a:satMod val="105000"/>
+                <a:tint val="67000"/>
+              </a:schemeClr>
+            </a:gs>
+            <a:gs pos="50000">
+              <a:schemeClr val="phClr">
+                <a:lumMod val="105000"/>
+                <a:satMod val="103000"/>
+                <a:tint val="73000"/>
+              </a:schemeClr>
+            </a:gs>
+            <a:gs pos="100000">
+              <a:schemeClr val="phClr">
+                <a:lumMod val="105000"/>
+                <a:satMod val="109000"/>
+                <a:tint val="81000"/>
+              </a:schemeClr>
+            </a:gs>
+          </a:gsLst>
+          <a:lin ang="5400000" scaled="0"/>
+        </a:gradFill>
+        <a:gradFill rotWithShape="1">
+          <a:gsLst>
+            <a:gs pos="0">
+              <a:schemeClr val="phClr">
+                <a:satMod val="103000"/>
+                <a:lumMod val="102000"/>
+                <a:tint val="94000"/>
+              </a:schemeClr>
+            </a:gs>
+            <a:gs pos="50000">
+              <a:schemeClr val="phClr">
+                <a:satMod val="110000"/>
+                <a:lumMod val="100000"/>
+                <a:shade val="100000"/>
+              </a:schemeClr>
+            </a:gs>
+            <a:gs pos="100000">
+              <a:schemeClr val="phClr">
+                <a:lumMod val="99000"/>
+                <a:satMod val="120000"/>
+                <a:shade val="78000"/>
+              </a:schemeClr>
+            </a:gs>
+          </a:gsLst>
+          <a:lin ang="5400000" scaled="0"/>
+        </a:gradFill>
+      </a:fillStyleLst>
+      <a:lnStyleLst>
+        <a:ln w="12700" cap="flat" cmpd="sng" algn="ctr">
+          <a:solidFill>
+            <a:schemeClr val="phClr"/>
+          </a:solidFill>
+          <a:prstDash val="solid"/>
+          <a:miter lim="800000"/>
+        </a:ln>
+        <a:ln w="19050" cap="flat" cmpd="sng" algn="ctr">
+          <a:solidFill>
+            <a:schemeClr val="phClr"/>
+          </a:solidFill>
+          <a:prstDash val="solid"/>
+          <a:miter lim="800000"/>
+        </a:ln>
+        <a:ln w="25400" cap="flat" cmpd="sng" algn="ctr">
+          <a:solidFill>
+            <a:schemeClr val="phClr"/>
+          </a:solidFill>
+          <a:prstDash val="solid"/>
+          <a:miter lim="800000"/>
+        </a:ln>
+      </a:lnStyleLst>
+      <a:effectStyleLst>
+        <a:effectStyle>
+          <a:effectLst/>
+        </a:effectStyle>
+        <a:effectStyle>
+          <a:effectLst/>
+        </a:effectStyle>
+        <a:effectStyle>
+          <a:effectLst>
+            <a:outerShdw blurRad="57150" dist="19050" dir="5400000" algn="ctr" rotWithShape="0">
+              <a:srgbClr val="000000">
+                <a:alpha val="63000"/>
+              </a:srgbClr>
+            </a:outerShdw>
+          </a:effectLst>
+        </a:effectStyle>
+      </a:effectStyleLst>
+      <a:bgFillStyleLst>
+        <a:solidFill>
+          <a:schemeClr val="phClr"/>
+        </a:solidFill>
+        <a:solidFill>
+          <a:schemeClr val="phClr">
+            <a:tint val="95000"/>
+            <a:satMod val="170000"/>
+          </a:schemeClr>
+        </a:solidFill>
+        <a:gradFill rotWithShape="1">
+          <a:gsLst>
+            <a:gs pos="0">
+              <a:schemeClr val="phClr">
+                <a:tint val="93000"/>
+                <a:satMod val="150000"/>
+                <a:shade val="98000"/>
+                <a:lumMod val="102000"/>
+              </a:schemeClr>
+            </a:gs>
+            <a:gs pos="50000">
+              <a:schemeClr val="phClr">
+                <a:tint val="98000"/>
+                <a:satMod val="130000"/>
+                <a:shade val="90000"/>
+                <a:lumMod val="103000"/>
+              </a:schemeClr>
+            </a:gs>
+            <a:gs pos="100000">
+              <a:schemeClr val="phClr">
+                <a:shade val="63000"/>
+                <a:satMod val="120000"/>
+              </a:schemeClr>
+            </a:gs>
+          </a:gsLst>
+          <a:lin ang="5400000" scaled="0"/>
+        </a:gradFill>
+      </a:bgFillStyleLst>
+    </a:fmtScheme>
+  </a:themeElements>
+  <a:objectDefaults>
+    <a:lnDef>
+      <a:spPr/>
+      <a:bodyPr/>
+      <a:lstStyle/>
+      <a:style>
+        <a:lnRef idx="2">
+          <a:schemeClr val="accent1"/>
+        </a:lnRef>
+        <a:fillRef idx="0">
+          <a:schemeClr val="accent1"/>
+        </a:fillRef>
+        <a:effectRef idx="1">
+          <a:schemeClr val="accent1"/>
+        </a:effectRef>
+        <a:fontRef idx="minor">
+          <a:schemeClr val="tx1"/>
+        </a:fontRef>
+      </a:style>
+    </a:lnDef>
+  </a:objectDefaults>
+  <a:extraClrSchemeLst/>
+  <a:extLst>
+    <a:ext uri="{05A4C25C-085E-4340-85A3-A5531E510DB2}">
+      <thm15:themeFamily xmlns:thm15="http://schemas.microsoft.com/office/thememl/2012/main" name="Office Theme" id="{2E142A2C-CD16-42D6-873A-C26D2A0506FA}" vid="{1BDDFF52-6CD6-40A5-AB3C-68EB2F1E4D0A}"/>
+    </a:ext>
+  </a:extLst>
+</a:theme>
 </file>
--- a/Docs/Presentation/Farol_First_Presentation.pptx
+++ b/Docs/Presentation/Farol_First_Presentation.pptx
@@ -9,6 +9,7 @@
   </p:notesMasterIdLst>
   <p:sldIdLst>
     <p:sldId id="256" r:id="rId2"/>
+    <p:sldId id="261" r:id="rId12"/>
     <p:sldId id="259" r:id="rId3"/>
     <p:sldId id="257" r:id="rId4"/>
     <p:sldId id="258" r:id="rId5"/>
@@ -114,6 +115,11 @@
         <p14:section name="Cover (Bruno Lopes)" id="{3C1F5A2E-6D4B-4E8A-9B71-2F0C8D9E4A10}">
           <p14:sldIdLst>
             <p14:sldId id="256"/>
+          </p14:sldIdLst>
+        </p14:section>
+        <p14:section name="Product Vision (Tomás Oliveira)" id="{771975C7-DD32-4345-BD10-F5E181073B3C}">
+          <p14:sldIdLst>
+            <p14:sldId id="261"/>
           </p14:sldIdLst>
         </p14:section>
         <p14:section name="Personas (Tiago Teixeira)" id="{7A9E2B44-1C3D-4F6A-8E25-5B0D7C1F9E32}">
@@ -689,6 +695,124 @@
         </p:txBody>
       </p:sp>
     </p:spTree>
+  </p:cSld>
+  <p:clrMapOvr>
+    <a:masterClrMapping/>
+  </p:clrMapOvr>
+</p:notes>
+</file>
+
+<file path=ppt/notesSlides/notesSlide6.xml><?xml version="1.0" encoding="utf-8"?>
+<p:notes xmlns:a="http://schemas.openxmlformats.org/drawingml/2006/main" xmlns:r="http://schemas.openxmlformats.org/officeDocument/2006/relationships" xmlns:p="http://schemas.openxmlformats.org/presentationml/2006/main">
+  <p:cSld>
+    <p:spTree>
+      <p:nvGrpSpPr>
+        <p:cNvPr id="1" name=""/>
+        <p:cNvGrpSpPr/>
+        <p:nvPr/>
+      </p:nvGrpSpPr>
+      <p:grpSpPr>
+        <a:xfrm>
+          <a:off x="0" y="0"/>
+          <a:ext cx="0" cy="0"/>
+          <a:chOff x="0" y="0"/>
+          <a:chExt cx="0" cy="0"/>
+        </a:xfrm>
+      </p:grpSpPr>
+      <p:sp>
+        <p:nvSpPr>
+          <p:cNvPr id="2" name="Slide Image Placeholder 1"/>
+          <p:cNvSpPr>
+            <a:spLocks noGrp="1" noRot="1" noChangeAspect="1"/>
+          </p:cNvSpPr>
+          <p:nvPr>
+            <p:ph type="sldImg"/>
+          </p:nvPr>
+        </p:nvSpPr>
+        <p:spPr/>
+      </p:sp>
+      <p:sp>
+        <p:nvSpPr>
+          <p:cNvPr id="3" name="Notes Placeholder 2"/>
+          <p:cNvSpPr>
+            <a:spLocks noGrp="1"/>
+          </p:cNvSpPr>
+          <p:nvPr>
+            <p:ph type="body" idx="1"/>
+          </p:nvPr>
+        </p:nvSpPr>
+        <p:spPr/>
+        <p:txBody>
+          <a:bodyPr/>
+          <a:lstStyle/>
+          <a:p>
+            <a:r>
+              <a:t>A visao do Farol liga os participantes e a equipa do evento atraves de informacao fiavel e pedidos de ajuda com contexto e localizacao. Os estudantes acedem por link ou QR, escolhem o evento e encontram a planta, informacao essencial e transportes. A equipa configura o evento, mantem a informacao atualizada, avalia prioridades e encaminha pedidos para a equipa operacional adequada.</a:t>
+            </a:r>
+          </a:p>
+          <a:p>
+            <a:endParaRPr/>
+          </a:p>
+          <a:p>
+            <a:r>
+              <a:t>O MVP inclui a aplicacao web para participantes e o backoffice de cada equipa. O sucesso deve ser avaliado pelo tempo de acesso a informacao, pela facilidade de submeter e gerir pedidos, pela resposta operacional, pela adocao e pelo feedback. A visao ainda nao fixa metas numericas.</a:t>
+            </a:r>
+          </a:p>
+          <a:p>
+            <a:endParaRPr/>
+          </a:p>
+          <a:p>
+            <a:r>
+              <a:t>Integracoes pesadas, previsao avancada de multidoes e automacao completa ficam fora da primeira versao, salvo necessidade de validacao. A capacidade fisica das entradas fica fora do ambito.</a:t>
+            </a:r>
+          </a:p>
+          <a:p>
+            <a:endParaRPr/>
+          </a:p>
+          <a:p>
+            <a:r>
+              <a:t>Fonte: /Users/tomasoliveira21/Desktop/ISEP/2627/LABDSOF/Docs/Deliverables/problem-opportunity-report-queima.md, seccao "Visao de produto" (Personas, Proposta de valor, Principais jornadas do utilizador, Criterios de sucesso e Definicao do MVP).</a:t>
+            </a:r>
+          </a:p>
+          <a:p>
+            <a:endParaRPr/>
+          </a:p>
+          <a:p>
+            <a:r>
+              <a:t>Identidade visual: logotipo original da apresentacao fornecida.</a:t>
+            </a:r>
+          </a:p>
+        </p:txBody>
+      </p:sp>
+      <p:sp>
+        <p:nvSpPr>
+          <p:cNvPr id="4" name="Slide Number Placeholder 3"/>
+          <p:cNvSpPr>
+            <a:spLocks noGrp="1"/>
+          </p:cNvSpPr>
+          <p:nvPr>
+            <p:ph type="sldNum" sz="quarter" idx="10"/>
+          </p:nvPr>
+        </p:nvSpPr>
+        <p:spPr/>
+        <p:txBody>
+          <a:bodyPr/>
+          <a:lstStyle/>
+          <a:p>
+            <a:fld id="{F7021451-1387-4CA6-816F-3879F97B5CBC}" type="slidenum">
+              <a:rPr lang="en-US"/>
+              <a:t>2</a:t>
+            </a:fld>
+            <a:endParaRPr lang="en-US"/>
+          </a:p>
+        </p:txBody>
+      </p:sp>
+    </p:spTree>
+    <p:extLst>
+      <p:ext uri="{BB962C8B-B14F-4D97-AF65-F5344CB8AC3E}">
+        <p14:creationId xmlns:p14="http://schemas.microsoft.com/office/powerpoint/2010/main" val="1024086991"/>
+      </p:ext>
+    </p:extLst>
   </p:cSld>
   <p:clrMapOvr>
     <a:masterClrMapping/>
@@ -7776,6 +7900,956 @@
               <a:t>AI only suggests, the operator decides · unconfirmed reports expire and earn nothing · no badges for help requests</a:t>
             </a:r>
             <a:endParaRPr lang="en-US" sz="1200" dirty="0"/>
+          </a:p>
+        </p:txBody>
+      </p:sp>
+    </p:spTree>
+  </p:cSld>
+  <p:clrMapOvr>
+    <a:masterClrMapping/>
+  </p:clrMapOvr>
+</p:sld>
+</file>
+
+<file path=ppt/slides/slide6.xml><?xml version="1.0" encoding="utf-8"?>
+<p:sld xmlns:a="http://schemas.openxmlformats.org/drawingml/2006/main" xmlns:r="http://schemas.openxmlformats.org/officeDocument/2006/relationships" xmlns:p="http://schemas.openxmlformats.org/presentationml/2006/main">
+  <p:cSld name="Slide 2">
+    <p:spTree>
+      <p:nvGrpSpPr>
+        <p:cNvPr id="1" name=""/>
+        <p:cNvGrpSpPr/>
+        <p:nvPr/>
+      </p:nvGrpSpPr>
+      <p:grpSpPr>
+        <a:xfrm>
+          <a:off x="0" y="0"/>
+          <a:ext cx="0" cy="0"/>
+          <a:chOff x="0" y="0"/>
+          <a:chExt cx="0" cy="0"/>
+        </a:xfrm>
+      </p:grpSpPr>
+      <p:sp>
+        <p:nvSpPr>
+          <p:cNvPr id="4" name="Rita card">
+            <a:extLst>
+              <a:ext uri="{FF2B5EF4-FFF2-40B4-BE49-F238E27FC236}">
+                <a16:creationId xmlns:a16="http://schemas.microsoft.com/office/drawing/2014/main" id="{DE3F91AE-EEF0-4B77-F796-372EBD91B7DF}"/>
+              </a:ext>
+            </a:extLst>
+          </p:cNvPr>
+          <p:cNvSpPr/>
+          <p:nvPr/>
+        </p:nvSpPr>
+        <p:spPr>
+          <a:xfrm>
+            <a:off x="368693" y="3433761"/>
+            <a:ext cx="8387563" cy="1319448"/>
+          </a:xfrm>
+          <a:prstGeom prst="roundRect">
+            <a:avLst>
+              <a:gd name="adj" fmla="val 5714"/>
+            </a:avLst>
+          </a:prstGeom>
+          <a:solidFill>
+            <a:schemeClr val="tx2"/>
+          </a:solidFill>
+          <a:ln/>
+        </p:spPr>
+        <p:txBody>
+          <a:bodyPr/>
+          <a:lstStyle/>
+          <a:p>
+            <a:endParaRPr lang="en-PT" dirty="0">
+              <a:solidFill>
+                <a:schemeClr val="bg1"/>
+              </a:solidFill>
+            </a:endParaRPr>
+          </a:p>
+        </p:txBody>
+      </p:sp>
+      <p:sp>
+        <p:nvSpPr>
+          <p:cNvPr id="3" name="Rita card">
+            <a:extLst>
+              <a:ext uri="{FF2B5EF4-FFF2-40B4-BE49-F238E27FC236}">
+                <a16:creationId xmlns:a16="http://schemas.microsoft.com/office/drawing/2014/main" id="{30711021-712A-717F-2C45-15DE97DD91DD}"/>
+              </a:ext>
+            </a:extLst>
+          </p:cNvPr>
+          <p:cNvSpPr/>
+          <p:nvPr/>
+        </p:nvSpPr>
+        <p:spPr>
+          <a:xfrm>
+            <a:off x="4731143" y="1938337"/>
+            <a:ext cx="4025113" cy="1238250"/>
+          </a:xfrm>
+          <a:prstGeom prst="roundRect">
+            <a:avLst>
+              <a:gd name="adj" fmla="val 5714"/>
+            </a:avLst>
+          </a:prstGeom>
+          <a:solidFill>
+            <a:schemeClr val="bg2"/>
+          </a:solidFill>
+          <a:ln/>
+        </p:spPr>
+        <p:txBody>
+          <a:bodyPr/>
+          <a:lstStyle/>
+          <a:p>
+            <a:endParaRPr lang="en-PT"/>
+          </a:p>
+        </p:txBody>
+      </p:sp>
+      <p:sp>
+        <p:nvSpPr>
+          <p:cNvPr id="2" name="Rita card">
+            <a:extLst>
+              <a:ext uri="{FF2B5EF4-FFF2-40B4-BE49-F238E27FC236}">
+                <a16:creationId xmlns:a16="http://schemas.microsoft.com/office/drawing/2014/main" id="{0FDC3C32-5582-6860-15BE-D9F57C237ACD}"/>
+              </a:ext>
+            </a:extLst>
+          </p:cNvPr>
+          <p:cNvSpPr/>
+          <p:nvPr/>
+        </p:nvSpPr>
+        <p:spPr>
+          <a:xfrm>
+            <a:off x="368693" y="1938337"/>
+            <a:ext cx="4025113" cy="1238250"/>
+          </a:xfrm>
+          <a:prstGeom prst="roundRect">
+            <a:avLst>
+              <a:gd name="adj" fmla="val 5714"/>
+            </a:avLst>
+          </a:prstGeom>
+          <a:solidFill>
+            <a:schemeClr val="bg2"/>
+          </a:solidFill>
+          <a:ln/>
+        </p:spPr>
+        <p:txBody>
+          <a:bodyPr/>
+          <a:lstStyle/>
+          <a:p>
+            <a:endParaRPr lang="en-PT"/>
+          </a:p>
+        </p:txBody>
+      </p:sp>
+      <p:sp>
+        <p:nvSpPr>
+          <p:cNvPr id="46" name="Title 45">
+            <a:extLst>
+              <a:ext uri="{FF2B5EF4-FFF2-40B4-BE49-F238E27FC236}">
+                <a16:creationId xmlns:a16="http://schemas.microsoft.com/office/drawing/2014/main" id="{D35B6AAC-B8F8-6D43-4F74-381A49A405D9}"/>
+              </a:ext>
+            </a:extLst>
+          </p:cNvPr>
+          <p:cNvSpPr>
+            <a:spLocks noGrp="1"/>
+          </p:cNvSpPr>
+          <p:nvPr>
+            <p:ph type="title" idx="100"/>
+          </p:nvPr>
+        </p:nvSpPr>
+        <p:spPr>
+          <a:xfrm>
+            <a:off x="457200" y="274320"/>
+            <a:ext cx="8229600" cy="640080"/>
+          </a:xfrm>
+        </p:spPr>
+        <p:txBody>
+          <a:bodyPr lIns="0" tIns="0" rIns="0" bIns="0" anchor="ctr">
+            <a:noAutofit/>
+          </a:bodyPr>
+          <a:lstStyle>
+            <a:defPPr algn="ctr">
+              <a:defRPr sz="3200" b="1">
+                <a:solidFill>
+                  <a:srgbClr val="0B1F3A"/>
+                </a:solidFill>
+                <a:latin typeface="Calibri"/>
+                <a:ea typeface="Calibri"/>
+                <a:cs typeface="Calibri"/>
+              </a:defRPr>
+            </a:defPPr>
+          </a:lstStyle>
+          <a:p>
+            <a:pPr algn="ctr">
+              <a:defRPr sz="3200" b="1">
+                <a:solidFill>
+                  <a:srgbClr val="0B1F3A"/>
+                </a:solidFill>
+                <a:latin typeface="Calibri"/>
+                <a:ea typeface="Calibri"/>
+                <a:cs typeface="Calibri"/>
+              </a:defRPr>
+            </a:pPr>
+            <a:r>
+              <a:rPr sz="3200" b="1">
+                <a:solidFill>
+                  <a:srgbClr val="0B1F3A"/>
+                </a:solidFill>
+                <a:latin typeface="Calibri"/>
+                <a:ea typeface="Calibri"/>
+                <a:cs typeface="Calibri"/>
+              </a:rPr>
+              <a:t>Product vision</a:t>
+            </a:r>
+            <a:endParaRPr/>
+          </a:p>
+        </p:txBody>
+      </p:sp>
+      <p:pic>
+        <p:nvPicPr>
+          <p:cNvPr id="47" name="Picture 46">
+            <a:extLst>
+              <a:ext uri="{FF2B5EF4-FFF2-40B4-BE49-F238E27FC236}">
+                <a16:creationId xmlns:a16="http://schemas.microsoft.com/office/drawing/2014/main" id="{2165DBDE-5B3C-471C-9703-4CC44BBC29BB}"/>
+              </a:ext>
+            </a:extLst>
+          </p:cNvPr>
+          <p:cNvPicPr>
+            <a:picLocks noChangeAspect="1"/>
+          </p:cNvPicPr>
+          <p:nvPr/>
+        </p:nvPicPr>
+        <p:blipFill>
+          <a:blip r:embed="rId3"/>
+          <a:stretch/>
+        </p:blipFill>
+        <p:spPr>
+          <a:xfrm>
+            <a:off x="657225" y="900113"/>
+            <a:ext cx="952500" cy="952500"/>
+          </a:xfrm>
+          <a:prstGeom prst="rect">
+            <a:avLst/>
+          </a:prstGeom>
+        </p:spPr>
+      </p:pic>
+      <p:sp>
+        <p:nvSpPr>
+          <p:cNvPr id="48" name="Vision statement">
+            <a:extLst>
+              <a:ext uri="{FF2B5EF4-FFF2-40B4-BE49-F238E27FC236}">
+                <a16:creationId xmlns:a16="http://schemas.microsoft.com/office/drawing/2014/main" id="{BD580D43-FE42-4BF9-83F1-89CD57D05A09}"/>
+              </a:ext>
+            </a:extLst>
+          </p:cNvPr>
+          <p:cNvSpPr>
+            <a:spLocks noGrp="1"/>
+          </p:cNvSpPr>
+          <p:nvPr/>
+        </p:nvSpPr>
+        <p:spPr>
+          <a:xfrm>
+            <a:off x="1914525" y="914400"/>
+            <a:ext cx="6572250" cy="876300"/>
+          </a:xfrm>
+          <a:prstGeom prst="rect">
+            <a:avLst/>
+          </a:prstGeom>
+          <a:noFill/>
+          <a:ln w="0">
+            <a:noFill/>
+          </a:ln>
+        </p:spPr>
+        <p:txBody>
+          <a:bodyPr wrap="square" lIns="0" tIns="0" rIns="0" bIns="0" anchor="t">
+            <a:noAutofit/>
+          </a:bodyPr>
+          <a:lstStyle>
+            <a:defPPr algn="l">
+              <a:defRPr sz="2500" b="1">
+                <a:solidFill>
+                  <a:srgbClr val="0B1F3A"/>
+                </a:solidFill>
+                <a:latin typeface="Calibri"/>
+                <a:ea typeface="Calibri"/>
+                <a:cs typeface="Calibri"/>
+              </a:defRPr>
+            </a:defPPr>
+          </a:lstStyle>
+          <a:p>
+            <a:pPr algn="l">
+              <a:defRPr sz="2500" b="1">
+                <a:solidFill>
+                  <a:srgbClr val="0B1F3A"/>
+                </a:solidFill>
+                <a:latin typeface="Calibri"/>
+                <a:ea typeface="Calibri"/>
+                <a:cs typeface="Calibri"/>
+              </a:defRPr>
+            </a:pPr>
+            <a:r>
+              <a:rPr sz="2500" b="1" dirty="0">
+                <a:solidFill>
+                  <a:srgbClr val="0B1F3A"/>
+                </a:solidFill>
+                <a:latin typeface="Calibri"/>
+                <a:ea typeface="Calibri"/>
+                <a:cs typeface="Calibri"/>
+              </a:rPr>
+              <a:t>Reliable event information</a:t>
+            </a:r>
+            <a:r>
+              <a:rPr lang="pt-PT" sz="2500" b="1" dirty="0">
+                <a:solidFill>
+                  <a:srgbClr val="0B1F3A"/>
+                </a:solidFill>
+                <a:latin typeface="Calibri"/>
+                <a:ea typeface="Calibri"/>
+                <a:cs typeface="Calibri"/>
+              </a:rPr>
+              <a:t> </a:t>
+            </a:r>
+            <a:r>
+              <a:rPr sz="2500" b="1" dirty="0">
+                <a:solidFill>
+                  <a:srgbClr val="0B1F3A"/>
+                </a:solidFill>
+                <a:latin typeface="Calibri"/>
+                <a:ea typeface="Calibri"/>
+                <a:cs typeface="Calibri"/>
+              </a:rPr>
+              <a:t>and coordinated help</a:t>
+            </a:r>
+          </a:p>
+        </p:txBody>
+      </p:sp>
+      <p:sp>
+        <p:nvSpPr>
+          <p:cNvPr id="49" name="Vision audience">
+            <a:extLst>
+              <a:ext uri="{FF2B5EF4-FFF2-40B4-BE49-F238E27FC236}">
+                <a16:creationId xmlns:a16="http://schemas.microsoft.com/office/drawing/2014/main" id="{9DF1A56B-71E1-4DA3-8CB2-715A03FFF714}"/>
+              </a:ext>
+            </a:extLst>
+          </p:cNvPr>
+          <p:cNvSpPr>
+            <a:spLocks noGrp="1"/>
+          </p:cNvSpPr>
+          <p:nvPr/>
+        </p:nvSpPr>
+        <p:spPr>
+          <a:xfrm>
+            <a:off x="1919288" y="1395413"/>
+            <a:ext cx="6667500" cy="285750"/>
+          </a:xfrm>
+          <a:prstGeom prst="rect">
+            <a:avLst/>
+          </a:prstGeom>
+          <a:noFill/>
+          <a:ln w="0">
+            <a:noFill/>
+          </a:ln>
+        </p:spPr>
+        <p:txBody>
+          <a:bodyPr wrap="square" lIns="0" tIns="0" rIns="0" bIns="0" anchor="t">
+            <a:noAutofit/>
+          </a:bodyPr>
+          <a:lstStyle>
+            <a:defPPr algn="l">
+              <a:defRPr sz="1500">
+                <a:solidFill>
+                  <a:srgbClr val="1F4E79"/>
+                </a:solidFill>
+                <a:latin typeface="Calibri"/>
+                <a:ea typeface="Calibri"/>
+                <a:cs typeface="Calibri"/>
+              </a:defRPr>
+            </a:defPPr>
+          </a:lstStyle>
+          <a:p>
+            <a:pPr algn="l">
+              <a:defRPr sz="1500">
+                <a:solidFill>
+                  <a:srgbClr val="1F4E79"/>
+                </a:solidFill>
+                <a:latin typeface="Calibri"/>
+                <a:ea typeface="Calibri"/>
+                <a:cs typeface="Calibri"/>
+              </a:defRPr>
+            </a:pPr>
+            <a:r>
+              <a:rPr sz="1500" dirty="0">
+                <a:solidFill>
+                  <a:srgbClr val="1F4E79"/>
+                </a:solidFill>
+                <a:latin typeface="Calibri"/>
+                <a:ea typeface="Calibri"/>
+                <a:cs typeface="Calibri"/>
+              </a:rPr>
+              <a:t>A shared platform for participants and event teams</a:t>
+            </a:r>
+          </a:p>
+        </p:txBody>
+      </p:sp>
+      <p:sp>
+        <p:nvSpPr>
+          <p:cNvPr id="50" name="Participants heading">
+            <a:extLst>
+              <a:ext uri="{FF2B5EF4-FFF2-40B4-BE49-F238E27FC236}">
+                <a16:creationId xmlns:a16="http://schemas.microsoft.com/office/drawing/2014/main" id="{72DAA3F8-A99E-4817-B74D-445363117F11}"/>
+              </a:ext>
+            </a:extLst>
+          </p:cNvPr>
+          <p:cNvSpPr>
+            <a:spLocks noGrp="1"/>
+          </p:cNvSpPr>
+          <p:nvPr/>
+        </p:nvSpPr>
+        <p:spPr>
+          <a:xfrm>
+            <a:off x="457200" y="2052637"/>
+            <a:ext cx="3857625" cy="285750"/>
+          </a:xfrm>
+          <a:prstGeom prst="rect">
+            <a:avLst/>
+          </a:prstGeom>
+          <a:noFill/>
+          <a:ln w="0">
+            <a:noFill/>
+          </a:ln>
+        </p:spPr>
+        <p:txBody>
+          <a:bodyPr wrap="square" lIns="0" tIns="0" rIns="0" bIns="0" anchor="t">
+            <a:noAutofit/>
+          </a:bodyPr>
+          <a:lstStyle>
+            <a:defPPr algn="l">
+              <a:defRPr sz="1700" b="1">
+                <a:solidFill>
+                  <a:srgbClr val="1F4E79"/>
+                </a:solidFill>
+                <a:latin typeface="Calibri"/>
+                <a:ea typeface="Calibri"/>
+                <a:cs typeface="Calibri"/>
+              </a:defRPr>
+            </a:defPPr>
+          </a:lstStyle>
+          <a:p>
+            <a:pPr algn="l">
+              <a:defRPr sz="1700" b="1">
+                <a:solidFill>
+                  <a:srgbClr val="1F4E79"/>
+                </a:solidFill>
+                <a:latin typeface="Calibri"/>
+                <a:ea typeface="Calibri"/>
+                <a:cs typeface="Calibri"/>
+              </a:defRPr>
+            </a:pPr>
+            <a:r>
+              <a:rPr sz="1700" b="1" dirty="0">
+                <a:solidFill>
+                  <a:srgbClr val="1F4E79"/>
+                </a:solidFill>
+                <a:latin typeface="Calibri"/>
+                <a:ea typeface="Calibri"/>
+                <a:cs typeface="Calibri"/>
+              </a:rPr>
+              <a:t>For participants</a:t>
+            </a:r>
+          </a:p>
+        </p:txBody>
+      </p:sp>
+      <p:sp>
+        <p:nvSpPr>
+          <p:cNvPr id="51" name="Participants journey">
+            <a:extLst>
+              <a:ext uri="{FF2B5EF4-FFF2-40B4-BE49-F238E27FC236}">
+                <a16:creationId xmlns:a16="http://schemas.microsoft.com/office/drawing/2014/main" id="{FDD69BD9-71D1-41AC-8425-813E9BD26FD3}"/>
+              </a:ext>
+            </a:extLst>
+          </p:cNvPr>
+          <p:cNvSpPr>
+            <a:spLocks noGrp="1"/>
+          </p:cNvSpPr>
+          <p:nvPr/>
+        </p:nvSpPr>
+        <p:spPr>
+          <a:xfrm>
+            <a:off x="457200" y="2386012"/>
+            <a:ext cx="3848100" cy="781050"/>
+          </a:xfrm>
+          <a:prstGeom prst="rect">
+            <a:avLst/>
+          </a:prstGeom>
+          <a:noFill/>
+          <a:ln w="0">
+            <a:noFill/>
+          </a:ln>
+        </p:spPr>
+        <p:txBody>
+          <a:bodyPr wrap="square" lIns="0" tIns="0" rIns="0" bIns="0" anchor="t">
+            <a:noAutofit/>
+          </a:bodyPr>
+          <a:lstStyle>
+            <a:defPPr algn="l">
+              <a:defRPr sz="1500">
+                <a:solidFill>
+                  <a:srgbClr val="1B2430"/>
+                </a:solidFill>
+                <a:latin typeface="Calibri"/>
+                <a:ea typeface="Calibri"/>
+                <a:cs typeface="Calibri"/>
+              </a:defRPr>
+            </a:defPPr>
+          </a:lstStyle>
+          <a:p>
+            <a:pPr algn="l">
+              <a:defRPr sz="1500">
+                <a:solidFill>
+                  <a:srgbClr val="1B2430"/>
+                </a:solidFill>
+                <a:latin typeface="Calibri"/>
+                <a:ea typeface="Calibri"/>
+                <a:cs typeface="Calibri"/>
+              </a:defRPr>
+            </a:pPr>
+            <a:r>
+              <a:rPr sz="1500" dirty="0">
+                <a:solidFill>
+                  <a:srgbClr val="1B2430"/>
+                </a:solidFill>
+                <a:latin typeface="Calibri"/>
+                <a:ea typeface="Calibri"/>
+                <a:cs typeface="Calibri"/>
+              </a:rPr>
+              <a:t>Open by link or QR. Find the map and transport options, then request help with context and location.</a:t>
+            </a:r>
+          </a:p>
+        </p:txBody>
+      </p:sp>
+      <p:sp>
+        <p:nvSpPr>
+          <p:cNvPr id="52" name="Event team heading">
+            <a:extLst>
+              <a:ext uri="{FF2B5EF4-FFF2-40B4-BE49-F238E27FC236}">
+                <a16:creationId xmlns:a16="http://schemas.microsoft.com/office/drawing/2014/main" id="{EA37A2C6-44B2-4F7C-B5CD-57F6307C62E2}"/>
+              </a:ext>
+            </a:extLst>
+          </p:cNvPr>
+          <p:cNvSpPr>
+            <a:spLocks noGrp="1"/>
+          </p:cNvSpPr>
+          <p:nvPr/>
+        </p:nvSpPr>
+        <p:spPr>
+          <a:xfrm>
+            <a:off x="4800600" y="2071687"/>
+            <a:ext cx="3886200" cy="285750"/>
+          </a:xfrm>
+          <a:prstGeom prst="rect">
+            <a:avLst/>
+          </a:prstGeom>
+          <a:noFill/>
+          <a:ln w="0">
+            <a:noFill/>
+          </a:ln>
+        </p:spPr>
+        <p:txBody>
+          <a:bodyPr wrap="square" lIns="0" tIns="0" rIns="0" bIns="0" anchor="t">
+            <a:noAutofit/>
+          </a:bodyPr>
+          <a:lstStyle>
+            <a:defPPr algn="l">
+              <a:defRPr sz="1700" b="1">
+                <a:solidFill>
+                  <a:srgbClr val="1F4E79"/>
+                </a:solidFill>
+                <a:latin typeface="Calibri"/>
+                <a:ea typeface="Calibri"/>
+                <a:cs typeface="Calibri"/>
+              </a:defRPr>
+            </a:defPPr>
+          </a:lstStyle>
+          <a:p>
+            <a:pPr algn="l">
+              <a:defRPr sz="1700" b="1">
+                <a:solidFill>
+                  <a:srgbClr val="1F4E79"/>
+                </a:solidFill>
+                <a:latin typeface="Calibri"/>
+                <a:ea typeface="Calibri"/>
+                <a:cs typeface="Calibri"/>
+              </a:defRPr>
+            </a:pPr>
+            <a:r>
+              <a:rPr sz="1700" b="1">
+                <a:solidFill>
+                  <a:srgbClr val="1F4E79"/>
+                </a:solidFill>
+                <a:latin typeface="Calibri"/>
+                <a:ea typeface="Calibri"/>
+                <a:cs typeface="Calibri"/>
+              </a:rPr>
+              <a:t>For the event team</a:t>
+            </a:r>
+          </a:p>
+        </p:txBody>
+      </p:sp>
+      <p:sp>
+        <p:nvSpPr>
+          <p:cNvPr id="53" name="Event team journey">
+            <a:extLst>
+              <a:ext uri="{FF2B5EF4-FFF2-40B4-BE49-F238E27FC236}">
+                <a16:creationId xmlns:a16="http://schemas.microsoft.com/office/drawing/2014/main" id="{C93A605C-E103-414A-A0FC-CFFB4FECDB34}"/>
+              </a:ext>
+            </a:extLst>
+          </p:cNvPr>
+          <p:cNvSpPr>
+            <a:spLocks noGrp="1"/>
+          </p:cNvSpPr>
+          <p:nvPr/>
+        </p:nvSpPr>
+        <p:spPr>
+          <a:xfrm>
+            <a:off x="4800600" y="2405062"/>
+            <a:ext cx="3886200" cy="781050"/>
+          </a:xfrm>
+          <a:prstGeom prst="rect">
+            <a:avLst/>
+          </a:prstGeom>
+          <a:noFill/>
+          <a:ln w="0">
+            <a:noFill/>
+          </a:ln>
+        </p:spPr>
+        <p:txBody>
+          <a:bodyPr wrap="square" lIns="0" tIns="0" rIns="0" bIns="0" anchor="t">
+            <a:noAutofit/>
+          </a:bodyPr>
+          <a:lstStyle>
+            <a:defPPr algn="l">
+              <a:defRPr sz="1500">
+                <a:solidFill>
+                  <a:srgbClr val="1B2430"/>
+                </a:solidFill>
+                <a:latin typeface="Calibri"/>
+                <a:ea typeface="Calibri"/>
+                <a:cs typeface="Calibri"/>
+              </a:defRPr>
+            </a:defPPr>
+          </a:lstStyle>
+          <a:p>
+            <a:pPr algn="l">
+              <a:defRPr sz="1500">
+                <a:solidFill>
+                  <a:srgbClr val="1B2430"/>
+                </a:solidFill>
+                <a:latin typeface="Calibri"/>
+                <a:ea typeface="Calibri"/>
+                <a:cs typeface="Calibri"/>
+              </a:defRPr>
+            </a:pPr>
+            <a:r>
+              <a:rPr sz="1500">
+                <a:solidFill>
+                  <a:srgbClr val="1B2430"/>
+                </a:solidFill>
+                <a:latin typeface="Calibri"/>
+                <a:ea typeface="Calibri"/>
+                <a:cs typeface="Calibri"/>
+              </a:rPr>
+              <a:t>Configure the event and update information. Prioritise each request and route it to the right team.</a:t>
+            </a:r>
+          </a:p>
+        </p:txBody>
+      </p:sp>
+      <p:sp>
+        <p:nvSpPr>
+          <p:cNvPr id="54" name="MVP heading">
+            <a:extLst>
+              <a:ext uri="{FF2B5EF4-FFF2-40B4-BE49-F238E27FC236}">
+                <a16:creationId xmlns:a16="http://schemas.microsoft.com/office/drawing/2014/main" id="{FD4759BC-83D1-4166-BC0D-9B2F91CAF75B}"/>
+              </a:ext>
+            </a:extLst>
+          </p:cNvPr>
+          <p:cNvSpPr>
+            <a:spLocks noGrp="1"/>
+          </p:cNvSpPr>
+          <p:nvPr/>
+        </p:nvSpPr>
+        <p:spPr>
+          <a:xfrm>
+            <a:off x="457200" y="3614736"/>
+            <a:ext cx="1352550" cy="285750"/>
+          </a:xfrm>
+          <a:prstGeom prst="rect">
+            <a:avLst/>
+          </a:prstGeom>
+          <a:noFill/>
+          <a:ln w="0">
+            <a:noFill/>
+          </a:ln>
+        </p:spPr>
+        <p:txBody>
+          <a:bodyPr wrap="square" lIns="0" tIns="0" rIns="0" bIns="0" anchor="t">
+            <a:noAutofit/>
+          </a:bodyPr>
+          <a:lstStyle>
+            <a:defPPr algn="l">
+              <a:defRPr sz="1500" b="1">
+                <a:solidFill>
+                  <a:srgbClr val="0B1F3A"/>
+                </a:solidFill>
+                <a:latin typeface="Calibri"/>
+                <a:ea typeface="Calibri"/>
+                <a:cs typeface="Calibri"/>
+              </a:defRPr>
+            </a:defPPr>
+          </a:lstStyle>
+          <a:p>
+            <a:pPr algn="l">
+              <a:defRPr sz="1500" b="1">
+                <a:solidFill>
+                  <a:srgbClr val="0B1F3A"/>
+                </a:solidFill>
+                <a:latin typeface="Calibri"/>
+                <a:ea typeface="Calibri"/>
+                <a:cs typeface="Calibri"/>
+              </a:defRPr>
+            </a:pPr>
+            <a:r>
+              <a:rPr sz="1500" b="1" dirty="0">
+                <a:solidFill>
+                  <a:schemeClr val="accent1"/>
+                </a:solidFill>
+                <a:latin typeface="Calibri"/>
+                <a:ea typeface="Calibri"/>
+                <a:cs typeface="Calibri"/>
+              </a:rPr>
+              <a:t>MVP</a:t>
+            </a:r>
+          </a:p>
+        </p:txBody>
+      </p:sp>
+      <p:sp>
+        <p:nvSpPr>
+          <p:cNvPr id="55" name="MVP scope">
+            <a:extLst>
+              <a:ext uri="{FF2B5EF4-FFF2-40B4-BE49-F238E27FC236}">
+                <a16:creationId xmlns:a16="http://schemas.microsoft.com/office/drawing/2014/main" id="{EE15BBC2-61C5-47DC-90AD-58954614B58C}"/>
+              </a:ext>
+            </a:extLst>
+          </p:cNvPr>
+          <p:cNvSpPr>
+            <a:spLocks noGrp="1"/>
+          </p:cNvSpPr>
+          <p:nvPr/>
+        </p:nvSpPr>
+        <p:spPr>
+          <a:xfrm>
+            <a:off x="1914525" y="3614736"/>
+            <a:ext cx="6772275" cy="457200"/>
+          </a:xfrm>
+          <a:prstGeom prst="rect">
+            <a:avLst/>
+          </a:prstGeom>
+          <a:noFill/>
+          <a:ln w="0">
+            <a:noFill/>
+          </a:ln>
+        </p:spPr>
+        <p:txBody>
+          <a:bodyPr wrap="square" lIns="0" tIns="0" rIns="0" bIns="0" anchor="t">
+            <a:noAutofit/>
+          </a:bodyPr>
+          <a:lstStyle>
+            <a:defPPr algn="l">
+              <a:defRPr sz="1300">
+                <a:solidFill>
+                  <a:srgbClr val="1B2430"/>
+                </a:solidFill>
+                <a:latin typeface="Calibri"/>
+                <a:ea typeface="Calibri"/>
+                <a:cs typeface="Calibri"/>
+              </a:defRPr>
+            </a:defPPr>
+          </a:lstStyle>
+          <a:p>
+            <a:pPr algn="l">
+              <a:defRPr sz="1300">
+                <a:solidFill>
+                  <a:srgbClr val="1B2430"/>
+                </a:solidFill>
+                <a:latin typeface="Calibri"/>
+                <a:ea typeface="Calibri"/>
+                <a:cs typeface="Calibri"/>
+              </a:defRPr>
+            </a:pPr>
+            <a:r>
+              <a:rPr sz="1300" dirty="0">
+                <a:solidFill>
+                  <a:schemeClr val="bg1"/>
+                </a:solidFill>
+                <a:latin typeface="Calibri"/>
+                <a:ea typeface="Calibri"/>
+                <a:cs typeface="Calibri"/>
+              </a:rPr>
+              <a:t>Event selection, venue map, essential information, transport and help requests, with an event </a:t>
+            </a:r>
+            <a:r>
+              <a:rPr sz="1300" dirty="0" err="1">
+                <a:solidFill>
+                  <a:schemeClr val="bg1"/>
+                </a:solidFill>
+                <a:latin typeface="Calibri"/>
+                <a:ea typeface="Calibri"/>
+                <a:cs typeface="Calibri"/>
+              </a:rPr>
+              <a:t>backoffice</a:t>
+            </a:r>
+            <a:r>
+              <a:rPr sz="1300" dirty="0">
+                <a:solidFill>
+                  <a:schemeClr val="bg1"/>
+                </a:solidFill>
+                <a:latin typeface="Calibri"/>
+                <a:ea typeface="Calibri"/>
+                <a:cs typeface="Calibri"/>
+              </a:rPr>
+              <a:t>.</a:t>
+            </a:r>
+          </a:p>
+        </p:txBody>
+      </p:sp>
+      <p:sp>
+        <p:nvSpPr>
+          <p:cNvPr id="56" name="Success heading">
+            <a:extLst>
+              <a:ext uri="{FF2B5EF4-FFF2-40B4-BE49-F238E27FC236}">
+                <a16:creationId xmlns:a16="http://schemas.microsoft.com/office/drawing/2014/main" id="{5A36368D-A38A-49D3-AB41-D9FC53609A8B}"/>
+              </a:ext>
+            </a:extLst>
+          </p:cNvPr>
+          <p:cNvSpPr>
+            <a:spLocks noGrp="1"/>
+          </p:cNvSpPr>
+          <p:nvPr/>
+        </p:nvSpPr>
+        <p:spPr>
+          <a:xfrm>
+            <a:off x="457200" y="4195761"/>
+            <a:ext cx="1352550" cy="304800"/>
+          </a:xfrm>
+          <a:prstGeom prst="rect">
+            <a:avLst/>
+          </a:prstGeom>
+          <a:noFill/>
+          <a:ln w="0">
+            <a:noFill/>
+          </a:ln>
+        </p:spPr>
+        <p:txBody>
+          <a:bodyPr wrap="square" lIns="0" tIns="0" rIns="0" bIns="0" anchor="t">
+            <a:noAutofit/>
+          </a:bodyPr>
+          <a:lstStyle>
+            <a:defPPr algn="l">
+              <a:defRPr sz="1500" b="1">
+                <a:solidFill>
+                  <a:srgbClr val="0B1F3A"/>
+                </a:solidFill>
+                <a:latin typeface="Calibri"/>
+                <a:ea typeface="Calibri"/>
+                <a:cs typeface="Calibri"/>
+              </a:defRPr>
+            </a:defPPr>
+          </a:lstStyle>
+          <a:p>
+            <a:pPr algn="l">
+              <a:defRPr sz="1500" b="1">
+                <a:solidFill>
+                  <a:srgbClr val="0B1F3A"/>
+                </a:solidFill>
+                <a:latin typeface="Calibri"/>
+                <a:ea typeface="Calibri"/>
+                <a:cs typeface="Calibri"/>
+              </a:defRPr>
+            </a:pPr>
+            <a:r>
+              <a:rPr sz="1500" b="1" dirty="0">
+                <a:solidFill>
+                  <a:schemeClr val="accent1"/>
+                </a:solidFill>
+                <a:latin typeface="Calibri"/>
+                <a:ea typeface="Calibri"/>
+                <a:cs typeface="Calibri"/>
+              </a:rPr>
+              <a:t>Success criteria</a:t>
+            </a:r>
+          </a:p>
+        </p:txBody>
+      </p:sp>
+      <p:sp>
+        <p:nvSpPr>
+          <p:cNvPr id="57" name="Success criteria">
+            <a:extLst>
+              <a:ext uri="{FF2B5EF4-FFF2-40B4-BE49-F238E27FC236}">
+                <a16:creationId xmlns:a16="http://schemas.microsoft.com/office/drawing/2014/main" id="{3BC16916-00CE-4194-9ADB-BCE37690540A}"/>
+              </a:ext>
+            </a:extLst>
+          </p:cNvPr>
+          <p:cNvSpPr>
+            <a:spLocks noGrp="1"/>
+          </p:cNvSpPr>
+          <p:nvPr/>
+        </p:nvSpPr>
+        <p:spPr>
+          <a:xfrm>
+            <a:off x="1914525" y="4195761"/>
+            <a:ext cx="6772275" cy="457200"/>
+          </a:xfrm>
+          <a:prstGeom prst="rect">
+            <a:avLst/>
+          </a:prstGeom>
+          <a:noFill/>
+          <a:ln w="0">
+            <a:noFill/>
+          </a:ln>
+        </p:spPr>
+        <p:txBody>
+          <a:bodyPr wrap="square" lIns="0" tIns="0" rIns="0" bIns="0" anchor="t">
+            <a:noAutofit/>
+          </a:bodyPr>
+          <a:lstStyle>
+            <a:defPPr algn="l">
+              <a:defRPr sz="1300">
+                <a:solidFill>
+                  <a:srgbClr val="1B2430"/>
+                </a:solidFill>
+                <a:latin typeface="Calibri"/>
+                <a:ea typeface="Calibri"/>
+                <a:cs typeface="Calibri"/>
+              </a:defRPr>
+            </a:defPPr>
+          </a:lstStyle>
+          <a:p>
+            <a:pPr algn="l">
+              <a:defRPr sz="1300">
+                <a:solidFill>
+                  <a:srgbClr val="1B2430"/>
+                </a:solidFill>
+                <a:latin typeface="Calibri"/>
+                <a:ea typeface="Calibri"/>
+                <a:cs typeface="Calibri"/>
+              </a:defRPr>
+            </a:pPr>
+            <a:r>
+              <a:rPr sz="1300">
+                <a:solidFill>
+                  <a:schemeClr val="bg1"/>
+                </a:solidFill>
+                <a:latin typeface="Calibri"/>
+                <a:ea typeface="Calibri"/>
+                <a:cs typeface="Calibri"/>
+              </a:rPr>
+              <a:t>Faster access to information and operational response, less confusion, adoption and positive feedback.</a:t>
+            </a:r>
           </a:p>
         </p:txBody>
       </p:sp>

--- a/Docs/Presentation/Farol_First_Presentation.pptx
+++ b/Docs/Presentation/Farol_First_Presentation.pptx
@@ -14,6 +14,7 @@
     <p:sldId id="257" r:id="rId4"/>
     <p:sldId id="258" r:id="rId5"/>
     <p:sldId id="260" r:id="rId6"/>
+    <p:sldId id="262" r:id="rId13"/>
   </p:sldIdLst>
   <p:sldSz cx="9144000" cy="5143500" type="screen16x9"/>
   <p:notesSz cx="5143500" cy="9144000"/>
@@ -136,6 +137,11 @@
         <p14:section name="User workflows (António Guerra)" id="{5D2A7C18-9E41-4B6F-A3D0-8C7E1F24B9A6}">
           <p14:sldIdLst>
             <p14:sldId id="260"/>
+          </p14:sldIdLst>
+        </p14:section>
+        <p14:section name="Status overview" id="{2BDB7B91-3058-42AC-8457-3A3E92086DEB}">
+          <p14:sldIdLst>
+            <p14:sldId id="262"/>
           </p14:sldIdLst>
         </p14:section>
       </p14:sectionLst>
@@ -813,6 +819,52 @@
         <p14:creationId xmlns:p14="http://schemas.microsoft.com/office/powerpoint/2010/main" val="1024086991"/>
       </p:ext>
     </p:extLst>
+  </p:cSld>
+  <p:clrMapOvr>
+    <a:masterClrMapping/>
+  </p:clrMapOvr>
+</p:notes>
+</file>
+
+<file path=ppt/notesSlides/notesSlide7.xml><?xml version="1.0" encoding="utf-8"?>
+<p:notes xmlns:a="http://schemas.openxmlformats.org/drawingml/2006/main" xmlns:p="http://schemas.openxmlformats.org/presentationml/2006/main" xmlns:r="http://schemas.openxmlformats.org/officeDocument/2006/relationships">
+  <p:cSld>
+    <p:spTree>
+      <p:nvGrpSpPr>
+        <p:cNvPr id="1" name=""/>
+        <p:cNvGrpSpPr/>
+        <p:nvPr/>
+      </p:nvGrpSpPr>
+      <p:grpSpPr>
+        <a:xfrm>
+          <a:off x="0" y="0"/>
+          <a:ext cx="0" cy="0"/>
+          <a:chOff x="0" y="0"/>
+          <a:chExt cx="0" cy="0"/>
+        </a:xfrm>
+      </p:grpSpPr>
+      <p:sp>
+        <p:nvSpPr>
+          <p:cNvPr id="3" name="Notes Placeholder 2"/>
+          <p:cNvSpPr>
+            <a:spLocks noGrp="1"/>
+          </p:cNvSpPr>
+          <p:nvPr>
+            <p:ph type="body" idx="1"/>
+          </p:nvPr>
+        </p:nvSpPr>
+        <p:spPr/>
+        <p:txBody>
+          <a:bodyPr/>
+          <a:lstStyle/>
+          <a:p>
+            <a:r>
+              <a:t>(~45 s) Ponto de situação dos quatro temas pedidos pelo professor. DoR e DoD: verde. Foram acordados pela equipa a 8 de outubro; a regra é uma user story, uma issue, um PR. Já estão no GitHub: o DoR e o DoD da story nos issue forms e o DoD do PR no template de PR. Falta só criar as colunas Ready e Done no board. Papéis e processo: amarelo. Temos seis papéis definidos, GitHub Flow, sprints A, B e C com datas e duas reuniões por semana. Já temos uma verificação automática das convenções em cada PR. Falta pôr o board a funcionar e ligar a proteção do main com squash merge. Modelo de domínio: amarelo. Temos dois bounded contexts, o diagrama de classes, as regras de negócio e a parte de privacidade; o login obrigatório já está decidido. Faltam as questões DM-2 a DM-5 e as entidades Report, Badge e PlatformAdmin. Arquitetura: amarelo. Já começou a ser trabalhada: temos as vistas de contexto, contentores e deployment e o fluxo assíncrono de triagem com IA, mas ainda faltam fechar as decisões: serviços ou monólito modular, a stack tecnológica, os ADRs, o esboço da API e o walking skeleton. É a prioridade para o início do Sprint B.</a:t>
+            </a:r>
+          </a:p>
+        </p:txBody>
+      </p:sp>
+    </p:spTree>
   </p:cSld>
   <p:clrMapOvr>
     <a:masterClrMapping/>
@@ -1555,6 +1607,956 @@
 
 <file path=ppt/slides/slide2.xml><?xml version="1.0" encoding="utf-8"?>
 <p:sld xmlns:a="http://schemas.openxmlformats.org/drawingml/2006/main" xmlns:r="http://schemas.openxmlformats.org/officeDocument/2006/relationships" xmlns:p="http://schemas.openxmlformats.org/presentationml/2006/main">
+  <p:cSld name="Slide 2">
+    <p:spTree>
+      <p:nvGrpSpPr>
+        <p:cNvPr id="1" name=""/>
+        <p:cNvGrpSpPr/>
+        <p:nvPr/>
+      </p:nvGrpSpPr>
+      <p:grpSpPr>
+        <a:xfrm>
+          <a:off x="0" y="0"/>
+          <a:ext cx="0" cy="0"/>
+          <a:chOff x="0" y="0"/>
+          <a:chExt cx="0" cy="0"/>
+        </a:xfrm>
+      </p:grpSpPr>
+      <p:sp>
+        <p:nvSpPr>
+          <p:cNvPr id="4" name="Rita card">
+            <a:extLst>
+              <a:ext uri="{FF2B5EF4-FFF2-40B4-BE49-F238E27FC236}">
+                <a16:creationId xmlns:a16="http://schemas.microsoft.com/office/drawing/2014/main" id="{DE3F91AE-EEF0-4B77-F796-372EBD91B7DF}"/>
+              </a:ext>
+            </a:extLst>
+          </p:cNvPr>
+          <p:cNvSpPr/>
+          <p:nvPr/>
+        </p:nvSpPr>
+        <p:spPr>
+          <a:xfrm>
+            <a:off x="368693" y="3433761"/>
+            <a:ext cx="8387563" cy="1319448"/>
+          </a:xfrm>
+          <a:prstGeom prst="roundRect">
+            <a:avLst>
+              <a:gd name="adj" fmla="val 5714"/>
+            </a:avLst>
+          </a:prstGeom>
+          <a:solidFill>
+            <a:schemeClr val="tx2"/>
+          </a:solidFill>
+          <a:ln/>
+        </p:spPr>
+        <p:txBody>
+          <a:bodyPr/>
+          <a:lstStyle/>
+          <a:p>
+            <a:endParaRPr lang="en-PT" dirty="0">
+              <a:solidFill>
+                <a:schemeClr val="bg1"/>
+              </a:solidFill>
+            </a:endParaRPr>
+          </a:p>
+        </p:txBody>
+      </p:sp>
+      <p:sp>
+        <p:nvSpPr>
+          <p:cNvPr id="3" name="Rita card">
+            <a:extLst>
+              <a:ext uri="{FF2B5EF4-FFF2-40B4-BE49-F238E27FC236}">
+                <a16:creationId xmlns:a16="http://schemas.microsoft.com/office/drawing/2014/main" id="{30711021-712A-717F-2C45-15DE97DD91DD}"/>
+              </a:ext>
+            </a:extLst>
+          </p:cNvPr>
+          <p:cNvSpPr/>
+          <p:nvPr/>
+        </p:nvSpPr>
+        <p:spPr>
+          <a:xfrm>
+            <a:off x="4731143" y="1938337"/>
+            <a:ext cx="4025113" cy="1238250"/>
+          </a:xfrm>
+          <a:prstGeom prst="roundRect">
+            <a:avLst>
+              <a:gd name="adj" fmla="val 5714"/>
+            </a:avLst>
+          </a:prstGeom>
+          <a:solidFill>
+            <a:schemeClr val="bg2"/>
+          </a:solidFill>
+          <a:ln/>
+        </p:spPr>
+        <p:txBody>
+          <a:bodyPr/>
+          <a:lstStyle/>
+          <a:p>
+            <a:endParaRPr lang="en-PT"/>
+          </a:p>
+        </p:txBody>
+      </p:sp>
+      <p:sp>
+        <p:nvSpPr>
+          <p:cNvPr id="2" name="Rita card">
+            <a:extLst>
+              <a:ext uri="{FF2B5EF4-FFF2-40B4-BE49-F238E27FC236}">
+                <a16:creationId xmlns:a16="http://schemas.microsoft.com/office/drawing/2014/main" id="{0FDC3C32-5582-6860-15BE-D9F57C237ACD}"/>
+              </a:ext>
+            </a:extLst>
+          </p:cNvPr>
+          <p:cNvSpPr/>
+          <p:nvPr/>
+        </p:nvSpPr>
+        <p:spPr>
+          <a:xfrm>
+            <a:off x="368693" y="1938337"/>
+            <a:ext cx="4025113" cy="1238250"/>
+          </a:xfrm>
+          <a:prstGeom prst="roundRect">
+            <a:avLst>
+              <a:gd name="adj" fmla="val 5714"/>
+            </a:avLst>
+          </a:prstGeom>
+          <a:solidFill>
+            <a:schemeClr val="bg2"/>
+          </a:solidFill>
+          <a:ln/>
+        </p:spPr>
+        <p:txBody>
+          <a:bodyPr/>
+          <a:lstStyle/>
+          <a:p>
+            <a:endParaRPr lang="en-PT"/>
+          </a:p>
+        </p:txBody>
+      </p:sp>
+      <p:sp>
+        <p:nvSpPr>
+          <p:cNvPr id="46" name="Title 45">
+            <a:extLst>
+              <a:ext uri="{FF2B5EF4-FFF2-40B4-BE49-F238E27FC236}">
+                <a16:creationId xmlns:a16="http://schemas.microsoft.com/office/drawing/2014/main" id="{D35B6AAC-B8F8-6D43-4F74-381A49A405D9}"/>
+              </a:ext>
+            </a:extLst>
+          </p:cNvPr>
+          <p:cNvSpPr>
+            <a:spLocks noGrp="1"/>
+          </p:cNvSpPr>
+          <p:nvPr>
+            <p:ph type="title" idx="100"/>
+          </p:nvPr>
+        </p:nvSpPr>
+        <p:spPr>
+          <a:xfrm>
+            <a:off x="457200" y="274320"/>
+            <a:ext cx="8229600" cy="640080"/>
+          </a:xfrm>
+        </p:spPr>
+        <p:txBody>
+          <a:bodyPr lIns="0" tIns="0" rIns="0" bIns="0" anchor="ctr">
+            <a:noAutofit/>
+          </a:bodyPr>
+          <a:lstStyle>
+            <a:defPPr algn="ctr">
+              <a:defRPr sz="3200" b="1">
+                <a:solidFill>
+                  <a:srgbClr val="0B1F3A"/>
+                </a:solidFill>
+                <a:latin typeface="Calibri"/>
+                <a:ea typeface="Calibri"/>
+                <a:cs typeface="Calibri"/>
+              </a:defRPr>
+            </a:defPPr>
+          </a:lstStyle>
+          <a:p>
+            <a:pPr algn="ctr">
+              <a:defRPr sz="3200" b="1">
+                <a:solidFill>
+                  <a:srgbClr val="0B1F3A"/>
+                </a:solidFill>
+                <a:latin typeface="Calibri"/>
+                <a:ea typeface="Calibri"/>
+                <a:cs typeface="Calibri"/>
+              </a:defRPr>
+            </a:pPr>
+            <a:r>
+              <a:rPr sz="3200" b="1">
+                <a:solidFill>
+                  <a:srgbClr val="0B1F3A"/>
+                </a:solidFill>
+                <a:latin typeface="Calibri"/>
+                <a:ea typeface="Calibri"/>
+                <a:cs typeface="Calibri"/>
+              </a:rPr>
+              <a:t>Product vision</a:t>
+            </a:r>
+            <a:endParaRPr/>
+          </a:p>
+        </p:txBody>
+      </p:sp>
+      <p:pic>
+        <p:nvPicPr>
+          <p:cNvPr id="47" name="Picture 46">
+            <a:extLst>
+              <a:ext uri="{FF2B5EF4-FFF2-40B4-BE49-F238E27FC236}">
+                <a16:creationId xmlns:a16="http://schemas.microsoft.com/office/drawing/2014/main" id="{2165DBDE-5B3C-471C-9703-4CC44BBC29BB}"/>
+              </a:ext>
+            </a:extLst>
+          </p:cNvPr>
+          <p:cNvPicPr>
+            <a:picLocks noChangeAspect="1"/>
+          </p:cNvPicPr>
+          <p:nvPr/>
+        </p:nvPicPr>
+        <p:blipFill>
+          <a:blip r:embed="rId3"/>
+          <a:stretch/>
+        </p:blipFill>
+        <p:spPr>
+          <a:xfrm>
+            <a:off x="657225" y="900113"/>
+            <a:ext cx="952500" cy="952500"/>
+          </a:xfrm>
+          <a:prstGeom prst="rect">
+            <a:avLst/>
+          </a:prstGeom>
+        </p:spPr>
+      </p:pic>
+      <p:sp>
+        <p:nvSpPr>
+          <p:cNvPr id="48" name="Vision statement">
+            <a:extLst>
+              <a:ext uri="{FF2B5EF4-FFF2-40B4-BE49-F238E27FC236}">
+                <a16:creationId xmlns:a16="http://schemas.microsoft.com/office/drawing/2014/main" id="{BD580D43-FE42-4BF9-83F1-89CD57D05A09}"/>
+              </a:ext>
+            </a:extLst>
+          </p:cNvPr>
+          <p:cNvSpPr>
+            <a:spLocks noGrp="1"/>
+          </p:cNvSpPr>
+          <p:nvPr/>
+        </p:nvSpPr>
+        <p:spPr>
+          <a:xfrm>
+            <a:off x="1914525" y="914400"/>
+            <a:ext cx="6572250" cy="876300"/>
+          </a:xfrm>
+          <a:prstGeom prst="rect">
+            <a:avLst/>
+          </a:prstGeom>
+          <a:noFill/>
+          <a:ln w="0">
+            <a:noFill/>
+          </a:ln>
+        </p:spPr>
+        <p:txBody>
+          <a:bodyPr wrap="square" lIns="0" tIns="0" rIns="0" bIns="0" anchor="t">
+            <a:noAutofit/>
+          </a:bodyPr>
+          <a:lstStyle>
+            <a:defPPr algn="l">
+              <a:defRPr sz="2500" b="1">
+                <a:solidFill>
+                  <a:srgbClr val="0B1F3A"/>
+                </a:solidFill>
+                <a:latin typeface="Calibri"/>
+                <a:ea typeface="Calibri"/>
+                <a:cs typeface="Calibri"/>
+              </a:defRPr>
+            </a:defPPr>
+          </a:lstStyle>
+          <a:p>
+            <a:pPr algn="l">
+              <a:defRPr sz="2500" b="1">
+                <a:solidFill>
+                  <a:srgbClr val="0B1F3A"/>
+                </a:solidFill>
+                <a:latin typeface="Calibri"/>
+                <a:ea typeface="Calibri"/>
+                <a:cs typeface="Calibri"/>
+              </a:defRPr>
+            </a:pPr>
+            <a:r>
+              <a:rPr sz="2500" b="1" dirty="0">
+                <a:solidFill>
+                  <a:srgbClr val="0B1F3A"/>
+                </a:solidFill>
+                <a:latin typeface="Calibri"/>
+                <a:ea typeface="Calibri"/>
+                <a:cs typeface="Calibri"/>
+              </a:rPr>
+              <a:t>Reliable event information</a:t>
+            </a:r>
+            <a:r>
+              <a:rPr lang="pt-PT" sz="2500" b="1" dirty="0">
+                <a:solidFill>
+                  <a:srgbClr val="0B1F3A"/>
+                </a:solidFill>
+                <a:latin typeface="Calibri"/>
+                <a:ea typeface="Calibri"/>
+                <a:cs typeface="Calibri"/>
+              </a:rPr>
+              <a:t> </a:t>
+            </a:r>
+            <a:r>
+              <a:rPr sz="2500" b="1" dirty="0">
+                <a:solidFill>
+                  <a:srgbClr val="0B1F3A"/>
+                </a:solidFill>
+                <a:latin typeface="Calibri"/>
+                <a:ea typeface="Calibri"/>
+                <a:cs typeface="Calibri"/>
+              </a:rPr>
+              <a:t>and coordinated help</a:t>
+            </a:r>
+          </a:p>
+        </p:txBody>
+      </p:sp>
+      <p:sp>
+        <p:nvSpPr>
+          <p:cNvPr id="49" name="Vision audience">
+            <a:extLst>
+              <a:ext uri="{FF2B5EF4-FFF2-40B4-BE49-F238E27FC236}">
+                <a16:creationId xmlns:a16="http://schemas.microsoft.com/office/drawing/2014/main" id="{9DF1A56B-71E1-4DA3-8CB2-715A03FFF714}"/>
+              </a:ext>
+            </a:extLst>
+          </p:cNvPr>
+          <p:cNvSpPr>
+            <a:spLocks noGrp="1"/>
+          </p:cNvSpPr>
+          <p:nvPr/>
+        </p:nvSpPr>
+        <p:spPr>
+          <a:xfrm>
+            <a:off x="1919288" y="1395413"/>
+            <a:ext cx="6667500" cy="285750"/>
+          </a:xfrm>
+          <a:prstGeom prst="rect">
+            <a:avLst/>
+          </a:prstGeom>
+          <a:noFill/>
+          <a:ln w="0">
+            <a:noFill/>
+          </a:ln>
+        </p:spPr>
+        <p:txBody>
+          <a:bodyPr wrap="square" lIns="0" tIns="0" rIns="0" bIns="0" anchor="t">
+            <a:noAutofit/>
+          </a:bodyPr>
+          <a:lstStyle>
+            <a:defPPr algn="l">
+              <a:defRPr sz="1500">
+                <a:solidFill>
+                  <a:srgbClr val="1F4E79"/>
+                </a:solidFill>
+                <a:latin typeface="Calibri"/>
+                <a:ea typeface="Calibri"/>
+                <a:cs typeface="Calibri"/>
+              </a:defRPr>
+            </a:defPPr>
+          </a:lstStyle>
+          <a:p>
+            <a:pPr algn="l">
+              <a:defRPr sz="1500">
+                <a:solidFill>
+                  <a:srgbClr val="1F4E79"/>
+                </a:solidFill>
+                <a:latin typeface="Calibri"/>
+                <a:ea typeface="Calibri"/>
+                <a:cs typeface="Calibri"/>
+              </a:defRPr>
+            </a:pPr>
+            <a:r>
+              <a:rPr sz="1500" dirty="0">
+                <a:solidFill>
+                  <a:srgbClr val="1F4E79"/>
+                </a:solidFill>
+                <a:latin typeface="Calibri"/>
+                <a:ea typeface="Calibri"/>
+                <a:cs typeface="Calibri"/>
+              </a:rPr>
+              <a:t>A shared platform for participants and event teams</a:t>
+            </a:r>
+          </a:p>
+        </p:txBody>
+      </p:sp>
+      <p:sp>
+        <p:nvSpPr>
+          <p:cNvPr id="50" name="Participants heading">
+            <a:extLst>
+              <a:ext uri="{FF2B5EF4-FFF2-40B4-BE49-F238E27FC236}">
+                <a16:creationId xmlns:a16="http://schemas.microsoft.com/office/drawing/2014/main" id="{72DAA3F8-A99E-4817-B74D-445363117F11}"/>
+              </a:ext>
+            </a:extLst>
+          </p:cNvPr>
+          <p:cNvSpPr>
+            <a:spLocks noGrp="1"/>
+          </p:cNvSpPr>
+          <p:nvPr/>
+        </p:nvSpPr>
+        <p:spPr>
+          <a:xfrm>
+            <a:off x="457200" y="2052637"/>
+            <a:ext cx="3857625" cy="285750"/>
+          </a:xfrm>
+          <a:prstGeom prst="rect">
+            <a:avLst/>
+          </a:prstGeom>
+          <a:noFill/>
+          <a:ln w="0">
+            <a:noFill/>
+          </a:ln>
+        </p:spPr>
+        <p:txBody>
+          <a:bodyPr wrap="square" lIns="0" tIns="0" rIns="0" bIns="0" anchor="t">
+            <a:noAutofit/>
+          </a:bodyPr>
+          <a:lstStyle>
+            <a:defPPr algn="l">
+              <a:defRPr sz="1700" b="1">
+                <a:solidFill>
+                  <a:srgbClr val="1F4E79"/>
+                </a:solidFill>
+                <a:latin typeface="Calibri"/>
+                <a:ea typeface="Calibri"/>
+                <a:cs typeface="Calibri"/>
+              </a:defRPr>
+            </a:defPPr>
+          </a:lstStyle>
+          <a:p>
+            <a:pPr algn="l">
+              <a:defRPr sz="1700" b="1">
+                <a:solidFill>
+                  <a:srgbClr val="1F4E79"/>
+                </a:solidFill>
+                <a:latin typeface="Calibri"/>
+                <a:ea typeface="Calibri"/>
+                <a:cs typeface="Calibri"/>
+              </a:defRPr>
+            </a:pPr>
+            <a:r>
+              <a:rPr sz="1700" b="1" dirty="0">
+                <a:solidFill>
+                  <a:srgbClr val="1F4E79"/>
+                </a:solidFill>
+                <a:latin typeface="Calibri"/>
+                <a:ea typeface="Calibri"/>
+                <a:cs typeface="Calibri"/>
+              </a:rPr>
+              <a:t>For participants</a:t>
+            </a:r>
+          </a:p>
+        </p:txBody>
+      </p:sp>
+      <p:sp>
+        <p:nvSpPr>
+          <p:cNvPr id="51" name="Participants journey">
+            <a:extLst>
+              <a:ext uri="{FF2B5EF4-FFF2-40B4-BE49-F238E27FC236}">
+                <a16:creationId xmlns:a16="http://schemas.microsoft.com/office/drawing/2014/main" id="{FDD69BD9-71D1-41AC-8425-813E9BD26FD3}"/>
+              </a:ext>
+            </a:extLst>
+          </p:cNvPr>
+          <p:cNvSpPr>
+            <a:spLocks noGrp="1"/>
+          </p:cNvSpPr>
+          <p:nvPr/>
+        </p:nvSpPr>
+        <p:spPr>
+          <a:xfrm>
+            <a:off x="457200" y="2386012"/>
+            <a:ext cx="3848100" cy="781050"/>
+          </a:xfrm>
+          <a:prstGeom prst="rect">
+            <a:avLst/>
+          </a:prstGeom>
+          <a:noFill/>
+          <a:ln w="0">
+            <a:noFill/>
+          </a:ln>
+        </p:spPr>
+        <p:txBody>
+          <a:bodyPr wrap="square" lIns="0" tIns="0" rIns="0" bIns="0" anchor="t">
+            <a:noAutofit/>
+          </a:bodyPr>
+          <a:lstStyle>
+            <a:defPPr algn="l">
+              <a:defRPr sz="1500">
+                <a:solidFill>
+                  <a:srgbClr val="1B2430"/>
+                </a:solidFill>
+                <a:latin typeface="Calibri"/>
+                <a:ea typeface="Calibri"/>
+                <a:cs typeface="Calibri"/>
+              </a:defRPr>
+            </a:defPPr>
+          </a:lstStyle>
+          <a:p>
+            <a:pPr algn="l">
+              <a:defRPr sz="1500">
+                <a:solidFill>
+                  <a:srgbClr val="1B2430"/>
+                </a:solidFill>
+                <a:latin typeface="Calibri"/>
+                <a:ea typeface="Calibri"/>
+                <a:cs typeface="Calibri"/>
+              </a:defRPr>
+            </a:pPr>
+            <a:r>
+              <a:rPr sz="1500" dirty="0">
+                <a:solidFill>
+                  <a:srgbClr val="1B2430"/>
+                </a:solidFill>
+                <a:latin typeface="Calibri"/>
+                <a:ea typeface="Calibri"/>
+                <a:cs typeface="Calibri"/>
+              </a:rPr>
+              <a:t>Open by link or QR. Find the map and transport options, then request help with context and location.</a:t>
+            </a:r>
+          </a:p>
+        </p:txBody>
+      </p:sp>
+      <p:sp>
+        <p:nvSpPr>
+          <p:cNvPr id="52" name="Event team heading">
+            <a:extLst>
+              <a:ext uri="{FF2B5EF4-FFF2-40B4-BE49-F238E27FC236}">
+                <a16:creationId xmlns:a16="http://schemas.microsoft.com/office/drawing/2014/main" id="{EA37A2C6-44B2-4F7C-B5CD-57F6307C62E2}"/>
+              </a:ext>
+            </a:extLst>
+          </p:cNvPr>
+          <p:cNvSpPr>
+            <a:spLocks noGrp="1"/>
+          </p:cNvSpPr>
+          <p:nvPr/>
+        </p:nvSpPr>
+        <p:spPr>
+          <a:xfrm>
+            <a:off x="4800600" y="2071687"/>
+            <a:ext cx="3886200" cy="285750"/>
+          </a:xfrm>
+          <a:prstGeom prst="rect">
+            <a:avLst/>
+          </a:prstGeom>
+          <a:noFill/>
+          <a:ln w="0">
+            <a:noFill/>
+          </a:ln>
+        </p:spPr>
+        <p:txBody>
+          <a:bodyPr wrap="square" lIns="0" tIns="0" rIns="0" bIns="0" anchor="t">
+            <a:noAutofit/>
+          </a:bodyPr>
+          <a:lstStyle>
+            <a:defPPr algn="l">
+              <a:defRPr sz="1700" b="1">
+                <a:solidFill>
+                  <a:srgbClr val="1F4E79"/>
+                </a:solidFill>
+                <a:latin typeface="Calibri"/>
+                <a:ea typeface="Calibri"/>
+                <a:cs typeface="Calibri"/>
+              </a:defRPr>
+            </a:defPPr>
+          </a:lstStyle>
+          <a:p>
+            <a:pPr algn="l">
+              <a:defRPr sz="1700" b="1">
+                <a:solidFill>
+                  <a:srgbClr val="1F4E79"/>
+                </a:solidFill>
+                <a:latin typeface="Calibri"/>
+                <a:ea typeface="Calibri"/>
+                <a:cs typeface="Calibri"/>
+              </a:defRPr>
+            </a:pPr>
+            <a:r>
+              <a:rPr sz="1700" b="1">
+                <a:solidFill>
+                  <a:srgbClr val="1F4E79"/>
+                </a:solidFill>
+                <a:latin typeface="Calibri"/>
+                <a:ea typeface="Calibri"/>
+                <a:cs typeface="Calibri"/>
+              </a:rPr>
+              <a:t>For the event team</a:t>
+            </a:r>
+          </a:p>
+        </p:txBody>
+      </p:sp>
+      <p:sp>
+        <p:nvSpPr>
+          <p:cNvPr id="53" name="Event team journey">
+            <a:extLst>
+              <a:ext uri="{FF2B5EF4-FFF2-40B4-BE49-F238E27FC236}">
+                <a16:creationId xmlns:a16="http://schemas.microsoft.com/office/drawing/2014/main" id="{C93A605C-E103-414A-A0FC-CFFB4FECDB34}"/>
+              </a:ext>
+            </a:extLst>
+          </p:cNvPr>
+          <p:cNvSpPr>
+            <a:spLocks noGrp="1"/>
+          </p:cNvSpPr>
+          <p:nvPr/>
+        </p:nvSpPr>
+        <p:spPr>
+          <a:xfrm>
+            <a:off x="4800600" y="2405062"/>
+            <a:ext cx="3886200" cy="781050"/>
+          </a:xfrm>
+          <a:prstGeom prst="rect">
+            <a:avLst/>
+          </a:prstGeom>
+          <a:noFill/>
+          <a:ln w="0">
+            <a:noFill/>
+          </a:ln>
+        </p:spPr>
+        <p:txBody>
+          <a:bodyPr wrap="square" lIns="0" tIns="0" rIns="0" bIns="0" anchor="t">
+            <a:noAutofit/>
+          </a:bodyPr>
+          <a:lstStyle>
+            <a:defPPr algn="l">
+              <a:defRPr sz="1500">
+                <a:solidFill>
+                  <a:srgbClr val="1B2430"/>
+                </a:solidFill>
+                <a:latin typeface="Calibri"/>
+                <a:ea typeface="Calibri"/>
+                <a:cs typeface="Calibri"/>
+              </a:defRPr>
+            </a:defPPr>
+          </a:lstStyle>
+          <a:p>
+            <a:pPr algn="l">
+              <a:defRPr sz="1500">
+                <a:solidFill>
+                  <a:srgbClr val="1B2430"/>
+                </a:solidFill>
+                <a:latin typeface="Calibri"/>
+                <a:ea typeface="Calibri"/>
+                <a:cs typeface="Calibri"/>
+              </a:defRPr>
+            </a:pPr>
+            <a:r>
+              <a:rPr sz="1500">
+                <a:solidFill>
+                  <a:srgbClr val="1B2430"/>
+                </a:solidFill>
+                <a:latin typeface="Calibri"/>
+                <a:ea typeface="Calibri"/>
+                <a:cs typeface="Calibri"/>
+              </a:rPr>
+              <a:t>Configure the event and update information. Prioritise each request and route it to the right team.</a:t>
+            </a:r>
+          </a:p>
+        </p:txBody>
+      </p:sp>
+      <p:sp>
+        <p:nvSpPr>
+          <p:cNvPr id="54" name="MVP heading">
+            <a:extLst>
+              <a:ext uri="{FF2B5EF4-FFF2-40B4-BE49-F238E27FC236}">
+                <a16:creationId xmlns:a16="http://schemas.microsoft.com/office/drawing/2014/main" id="{FD4759BC-83D1-4166-BC0D-9B2F91CAF75B}"/>
+              </a:ext>
+            </a:extLst>
+          </p:cNvPr>
+          <p:cNvSpPr>
+            <a:spLocks noGrp="1"/>
+          </p:cNvSpPr>
+          <p:nvPr/>
+        </p:nvSpPr>
+        <p:spPr>
+          <a:xfrm>
+            <a:off x="457200" y="3614736"/>
+            <a:ext cx="1352550" cy="285750"/>
+          </a:xfrm>
+          <a:prstGeom prst="rect">
+            <a:avLst/>
+          </a:prstGeom>
+          <a:noFill/>
+          <a:ln w="0">
+            <a:noFill/>
+          </a:ln>
+        </p:spPr>
+        <p:txBody>
+          <a:bodyPr wrap="square" lIns="0" tIns="0" rIns="0" bIns="0" anchor="t">
+            <a:noAutofit/>
+          </a:bodyPr>
+          <a:lstStyle>
+            <a:defPPr algn="l">
+              <a:defRPr sz="1500" b="1">
+                <a:solidFill>
+                  <a:srgbClr val="0B1F3A"/>
+                </a:solidFill>
+                <a:latin typeface="Calibri"/>
+                <a:ea typeface="Calibri"/>
+                <a:cs typeface="Calibri"/>
+              </a:defRPr>
+            </a:defPPr>
+          </a:lstStyle>
+          <a:p>
+            <a:pPr algn="l">
+              <a:defRPr sz="1500" b="1">
+                <a:solidFill>
+                  <a:srgbClr val="0B1F3A"/>
+                </a:solidFill>
+                <a:latin typeface="Calibri"/>
+                <a:ea typeface="Calibri"/>
+                <a:cs typeface="Calibri"/>
+              </a:defRPr>
+            </a:pPr>
+            <a:r>
+              <a:rPr sz="1500" b="1" dirty="0">
+                <a:solidFill>
+                  <a:schemeClr val="accent1"/>
+                </a:solidFill>
+                <a:latin typeface="Calibri"/>
+                <a:ea typeface="Calibri"/>
+                <a:cs typeface="Calibri"/>
+              </a:rPr>
+              <a:t>MVP</a:t>
+            </a:r>
+          </a:p>
+        </p:txBody>
+      </p:sp>
+      <p:sp>
+        <p:nvSpPr>
+          <p:cNvPr id="55" name="MVP scope">
+            <a:extLst>
+              <a:ext uri="{FF2B5EF4-FFF2-40B4-BE49-F238E27FC236}">
+                <a16:creationId xmlns:a16="http://schemas.microsoft.com/office/drawing/2014/main" id="{EE15BBC2-61C5-47DC-90AD-58954614B58C}"/>
+              </a:ext>
+            </a:extLst>
+          </p:cNvPr>
+          <p:cNvSpPr>
+            <a:spLocks noGrp="1"/>
+          </p:cNvSpPr>
+          <p:nvPr/>
+        </p:nvSpPr>
+        <p:spPr>
+          <a:xfrm>
+            <a:off x="1914525" y="3614736"/>
+            <a:ext cx="6772275" cy="457200"/>
+          </a:xfrm>
+          <a:prstGeom prst="rect">
+            <a:avLst/>
+          </a:prstGeom>
+          <a:noFill/>
+          <a:ln w="0">
+            <a:noFill/>
+          </a:ln>
+        </p:spPr>
+        <p:txBody>
+          <a:bodyPr wrap="square" lIns="0" tIns="0" rIns="0" bIns="0" anchor="t">
+            <a:noAutofit/>
+          </a:bodyPr>
+          <a:lstStyle>
+            <a:defPPr algn="l">
+              <a:defRPr sz="1300">
+                <a:solidFill>
+                  <a:srgbClr val="1B2430"/>
+                </a:solidFill>
+                <a:latin typeface="Calibri"/>
+                <a:ea typeface="Calibri"/>
+                <a:cs typeface="Calibri"/>
+              </a:defRPr>
+            </a:defPPr>
+          </a:lstStyle>
+          <a:p>
+            <a:pPr algn="l">
+              <a:defRPr sz="1300">
+                <a:solidFill>
+                  <a:srgbClr val="1B2430"/>
+                </a:solidFill>
+                <a:latin typeface="Calibri"/>
+                <a:ea typeface="Calibri"/>
+                <a:cs typeface="Calibri"/>
+              </a:defRPr>
+            </a:pPr>
+            <a:r>
+              <a:rPr sz="1300" dirty="0">
+                <a:solidFill>
+                  <a:schemeClr val="bg1"/>
+                </a:solidFill>
+                <a:latin typeface="Calibri"/>
+                <a:ea typeface="Calibri"/>
+                <a:cs typeface="Calibri"/>
+              </a:rPr>
+              <a:t>Event selection, venue map, essential information, transport and help requests, with an event </a:t>
+            </a:r>
+            <a:r>
+              <a:rPr sz="1300" dirty="0" err="1">
+                <a:solidFill>
+                  <a:schemeClr val="bg1"/>
+                </a:solidFill>
+                <a:latin typeface="Calibri"/>
+                <a:ea typeface="Calibri"/>
+                <a:cs typeface="Calibri"/>
+              </a:rPr>
+              <a:t>backoffice</a:t>
+            </a:r>
+            <a:r>
+              <a:rPr sz="1300" dirty="0">
+                <a:solidFill>
+                  <a:schemeClr val="bg1"/>
+                </a:solidFill>
+                <a:latin typeface="Calibri"/>
+                <a:ea typeface="Calibri"/>
+                <a:cs typeface="Calibri"/>
+              </a:rPr>
+              <a:t>.</a:t>
+            </a:r>
+          </a:p>
+        </p:txBody>
+      </p:sp>
+      <p:sp>
+        <p:nvSpPr>
+          <p:cNvPr id="56" name="Success heading">
+            <a:extLst>
+              <a:ext uri="{FF2B5EF4-FFF2-40B4-BE49-F238E27FC236}">
+                <a16:creationId xmlns:a16="http://schemas.microsoft.com/office/drawing/2014/main" id="{5A36368D-A38A-49D3-AB41-D9FC53609A8B}"/>
+              </a:ext>
+            </a:extLst>
+          </p:cNvPr>
+          <p:cNvSpPr>
+            <a:spLocks noGrp="1"/>
+          </p:cNvSpPr>
+          <p:nvPr/>
+        </p:nvSpPr>
+        <p:spPr>
+          <a:xfrm>
+            <a:off x="457200" y="4195761"/>
+            <a:ext cx="1352550" cy="304800"/>
+          </a:xfrm>
+          <a:prstGeom prst="rect">
+            <a:avLst/>
+          </a:prstGeom>
+          <a:noFill/>
+          <a:ln w="0">
+            <a:noFill/>
+          </a:ln>
+        </p:spPr>
+        <p:txBody>
+          <a:bodyPr wrap="square" lIns="0" tIns="0" rIns="0" bIns="0" anchor="t">
+            <a:noAutofit/>
+          </a:bodyPr>
+          <a:lstStyle>
+            <a:defPPr algn="l">
+              <a:defRPr sz="1500" b="1">
+                <a:solidFill>
+                  <a:srgbClr val="0B1F3A"/>
+                </a:solidFill>
+                <a:latin typeface="Calibri"/>
+                <a:ea typeface="Calibri"/>
+                <a:cs typeface="Calibri"/>
+              </a:defRPr>
+            </a:defPPr>
+          </a:lstStyle>
+          <a:p>
+            <a:pPr algn="l">
+              <a:defRPr sz="1500" b="1">
+                <a:solidFill>
+                  <a:srgbClr val="0B1F3A"/>
+                </a:solidFill>
+                <a:latin typeface="Calibri"/>
+                <a:ea typeface="Calibri"/>
+                <a:cs typeface="Calibri"/>
+              </a:defRPr>
+            </a:pPr>
+            <a:r>
+              <a:rPr sz="1500" b="1" dirty="0">
+                <a:solidFill>
+                  <a:schemeClr val="accent1"/>
+                </a:solidFill>
+                <a:latin typeface="Calibri"/>
+                <a:ea typeface="Calibri"/>
+                <a:cs typeface="Calibri"/>
+              </a:rPr>
+              <a:t>Success criteria</a:t>
+            </a:r>
+          </a:p>
+        </p:txBody>
+      </p:sp>
+      <p:sp>
+        <p:nvSpPr>
+          <p:cNvPr id="57" name="Success criteria">
+            <a:extLst>
+              <a:ext uri="{FF2B5EF4-FFF2-40B4-BE49-F238E27FC236}">
+                <a16:creationId xmlns:a16="http://schemas.microsoft.com/office/drawing/2014/main" id="{3BC16916-00CE-4194-9ADB-BCE37690540A}"/>
+              </a:ext>
+            </a:extLst>
+          </p:cNvPr>
+          <p:cNvSpPr>
+            <a:spLocks noGrp="1"/>
+          </p:cNvSpPr>
+          <p:nvPr/>
+        </p:nvSpPr>
+        <p:spPr>
+          <a:xfrm>
+            <a:off x="1914525" y="4195761"/>
+            <a:ext cx="6772275" cy="457200"/>
+          </a:xfrm>
+          <a:prstGeom prst="rect">
+            <a:avLst/>
+          </a:prstGeom>
+          <a:noFill/>
+          <a:ln w="0">
+            <a:noFill/>
+          </a:ln>
+        </p:spPr>
+        <p:txBody>
+          <a:bodyPr wrap="square" lIns="0" tIns="0" rIns="0" bIns="0" anchor="t">
+            <a:noAutofit/>
+          </a:bodyPr>
+          <a:lstStyle>
+            <a:defPPr algn="l">
+              <a:defRPr sz="1300">
+                <a:solidFill>
+                  <a:srgbClr val="1B2430"/>
+                </a:solidFill>
+                <a:latin typeface="Calibri"/>
+                <a:ea typeface="Calibri"/>
+                <a:cs typeface="Calibri"/>
+              </a:defRPr>
+            </a:defPPr>
+          </a:lstStyle>
+          <a:p>
+            <a:pPr algn="l">
+              <a:defRPr sz="1300">
+                <a:solidFill>
+                  <a:srgbClr val="1B2430"/>
+                </a:solidFill>
+                <a:latin typeface="Calibri"/>
+                <a:ea typeface="Calibri"/>
+                <a:cs typeface="Calibri"/>
+              </a:defRPr>
+            </a:pPr>
+            <a:r>
+              <a:rPr sz="1300">
+                <a:solidFill>
+                  <a:schemeClr val="bg1"/>
+                </a:solidFill>
+                <a:latin typeface="Calibri"/>
+                <a:ea typeface="Calibri"/>
+                <a:cs typeface="Calibri"/>
+              </a:rPr>
+              <a:t>Faster access to information and operational response, less confusion, adoption and positive feedback.</a:t>
+            </a:r>
+          </a:p>
+        </p:txBody>
+      </p:sp>
+    </p:spTree>
+  </p:cSld>
+  <p:clrMapOvr>
+    <a:masterClrMapping/>
+  </p:clrMapOvr>
+</p:sld>
+</file>
+
+<file path=ppt/slides/slide3.xml><?xml version="1.0" encoding="utf-8"?>
+<p:sld xmlns:a="http://schemas.openxmlformats.org/drawingml/2006/main" xmlns:r="http://schemas.openxmlformats.org/officeDocument/2006/relationships" xmlns:p="http://schemas.openxmlformats.org/presentationml/2006/main">
   <p:cSld name="Slide 1">
     <p:spTree>
       <p:nvGrpSpPr>
@@ -3872,7 +4874,7 @@
 </p:sld>
 </file>
 
-<file path=ppt/slides/slide3.xml><?xml version="1.0" encoding="utf-8"?>
+<file path=ppt/slides/slide4.xml><?xml version="1.0" encoding="utf-8"?>
 <p:sld xmlns:a="http://schemas.openxmlformats.org/drawingml/2006/main" xmlns:r="http://schemas.openxmlformats.org/officeDocument/2006/relationships" xmlns:p="http://schemas.openxmlformats.org/presentationml/2006/main">
   <p:cSld name="Slide 2">
     <p:spTree>
@@ -5168,7 +6170,7 @@
 </p:sld>
 </file>
 
-<file path=ppt/slides/slide4.xml><?xml version="1.0" encoding="utf-8"?>
+<file path=ppt/slides/slide5.xml><?xml version="1.0" encoding="utf-8"?>
 <p:sld xmlns:a="http://schemas.openxmlformats.org/drawingml/2006/main" xmlns:r="http://schemas.openxmlformats.org/officeDocument/2006/relationships" xmlns:p="http://schemas.openxmlformats.org/presentationml/2006/main">
   <p:cSld name="Slide 3">
     <p:spTree>
@@ -6372,7 +7374,7 @@
 </p:sld>
 </file>
 
-<file path=ppt/slides/slide5.xml><?xml version="1.0" encoding="utf-8"?>
+<file path=ppt/slides/slide6.xml><?xml version="1.0" encoding="utf-8"?>
 <p:sld xmlns:a="http://schemas.openxmlformats.org/drawingml/2006/main" xmlns:r="http://schemas.openxmlformats.org/officeDocument/2006/relationships" xmlns:p="http://schemas.openxmlformats.org/presentationml/2006/main">
   <p:cSld name="User workflows">
     <p:spTree>
@@ -7911,146 +8913,24 @@
 </p:sld>
 </file>
 
-<file path=ppt/slides/slide6.xml><?xml version="1.0" encoding="utf-8"?>
-<p:sld xmlns:a="http://schemas.openxmlformats.org/drawingml/2006/main" xmlns:r="http://schemas.openxmlformats.org/officeDocument/2006/relationships" xmlns:p="http://schemas.openxmlformats.org/presentationml/2006/main">
-  <p:cSld name="Slide 2">
+<file path=ppt/slides/slide7.xml><?xml version="1.0" encoding="utf-8"?>
+<p:sld xmlns:a="http://schemas.openxmlformats.org/drawingml/2006/main" xmlns:p="http://schemas.openxmlformats.org/presentationml/2006/main" xmlns:r="http://schemas.openxmlformats.org/officeDocument/2006/relationships">
+  <p:cSld>
     <p:spTree>
       <p:nvGrpSpPr>
         <p:cNvPr id="1" name=""/>
         <p:cNvGrpSpPr/>
         <p:nvPr/>
       </p:nvGrpSpPr>
-      <p:grpSpPr>
-        <a:xfrm>
-          <a:off x="0" y="0"/>
-          <a:ext cx="0" cy="0"/>
-          <a:chOff x="0" y="0"/>
-          <a:chExt cx="0" cy="0"/>
-        </a:xfrm>
-      </p:grpSpPr>
-      <p:sp>
-        <p:nvSpPr>
-          <p:cNvPr id="4" name="Rita card">
-            <a:extLst>
-              <a:ext uri="{FF2B5EF4-FFF2-40B4-BE49-F238E27FC236}">
-                <a16:creationId xmlns:a16="http://schemas.microsoft.com/office/drawing/2014/main" id="{DE3F91AE-EEF0-4B77-F796-372EBD91B7DF}"/>
-              </a:ext>
-            </a:extLst>
-          </p:cNvPr>
-          <p:cNvSpPr/>
-          <p:nvPr/>
-        </p:nvSpPr>
-        <p:spPr>
-          <a:xfrm>
-            <a:off x="368693" y="3433761"/>
-            <a:ext cx="8387563" cy="1319448"/>
-          </a:xfrm>
-          <a:prstGeom prst="roundRect">
-            <a:avLst>
-              <a:gd name="adj" fmla="val 5714"/>
-            </a:avLst>
-          </a:prstGeom>
-          <a:solidFill>
-            <a:schemeClr val="tx2"/>
-          </a:solidFill>
-          <a:ln/>
-        </p:spPr>
-        <p:txBody>
-          <a:bodyPr/>
-          <a:lstStyle/>
-          <a:p>
-            <a:endParaRPr lang="en-PT" dirty="0">
-              <a:solidFill>
-                <a:schemeClr val="bg1"/>
-              </a:solidFill>
-            </a:endParaRPr>
-          </a:p>
-        </p:txBody>
-      </p:sp>
-      <p:sp>
-        <p:nvSpPr>
-          <p:cNvPr id="3" name="Rita card">
-            <a:extLst>
-              <a:ext uri="{FF2B5EF4-FFF2-40B4-BE49-F238E27FC236}">
-                <a16:creationId xmlns:a16="http://schemas.microsoft.com/office/drawing/2014/main" id="{30711021-712A-717F-2C45-15DE97DD91DD}"/>
-              </a:ext>
-            </a:extLst>
-          </p:cNvPr>
-          <p:cNvSpPr/>
-          <p:nvPr/>
-        </p:nvSpPr>
-        <p:spPr>
-          <a:xfrm>
-            <a:off x="4731143" y="1938337"/>
-            <a:ext cx="4025113" cy="1238250"/>
-          </a:xfrm>
-          <a:prstGeom prst="roundRect">
-            <a:avLst>
-              <a:gd name="adj" fmla="val 5714"/>
-            </a:avLst>
-          </a:prstGeom>
-          <a:solidFill>
-            <a:schemeClr val="bg2"/>
-          </a:solidFill>
-          <a:ln/>
-        </p:spPr>
-        <p:txBody>
-          <a:bodyPr/>
-          <a:lstStyle/>
-          <a:p>
-            <a:endParaRPr lang="en-PT"/>
-          </a:p>
-        </p:txBody>
-      </p:sp>
-      <p:sp>
-        <p:nvSpPr>
-          <p:cNvPr id="2" name="Rita card">
-            <a:extLst>
-              <a:ext uri="{FF2B5EF4-FFF2-40B4-BE49-F238E27FC236}">
-                <a16:creationId xmlns:a16="http://schemas.microsoft.com/office/drawing/2014/main" id="{0FDC3C32-5582-6860-15BE-D9F57C237ACD}"/>
-              </a:ext>
-            </a:extLst>
-          </p:cNvPr>
-          <p:cNvSpPr/>
-          <p:nvPr/>
-        </p:nvSpPr>
-        <p:spPr>
-          <a:xfrm>
-            <a:off x="368693" y="1938337"/>
-            <a:ext cx="4025113" cy="1238250"/>
-          </a:xfrm>
-          <a:prstGeom prst="roundRect">
-            <a:avLst>
-              <a:gd name="adj" fmla="val 5714"/>
-            </a:avLst>
-          </a:prstGeom>
-          <a:solidFill>
-            <a:schemeClr val="bg2"/>
-          </a:solidFill>
-          <a:ln/>
-        </p:spPr>
-        <p:txBody>
-          <a:bodyPr/>
-          <a:lstStyle/>
-          <a:p>
-            <a:endParaRPr lang="en-PT"/>
-          </a:p>
-        </p:txBody>
-      </p:sp>
-      <p:sp>
-        <p:nvSpPr>
-          <p:cNvPr id="46" name="Title 45">
-            <a:extLst>
-              <a:ext uri="{FF2B5EF4-FFF2-40B4-BE49-F238E27FC236}">
-                <a16:creationId xmlns:a16="http://schemas.microsoft.com/office/drawing/2014/main" id="{D35B6AAC-B8F8-6D43-4F74-381A49A405D9}"/>
-              </a:ext>
-            </a:extLst>
-          </p:cNvPr>
+      <p:grpSpPr/>
+      <p:sp>
+        <p:nvSpPr>
+          <p:cNvPr id="2" name="Text 0"/>
           <p:cNvSpPr>
             <a:spLocks noGrp="1"/>
           </p:cNvSpPr>
           <p:nvPr>
-            <p:ph type="title" idx="100"/>
+            <p:ph type="title" idx="100" hasCustomPrompt="1"/>
           </p:nvPr>
         </p:nvSpPr>
         <p:spPr>
@@ -8058,797 +8938,1069 @@
             <a:off x="457200" y="274320"/>
             <a:ext cx="8229600" cy="640080"/>
           </a:xfrm>
-        </p:spPr>
-        <p:txBody>
-          <a:bodyPr lIns="0" tIns="0" rIns="0" bIns="0" anchor="ctr">
-            <a:noAutofit/>
-          </a:bodyPr>
-          <a:lstStyle>
-            <a:defPPr algn="ctr">
-              <a:defRPr sz="3200" b="1">
-                <a:solidFill>
-                  <a:srgbClr val="0B1F3A"/>
-                </a:solidFill>
-                <a:latin typeface="Calibri"/>
-                <a:ea typeface="Calibri"/>
-                <a:cs typeface="Calibri"/>
-              </a:defRPr>
-            </a:defPPr>
-          </a:lstStyle>
-          <a:p>
-            <a:pPr algn="ctr">
-              <a:defRPr sz="3200" b="1">
-                <a:solidFill>
-                  <a:srgbClr val="0B1F3A"/>
-                </a:solidFill>
-                <a:latin typeface="Calibri"/>
-                <a:ea typeface="Calibri"/>
-                <a:cs typeface="Calibri"/>
-              </a:defRPr>
-            </a:pPr>
-            <a:r>
-              <a:rPr sz="3200" b="1">
-                <a:solidFill>
-                  <a:srgbClr val="0B1F3A"/>
-                </a:solidFill>
-                <a:latin typeface="Calibri"/>
-                <a:ea typeface="Calibri"/>
-                <a:cs typeface="Calibri"/>
-              </a:rPr>
-              <a:t>Product vision</a:t>
-            </a:r>
-            <a:endParaRPr/>
-          </a:p>
-        </p:txBody>
-      </p:sp>
-      <p:pic>
-        <p:nvPicPr>
-          <p:cNvPr id="47" name="Picture 46">
-            <a:extLst>
-              <a:ext uri="{FF2B5EF4-FFF2-40B4-BE49-F238E27FC236}">
-                <a16:creationId xmlns:a16="http://schemas.microsoft.com/office/drawing/2014/main" id="{2165DBDE-5B3C-471C-9703-4CC44BBC29BB}"/>
-              </a:ext>
-            </a:extLst>
-          </p:cNvPr>
-          <p:cNvPicPr>
-            <a:picLocks noChangeAspect="1"/>
-          </p:cNvPicPr>
-          <p:nvPr/>
-        </p:nvPicPr>
-        <p:blipFill>
-          <a:blip r:embed="rId3"/>
-          <a:stretch/>
-        </p:blipFill>
-        <p:spPr>
-          <a:xfrm>
-            <a:off x="657225" y="900113"/>
-            <a:ext cx="952500" cy="952500"/>
-          </a:xfrm>
-          <a:prstGeom prst="rect">
-            <a:avLst/>
-          </a:prstGeom>
-        </p:spPr>
-      </p:pic>
-      <p:sp>
-        <p:nvSpPr>
-          <p:cNvPr id="48" name="Vision statement">
-            <a:extLst>
-              <a:ext uri="{FF2B5EF4-FFF2-40B4-BE49-F238E27FC236}">
-                <a16:creationId xmlns:a16="http://schemas.microsoft.com/office/drawing/2014/main" id="{BD580D43-FE42-4BF9-83F1-89CD57D05A09}"/>
-              </a:ext>
-            </a:extLst>
-          </p:cNvPr>
-          <p:cNvSpPr>
-            <a:spLocks noGrp="1"/>
-          </p:cNvSpPr>
-          <p:nvPr/>
-        </p:nvSpPr>
-        <p:spPr>
-          <a:xfrm>
-            <a:off x="1914525" y="914400"/>
-            <a:ext cx="6572250" cy="876300"/>
-          </a:xfrm>
-          <a:prstGeom prst="rect">
-            <a:avLst/>
-          </a:prstGeom>
-          <a:noFill/>
-          <a:ln w="0">
+          <a:prstGeom prst="rect">
+            <a:avLst/>
+          </a:prstGeom>
+          <a:noFill/>
+          <a:ln/>
+        </p:spPr>
+        <p:txBody>
+          <a:bodyPr wrap="square" lIns="0" tIns="0" rIns="0" bIns="0" rtlCol="0" anchor="ctr"/>
+          <a:lstStyle/>
+          <a:p>
+            <a:pPr marL="0" indent="0">
+              <a:buNone/>
+            </a:pPr>
+            <a:r>
+              <a:rPr lang="en-US" sz="3200" b="1" dirty="0">
+                <a:solidFill>
+                  <a:schemeClr val="tx2"/>
+                </a:solidFill>
+              </a:rPr>
+              <a:t>Process and technical status</a:t>
+            </a:r>
+            <a:endParaRPr lang="en-US" sz="3200" dirty="0"/>
+          </a:p>
+        </p:txBody>
+      </p:sp>
+      <p:sp>
+        <p:nvSpPr>
+          <p:cNvPr id="3" name="DoR / DoD card"/>
+          <p:cNvSpPr/>
+          <p:nvPr/>
+        </p:nvSpPr>
+        <p:spPr>
+          <a:xfrm>
+            <a:off x="457200" y="1005840"/>
+            <a:ext cx="4023360" cy="1645920"/>
+          </a:xfrm>
+          <a:prstGeom prst="roundRect">
+            <a:avLst>
+              <a:gd name="adj" fmla="val 6000"/>
+            </a:avLst>
+          </a:prstGeom>
+          <a:solidFill>
+            <a:schemeClr val="bg2"/>
+          </a:solidFill>
+          <a:ln>
             <a:noFill/>
           </a:ln>
-        </p:spPr>
-        <p:txBody>
-          <a:bodyPr wrap="square" lIns="0" tIns="0" rIns="0" bIns="0" anchor="t">
-            <a:noAutofit/>
-          </a:bodyPr>
-          <a:lstStyle>
-            <a:defPPr algn="l">
-              <a:defRPr sz="2500" b="1">
-                <a:solidFill>
-                  <a:srgbClr val="0B1F3A"/>
-                </a:solidFill>
-                <a:latin typeface="Calibri"/>
-                <a:ea typeface="Calibri"/>
-                <a:cs typeface="Calibri"/>
-              </a:defRPr>
-            </a:defPPr>
-          </a:lstStyle>
-          <a:p>
-            <a:pPr algn="l">
-              <a:defRPr sz="2500" b="1">
-                <a:solidFill>
-                  <a:srgbClr val="0B1F3A"/>
-                </a:solidFill>
-                <a:latin typeface="Calibri"/>
-                <a:ea typeface="Calibri"/>
-                <a:cs typeface="Calibri"/>
-              </a:defRPr>
-            </a:pPr>
-            <a:r>
-              <a:rPr sz="2500" b="1" dirty="0">
-                <a:solidFill>
-                  <a:srgbClr val="0B1F3A"/>
-                </a:solidFill>
-                <a:latin typeface="Calibri"/>
-                <a:ea typeface="Calibri"/>
-                <a:cs typeface="Calibri"/>
-              </a:rPr>
-              <a:t>Reliable event information</a:t>
-            </a:r>
-            <a:r>
-              <a:rPr lang="pt-PT" sz="2500" b="1" dirty="0">
-                <a:solidFill>
-                  <a:srgbClr val="0B1F3A"/>
-                </a:solidFill>
-                <a:latin typeface="Calibri"/>
-                <a:ea typeface="Calibri"/>
-                <a:cs typeface="Calibri"/>
-              </a:rPr>
-              <a:t> </a:t>
-            </a:r>
-            <a:r>
-              <a:rPr sz="2500" b="1" dirty="0">
-                <a:solidFill>
-                  <a:srgbClr val="0B1F3A"/>
-                </a:solidFill>
-                <a:latin typeface="Calibri"/>
-                <a:ea typeface="Calibri"/>
-                <a:cs typeface="Calibri"/>
-              </a:rPr>
-              <a:t>and coordinated help</a:t>
-            </a:r>
-          </a:p>
-        </p:txBody>
-      </p:sp>
-      <p:sp>
-        <p:nvSpPr>
-          <p:cNvPr id="49" name="Vision audience">
-            <a:extLst>
-              <a:ext uri="{FF2B5EF4-FFF2-40B4-BE49-F238E27FC236}">
-                <a16:creationId xmlns:a16="http://schemas.microsoft.com/office/drawing/2014/main" id="{9DF1A56B-71E1-4DA3-8CB2-715A03FFF714}"/>
-              </a:ext>
-            </a:extLst>
-          </p:cNvPr>
-          <p:cNvSpPr>
-            <a:spLocks noGrp="1"/>
-          </p:cNvSpPr>
-          <p:nvPr/>
-        </p:nvSpPr>
-        <p:spPr>
-          <a:xfrm>
-            <a:off x="1919288" y="1395413"/>
-            <a:ext cx="6667500" cy="285750"/>
-          </a:xfrm>
-          <a:prstGeom prst="rect">
-            <a:avLst/>
-          </a:prstGeom>
-          <a:noFill/>
-          <a:ln w="0">
+          <a:effectLst/>
+        </p:spPr>
+        <p:style>
+          <a:lnRef idx="1">
+            <a:schemeClr val="accent1"/>
+          </a:lnRef>
+          <a:fillRef idx="3">
+            <a:schemeClr val="accent1"/>
+          </a:fillRef>
+          <a:effectRef idx="2">
+            <a:schemeClr val="accent1"/>
+          </a:effectRef>
+          <a:fontRef idx="minor">
+            <a:schemeClr val="lt1"/>
+          </a:fontRef>
+        </p:style>
+        <p:txBody>
+          <a:bodyPr rtlCol="0" anchor="ctr"/>
+          <a:lstStyle/>
+          <a:p>
+            <a:pPr algn="ctr"/>
+          </a:p>
+        </p:txBody>
+      </p:sp>
+      <p:sp>
+        <p:nvSpPr>
+          <p:cNvPr id="4" name="DoR / DoD status"/>
+          <p:cNvSpPr/>
+          <p:nvPr/>
+        </p:nvSpPr>
+        <p:spPr>
+          <a:xfrm>
+            <a:off x="640080" y="1188720"/>
+            <a:ext cx="365760" cy="365760"/>
+          </a:xfrm>
+          <a:prstGeom prst="ellipse">
+            <a:avLst/>
+          </a:prstGeom>
+          <a:solidFill>
+            <a:srgbClr val="2E9E5B"/>
+          </a:solidFill>
+          <a:ln>
             <a:noFill/>
           </a:ln>
-        </p:spPr>
-        <p:txBody>
-          <a:bodyPr wrap="square" lIns="0" tIns="0" rIns="0" bIns="0" anchor="t">
-            <a:noAutofit/>
+          <a:effectLst/>
+        </p:spPr>
+        <p:style>
+          <a:lnRef idx="1">
+            <a:schemeClr val="accent1"/>
+          </a:lnRef>
+          <a:fillRef idx="3">
+            <a:schemeClr val="accent1"/>
+          </a:fillRef>
+          <a:effectRef idx="2">
+            <a:schemeClr val="accent1"/>
+          </a:effectRef>
+          <a:fontRef idx="minor">
+            <a:schemeClr val="lt1"/>
+          </a:fontRef>
+        </p:style>
+        <p:txBody>
+          <a:bodyPr rtlCol="0" anchor="ctr"/>
+          <a:lstStyle/>
+          <a:p>
+            <a:pPr algn="ctr"/>
+          </a:p>
+        </p:txBody>
+      </p:sp>
+      <p:sp>
+        <p:nvSpPr>
+          <p:cNvPr id="5" name="DoR / DoD name"/>
+          <p:cNvSpPr txBox="1"/>
+          <p:nvPr/>
+        </p:nvSpPr>
+        <p:spPr>
+          <a:xfrm>
+            <a:off x="1143000" y="1188720"/>
+            <a:ext cx="2377440" cy="365760"/>
+          </a:xfrm>
+          <a:prstGeom prst="rect">
+            <a:avLst/>
+          </a:prstGeom>
+          <a:noFill/>
+        </p:spPr>
+        <p:txBody>
+          <a:bodyPr wrap="square" lIns="0" rIns="0" tIns="0" bIns="0" anchor="ctr">
+            <a:spAutoFit/>
           </a:bodyPr>
-          <a:lstStyle>
-            <a:defPPr algn="l">
-              <a:defRPr sz="1500">
+          <a:lstStyle/>
+          <a:p>
+            <a:pPr algn="l"/>
+            <a:r>
+              <a:rPr sz="1700" b="1">
+                <a:solidFill>
+                  <a:srgbClr val="0B1F3A"/>
+                </a:solidFill>
+              </a:rPr>
+              <a:t>DoR / DoD</a:t>
+            </a:r>
+          </a:p>
+        </p:txBody>
+      </p:sp>
+      <p:sp>
+        <p:nvSpPr>
+          <p:cNvPr id="6" name="DoR / DoD label"/>
+          <p:cNvSpPr txBox="1"/>
+          <p:nvPr/>
+        </p:nvSpPr>
+        <p:spPr>
+          <a:xfrm>
+            <a:off x="3429000" y="1188720"/>
+            <a:ext cx="868680" cy="365760"/>
+          </a:xfrm>
+          <a:prstGeom prst="rect">
+            <a:avLst/>
+          </a:prstGeom>
+          <a:noFill/>
+        </p:spPr>
+        <p:txBody>
+          <a:bodyPr wrap="square" lIns="0" rIns="0" tIns="0" bIns="0" anchor="ctr">
+            <a:spAutoFit/>
+          </a:bodyPr>
+          <a:lstStyle/>
+          <a:p>
+            <a:pPr algn="r"/>
+            <a:r>
+              <a:rPr sz="1300" b="1">
+                <a:solidFill>
+                  <a:srgbClr val="2E9E5B"/>
+                </a:solidFill>
+              </a:rPr>
+              <a:t>On track</a:t>
+            </a:r>
+          </a:p>
+        </p:txBody>
+      </p:sp>
+      <p:sp>
+        <p:nvSpPr>
+          <p:cNvPr id="7" name="DoR / DoD done"/>
+          <p:cNvSpPr txBox="1"/>
+          <p:nvPr/>
+        </p:nvSpPr>
+        <p:spPr>
+          <a:xfrm>
+            <a:off x="640080" y="1691640"/>
+            <a:ext cx="3657600" cy="411480"/>
+          </a:xfrm>
+          <a:prstGeom prst="rect">
+            <a:avLst/>
+          </a:prstGeom>
+          <a:noFill/>
+        </p:spPr>
+        <p:txBody>
+          <a:bodyPr wrap="square" lIns="0" rIns="0" tIns="0" bIns="0" anchor="t">
+            <a:spAutoFit/>
+          </a:bodyPr>
+          <a:lstStyle/>
+          <a:p>
+            <a:pPr algn="l"/>
+            <a:r>
+              <a:rPr sz="1300" b="1">
                 <a:solidFill>
                   <a:srgbClr val="1F4E79"/>
                 </a:solidFill>
-                <a:latin typeface="Calibri"/>
-                <a:ea typeface="Calibri"/>
-                <a:cs typeface="Calibri"/>
-              </a:defRPr>
-            </a:defPPr>
-          </a:lstStyle>
-          <a:p>
-            <a:pPr algn="l">
-              <a:defRPr sz="1500">
+              </a:rPr>
+              <a:t>Done  </a:t>
+            </a:r>
+            <a:r>
+              <a:rPr sz="1300" b="0">
+                <a:solidFill>
+                  <a:srgbClr val="1B2430"/>
+                </a:solidFill>
+              </a:rPr>
+              <a:t>Agreed 8 Oct; in issue forms and PR template</a:t>
+            </a:r>
+          </a:p>
+        </p:txBody>
+      </p:sp>
+      <p:sp>
+        <p:nvSpPr>
+          <p:cNvPr id="8" name="DoR / DoD next"/>
+          <p:cNvSpPr txBox="1"/>
+          <p:nvPr/>
+        </p:nvSpPr>
+        <p:spPr>
+          <a:xfrm>
+            <a:off x="640080" y="2121408"/>
+            <a:ext cx="3657600" cy="411480"/>
+          </a:xfrm>
+          <a:prstGeom prst="rect">
+            <a:avLst/>
+          </a:prstGeom>
+          <a:noFill/>
+        </p:spPr>
+        <p:txBody>
+          <a:bodyPr wrap="square" lIns="0" rIns="0" tIns="0" bIns="0" anchor="t">
+            <a:spAutoFit/>
+          </a:bodyPr>
+          <a:lstStyle/>
+          <a:p>
+            <a:pPr algn="l"/>
+            <a:r>
+              <a:rPr sz="1300" b="1">
                 <a:solidFill>
                   <a:srgbClr val="1F4E79"/>
                 </a:solidFill>
-                <a:latin typeface="Calibri"/>
-                <a:ea typeface="Calibri"/>
-                <a:cs typeface="Calibri"/>
-              </a:defRPr>
-            </a:pPr>
-            <a:r>
-              <a:rPr sz="1500" dirty="0">
-                <a:solidFill>
-                  <a:srgbClr val="1F4E79"/>
-                </a:solidFill>
-                <a:latin typeface="Calibri"/>
-                <a:ea typeface="Calibri"/>
-                <a:cs typeface="Calibri"/>
-              </a:rPr>
-              <a:t>A shared platform for participants and event teams</a:t>
-            </a:r>
-          </a:p>
-        </p:txBody>
-      </p:sp>
-      <p:sp>
-        <p:nvSpPr>
-          <p:cNvPr id="50" name="Participants heading">
-            <a:extLst>
-              <a:ext uri="{FF2B5EF4-FFF2-40B4-BE49-F238E27FC236}">
-                <a16:creationId xmlns:a16="http://schemas.microsoft.com/office/drawing/2014/main" id="{72DAA3F8-A99E-4817-B74D-445363117F11}"/>
-              </a:ext>
-            </a:extLst>
-          </p:cNvPr>
-          <p:cNvSpPr>
-            <a:spLocks noGrp="1"/>
-          </p:cNvSpPr>
-          <p:nvPr/>
-        </p:nvSpPr>
-        <p:spPr>
-          <a:xfrm>
-            <a:off x="457200" y="2052637"/>
-            <a:ext cx="3857625" cy="285750"/>
-          </a:xfrm>
-          <a:prstGeom prst="rect">
-            <a:avLst/>
-          </a:prstGeom>
-          <a:noFill/>
-          <a:ln w="0">
+              </a:rPr>
+              <a:t>Next  </a:t>
+            </a:r>
+            <a:r>
+              <a:rPr sz="1300" b="0">
+                <a:solidFill>
+                  <a:srgbClr val="1B2430"/>
+                </a:solidFill>
+              </a:rPr>
+              <a:t>Ready and Done columns on the board</a:t>
+            </a:r>
+          </a:p>
+        </p:txBody>
+      </p:sp>
+      <p:sp>
+        <p:nvSpPr>
+          <p:cNvPr id="9" name="Team roles and process card"/>
+          <p:cNvSpPr/>
+          <p:nvPr/>
+        </p:nvSpPr>
+        <p:spPr>
+          <a:xfrm>
+            <a:off x="4663440" y="1005840"/>
+            <a:ext cx="4023360" cy="1645920"/>
+          </a:xfrm>
+          <a:prstGeom prst="roundRect">
+            <a:avLst>
+              <a:gd name="adj" fmla="val 6000"/>
+            </a:avLst>
+          </a:prstGeom>
+          <a:solidFill>
+            <a:schemeClr val="bg2"/>
+          </a:solidFill>
+          <a:ln>
             <a:noFill/>
           </a:ln>
-        </p:spPr>
-        <p:txBody>
-          <a:bodyPr wrap="square" lIns="0" tIns="0" rIns="0" bIns="0" anchor="t">
-            <a:noAutofit/>
-          </a:bodyPr>
-          <a:lstStyle>
-            <a:defPPr algn="l">
-              <a:defRPr sz="1700" b="1">
-                <a:solidFill>
-                  <a:srgbClr val="1F4E79"/>
-                </a:solidFill>
-                <a:latin typeface="Calibri"/>
-                <a:ea typeface="Calibri"/>
-                <a:cs typeface="Calibri"/>
-              </a:defRPr>
-            </a:defPPr>
-          </a:lstStyle>
-          <a:p>
-            <a:pPr algn="l">
-              <a:defRPr sz="1700" b="1">
-                <a:solidFill>
-                  <a:srgbClr val="1F4E79"/>
-                </a:solidFill>
-                <a:latin typeface="Calibri"/>
-                <a:ea typeface="Calibri"/>
-                <a:cs typeface="Calibri"/>
-              </a:defRPr>
-            </a:pPr>
-            <a:r>
-              <a:rPr sz="1700" b="1" dirty="0">
-                <a:solidFill>
-                  <a:srgbClr val="1F4E79"/>
-                </a:solidFill>
-                <a:latin typeface="Calibri"/>
-                <a:ea typeface="Calibri"/>
-                <a:cs typeface="Calibri"/>
-              </a:rPr>
-              <a:t>For participants</a:t>
-            </a:r>
-          </a:p>
-        </p:txBody>
-      </p:sp>
-      <p:sp>
-        <p:nvSpPr>
-          <p:cNvPr id="51" name="Participants journey">
-            <a:extLst>
-              <a:ext uri="{FF2B5EF4-FFF2-40B4-BE49-F238E27FC236}">
-                <a16:creationId xmlns:a16="http://schemas.microsoft.com/office/drawing/2014/main" id="{FDD69BD9-71D1-41AC-8425-813E9BD26FD3}"/>
-              </a:ext>
-            </a:extLst>
-          </p:cNvPr>
-          <p:cNvSpPr>
-            <a:spLocks noGrp="1"/>
-          </p:cNvSpPr>
-          <p:nvPr/>
-        </p:nvSpPr>
-        <p:spPr>
-          <a:xfrm>
-            <a:off x="457200" y="2386012"/>
-            <a:ext cx="3848100" cy="781050"/>
-          </a:xfrm>
-          <a:prstGeom prst="rect">
-            <a:avLst/>
-          </a:prstGeom>
-          <a:noFill/>
-          <a:ln w="0">
+          <a:effectLst/>
+        </p:spPr>
+        <p:style>
+          <a:lnRef idx="1">
+            <a:schemeClr val="accent1"/>
+          </a:lnRef>
+          <a:fillRef idx="3">
+            <a:schemeClr val="accent1"/>
+          </a:fillRef>
+          <a:effectRef idx="2">
+            <a:schemeClr val="accent1"/>
+          </a:effectRef>
+          <a:fontRef idx="minor">
+            <a:schemeClr val="lt1"/>
+          </a:fontRef>
+        </p:style>
+        <p:txBody>
+          <a:bodyPr rtlCol="0" anchor="ctr"/>
+          <a:lstStyle/>
+          <a:p>
+            <a:pPr algn="ctr"/>
+          </a:p>
+        </p:txBody>
+      </p:sp>
+      <p:sp>
+        <p:nvSpPr>
+          <p:cNvPr id="10" name="Team roles and process status"/>
+          <p:cNvSpPr/>
+          <p:nvPr/>
+        </p:nvSpPr>
+        <p:spPr>
+          <a:xfrm>
+            <a:off x="4846320" y="1188720"/>
+            <a:ext cx="365760" cy="365760"/>
+          </a:xfrm>
+          <a:prstGeom prst="ellipse">
+            <a:avLst/>
+          </a:prstGeom>
+          <a:solidFill>
+            <a:srgbClr val="E8A300"/>
+          </a:solidFill>
+          <a:ln>
             <a:noFill/>
           </a:ln>
-        </p:spPr>
-        <p:txBody>
-          <a:bodyPr wrap="square" lIns="0" tIns="0" rIns="0" bIns="0" anchor="t">
-            <a:noAutofit/>
+          <a:effectLst/>
+        </p:spPr>
+        <p:style>
+          <a:lnRef idx="1">
+            <a:schemeClr val="accent1"/>
+          </a:lnRef>
+          <a:fillRef idx="3">
+            <a:schemeClr val="accent1"/>
+          </a:fillRef>
+          <a:effectRef idx="2">
+            <a:schemeClr val="accent1"/>
+          </a:effectRef>
+          <a:fontRef idx="minor">
+            <a:schemeClr val="lt1"/>
+          </a:fontRef>
+        </p:style>
+        <p:txBody>
+          <a:bodyPr rtlCol="0" anchor="ctr"/>
+          <a:lstStyle/>
+          <a:p>
+            <a:pPr algn="ctr"/>
+          </a:p>
+        </p:txBody>
+      </p:sp>
+      <p:sp>
+        <p:nvSpPr>
+          <p:cNvPr id="11" name="Team roles and process name"/>
+          <p:cNvSpPr txBox="1"/>
+          <p:nvPr/>
+        </p:nvSpPr>
+        <p:spPr>
+          <a:xfrm>
+            <a:off x="5349240" y="1188720"/>
+            <a:ext cx="2377440" cy="365760"/>
+          </a:xfrm>
+          <a:prstGeom prst="rect">
+            <a:avLst/>
+          </a:prstGeom>
+          <a:noFill/>
+        </p:spPr>
+        <p:txBody>
+          <a:bodyPr wrap="square" lIns="0" rIns="0" tIns="0" bIns="0" anchor="ctr">
+            <a:spAutoFit/>
           </a:bodyPr>
-          <a:lstStyle>
-            <a:defPPr algn="l">
-              <a:defRPr sz="1500">
+          <a:lstStyle/>
+          <a:p>
+            <a:pPr algn="l"/>
+            <a:r>
+              <a:rPr sz="1700" b="1">
+                <a:solidFill>
+                  <a:srgbClr val="0B1F3A"/>
+                </a:solidFill>
+              </a:rPr>
+              <a:t>Team roles and process</a:t>
+            </a:r>
+          </a:p>
+        </p:txBody>
+      </p:sp>
+      <p:sp>
+        <p:nvSpPr>
+          <p:cNvPr id="12" name="Team roles and process label"/>
+          <p:cNvSpPr txBox="1"/>
+          <p:nvPr/>
+        </p:nvSpPr>
+        <p:spPr>
+          <a:xfrm>
+            <a:off x="7635240" y="1188720"/>
+            <a:ext cx="868680" cy="365760"/>
+          </a:xfrm>
+          <a:prstGeom prst="rect">
+            <a:avLst/>
+          </a:prstGeom>
+          <a:noFill/>
+        </p:spPr>
+        <p:txBody>
+          <a:bodyPr wrap="square" lIns="0" rIns="0" tIns="0" bIns="0" anchor="ctr">
+            <a:spAutoFit/>
+          </a:bodyPr>
+          <a:lstStyle/>
+          <a:p>
+            <a:pPr algn="r"/>
+            <a:r>
+              <a:rPr sz="1300" b="1">
+                <a:solidFill>
+                  <a:srgbClr val="E8A300"/>
+                </a:solidFill>
+              </a:rPr>
+              <a:t>In progress</a:t>
+            </a:r>
+          </a:p>
+        </p:txBody>
+      </p:sp>
+      <p:sp>
+        <p:nvSpPr>
+          <p:cNvPr id="13" name="Team roles and process done"/>
+          <p:cNvSpPr txBox="1"/>
+          <p:nvPr/>
+        </p:nvSpPr>
+        <p:spPr>
+          <a:xfrm>
+            <a:off x="4846320" y="1691640"/>
+            <a:ext cx="3657600" cy="411480"/>
+          </a:xfrm>
+          <a:prstGeom prst="rect">
+            <a:avLst/>
+          </a:prstGeom>
+          <a:noFill/>
+        </p:spPr>
+        <p:txBody>
+          <a:bodyPr wrap="square" lIns="0" rIns="0" tIns="0" bIns="0" anchor="t">
+            <a:spAutoFit/>
+          </a:bodyPr>
+          <a:lstStyle/>
+          <a:p>
+            <a:pPr algn="l"/>
+            <a:r>
+              <a:rPr sz="1300" b="1">
+                <a:solidFill>
+                  <a:srgbClr val="1F4E79"/>
+                </a:solidFill>
+              </a:rPr>
+              <a:t>Done  </a:t>
+            </a:r>
+            <a:r>
+              <a:rPr sz="1300" b="0">
                 <a:solidFill>
                   <a:srgbClr val="1B2430"/>
                 </a:solidFill>
-                <a:latin typeface="Calibri"/>
-                <a:ea typeface="Calibri"/>
-                <a:cs typeface="Calibri"/>
-              </a:defRPr>
-            </a:defPPr>
-          </a:lstStyle>
-          <a:p>
-            <a:pPr algn="l">
-              <a:defRPr sz="1500">
+              </a:rPr>
+              <a:t>6 roles, GitHub Flow, sprints A to C, 2 meetings</a:t>
+            </a:r>
+          </a:p>
+        </p:txBody>
+      </p:sp>
+      <p:sp>
+        <p:nvSpPr>
+          <p:cNvPr id="14" name="Team roles and process next"/>
+          <p:cNvSpPr txBox="1"/>
+          <p:nvPr/>
+        </p:nvSpPr>
+        <p:spPr>
+          <a:xfrm>
+            <a:off x="4846320" y="2121408"/>
+            <a:ext cx="3657600" cy="411480"/>
+          </a:xfrm>
+          <a:prstGeom prst="rect">
+            <a:avLst/>
+          </a:prstGeom>
+          <a:noFill/>
+        </p:spPr>
+        <p:txBody>
+          <a:bodyPr wrap="square" lIns="0" rIns="0" tIns="0" bIns="0" anchor="t">
+            <a:spAutoFit/>
+          </a:bodyPr>
+          <a:lstStyle/>
+          <a:p>
+            <a:pPr algn="l"/>
+            <a:r>
+              <a:rPr sz="1300" b="1">
+                <a:solidFill>
+                  <a:srgbClr val="1F4E79"/>
+                </a:solidFill>
+              </a:rPr>
+              <a:t>Next  </a:t>
+            </a:r>
+            <a:r>
+              <a:rPr sz="1300" b="0">
                 <a:solidFill>
                   <a:srgbClr val="1B2430"/>
                 </a:solidFill>
-                <a:latin typeface="Calibri"/>
-                <a:ea typeface="Calibri"/>
-                <a:cs typeface="Calibri"/>
-              </a:defRPr>
-            </a:pPr>
-            <a:r>
-              <a:rPr sz="1500" dirty="0">
-                <a:solidFill>
-                  <a:srgbClr val="1B2430"/>
-                </a:solidFill>
-                <a:latin typeface="Calibri"/>
-                <a:ea typeface="Calibri"/>
-                <a:cs typeface="Calibri"/>
-              </a:rPr>
-              <a:t>Open by link or QR. Find the map and transport options, then request help with context and location.</a:t>
-            </a:r>
-          </a:p>
-        </p:txBody>
-      </p:sp>
-      <p:sp>
-        <p:nvSpPr>
-          <p:cNvPr id="52" name="Event team heading">
-            <a:extLst>
-              <a:ext uri="{FF2B5EF4-FFF2-40B4-BE49-F238E27FC236}">
-                <a16:creationId xmlns:a16="http://schemas.microsoft.com/office/drawing/2014/main" id="{EA37A2C6-44B2-4F7C-B5CD-57F6307C62E2}"/>
-              </a:ext>
-            </a:extLst>
-          </p:cNvPr>
-          <p:cNvSpPr>
-            <a:spLocks noGrp="1"/>
-          </p:cNvSpPr>
-          <p:nvPr/>
-        </p:nvSpPr>
-        <p:spPr>
-          <a:xfrm>
-            <a:off x="4800600" y="2071687"/>
-            <a:ext cx="3886200" cy="285750"/>
-          </a:xfrm>
-          <a:prstGeom prst="rect">
-            <a:avLst/>
-          </a:prstGeom>
-          <a:noFill/>
-          <a:ln w="0">
+              </a:rPr>
+              <a:t>Board live; branch protection; squash only</a:t>
+            </a:r>
+          </a:p>
+        </p:txBody>
+      </p:sp>
+      <p:sp>
+        <p:nvSpPr>
+          <p:cNvPr id="15" name="Domain model card"/>
+          <p:cNvSpPr/>
+          <p:nvPr/>
+        </p:nvSpPr>
+        <p:spPr>
+          <a:xfrm>
+            <a:off x="457200" y="2834640"/>
+            <a:ext cx="4023360" cy="1645920"/>
+          </a:xfrm>
+          <a:prstGeom prst="roundRect">
+            <a:avLst>
+              <a:gd name="adj" fmla="val 6000"/>
+            </a:avLst>
+          </a:prstGeom>
+          <a:solidFill>
+            <a:schemeClr val="bg2"/>
+          </a:solidFill>
+          <a:ln>
             <a:noFill/>
           </a:ln>
-        </p:spPr>
-        <p:txBody>
-          <a:bodyPr wrap="square" lIns="0" tIns="0" rIns="0" bIns="0" anchor="t">
-            <a:noAutofit/>
-          </a:bodyPr>
-          <a:lstStyle>
-            <a:defPPr algn="l">
-              <a:defRPr sz="1700" b="1">
-                <a:solidFill>
-                  <a:srgbClr val="1F4E79"/>
-                </a:solidFill>
-                <a:latin typeface="Calibri"/>
-                <a:ea typeface="Calibri"/>
-                <a:cs typeface="Calibri"/>
-              </a:defRPr>
-            </a:defPPr>
-          </a:lstStyle>
-          <a:p>
-            <a:pPr algn="l">
-              <a:defRPr sz="1700" b="1">
-                <a:solidFill>
-                  <a:srgbClr val="1F4E79"/>
-                </a:solidFill>
-                <a:latin typeface="Calibri"/>
-                <a:ea typeface="Calibri"/>
-                <a:cs typeface="Calibri"/>
-              </a:defRPr>
-            </a:pPr>
-            <a:r>
-              <a:rPr sz="1700" b="1">
-                <a:solidFill>
-                  <a:srgbClr val="1F4E79"/>
-                </a:solidFill>
-                <a:latin typeface="Calibri"/>
-                <a:ea typeface="Calibri"/>
-                <a:cs typeface="Calibri"/>
-              </a:rPr>
-              <a:t>For the event team</a:t>
-            </a:r>
-          </a:p>
-        </p:txBody>
-      </p:sp>
-      <p:sp>
-        <p:nvSpPr>
-          <p:cNvPr id="53" name="Event team journey">
-            <a:extLst>
-              <a:ext uri="{FF2B5EF4-FFF2-40B4-BE49-F238E27FC236}">
-                <a16:creationId xmlns:a16="http://schemas.microsoft.com/office/drawing/2014/main" id="{C93A605C-E103-414A-A0FC-CFFB4FECDB34}"/>
-              </a:ext>
-            </a:extLst>
-          </p:cNvPr>
-          <p:cNvSpPr>
-            <a:spLocks noGrp="1"/>
-          </p:cNvSpPr>
-          <p:nvPr/>
-        </p:nvSpPr>
-        <p:spPr>
-          <a:xfrm>
-            <a:off x="4800600" y="2405062"/>
-            <a:ext cx="3886200" cy="781050"/>
-          </a:xfrm>
-          <a:prstGeom prst="rect">
-            <a:avLst/>
-          </a:prstGeom>
-          <a:noFill/>
-          <a:ln w="0">
+          <a:effectLst/>
+        </p:spPr>
+        <p:style>
+          <a:lnRef idx="1">
+            <a:schemeClr val="accent1"/>
+          </a:lnRef>
+          <a:fillRef idx="3">
+            <a:schemeClr val="accent1"/>
+          </a:fillRef>
+          <a:effectRef idx="2">
+            <a:schemeClr val="accent1"/>
+          </a:effectRef>
+          <a:fontRef idx="minor">
+            <a:schemeClr val="lt1"/>
+          </a:fontRef>
+        </p:style>
+        <p:txBody>
+          <a:bodyPr rtlCol="0" anchor="ctr"/>
+          <a:lstStyle/>
+          <a:p>
+            <a:pPr algn="ctr"/>
+          </a:p>
+        </p:txBody>
+      </p:sp>
+      <p:sp>
+        <p:nvSpPr>
+          <p:cNvPr id="16" name="Domain model status"/>
+          <p:cNvSpPr/>
+          <p:nvPr/>
+        </p:nvSpPr>
+        <p:spPr>
+          <a:xfrm>
+            <a:off x="640080" y="3017520"/>
+            <a:ext cx="365760" cy="365760"/>
+          </a:xfrm>
+          <a:prstGeom prst="ellipse">
+            <a:avLst/>
+          </a:prstGeom>
+          <a:solidFill>
+            <a:srgbClr val="E8A300"/>
+          </a:solidFill>
+          <a:ln>
             <a:noFill/>
           </a:ln>
-        </p:spPr>
-        <p:txBody>
-          <a:bodyPr wrap="square" lIns="0" tIns="0" rIns="0" bIns="0" anchor="t">
-            <a:noAutofit/>
+          <a:effectLst/>
+        </p:spPr>
+        <p:style>
+          <a:lnRef idx="1">
+            <a:schemeClr val="accent1"/>
+          </a:lnRef>
+          <a:fillRef idx="3">
+            <a:schemeClr val="accent1"/>
+          </a:fillRef>
+          <a:effectRef idx="2">
+            <a:schemeClr val="accent1"/>
+          </a:effectRef>
+          <a:fontRef idx="minor">
+            <a:schemeClr val="lt1"/>
+          </a:fontRef>
+        </p:style>
+        <p:txBody>
+          <a:bodyPr rtlCol="0" anchor="ctr"/>
+          <a:lstStyle/>
+          <a:p>
+            <a:pPr algn="ctr"/>
+          </a:p>
+        </p:txBody>
+      </p:sp>
+      <p:sp>
+        <p:nvSpPr>
+          <p:cNvPr id="17" name="Domain model name"/>
+          <p:cNvSpPr txBox="1"/>
+          <p:nvPr/>
+        </p:nvSpPr>
+        <p:spPr>
+          <a:xfrm>
+            <a:off x="1143000" y="3017520"/>
+            <a:ext cx="2377440" cy="365760"/>
+          </a:xfrm>
+          <a:prstGeom prst="rect">
+            <a:avLst/>
+          </a:prstGeom>
+          <a:noFill/>
+        </p:spPr>
+        <p:txBody>
+          <a:bodyPr wrap="square" lIns="0" rIns="0" tIns="0" bIns="0" anchor="ctr">
+            <a:spAutoFit/>
           </a:bodyPr>
-          <a:lstStyle>
-            <a:defPPr algn="l">
-              <a:defRPr sz="1500">
+          <a:lstStyle/>
+          <a:p>
+            <a:pPr algn="l"/>
+            <a:r>
+              <a:rPr sz="1700" b="1">
+                <a:solidFill>
+                  <a:srgbClr val="0B1F3A"/>
+                </a:solidFill>
+              </a:rPr>
+              <a:t>Domain model</a:t>
+            </a:r>
+          </a:p>
+        </p:txBody>
+      </p:sp>
+      <p:sp>
+        <p:nvSpPr>
+          <p:cNvPr id="18" name="Domain model label"/>
+          <p:cNvSpPr txBox="1"/>
+          <p:nvPr/>
+        </p:nvSpPr>
+        <p:spPr>
+          <a:xfrm>
+            <a:off x="3429000" y="3017520"/>
+            <a:ext cx="868680" cy="365760"/>
+          </a:xfrm>
+          <a:prstGeom prst="rect">
+            <a:avLst/>
+          </a:prstGeom>
+          <a:noFill/>
+        </p:spPr>
+        <p:txBody>
+          <a:bodyPr wrap="square" lIns="0" rIns="0" tIns="0" bIns="0" anchor="ctr">
+            <a:spAutoFit/>
+          </a:bodyPr>
+          <a:lstStyle/>
+          <a:p>
+            <a:pPr algn="r"/>
+            <a:r>
+              <a:rPr sz="1300" b="1">
+                <a:solidFill>
+                  <a:srgbClr val="E8A300"/>
+                </a:solidFill>
+              </a:rPr>
+              <a:t>In progress</a:t>
+            </a:r>
+          </a:p>
+        </p:txBody>
+      </p:sp>
+      <p:sp>
+        <p:nvSpPr>
+          <p:cNvPr id="19" name="Domain model done"/>
+          <p:cNvSpPr txBox="1"/>
+          <p:nvPr/>
+        </p:nvSpPr>
+        <p:spPr>
+          <a:xfrm>
+            <a:off x="640080" y="3520440"/>
+            <a:ext cx="3657600" cy="411480"/>
+          </a:xfrm>
+          <a:prstGeom prst="rect">
+            <a:avLst/>
+          </a:prstGeom>
+          <a:noFill/>
+        </p:spPr>
+        <p:txBody>
+          <a:bodyPr wrap="square" lIns="0" rIns="0" tIns="0" bIns="0" anchor="t">
+            <a:spAutoFit/>
+          </a:bodyPr>
+          <a:lstStyle/>
+          <a:p>
+            <a:pPr algn="l"/>
+            <a:r>
+              <a:rPr sz="1300" b="1">
+                <a:solidFill>
+                  <a:srgbClr val="1F4E79"/>
+                </a:solidFill>
+              </a:rPr>
+              <a:t>Done  </a:t>
+            </a:r>
+            <a:r>
+              <a:rPr sz="1300" b="0">
                 <a:solidFill>
                   <a:srgbClr val="1B2430"/>
                 </a:solidFill>
-                <a:latin typeface="Calibri"/>
-                <a:ea typeface="Calibri"/>
-                <a:cs typeface="Calibri"/>
-              </a:defRPr>
-            </a:defPPr>
-          </a:lstStyle>
-          <a:p>
-            <a:pPr algn="l">
-              <a:defRPr sz="1500">
+              </a:rPr>
+              <a:t>2 contexts, class diagram, rules, privacy</a:t>
+            </a:r>
+          </a:p>
+        </p:txBody>
+      </p:sp>
+      <p:sp>
+        <p:nvSpPr>
+          <p:cNvPr id="20" name="Domain model next"/>
+          <p:cNvSpPr txBox="1"/>
+          <p:nvPr/>
+        </p:nvSpPr>
+        <p:spPr>
+          <a:xfrm>
+            <a:off x="640080" y="3950208"/>
+            <a:ext cx="3657600" cy="411480"/>
+          </a:xfrm>
+          <a:prstGeom prst="rect">
+            <a:avLst/>
+          </a:prstGeom>
+          <a:noFill/>
+        </p:spPr>
+        <p:txBody>
+          <a:bodyPr wrap="square" lIns="0" rIns="0" tIns="0" bIns="0" anchor="t">
+            <a:spAutoFit/>
+          </a:bodyPr>
+          <a:lstStyle/>
+          <a:p>
+            <a:pPr algn="l"/>
+            <a:r>
+              <a:rPr sz="1300" b="1">
+                <a:solidFill>
+                  <a:srgbClr val="1F4E79"/>
+                </a:solidFill>
+              </a:rPr>
+              <a:t>Next  </a:t>
+            </a:r>
+            <a:r>
+              <a:rPr sz="1300" b="0">
                 <a:solidFill>
                   <a:srgbClr val="1B2430"/>
                 </a:solidFill>
-                <a:latin typeface="Calibri"/>
-                <a:ea typeface="Calibri"/>
-                <a:cs typeface="Calibri"/>
-              </a:defRPr>
-            </a:pPr>
-            <a:r>
-              <a:rPr sz="1500">
-                <a:solidFill>
-                  <a:srgbClr val="1B2430"/>
-                </a:solidFill>
-                <a:latin typeface="Calibri"/>
-                <a:ea typeface="Calibri"/>
-                <a:cs typeface="Calibri"/>
-              </a:rPr>
-              <a:t>Configure the event and update information. Prioritise each request and route it to the right team.</a:t>
-            </a:r>
-          </a:p>
-        </p:txBody>
-      </p:sp>
-      <p:sp>
-        <p:nvSpPr>
-          <p:cNvPr id="54" name="MVP heading">
-            <a:extLst>
-              <a:ext uri="{FF2B5EF4-FFF2-40B4-BE49-F238E27FC236}">
-                <a16:creationId xmlns:a16="http://schemas.microsoft.com/office/drawing/2014/main" id="{FD4759BC-83D1-4166-BC0D-9B2F91CAF75B}"/>
-              </a:ext>
-            </a:extLst>
-          </p:cNvPr>
-          <p:cNvSpPr>
-            <a:spLocks noGrp="1"/>
-          </p:cNvSpPr>
-          <p:nvPr/>
-        </p:nvSpPr>
-        <p:spPr>
-          <a:xfrm>
-            <a:off x="457200" y="3614736"/>
-            <a:ext cx="1352550" cy="285750"/>
-          </a:xfrm>
-          <a:prstGeom prst="rect">
-            <a:avLst/>
-          </a:prstGeom>
-          <a:noFill/>
-          <a:ln w="0">
+              </a:rPr>
+              <a:t>DM-2 to DM-5; Report, Badge, PlatformAdmin</a:t>
+            </a:r>
+          </a:p>
+        </p:txBody>
+      </p:sp>
+      <p:sp>
+        <p:nvSpPr>
+          <p:cNvPr id="21" name="High-level architecture card"/>
+          <p:cNvSpPr/>
+          <p:nvPr/>
+        </p:nvSpPr>
+        <p:spPr>
+          <a:xfrm>
+            <a:off x="4663440" y="2834640"/>
+            <a:ext cx="4023360" cy="1645920"/>
+          </a:xfrm>
+          <a:prstGeom prst="roundRect">
+            <a:avLst>
+              <a:gd name="adj" fmla="val 6000"/>
+            </a:avLst>
+          </a:prstGeom>
+          <a:solidFill>
+            <a:schemeClr val="bg2"/>
+          </a:solidFill>
+          <a:ln>
             <a:noFill/>
           </a:ln>
-        </p:spPr>
-        <p:txBody>
-          <a:bodyPr wrap="square" lIns="0" tIns="0" rIns="0" bIns="0" anchor="t">
-            <a:noAutofit/>
-          </a:bodyPr>
-          <a:lstStyle>
-            <a:defPPr algn="l">
-              <a:defRPr sz="1500" b="1">
-                <a:solidFill>
-                  <a:srgbClr val="0B1F3A"/>
-                </a:solidFill>
-                <a:latin typeface="Calibri"/>
-                <a:ea typeface="Calibri"/>
-                <a:cs typeface="Calibri"/>
-              </a:defRPr>
-            </a:defPPr>
-          </a:lstStyle>
-          <a:p>
-            <a:pPr algn="l">
-              <a:defRPr sz="1500" b="1">
-                <a:solidFill>
-                  <a:srgbClr val="0B1F3A"/>
-                </a:solidFill>
-                <a:latin typeface="Calibri"/>
-                <a:ea typeface="Calibri"/>
-                <a:cs typeface="Calibri"/>
-              </a:defRPr>
-            </a:pPr>
-            <a:r>
-              <a:rPr sz="1500" b="1" dirty="0">
-                <a:solidFill>
-                  <a:schemeClr val="accent1"/>
-                </a:solidFill>
-                <a:latin typeface="Calibri"/>
-                <a:ea typeface="Calibri"/>
-                <a:cs typeface="Calibri"/>
-              </a:rPr>
-              <a:t>MVP</a:t>
-            </a:r>
-          </a:p>
-        </p:txBody>
-      </p:sp>
-      <p:sp>
-        <p:nvSpPr>
-          <p:cNvPr id="55" name="MVP scope">
-            <a:extLst>
-              <a:ext uri="{FF2B5EF4-FFF2-40B4-BE49-F238E27FC236}">
-                <a16:creationId xmlns:a16="http://schemas.microsoft.com/office/drawing/2014/main" id="{EE15BBC2-61C5-47DC-90AD-58954614B58C}"/>
-              </a:ext>
-            </a:extLst>
-          </p:cNvPr>
-          <p:cNvSpPr>
-            <a:spLocks noGrp="1"/>
-          </p:cNvSpPr>
-          <p:nvPr/>
-        </p:nvSpPr>
-        <p:spPr>
-          <a:xfrm>
-            <a:off x="1914525" y="3614736"/>
-            <a:ext cx="6772275" cy="457200"/>
-          </a:xfrm>
-          <a:prstGeom prst="rect">
-            <a:avLst/>
-          </a:prstGeom>
-          <a:noFill/>
-          <a:ln w="0">
+          <a:effectLst/>
+        </p:spPr>
+        <p:style>
+          <a:lnRef idx="1">
+            <a:schemeClr val="accent1"/>
+          </a:lnRef>
+          <a:fillRef idx="3">
+            <a:schemeClr val="accent1"/>
+          </a:fillRef>
+          <a:effectRef idx="2">
+            <a:schemeClr val="accent1"/>
+          </a:effectRef>
+          <a:fontRef idx="minor">
+            <a:schemeClr val="lt1"/>
+          </a:fontRef>
+        </p:style>
+        <p:txBody>
+          <a:bodyPr rtlCol="0" anchor="ctr"/>
+          <a:lstStyle/>
+          <a:p>
+            <a:pPr algn="ctr"/>
+          </a:p>
+        </p:txBody>
+      </p:sp>
+      <p:sp>
+        <p:nvSpPr>
+          <p:cNvPr id="22" name="High-level architecture status"/>
+          <p:cNvSpPr/>
+          <p:nvPr/>
+        </p:nvSpPr>
+        <p:spPr>
+          <a:xfrm>
+            <a:off x="4846320" y="3017520"/>
+            <a:ext cx="365760" cy="365760"/>
+          </a:xfrm>
+          <a:prstGeom prst="ellipse">
+            <a:avLst/>
+          </a:prstGeom>
+          <a:solidFill>
+            <a:srgbClr val="E8A300"/>
+          </a:solidFill>
+          <a:ln>
             <a:noFill/>
           </a:ln>
-        </p:spPr>
-        <p:txBody>
-          <a:bodyPr wrap="square" lIns="0" tIns="0" rIns="0" bIns="0" anchor="t">
-            <a:noAutofit/>
+          <a:effectLst/>
+        </p:spPr>
+        <p:style>
+          <a:lnRef idx="1">
+            <a:schemeClr val="accent1"/>
+          </a:lnRef>
+          <a:fillRef idx="3">
+            <a:schemeClr val="accent1"/>
+          </a:fillRef>
+          <a:effectRef idx="2">
+            <a:schemeClr val="accent1"/>
+          </a:effectRef>
+          <a:fontRef idx="minor">
+            <a:schemeClr val="lt1"/>
+          </a:fontRef>
+        </p:style>
+        <p:txBody>
+          <a:bodyPr rtlCol="0" anchor="ctr"/>
+          <a:lstStyle/>
+          <a:p>
+            <a:pPr algn="ctr"/>
+          </a:p>
+        </p:txBody>
+      </p:sp>
+      <p:sp>
+        <p:nvSpPr>
+          <p:cNvPr id="23" name="High-level architecture name"/>
+          <p:cNvSpPr txBox="1"/>
+          <p:nvPr/>
+        </p:nvSpPr>
+        <p:spPr>
+          <a:xfrm>
+            <a:off x="5349240" y="3017520"/>
+            <a:ext cx="2377440" cy="365760"/>
+          </a:xfrm>
+          <a:prstGeom prst="rect">
+            <a:avLst/>
+          </a:prstGeom>
+          <a:noFill/>
+        </p:spPr>
+        <p:txBody>
+          <a:bodyPr wrap="square" lIns="0" rIns="0" tIns="0" bIns="0" anchor="ctr">
+            <a:spAutoFit/>
           </a:bodyPr>
-          <a:lstStyle>
-            <a:defPPr algn="l">
-              <a:defRPr sz="1300">
+          <a:lstStyle/>
+          <a:p>
+            <a:pPr algn="l"/>
+            <a:r>
+              <a:rPr sz="1700" b="1">
+                <a:solidFill>
+                  <a:srgbClr val="0B1F3A"/>
+                </a:solidFill>
+              </a:rPr>
+              <a:t>High-level architecture</a:t>
+            </a:r>
+          </a:p>
+        </p:txBody>
+      </p:sp>
+      <p:sp>
+        <p:nvSpPr>
+          <p:cNvPr id="24" name="High-level architecture label"/>
+          <p:cNvSpPr txBox="1"/>
+          <p:nvPr/>
+        </p:nvSpPr>
+        <p:spPr>
+          <a:xfrm>
+            <a:off x="7635240" y="3017520"/>
+            <a:ext cx="868680" cy="365760"/>
+          </a:xfrm>
+          <a:prstGeom prst="rect">
+            <a:avLst/>
+          </a:prstGeom>
+          <a:noFill/>
+        </p:spPr>
+        <p:txBody>
+          <a:bodyPr wrap="square" lIns="0" rIns="0" tIns="0" bIns="0" anchor="ctr">
+            <a:spAutoFit/>
+          </a:bodyPr>
+          <a:lstStyle/>
+          <a:p>
+            <a:pPr algn="r"/>
+            <a:r>
+              <a:rPr sz="1300" b="1">
+                <a:solidFill>
+                  <a:srgbClr val="E8A300"/>
+                </a:solidFill>
+              </a:rPr>
+              <a:t>In progress</a:t>
+            </a:r>
+          </a:p>
+        </p:txBody>
+      </p:sp>
+      <p:sp>
+        <p:nvSpPr>
+          <p:cNvPr id="25" name="High-level architecture done"/>
+          <p:cNvSpPr txBox="1"/>
+          <p:nvPr/>
+        </p:nvSpPr>
+        <p:spPr>
+          <a:xfrm>
+            <a:off x="4846320" y="3520440"/>
+            <a:ext cx="3657600" cy="411480"/>
+          </a:xfrm>
+          <a:prstGeom prst="rect">
+            <a:avLst/>
+          </a:prstGeom>
+          <a:noFill/>
+        </p:spPr>
+        <p:txBody>
+          <a:bodyPr wrap="square" lIns="0" rIns="0" tIns="0" bIns="0" anchor="t">
+            <a:spAutoFit/>
+          </a:bodyPr>
+          <a:lstStyle/>
+          <a:p>
+            <a:pPr algn="l"/>
+            <a:r>
+              <a:rPr sz="1300" b="1">
+                <a:solidFill>
+                  <a:srgbClr val="1F4E79"/>
+                </a:solidFill>
+              </a:rPr>
+              <a:t>Done  </a:t>
+            </a:r>
+            <a:r>
+              <a:rPr sz="1300" b="0">
                 <a:solidFill>
                   <a:srgbClr val="1B2430"/>
                 </a:solidFill>
-                <a:latin typeface="Calibri"/>
-                <a:ea typeface="Calibri"/>
-                <a:cs typeface="Calibri"/>
-              </a:defRPr>
-            </a:defPPr>
-          </a:lstStyle>
-          <a:p>
-            <a:pPr algn="l">
-              <a:defRPr sz="1300">
+              </a:rPr>
+              <a:t>Context, container, deployment; AI triage flow</a:t>
+            </a:r>
+          </a:p>
+        </p:txBody>
+      </p:sp>
+      <p:sp>
+        <p:nvSpPr>
+          <p:cNvPr id="26" name="High-level architecture next"/>
+          <p:cNvSpPr txBox="1"/>
+          <p:nvPr/>
+        </p:nvSpPr>
+        <p:spPr>
+          <a:xfrm>
+            <a:off x="4846320" y="3950208"/>
+            <a:ext cx="3657600" cy="411480"/>
+          </a:xfrm>
+          <a:prstGeom prst="rect">
+            <a:avLst/>
+          </a:prstGeom>
+          <a:noFill/>
+        </p:spPr>
+        <p:txBody>
+          <a:bodyPr wrap="square" lIns="0" rIns="0" tIns="0" bIns="0" anchor="t">
+            <a:spAutoFit/>
+          </a:bodyPr>
+          <a:lstStyle/>
+          <a:p>
+            <a:pPr algn="l"/>
+            <a:r>
+              <a:rPr sz="1300" b="1">
+                <a:solidFill>
+                  <a:srgbClr val="1F4E79"/>
+                </a:solidFill>
+              </a:rPr>
+              <a:t>Next  </a:t>
+            </a:r>
+            <a:r>
+              <a:rPr sz="1300" b="0">
                 <a:solidFill>
                   <a:srgbClr val="1B2430"/>
                 </a:solidFill>
-                <a:latin typeface="Calibri"/>
-                <a:ea typeface="Calibri"/>
-                <a:cs typeface="Calibri"/>
-              </a:defRPr>
-            </a:pPr>
-            <a:r>
-              <a:rPr sz="1300" dirty="0">
-                <a:solidFill>
-                  <a:schemeClr val="bg1"/>
-                </a:solidFill>
-                <a:latin typeface="Calibri"/>
-                <a:ea typeface="Calibri"/>
-                <a:cs typeface="Calibri"/>
-              </a:rPr>
-              <a:t>Event selection, venue map, essential information, transport and help requests, with an event </a:t>
-            </a:r>
-            <a:r>
-              <a:rPr sz="1300" dirty="0" err="1">
-                <a:solidFill>
-                  <a:schemeClr val="bg1"/>
-                </a:solidFill>
-                <a:latin typeface="Calibri"/>
-                <a:ea typeface="Calibri"/>
-                <a:cs typeface="Calibri"/>
-              </a:rPr>
-              <a:t>backoffice</a:t>
-            </a:r>
-            <a:r>
-              <a:rPr sz="1300" dirty="0">
-                <a:solidFill>
-                  <a:schemeClr val="bg1"/>
-                </a:solidFill>
-                <a:latin typeface="Calibri"/>
-                <a:ea typeface="Calibri"/>
-                <a:cs typeface="Calibri"/>
-              </a:rPr>
-              <a:t>.</a:t>
-            </a:r>
-          </a:p>
-        </p:txBody>
-      </p:sp>
-      <p:sp>
-        <p:nvSpPr>
-          <p:cNvPr id="56" name="Success heading">
-            <a:extLst>
-              <a:ext uri="{FF2B5EF4-FFF2-40B4-BE49-F238E27FC236}">
-                <a16:creationId xmlns:a16="http://schemas.microsoft.com/office/drawing/2014/main" id="{5A36368D-A38A-49D3-AB41-D9FC53609A8B}"/>
-              </a:ext>
-            </a:extLst>
-          </p:cNvPr>
-          <p:cNvSpPr>
-            <a:spLocks noGrp="1"/>
-          </p:cNvSpPr>
-          <p:nvPr/>
-        </p:nvSpPr>
-        <p:spPr>
-          <a:xfrm>
-            <a:off x="457200" y="4195761"/>
-            <a:ext cx="1352550" cy="304800"/>
-          </a:xfrm>
-          <a:prstGeom prst="rect">
-            <a:avLst/>
-          </a:prstGeom>
-          <a:noFill/>
-          <a:ln w="0">
-            <a:noFill/>
-          </a:ln>
-        </p:spPr>
-        <p:txBody>
-          <a:bodyPr wrap="square" lIns="0" tIns="0" rIns="0" bIns="0" anchor="t">
-            <a:noAutofit/>
+              </a:rPr>
+              <a:t>Services vs monolith, stack, ADRs, skeleton</a:t>
+            </a:r>
+          </a:p>
+        </p:txBody>
+      </p:sp>
+      <p:sp>
+        <p:nvSpPr>
+          <p:cNvPr id="27" name="Legend"/>
+          <p:cNvSpPr txBox="1"/>
+          <p:nvPr/>
+        </p:nvSpPr>
+        <p:spPr>
+          <a:xfrm>
+            <a:off x="457200" y="4681728"/>
+            <a:ext cx="8229600" cy="274320"/>
+          </a:xfrm>
+          <a:prstGeom prst="rect">
+            <a:avLst/>
+          </a:prstGeom>
+          <a:noFill/>
+        </p:spPr>
+        <p:txBody>
+          <a:bodyPr wrap="square" lIns="0" rIns="0" tIns="0" bIns="0" anchor="t">
+            <a:spAutoFit/>
           </a:bodyPr>
-          <a:lstStyle>
-            <a:defPPr algn="l">
-              <a:defRPr sz="1500" b="1">
-                <a:solidFill>
-                  <a:srgbClr val="0B1F3A"/>
-                </a:solidFill>
-                <a:latin typeface="Calibri"/>
-                <a:ea typeface="Calibri"/>
-                <a:cs typeface="Calibri"/>
-              </a:defRPr>
-            </a:defPPr>
-          </a:lstStyle>
-          <a:p>
-            <a:pPr algn="l">
-              <a:defRPr sz="1500" b="1">
-                <a:solidFill>
-                  <a:srgbClr val="0B1F3A"/>
-                </a:solidFill>
-                <a:latin typeface="Calibri"/>
-                <a:ea typeface="Calibri"/>
-                <a:cs typeface="Calibri"/>
-              </a:defRPr>
-            </a:pPr>
-            <a:r>
-              <a:rPr sz="1500" b="1" dirty="0">
-                <a:solidFill>
-                  <a:schemeClr val="accent1"/>
-                </a:solidFill>
-                <a:latin typeface="Calibri"/>
-                <a:ea typeface="Calibri"/>
-                <a:cs typeface="Calibri"/>
-              </a:rPr>
-              <a:t>Success criteria</a:t>
-            </a:r>
-          </a:p>
-        </p:txBody>
-      </p:sp>
-      <p:sp>
-        <p:nvSpPr>
-          <p:cNvPr id="57" name="Success criteria">
-            <a:extLst>
-              <a:ext uri="{FF2B5EF4-FFF2-40B4-BE49-F238E27FC236}">
-                <a16:creationId xmlns:a16="http://schemas.microsoft.com/office/drawing/2014/main" id="{3BC16916-00CE-4194-9ADB-BCE37690540A}"/>
-              </a:ext>
-            </a:extLst>
-          </p:cNvPr>
-          <p:cNvSpPr>
-            <a:spLocks noGrp="1"/>
-          </p:cNvSpPr>
-          <p:nvPr/>
-        </p:nvSpPr>
-        <p:spPr>
-          <a:xfrm>
-            <a:off x="1914525" y="4195761"/>
-            <a:ext cx="6772275" cy="457200"/>
-          </a:xfrm>
-          <a:prstGeom prst="rect">
-            <a:avLst/>
-          </a:prstGeom>
-          <a:noFill/>
-          <a:ln w="0">
-            <a:noFill/>
-          </a:ln>
-        </p:spPr>
-        <p:txBody>
-          <a:bodyPr wrap="square" lIns="0" tIns="0" rIns="0" bIns="0" anchor="t">
-            <a:noAutofit/>
-          </a:bodyPr>
-          <a:lstStyle>
-            <a:defPPr algn="l">
-              <a:defRPr sz="1300">
-                <a:solidFill>
-                  <a:srgbClr val="1B2430"/>
-                </a:solidFill>
-                <a:latin typeface="Calibri"/>
-                <a:ea typeface="Calibri"/>
-                <a:cs typeface="Calibri"/>
-              </a:defRPr>
-            </a:defPPr>
-          </a:lstStyle>
-          <a:p>
-            <a:pPr algn="l">
-              <a:defRPr sz="1300">
-                <a:solidFill>
-                  <a:srgbClr val="1B2430"/>
-                </a:solidFill>
-                <a:latin typeface="Calibri"/>
-                <a:ea typeface="Calibri"/>
-                <a:cs typeface="Calibri"/>
-              </a:defRPr>
-            </a:pPr>
-            <a:r>
-              <a:rPr sz="1300">
-                <a:solidFill>
-                  <a:schemeClr val="bg1"/>
-                </a:solidFill>
-                <a:latin typeface="Calibri"/>
-                <a:ea typeface="Calibri"/>
-                <a:cs typeface="Calibri"/>
-              </a:rPr>
-              <a:t>Faster access to information and operational response, less confusion, adoption and positive feedback.</a:t>
+          <a:lstStyle/>
+          <a:p>
+            <a:pPr algn="l"/>
+            <a:r>
+              <a:rPr sz="1300" b="0">
+                <a:solidFill>
+                  <a:srgbClr val="2E9E5B"/>
+                </a:solidFill>
+              </a:rPr>
+              <a:t>● </a:t>
+            </a:r>
+            <a:r>
+              <a:rPr sz="1300" b="0">
+                <a:solidFill>
+                  <a:srgbClr val="5A6B85"/>
+                </a:solidFill>
+              </a:rPr>
+              <a:t>agreed and documented     </a:t>
+            </a:r>
+            <a:r>
+              <a:rPr sz="1300" b="0">
+                <a:solidFill>
+                  <a:srgbClr val="E8A300"/>
+                </a:solidFill>
+              </a:rPr>
+              <a:t>● </a:t>
+            </a:r>
+            <a:r>
+              <a:rPr sz="1300" b="0">
+                <a:solidFill>
+                  <a:srgbClr val="5A6B85"/>
+                </a:solidFill>
+              </a:rPr>
+              <a:t>drafted, decisions open     </a:t>
+            </a:r>
+            <a:r>
+              <a:rPr sz="1300" b="0">
+                <a:solidFill>
+                  <a:srgbClr val="D64545"/>
+                </a:solidFill>
+              </a:rPr>
+              <a:t>● </a:t>
+            </a:r>
+            <a:r>
+              <a:rPr sz="1300" b="0">
+                <a:solidFill>
+                  <a:srgbClr val="5A6B85"/>
+                </a:solidFill>
+              </a:rPr>
+              <a:t>key decisions missing     </a:t>
             </a:r>
           </a:p>
         </p:txBody>

--- a/Docs/Presentation/Farol_First_Presentation.pptx
+++ b/Docs/Presentation/Farol_First_Presentation.pptx
@@ -139,7 +139,7 @@
             <p14:sldId id="260"/>
           </p14:sldIdLst>
         </p14:section>
-        <p14:section name="Status overview" id="{2BDB7B91-3058-42AC-8457-3A3E92086DEB}">
+        <p14:section name="Status overview" id="{A573BAAB-071E-46C6-A4BF-0AFB26A42381}">
           <p14:sldIdLst>
             <p14:sldId id="262"/>
           </p14:sldIdLst>
@@ -498,7 +498,7 @@
           <a:p>
             <a:r>
               <a:rPr lang="en-US" dirty="0"/>
-              <a:t>(~55 s) O Farol tem dois lados, ligados pela planta do recinto. O participante, depois de fazer login, vê a planta com entradas, casas de banho, primeiros socorros e paragens. O mais importante é o Pedir ajuda: primeiro aparece o Ligar 112; se não for uma emergência, escolhe uma categoria e marca na planta onde está. Vê também como voltar para casa, com as linhas da STCP e os shuttles do evento, recebe avisos em tempo real e pode reportar problemas na planta. Do lado da equipa, a organização cria o evento e gere os papéis e as equipas de resposta: médica, segurança, PCR e logística. Durante a noite, os operadores veem os pedidos chegar em tempo real, na lista e na planta, priorizam, encaminham para a equipa certa e confirmam os reports. Cada organização só vê os dados do seu evento.</a:t>
+              <a:t>(~55 s) O Farol tem dois lados, ligados pela planta do recinto. O participante, depois de fazer login, vê a planta com entradas, casas de banho, primeiros socorros e paragens. O mais importante é o Pedir ajuda: escolhe uma categoria e marca na planta onde está. Vê também como voltar para casa, com as linhas da STCP e os shuttles do evento, recebe avisos em tempo real e pode reportar problemas na planta. Do lado da equipa, a organização cria o evento e gere os papéis e as equipas de resposta: médica, segurança, PCR e logística. Durante a noite, os operadores veem os pedidos chegar em tempo real, na lista e na planta, priorizam, encaminham para a equipa certa e confirmam os reports. Cada organização só vê os dados do seu evento.</a:t>
             </a:r>
           </a:p>
         </p:txBody>
@@ -859,7 +859,7 @@
           <a:lstStyle/>
           <a:p>
             <a:r>
-              <a:t>(~45 s) Ponto de situação dos quatro temas pedidos pelo professor. DoR e DoD: verde. Foram acordados pela equipa a 8 de outubro; a regra é uma user story, uma issue, um PR. Já estão no GitHub: o DoR e o DoD da story nos issue forms e o DoD do PR no template de PR. Falta só criar as colunas Ready e Done no board. Papéis e processo: amarelo. Temos seis papéis definidos, GitHub Flow, sprints A, B e C com datas e duas reuniões por semana. Já temos uma verificação automática das convenções em cada PR. Falta pôr o board a funcionar e ligar a proteção do main com squash merge. Modelo de domínio: amarelo. Temos dois bounded contexts, o diagrama de classes, as regras de negócio e a parte de privacidade; o login obrigatório já está decidido. Faltam as questões DM-2 a DM-5 e as entidades Report, Badge e PlatformAdmin. Arquitetura: amarelo. Já começou a ser trabalhada: temos as vistas de contexto, contentores e deployment e o fluxo assíncrono de triagem com IA, mas ainda faltam fechar as decisões: serviços ou monólito modular, a stack tecnológica, os ADRs, o esboço da API e o walking skeleton. É a prioridade para o início do Sprint B.</a:t>
+              <a:t>(~45 s) Ponto de situação dos quatro temas pedidos pelo professor. DoR e DoD: verde. Foram acordados pela equipa a 8 de outubro; a regra é uma user story, uma issue, um PR. Já estão no GitHub: o DoR e o DoD da story nos issue forms e o DoD do PR no template de PR. Papéis e processo: amarelo. Temos seis papéis definidos, GitHub Flow, sprints A, B e C com datas e duas reuniões por semana. Já temos uma verificação automática das convenções em cada PR. Falta pôr o board a funcionar e ligar a proteção do main com squash merge. Modelo de domínio: amarelo. Temos dois bounded contexts, o diagrama de classes, as regras de negócio e a parte de privacidade; o login obrigatório já está decidido. Faltam as questões DM-2 a DM-5 e as entidades Report, Badge e PlatformAdmin. Arquitetura: amarelo. Já começou a ser trabalhada: temos as vistas de contexto, contentores e deployment e o fluxo assíncrono de triagem com IA, mas ainda faltam fechar as decisões: serviços ou monólito modular, a stack tecnológica, os ADRs, o esboço da API e o walking skeleton. É a prioridade para o início do Sprint B.</a:t>
             </a:r>
           </a:p>
         </p:txBody>
@@ -3926,7 +3926,7 @@
                   <a:schemeClr val="tx1"/>
                 </a:solidFill>
               </a:rPr>
-              <a:t>next night ready with configuration only</a:t>
+              <a:t>event configured and published</a:t>
             </a:r>
             <a:endParaRPr lang="en-US" sz="1200" dirty="0"/>
           </a:p>
@@ -5160,7 +5160,7 @@
       </p:pic>
       <p:sp>
         <p:nvSpPr>
-          <p:cNvPr id="11" name="Feature: Ask for help, 112 shown first"/>
+          <p:cNvPr id="11" name="Feature: Ask for help"/>
           <p:cNvSpPr txBox="1"/>
           <p:nvPr/>
         </p:nvSpPr>
@@ -5188,7 +5188,7 @@
                   <a:schemeClr val="tx1"/>
                 </a:solidFill>
               </a:rPr>
-              <a:t>Ask for help, 112 shown first</a:t>
+              <a:t>Ask for help</a:t>
             </a:r>
             <a:endParaRPr lang="en-US" sz="1400" dirty="0"/>
           </a:p>
@@ -9165,49 +9165,7 @@
       </p:sp>
       <p:sp>
         <p:nvSpPr>
-          <p:cNvPr id="8" name="DoR / DoD next"/>
-          <p:cNvSpPr txBox="1"/>
-          <p:nvPr/>
-        </p:nvSpPr>
-        <p:spPr>
-          <a:xfrm>
-            <a:off x="640080" y="2121408"/>
-            <a:ext cx="3657600" cy="411480"/>
-          </a:xfrm>
-          <a:prstGeom prst="rect">
-            <a:avLst/>
-          </a:prstGeom>
-          <a:noFill/>
-        </p:spPr>
-        <p:txBody>
-          <a:bodyPr wrap="square" lIns="0" rIns="0" tIns="0" bIns="0" anchor="t">
-            <a:spAutoFit/>
-          </a:bodyPr>
-          <a:lstStyle/>
-          <a:p>
-            <a:pPr algn="l"/>
-            <a:r>
-              <a:rPr sz="1300" b="1">
-                <a:solidFill>
-                  <a:srgbClr val="1F4E79"/>
-                </a:solidFill>
-              </a:rPr>
-              <a:t>Next  </a:t>
-            </a:r>
-            <a:r>
-              <a:rPr sz="1300" b="0">
-                <a:solidFill>
-                  <a:srgbClr val="1B2430"/>
-                </a:solidFill>
-              </a:rPr>
-              <a:t>Ready and Done columns on the board</a:t>
-            </a:r>
-          </a:p>
-        </p:txBody>
-      </p:sp>
-      <p:sp>
-        <p:nvSpPr>
-          <p:cNvPr id="9" name="Team roles and process card"/>
+          <p:cNvPr id="8" name="Team roles and process card"/>
           <p:cNvSpPr/>
           <p:nvPr/>
         </p:nvSpPr>
@@ -9253,7 +9211,7 @@
       </p:sp>
       <p:sp>
         <p:nvSpPr>
-          <p:cNvPr id="10" name="Team roles and process status"/>
+          <p:cNvPr id="9" name="Team roles and process status"/>
           <p:cNvSpPr/>
           <p:nvPr/>
         </p:nvSpPr>
@@ -9297,7 +9255,7 @@
       </p:sp>
       <p:sp>
         <p:nvSpPr>
-          <p:cNvPr id="11" name="Team roles and process name"/>
+          <p:cNvPr id="10" name="Team roles and process name"/>
           <p:cNvSpPr txBox="1"/>
           <p:nvPr/>
         </p:nvSpPr>
@@ -9331,7 +9289,7 @@
       </p:sp>
       <p:sp>
         <p:nvSpPr>
-          <p:cNvPr id="12" name="Team roles and process label"/>
+          <p:cNvPr id="11" name="Team roles and process label"/>
           <p:cNvSpPr txBox="1"/>
           <p:nvPr/>
         </p:nvSpPr>
@@ -9365,7 +9323,7 @@
       </p:sp>
       <p:sp>
         <p:nvSpPr>
-          <p:cNvPr id="13" name="Team roles and process done"/>
+          <p:cNvPr id="12" name="Team roles and process done"/>
           <p:cNvSpPr txBox="1"/>
           <p:nvPr/>
         </p:nvSpPr>
@@ -9407,7 +9365,7 @@
       </p:sp>
       <p:sp>
         <p:nvSpPr>
-          <p:cNvPr id="14" name="Team roles and process next"/>
+          <p:cNvPr id="13" name="Team roles and process next"/>
           <p:cNvSpPr txBox="1"/>
           <p:nvPr/>
         </p:nvSpPr>
@@ -9449,7 +9407,7 @@
       </p:sp>
       <p:sp>
         <p:nvSpPr>
-          <p:cNvPr id="15" name="Domain model card"/>
+          <p:cNvPr id="14" name="Domain model card"/>
           <p:cNvSpPr/>
           <p:nvPr/>
         </p:nvSpPr>
@@ -9495,7 +9453,7 @@
       </p:sp>
       <p:sp>
         <p:nvSpPr>
-          <p:cNvPr id="16" name="Domain model status"/>
+          <p:cNvPr id="15" name="Domain model status"/>
           <p:cNvSpPr/>
           <p:nvPr/>
         </p:nvSpPr>
@@ -9539,7 +9497,7 @@
       </p:sp>
       <p:sp>
         <p:nvSpPr>
-          <p:cNvPr id="17" name="Domain model name"/>
+          <p:cNvPr id="16" name="Domain model name"/>
           <p:cNvSpPr txBox="1"/>
           <p:nvPr/>
         </p:nvSpPr>
@@ -9573,7 +9531,7 @@
       </p:sp>
       <p:sp>
         <p:nvSpPr>
-          <p:cNvPr id="18" name="Domain model label"/>
+          <p:cNvPr id="17" name="Domain model label"/>
           <p:cNvSpPr txBox="1"/>
           <p:nvPr/>
         </p:nvSpPr>
@@ -9607,7 +9565,7 @@
       </p:sp>
       <p:sp>
         <p:nvSpPr>
-          <p:cNvPr id="19" name="Domain model done"/>
+          <p:cNvPr id="18" name="Domain model done"/>
           <p:cNvSpPr txBox="1"/>
           <p:nvPr/>
         </p:nvSpPr>
@@ -9649,7 +9607,7 @@
       </p:sp>
       <p:sp>
         <p:nvSpPr>
-          <p:cNvPr id="20" name="Domain model next"/>
+          <p:cNvPr id="19" name="Domain model next"/>
           <p:cNvSpPr txBox="1"/>
           <p:nvPr/>
         </p:nvSpPr>
@@ -9691,7 +9649,7 @@
       </p:sp>
       <p:sp>
         <p:nvSpPr>
-          <p:cNvPr id="21" name="High-level architecture card"/>
+          <p:cNvPr id="20" name="High-level architecture card"/>
           <p:cNvSpPr/>
           <p:nvPr/>
         </p:nvSpPr>
@@ -9737,7 +9695,7 @@
       </p:sp>
       <p:sp>
         <p:nvSpPr>
-          <p:cNvPr id="22" name="High-level architecture status"/>
+          <p:cNvPr id="21" name="High-level architecture status"/>
           <p:cNvSpPr/>
           <p:nvPr/>
         </p:nvSpPr>
@@ -9781,7 +9739,7 @@
       </p:sp>
       <p:sp>
         <p:nvSpPr>
-          <p:cNvPr id="23" name="High-level architecture name"/>
+          <p:cNvPr id="22" name="High-level architecture name"/>
           <p:cNvSpPr txBox="1"/>
           <p:nvPr/>
         </p:nvSpPr>
@@ -9815,7 +9773,7 @@
       </p:sp>
       <p:sp>
         <p:nvSpPr>
-          <p:cNvPr id="24" name="High-level architecture label"/>
+          <p:cNvPr id="23" name="High-level architecture label"/>
           <p:cNvSpPr txBox="1"/>
           <p:nvPr/>
         </p:nvSpPr>
@@ -9849,7 +9807,7 @@
       </p:sp>
       <p:sp>
         <p:nvSpPr>
-          <p:cNvPr id="25" name="High-level architecture done"/>
+          <p:cNvPr id="24" name="High-level architecture done"/>
           <p:cNvSpPr txBox="1"/>
           <p:nvPr/>
         </p:nvSpPr>
@@ -9891,7 +9849,7 @@
       </p:sp>
       <p:sp>
         <p:nvSpPr>
-          <p:cNvPr id="26" name="High-level architecture next"/>
+          <p:cNvPr id="25" name="High-level architecture next"/>
           <p:cNvSpPr txBox="1"/>
           <p:nvPr/>
         </p:nvSpPr>
@@ -9926,14 +9884,14 @@
                   <a:srgbClr val="1B2430"/>
                 </a:solidFill>
               </a:rPr>
-              <a:t>Services vs monolith, stack, ADRs, skeleton</a:t>
-            </a:r>
-          </a:p>
-        </p:txBody>
-      </p:sp>
-      <p:sp>
-        <p:nvSpPr>
-          <p:cNvPr id="27" name="Legend"/>
+              <a:t>Services vs Modular, stack, ADRs, skeleton</a:t>
+            </a:r>
+          </a:p>
+        </p:txBody>
+      </p:sp>
+      <p:sp>
+        <p:nvSpPr>
+          <p:cNvPr id="26" name="Legend"/>
           <p:cNvSpPr txBox="1"/>
           <p:nvPr/>
         </p:nvSpPr>
